--- a/slides/MassiveMusic_DE_TechTest.pptx
+++ b/slides/MassiveMusic_DE_TechTest.pptx
@@ -4,6 +4,9 @@
   <p:sldMasterIdLst>
     <p:sldMasterId id="2147483648" r:id="rId1"/>
   </p:sldMasterIdLst>
+  <p:notesMasterIdLst>
+    <p:notesMasterId r:id="rId12"/>
+  </p:notesMasterIdLst>
   <p:sldIdLst>
     <p:sldId id="256" r:id="rId2"/>
     <p:sldId id="257" r:id="rId3"/>
@@ -16,9 +19,6 @@
     <p:sldId id="264" r:id="rId10"/>
     <p:sldId id="265" r:id="rId11"/>
   </p:sldIdLst>
-  <p:notesMasterIdLst>
-    <p:notesMasterId r:id="rId12"/>
-  </p:notesMasterIdLst>
   <p:sldSz cx="12192000" cy="6858000"/>
   <p:notesSz cx="6858000" cy="12192000"/>
   <p:defaultTextStyle>
@@ -113,399 +113,12 @@
       </a:defRPr>
     </a:lvl9pPr>
   </p:defaultTextStyle>
+  <p:extLst>
+    <p:ext uri="{EFAFB233-063F-42B5-8137-9DF3F51BA10A}">
+      <p15:sldGuideLst xmlns:p15="http://schemas.microsoft.com/office/powerpoint/2012/main"/>
+    </p:ext>
+  </p:extLst>
 </p:presentation>
-</file>
-
-<file path=ppt/charts/chart1.xml><?xml version="1.0" encoding="utf-8"?>
-<c:chartSpace xmlns:c="http://schemas.openxmlformats.org/drawingml/2006/chart" xmlns:a="http://schemas.openxmlformats.org/drawingml/2006/main" xmlns:r="http://schemas.openxmlformats.org/officeDocument/2006/relationships">
-  <c:date1904 val="0"/>
-  <c:roundedCorners val="1"/>
-  <c:chart>
-    <c:autoTitleDeleted val="1"/>
-    <c:plotArea>
-      <c:layout/>
-      <c:barChart>
-        <c:barDir val="col"/>
-        <c:grouping val="clustered"/>
-        <c:varyColors val="0"/>
-        <c:ser>
-          <c:idx val="0"/>
-          <c:order val="0"/>
-          <c:tx>
-            <c:strRef>
-              <c:f>Sheet1!$B$1</c:f>
-              <c:strCache>
-                <c:ptCount val="1"/>
-                <c:pt idx="0">
-                  <c:v>YouTube videos</c:v>
-                </c:pt>
-              </c:strCache>
-            </c:strRef>
-          </c:tx>
-          <c:spPr>
-            <a:solidFill>
-              <a:srgbClr val="E11D2A"/>
-            </a:solidFill>
-            <a:effectLst/>
-          </c:spPr>
-          <c:invertIfNegative val="0"/>
-          <c:dLbls>
-            <c:numFmt formatCode="#,##0" sourceLinked="0"/>
-            <c:txPr>
-              <a:bodyPr/>
-              <a:lstStyle/>
-              <a:p>
-                <a:pPr>
-                  <a:defRPr b="0" i="0" strike="noStrike" sz="900" u="none">
-                    <a:solidFill>
-                      <a:srgbClr val="1E293B"/>
-                    </a:solidFill>
-                    <a:latin typeface="Arial"/>
-                  </a:defRPr>
-                </a:pPr>
-              </a:p>
-            </c:txPr>
-            <c:showLegendKey val="0"/>
-            <c:showVal val="1"/>
-            <c:showCatName val="0"/>
-            <c:showSerName val="0"/>
-            <c:showPercent val="0"/>
-            <c:showBubbleSize val="0"/>
-            <c:showLeaderLines val="0"/>
-          </c:dLbls>
-          <c:cat>
-            <c:multiLvlStrRef>
-              <c:f>Sheet1!$A$2:$A$8</c:f>
-              <c:multiLvlStrCache>
-                <c:ptCount val="7"/>
-                <c:lvl>
-                  <c:pt idx="0">
-                    <c:v>Flowers</c:v>
-                  </c:pt>
-                  <c:pt idx="1">
-                    <c:v>Shivers</c:v>
-                  </c:pt>
-                  <c:pt idx="2">
-                    <c:v>Bad Guy</c:v>
-                  </c:pt>
-                  <c:pt idx="3">
-                    <c:v>Don't Start Now</c:v>
-                  </c:pt>
-                  <c:pt idx="4">
-                    <c:v>As It Was</c:v>
-                  </c:pt>
-                  <c:pt idx="5">
-                    <c:v>Levitating</c:v>
-                  </c:pt>
-                  <c:pt idx="6">
-                    <c:v>good 4 u</c:v>
-                  </c:pt>
-                </c:lvl>
-              </c:multiLvlStrCache>
-            </c:multiLvlStrRef>
-          </c:cat>
-          <c:val>
-            <c:numRef>
-              <c:f>Sheet1!$B$2:$B$8</c:f>
-              <c:numCache>
-                <c:formatCode>General</c:formatCode>
-                <c:ptCount val="7"/>
-                <c:pt idx="0">
-                  <c:v>6</c:v>
-                </c:pt>
-                <c:pt idx="1">
-                  <c:v>5</c:v>
-                </c:pt>
-                <c:pt idx="2">
-                  <c:v>5</c:v>
-                </c:pt>
-                <c:pt idx="3">
-                  <c:v>4</c:v>
-                </c:pt>
-                <c:pt idx="4">
-                  <c:v>4</c:v>
-                </c:pt>
-                <c:pt idx="5">
-                  <c:v>4</c:v>
-                </c:pt>
-                <c:pt idx="6">
-                  <c:v>3</c:v>
-                </c:pt>
-              </c:numCache>
-            </c:numRef>
-          </c:val>
-        </c:ser>
-        <c:ser>
-          <c:idx val="1"/>
-          <c:order val="1"/>
-          <c:tx>
-            <c:strRef>
-              <c:f>Sheet1!$C$1</c:f>
-              <c:strCache>
-                <c:ptCount val="1"/>
-                <c:pt idx="0">
-                  <c:v>Spotify ISRCs</c:v>
-                </c:pt>
-              </c:strCache>
-            </c:strRef>
-          </c:tx>
-          <c:spPr>
-            <a:solidFill>
-              <a:srgbClr val="12B5A5"/>
-            </a:solidFill>
-            <a:effectLst/>
-          </c:spPr>
-          <c:invertIfNegative val="0"/>
-          <c:dLbls>
-            <c:numFmt formatCode="#,##0" sourceLinked="0"/>
-            <c:txPr>
-              <a:bodyPr/>
-              <a:lstStyle/>
-              <a:p>
-                <a:pPr>
-                  <a:defRPr b="0" i="0" strike="noStrike" sz="900" u="none">
-                    <a:solidFill>
-                      <a:srgbClr val="1E293B"/>
-                    </a:solidFill>
-                    <a:latin typeface="Arial"/>
-                  </a:defRPr>
-                </a:pPr>
-              </a:p>
-            </c:txPr>
-            <c:showLegendKey val="0"/>
-            <c:showVal val="1"/>
-            <c:showCatName val="0"/>
-            <c:showSerName val="0"/>
-            <c:showPercent val="0"/>
-            <c:showBubbleSize val="0"/>
-            <c:showLeaderLines val="0"/>
-          </c:dLbls>
-          <c:cat>
-            <c:multiLvlStrRef>
-              <c:f>Sheet1!$A$2:$A$8</c:f>
-              <c:multiLvlStrCache>
-                <c:ptCount val="7"/>
-                <c:lvl>
-                  <c:pt idx="0">
-                    <c:v>Flowers</c:v>
-                  </c:pt>
-                  <c:pt idx="1">
-                    <c:v>Shivers</c:v>
-                  </c:pt>
-                  <c:pt idx="2">
-                    <c:v>Bad Guy</c:v>
-                  </c:pt>
-                  <c:pt idx="3">
-                    <c:v>Don't Start Now</c:v>
-                  </c:pt>
-                  <c:pt idx="4">
-                    <c:v>As It Was</c:v>
-                  </c:pt>
-                  <c:pt idx="5">
-                    <c:v>Levitating</c:v>
-                  </c:pt>
-                  <c:pt idx="6">
-                    <c:v>good 4 u</c:v>
-                  </c:pt>
-                </c:lvl>
-              </c:multiLvlStrCache>
-            </c:multiLvlStrRef>
-          </c:cat>
-          <c:val>
-            <c:numRef>
-              <c:f>Sheet1!$C$2:$C$8</c:f>
-              <c:numCache>
-                <c:formatCode>General</c:formatCode>
-                <c:ptCount val="7"/>
-                <c:pt idx="0">
-                  <c:v>1</c:v>
-                </c:pt>
-                <c:pt idx="1">
-                  <c:v>3</c:v>
-                </c:pt>
-                <c:pt idx="2">
-                  <c:v>2</c:v>
-                </c:pt>
-                <c:pt idx="3">
-                  <c:v>4</c:v>
-                </c:pt>
-                <c:pt idx="4">
-                  <c:v>2</c:v>
-                </c:pt>
-                <c:pt idx="5">
-                  <c:v>2</c:v>
-                </c:pt>
-                <c:pt idx="6">
-                  <c:v>4</c:v>
-                </c:pt>
-              </c:numCache>
-            </c:numRef>
-          </c:val>
-        </c:ser>
-        <c:dLbls>
-          <c:numFmt formatCode="#,##0" sourceLinked="0"/>
-          <c:txPr>
-            <a:bodyPr/>
-            <a:lstStyle/>
-            <a:p>
-              <a:pPr>
-                <a:defRPr b="0" i="0" strike="noStrike" sz="900" u="none">
-                  <a:solidFill>
-                    <a:srgbClr val="1E293B"/>
-                  </a:solidFill>
-                  <a:latin typeface="Arial"/>
-                </a:defRPr>
-              </a:pPr>
-            </a:p>
-          </c:txPr>
-          <c:showLegendKey val="0"/>
-          <c:showVal val="1"/>
-          <c:showCatName val="0"/>
-          <c:showSerName val="0"/>
-          <c:showPercent val="0"/>
-          <c:showBubbleSize val="0"/>
-          <c:showLeaderLines val="0"/>
-        </c:dLbls>
-        <c:gapWidth val="40"/>
-        <c:overlap val="0"/>
-        <c:axId val="2094734554"/>
-        <c:axId val="2094734552"/>
-        <c:axId val="2094734556"/>
-      </c:barChart>
-      <c:catAx>
-        <c:axId val="2094734554"/>
-        <c:scaling>
-          <c:orientation val="minMax"/>
-        </c:scaling>
-        <c:delete val="0"/>
-        <c:axPos val="b"/>
-        <c:numFmt formatCode="General" sourceLinked="1"/>
-        <c:majorTickMark val="out"/>
-        <c:minorTickMark val="none"/>
-        <c:tickLblPos val="low"/>
-        <c:spPr>
-          <a:ln w="12700" cap="flat">
-            <a:solidFill>
-              <a:srgbClr val="888888"/>
-            </a:solidFill>
-            <a:prstDash val="solid"/>
-            <a:round/>
-          </a:ln>
-        </c:spPr>
-        <c:txPr>
-          <a:bodyPr/>
-          <a:lstStyle/>
-          <a:p>
-            <a:pPr>
-              <a:defRPr sz="1000" b="0" i="0" u="none" strike="noStrike">
-                <a:solidFill>
-                  <a:srgbClr val="64748B"/>
-                </a:solidFill>
-                <a:latin typeface="Arial"/>
-              </a:defRPr>
-            </a:pPr>
-            <a:endParaRPr lang="en-US"/>
-          </a:p>
-        </c:txPr>
-        <c:crossAx val="2094734552"/>
-        <c:crosses val="autoZero"/>
-        <c:auto val="1"/>
-        <c:lblAlgn val="ctr"/>
-        <c:noMultiLvlLbl val="1"/>
-      </c:catAx>
-      <c:valAx>
-        <c:axId val="2094734552"/>
-        <c:scaling>
-          <c:orientation val="minMax"/>
-          <c:min val="0"/>
-        </c:scaling>
-        <c:delete val="0"/>
-        <c:axPos val="l"/>
-        <c:majorGridlines>
-          <c:spPr>
-            <a:ln w="6350" cap="flat">
-              <a:solidFill>
-                <a:srgbClr val="E2E8F0"/>
-              </a:solidFill>
-              <a:prstDash val="solid"/>
-              <a:round/>
-            </a:ln>
-          </c:spPr>
-        </c:majorGridlines>
-        <c:numFmt formatCode="General" sourceLinked="0"/>
-        <c:majorTickMark val="out"/>
-        <c:minorTickMark val="none"/>
-        <c:tickLblPos val="nextTo"/>
-        <c:spPr>
-          <a:ln w="12700" cap="flat">
-            <a:solidFill>
-              <a:srgbClr val="888888"/>
-            </a:solidFill>
-            <a:prstDash val="solid"/>
-            <a:round/>
-          </a:ln>
-        </c:spPr>
-        <c:txPr>
-          <a:bodyPr/>
-          <a:lstStyle/>
-          <a:p>
-            <a:pPr>
-              <a:defRPr sz="1200" b="0" i="0" u="none" strike="noStrike">
-                <a:solidFill>
-                  <a:srgbClr val="64748B"/>
-                </a:solidFill>
-                <a:latin typeface="Arial"/>
-              </a:defRPr>
-            </a:pPr>
-            <a:endParaRPr lang="en-US"/>
-          </a:p>
-        </c:txPr>
-        <c:crossAx val="2094734554"/>
-        <c:crosses val="autoZero"/>
-        <c:crossBetween val="between"/>
-      </c:valAx>
-      <c:spPr>
-        <a:noFill/>
-        <a:ln>
-          <a:noFill/>
-        </a:ln>
-        <a:effectLst/>
-      </c:spPr>
-    </c:plotArea>
-    <c:legend>
-      <c:legendPos val="t"/>
-      <c:overlay val="0"/>
-      <c:txPr>
-        <a:bodyPr/>
-        <a:lstStyle/>
-        <a:p>
-          <a:pPr>
-            <a:defRPr>
-              <a:solidFill>
-                <a:srgbClr val="64748B"/>
-              </a:solidFill>
-            </a:defRPr>
-          </a:pPr>
-          <a:endParaRPr lang="en-US"/>
-        </a:p>
-      </c:txPr>
-    </c:legend>
-    <c:plotVisOnly val="1"/>
-    <c:dispBlanksAs val="span"/>
-  </c:chart>
-  <c:spPr>
-    <a:solidFill>
-      <a:srgbClr val="FFFFFF"/>
-    </a:solidFill>
-    <a:ln>
-      <a:noFill/>
-    </a:ln>
-    <a:effectLst/>
-  </c:spPr>
-  <c:externalData r:id="rId1">
-    <c:autoUpdate val="0"/>
-  </c:externalData>
-</c:chartSpace>
 </file>
 
 <file path=ppt/notesMasters/notesMaster1.xml><?xml version="1.0" encoding="utf-8"?>
@@ -530,234 +143,10 @@
           <a:chExt cx="0" cy="0"/>
         </a:xfrm>
       </p:grpSpPr>
-      <p:sp>
-        <p:nvSpPr>
-          <p:cNvPr id="2" name="Header Placeholder 1"/>
-          <p:cNvSpPr>
-            <a:spLocks noGrp="1"/>
-          </p:cNvSpPr>
-          <p:nvPr>
-            <p:ph type="hdr" sz="quarter"/>
-          </p:nvPr>
-        </p:nvSpPr>
-        <p:spPr>
-          <a:xfrm>
-            <a:off x="0" y="0"/>
-            <a:ext cx="2971800" cy="458788"/>
-          </a:xfrm>
-          <a:prstGeom prst="rect">
-            <a:avLst/>
-          </a:prstGeom>
-        </p:spPr>
-        <p:txBody>
-          <a:bodyPr vert="horz" lIns="91440" tIns="45720" rIns="91440" bIns="45720" rtlCol="0"/>
-          <a:lstStyle>
-            <a:lvl1pPr algn="l">
-              <a:defRPr sz="1200"/>
-            </a:lvl1pPr>
-          </a:lstStyle>
-          <a:p>
-            <a:endParaRPr lang="en-US"/>
-          </a:p>
-        </p:txBody>
-      </p:sp>
-      <p:sp>
-        <p:nvSpPr>
-          <p:cNvPr id="3" name="Date Placeholder 2"/>
-          <p:cNvSpPr>
-            <a:spLocks noGrp="1"/>
-          </p:cNvSpPr>
-          <p:nvPr>
-            <p:ph type="dt" idx="1"/>
-          </p:nvPr>
-        </p:nvSpPr>
-        <p:spPr>
-          <a:xfrm>
-            <a:off x="3884613" y="0"/>
-            <a:ext cx="2971800" cy="458788"/>
-          </a:xfrm>
-          <a:prstGeom prst="rect">
-            <a:avLst/>
-          </a:prstGeom>
-        </p:spPr>
-        <p:txBody>
-          <a:bodyPr vert="horz" lIns="91440" tIns="45720" rIns="91440" bIns="45720" rtlCol="0"/>
-          <a:lstStyle>
-            <a:lvl1pPr algn="r">
-              <a:defRPr sz="1200"/>
-            </a:lvl1pPr>
-          </a:lstStyle>
-          <a:p>
-            <a:fld id="{5282F153-3F37-0F45-9E97-73ACFA13230C}" type="datetimeFigureOut">
-              <a:rPr lang="en-US"/>
-              <a:t>7/23/19</a:t>
-            </a:fld>
-            <a:endParaRPr lang="en-US"/>
-          </a:p>
-        </p:txBody>
-      </p:sp>
-      <p:sp>
-        <p:nvSpPr>
-          <p:cNvPr id="4" name="Slide Image Placeholder 3"/>
-          <p:cNvSpPr>
-            <a:spLocks noGrp="1" noRot="1" noChangeAspect="1"/>
-          </p:cNvSpPr>
-          <p:nvPr>
-            <p:ph type="sldImg" idx="2"/>
-          </p:nvPr>
-        </p:nvSpPr>
-        <p:spPr>
-          <a:xfrm>
-            <a:off x="685800" y="1143000"/>
-            <a:ext cx="5486400" cy="3086100"/>
-          </a:xfrm>
-          <a:prstGeom prst="rect">
-            <a:avLst/>
-          </a:prstGeom>
-          <a:noFill/>
-          <a:ln w="12700">
-            <a:solidFill>
-              <a:prstClr val="black"/>
-            </a:solidFill>
-          </a:ln>
-        </p:spPr>
-        <p:txBody>
-          <a:bodyPr vert="horz" lIns="91440" tIns="45720" rIns="91440" bIns="45720" rtlCol="0" anchor="ctr"/>
-          <a:lstStyle/>
-          <a:p>
-            <a:endParaRPr lang="en-US"/>
-          </a:p>
-        </p:txBody>
-      </p:sp>
-      <p:sp>
-        <p:nvSpPr>
-          <p:cNvPr id="5" name="Notes Placeholder 4"/>
-          <p:cNvSpPr>
-            <a:spLocks noGrp="1"/>
-          </p:cNvSpPr>
-          <p:nvPr>
-            <p:ph type="body" sz="quarter" idx="3"/>
-          </p:nvPr>
-        </p:nvSpPr>
-        <p:spPr>
-          <a:xfrm>
-            <a:off x="685800" y="4400550"/>
-            <a:ext cx="5486400" cy="3600450"/>
-          </a:xfrm>
-          <a:prstGeom prst="rect">
-            <a:avLst/>
-          </a:prstGeom>
-        </p:spPr>
-        <p:txBody>
-          <a:bodyPr vert="horz" lIns="91440" tIns="45720" rIns="91440" bIns="45720" rtlCol="0"/>
-          <a:lstStyle/>
-          <a:p>
-            <a:pPr lvl="0"/>
-            <a:r>
-              <a:rPr lang="en-US"/>
-              <a:t>Click to edit Master text styles</a:t>
-            </a:r>
-          </a:p>
-          <a:p>
-            <a:pPr lvl="1"/>
-            <a:r>
-              <a:rPr lang="en-US"/>
-              <a:t>Second level</a:t>
-            </a:r>
-          </a:p>
-          <a:p>
-            <a:pPr lvl="2"/>
-            <a:r>
-              <a:rPr lang="en-US"/>
-              <a:t>Third level</a:t>
-            </a:r>
-          </a:p>
-          <a:p>
-            <a:pPr lvl="3"/>
-            <a:r>
-              <a:rPr lang="en-US"/>
-              <a:t>Fourth level</a:t>
-            </a:r>
-          </a:p>
-          <a:p>
-            <a:pPr lvl="4"/>
-            <a:r>
-              <a:rPr lang="en-US"/>
-              <a:t>Fifth level</a:t>
-            </a:r>
-          </a:p>
-        </p:txBody>
-      </p:sp>
-      <p:sp>
-        <p:nvSpPr>
-          <p:cNvPr id="6" name="Footer Placeholder 5"/>
-          <p:cNvSpPr>
-            <a:spLocks noGrp="1"/>
-          </p:cNvSpPr>
-          <p:nvPr>
-            <p:ph type="ftr" sz="quarter" idx="4"/>
-          </p:nvPr>
-        </p:nvSpPr>
-        <p:spPr>
-          <a:xfrm>
-            <a:off x="0" y="8685213"/>
-            <a:ext cx="2971800" cy="458787"/>
-          </a:xfrm>
-          <a:prstGeom prst="rect">
-            <a:avLst/>
-          </a:prstGeom>
-        </p:spPr>
-        <p:txBody>
-          <a:bodyPr vert="horz" lIns="91440" tIns="45720" rIns="91440" bIns="45720" rtlCol="0" anchor="b"/>
-          <a:lstStyle>
-            <a:lvl1pPr algn="l">
-              <a:defRPr sz="1200"/>
-            </a:lvl1pPr>
-          </a:lstStyle>
-          <a:p>
-            <a:endParaRPr lang="en-US"/>
-          </a:p>
-        </p:txBody>
-      </p:sp>
-      <p:sp>
-        <p:nvSpPr>
-          <p:cNvPr id="7" name="Slide Number Placeholder 6"/>
-          <p:cNvSpPr>
-            <a:spLocks noGrp="1"/>
-          </p:cNvSpPr>
-          <p:nvPr>
-            <p:ph type="sldNum" sz="quarter" idx="5"/>
-          </p:nvPr>
-        </p:nvSpPr>
-        <p:spPr>
-          <a:xfrm>
-            <a:off x="3884613" y="8685213"/>
-            <a:ext cx="2971800" cy="458787"/>
-          </a:xfrm>
-          <a:prstGeom prst="rect">
-            <a:avLst/>
-          </a:prstGeom>
-        </p:spPr>
-        <p:txBody>
-          <a:bodyPr vert="horz" lIns="91440" tIns="45720" rIns="91440" bIns="45720" rtlCol="0" anchor="b"/>
-          <a:lstStyle>
-            <a:lvl1pPr algn="r">
-              <a:defRPr sz="1200"/>
-            </a:lvl1pPr>
-          </a:lstStyle>
-          <a:p>
-            <a:fld id="{CE5E9CC1-C706-0F49-92D6-E571CC5EEA8F}" type="slidenum">
-              <a:rPr lang="en-US"/>
-              <a:t>‹#›</a:t>
-            </a:fld>
-            <a:endParaRPr lang="en-US"/>
-          </a:p>
-        </p:txBody>
-      </p:sp>
     </p:spTree>
     <p:extLst>
       <p:ext uri="{BB962C8B-B14F-4D97-AF65-F5344CB8AC3E}">
-        <p14:creationId xmlns:p14="http://schemas.microsoft.com/office/powerpoint/2010/main" val="1024086991"/>
+        <p14:creationId xmlns:p14="http://schemas.microsoft.com/office/powerpoint/2010/main" val="1407727517"/>
       </p:ext>
     </p:extLst>
   </p:cSld>
@@ -901,10 +290,6 @@
           <a:bodyPr/>
           <a:lstStyle/>
           <a:p>
-            <a:r>
-              <a:rPr lang="en-US" dirty="0"/>
-              <a:t/>
-            </a:r>
             <a:endParaRPr lang="en-US" dirty="0"/>
           </a:p>
         </p:txBody>
@@ -989,10 +374,6 @@
           <a:bodyPr/>
           <a:lstStyle/>
           <a:p>
-            <a:r>
-              <a:rPr lang="en-US" dirty="0"/>
-              <a:t/>
-            </a:r>
             <a:endParaRPr lang="en-US" dirty="0"/>
           </a:p>
         </p:txBody>
@@ -1077,10 +458,6 @@
           <a:bodyPr/>
           <a:lstStyle/>
           <a:p>
-            <a:r>
-              <a:rPr lang="en-US" dirty="0"/>
-              <a:t/>
-            </a:r>
             <a:endParaRPr lang="en-US" dirty="0"/>
           </a:p>
         </p:txBody>
@@ -1165,10 +542,6 @@
           <a:bodyPr/>
           <a:lstStyle/>
           <a:p>
-            <a:r>
-              <a:rPr lang="en-US" dirty="0"/>
-              <a:t/>
-            </a:r>
             <a:endParaRPr lang="en-US" dirty="0"/>
           </a:p>
         </p:txBody>
@@ -1253,10 +626,6 @@
           <a:bodyPr/>
           <a:lstStyle/>
           <a:p>
-            <a:r>
-              <a:rPr lang="en-US" dirty="0"/>
-              <a:t/>
-            </a:r>
             <a:endParaRPr lang="en-US" dirty="0"/>
           </a:p>
         </p:txBody>
@@ -1341,10 +710,6 @@
           <a:bodyPr/>
           <a:lstStyle/>
           <a:p>
-            <a:r>
-              <a:rPr lang="en-US" dirty="0"/>
-              <a:t/>
-            </a:r>
             <a:endParaRPr lang="en-US" dirty="0"/>
           </a:p>
         </p:txBody>
@@ -1429,10 +794,6 @@
           <a:bodyPr/>
           <a:lstStyle/>
           <a:p>
-            <a:r>
-              <a:rPr lang="en-US" dirty="0"/>
-              <a:t/>
-            </a:r>
             <a:endParaRPr lang="en-US" dirty="0"/>
           </a:p>
         </p:txBody>
@@ -1517,10 +878,6 @@
           <a:bodyPr/>
           <a:lstStyle/>
           <a:p>
-            <a:r>
-              <a:rPr lang="en-US" dirty="0"/>
-              <a:t/>
-            </a:r>
             <a:endParaRPr lang="en-US" dirty="0"/>
           </a:p>
         </p:txBody>
@@ -1605,10 +962,6 @@
           <a:bodyPr/>
           <a:lstStyle/>
           <a:p>
-            <a:r>
-              <a:rPr lang="en-US" dirty="0"/>
-              <a:t/>
-            </a:r>
             <a:endParaRPr lang="en-US" dirty="0"/>
           </a:p>
         </p:txBody>
@@ -1693,10 +1046,6 @@
           <a:bodyPr/>
           <a:lstStyle/>
           <a:p>
-            <a:r>
-              <a:rPr lang="en-US" dirty="0"/>
-              <a:t/>
-            </a:r>
             <a:endParaRPr lang="en-US" dirty="0"/>
           </a:p>
         </p:txBody>
@@ -1770,6 +1119,11 @@
 <file path=ppt/slideMasters/slideMaster1.xml><?xml version="1.0" encoding="utf-8"?>
 <p:sldMaster xmlns:a="http://schemas.openxmlformats.org/drawingml/2006/main" xmlns:r="http://schemas.openxmlformats.org/officeDocument/2006/relationships" xmlns:p="http://schemas.openxmlformats.org/presentationml/2006/main">
   <p:cSld>
+    <p:bg>
+      <p:bgRef idx="1001">
+        <a:schemeClr val="bg1"/>
+      </p:bgRef>
+    </p:bg>
     <p:spTree>
       <p:nvGrpSpPr>
         <p:cNvPr id="1" name=""/>
@@ -2052,6 +1406,7 @@
         <a:solidFill>
           <a:srgbClr val="14121C"/>
         </a:solidFill>
+        <a:effectLst/>
       </p:bgPr>
     </p:bg>
     <p:spTree>
@@ -2127,7 +1482,7 @@
           </a:solidFill>
           <a:ln/>
           <a:effectLst>
-            <a:outerShdw sx="100000" sy="100000" kx="0" ky="0" algn="bl" rotWithShape="0" blurRad="101600" dist="38100" dir="5400000">
+            <a:outerShdw blurRad="101600" dist="38100" dir="5400000" algn="bl" rotWithShape="0">
               <a:srgbClr val="000000">
                 <a:alpha val="12000"/>
               </a:srgbClr>
@@ -2137,249 +1492,7 @@
       </p:sp>
       <p:pic>
         <p:nvPicPr>
-          <p:cNvPr id="5" name="Image 0" descr="preencoded.png">    </p:cNvPr>
-          <p:cNvPicPr>
-            <a:picLocks noChangeAspect="1"/>
-          </p:cNvPicPr>
-          <p:nvPr/>
-        </p:nvPicPr>
-        <p:blipFill>
-          <a:blip r:embed="rId1"/>
-          <a:stretch>
-            <a:fillRect/>
-          </a:stretch>
-        </p:blipFill>
-        <p:spPr>
-          <a:xfrm>
-            <a:off x="1048817" y="1003097"/>
-            <a:ext cx="416966" cy="416966"/>
-          </a:xfrm>
-          <a:prstGeom prst="rect">
-            <a:avLst/>
-          </a:prstGeom>
-        </p:spPr>
-      </p:pic>
-      <p:sp>
-        <p:nvSpPr>
-          <p:cNvPr id="6" name="Text 3"/>
-          <p:cNvSpPr/>
-          <p:nvPr/>
-        </p:nvSpPr>
-        <p:spPr>
-          <a:xfrm>
-            <a:off x="1828800" y="868680"/>
-            <a:ext cx="7315200" cy="640080"/>
-          </a:xfrm>
-          <a:prstGeom prst="rect">
-            <a:avLst/>
-          </a:prstGeom>
-          <a:noFill/>
-          <a:ln/>
-        </p:spPr>
-        <p:txBody>
-          <a:bodyPr wrap="square" lIns="0" tIns="0" rIns="0" bIns="0" rtlCol="0" anchor="ctr"/>
-          <a:lstStyle/>
-          <a:p>
-            <a:pPr indent="0" marL="0">
-              <a:buNone/>
-            </a:pPr>
-            <a:r>
-              <a:rPr lang="en-US" sz="1400" b="1" spc="300" kern="0" dirty="0">
-                <a:solidFill>
-                  <a:srgbClr val="12B5A5"/>
-                </a:solidFill>
-                <a:latin typeface="Calibri" pitchFamily="34" charset="0"/>
-                <a:ea typeface="Calibri" pitchFamily="34" charset="-122"/>
-                <a:cs typeface="Calibri" pitchFamily="34" charset="-120"/>
-              </a:rPr>
-              <a:t>MASSIVE MUSIC  ·  TECHNICAL TEST</a:t>
-            </a:r>
-            <a:endParaRPr lang="en-US" sz="1400" dirty="0"/>
-          </a:p>
-        </p:txBody>
-      </p:sp>
-      <p:sp>
-        <p:nvSpPr>
-          <p:cNvPr id="7" name="Text 4"/>
-          <p:cNvSpPr/>
-          <p:nvPr/>
-        </p:nvSpPr>
-        <p:spPr>
-          <a:xfrm>
-            <a:off x="777240" y="2286000"/>
-            <a:ext cx="10515600" cy="1005840"/>
-          </a:xfrm>
-          <a:prstGeom prst="rect">
-            <a:avLst/>
-          </a:prstGeom>
-          <a:noFill/>
-          <a:ln/>
-        </p:spPr>
-        <p:txBody>
-          <a:bodyPr wrap="square" lIns="0" tIns="0" rIns="0" bIns="0" rtlCol="0" anchor="ctr"/>
-          <a:lstStyle/>
-          <a:p>
-            <a:pPr indent="0" marL="0">
-              <a:buNone/>
-            </a:pPr>
-            <a:r>
-              <a:rPr lang="en-US" sz="5400" b="1" dirty="0">
-                <a:solidFill>
-                  <a:srgbClr val="FFFFFF"/>
-                </a:solidFill>
-                <a:latin typeface="Cambria" pitchFamily="34" charset="0"/>
-                <a:ea typeface="Cambria" pitchFamily="34" charset="-122"/>
-                <a:cs typeface="Cambria" pitchFamily="34" charset="-120"/>
-              </a:rPr>
-              <a:t>DSP Metadata Pipeline</a:t>
-            </a:r>
-            <a:endParaRPr lang="en-US" sz="5400" dirty="0"/>
-          </a:p>
-        </p:txBody>
-      </p:sp>
-      <p:sp>
-        <p:nvSpPr>
-          <p:cNvPr id="8" name="Text 5"/>
-          <p:cNvSpPr/>
-          <p:nvPr/>
-        </p:nvSpPr>
-        <p:spPr>
-          <a:xfrm>
-            <a:off x="822960" y="3383280"/>
-            <a:ext cx="9601200" cy="914400"/>
-          </a:xfrm>
-          <a:prstGeom prst="rect">
-            <a:avLst/>
-          </a:prstGeom>
-          <a:noFill/>
-          <a:ln/>
-        </p:spPr>
-        <p:txBody>
-          <a:bodyPr wrap="square" lIns="0" tIns="0" rIns="0" bIns="0" rtlCol="0" anchor="ctr"/>
-          <a:lstStyle/>
-          <a:p>
-            <a:pPr indent="0" marL="0">
-              <a:lnSpc>
-                <a:spcPct val="115000"/>
-              </a:lnSpc>
-              <a:buNone/>
-            </a:pPr>
-            <a:r>
-              <a:rPr lang="en-US" sz="1800" dirty="0">
-                <a:solidFill>
-                  <a:srgbClr val="C7CDD9"/>
-                </a:solidFill>
-                <a:latin typeface="Calibri" pitchFamily="34" charset="0"/>
-                <a:ea typeface="Calibri" pitchFamily="34" charset="-122"/>
-                <a:cs typeface="Calibri" pitchFamily="34" charset="-120"/>
-              </a:rPr>
-              <a:t>Automated retrieval, cleaning &amp; storage of song / video metadata</a:t>
-            </a:r>
-            <a:endParaRPr lang="en-US" sz="1800" dirty="0"/>
-          </a:p>
-          <a:p>
-            <a:pPr indent="0" marL="0">
-              <a:lnSpc>
-                <a:spcPct val="115000"/>
-              </a:lnSpc>
-              <a:buNone/>
-            </a:pPr>
-            <a:r>
-              <a:rPr lang="en-US" sz="1800" dirty="0">
-                <a:solidFill>
-                  <a:srgbClr val="C7CDD9"/>
-                </a:solidFill>
-                <a:latin typeface="Calibri" pitchFamily="34" charset="0"/>
-                <a:ea typeface="Calibri" pitchFamily="34" charset="-122"/>
-                <a:cs typeface="Calibri" pitchFamily="34" charset="-120"/>
-              </a:rPr>
-              <a:t>from Spotify and YouTube — built for analysts and data scientists.</a:t>
-            </a:r>
-            <a:endParaRPr lang="en-US" sz="1800" dirty="0"/>
-          </a:p>
-        </p:txBody>
-      </p:sp>
-      <p:sp>
-        <p:nvSpPr>
-          <p:cNvPr id="9" name="Shape 6"/>
-          <p:cNvSpPr/>
-          <p:nvPr/>
-        </p:nvSpPr>
-        <p:spPr>
-          <a:xfrm>
-            <a:off x="822960" y="4892040"/>
-            <a:ext cx="640080" cy="640080"/>
-          </a:xfrm>
-          <a:prstGeom prst="ellipse">
-            <a:avLst/>
-          </a:prstGeom>
-          <a:solidFill>
-            <a:srgbClr val="FFFFFF"/>
-          </a:solidFill>
-          <a:ln/>
-          <a:effectLst>
-            <a:outerShdw sx="100000" sy="100000" kx="0" ky="0" algn="bl" rotWithShape="0" blurRad="101600" dist="38100" dir="5400000">
-              <a:srgbClr val="000000">
-                <a:alpha val="12000"/>
-              </a:srgbClr>
-            </a:outerShdw>
-          </a:effectLst>
-        </p:spPr>
-      </p:sp>
-      <p:pic>
-        <p:nvPicPr>
-          <p:cNvPr id="10" name="Image 1" descr="preencoded.png">    </p:cNvPr>
-          <p:cNvPicPr>
-            <a:picLocks noChangeAspect="1"/>
-          </p:cNvPicPr>
-          <p:nvPr/>
-        </p:nvPicPr>
-        <p:blipFill>
-          <a:blip r:embed="rId2"/>
-          <a:stretch>
-            <a:fillRect/>
-          </a:stretch>
-        </p:blipFill>
-        <p:spPr>
-          <a:xfrm>
-            <a:off x="989381" y="5058461"/>
-            <a:ext cx="307238" cy="307238"/>
-          </a:xfrm>
-          <a:prstGeom prst="rect">
-            <a:avLst/>
-          </a:prstGeom>
-        </p:spPr>
-      </p:pic>
-      <p:sp>
-        <p:nvSpPr>
-          <p:cNvPr id="11" name="Shape 7"/>
-          <p:cNvSpPr/>
-          <p:nvPr/>
-        </p:nvSpPr>
-        <p:spPr>
-          <a:xfrm>
-            <a:off x="1600200" y="4892040"/>
-            <a:ext cx="640080" cy="640080"/>
-          </a:xfrm>
-          <a:prstGeom prst="ellipse">
-            <a:avLst/>
-          </a:prstGeom>
-          <a:solidFill>
-            <a:srgbClr val="FFFFFF"/>
-          </a:solidFill>
-          <a:ln/>
-          <a:effectLst>
-            <a:outerShdw sx="100000" sy="100000" kx="0" ky="0" algn="bl" rotWithShape="0" blurRad="101600" dist="38100" dir="5400000">
-              <a:srgbClr val="000000">
-                <a:alpha val="12000"/>
-              </a:srgbClr>
-            </a:outerShdw>
-          </a:effectLst>
-        </p:spPr>
-      </p:sp>
-      <p:pic>
-        <p:nvPicPr>
-          <p:cNvPr id="12" name="Image 2" descr="preencoded.png">    </p:cNvPr>
+          <p:cNvPr id="5" name="Image 0" descr="preencoded.png"/>
           <p:cNvPicPr>
             <a:picLocks noChangeAspect="1"/>
           </p:cNvPicPr>
@@ -2393,8 +1506,8 @@
         </p:blipFill>
         <p:spPr>
           <a:xfrm>
-            <a:off x="1766621" y="5058461"/>
-            <a:ext cx="307238" cy="307238"/>
+            <a:off x="1048817" y="1003097"/>
+            <a:ext cx="416966" cy="416966"/>
           </a:xfrm>
           <a:prstGeom prst="rect">
             <a:avLst/>
@@ -2403,14 +1516,14 @@
       </p:pic>
       <p:sp>
         <p:nvSpPr>
-          <p:cNvPr id="13" name="Text 8"/>
-          <p:cNvSpPr/>
-          <p:nvPr/>
-        </p:nvSpPr>
-        <p:spPr>
-          <a:xfrm>
-            <a:off x="2468880" y="4892040"/>
-            <a:ext cx="5486400" cy="640080"/>
+          <p:cNvPr id="6" name="Text 3"/>
+          <p:cNvSpPr/>
+          <p:nvPr/>
+        </p:nvSpPr>
+        <p:spPr>
+          <a:xfrm>
+            <a:off x="1828800" y="868680"/>
+            <a:ext cx="7315200" cy="640080"/>
           </a:xfrm>
           <a:prstGeom prst="rect">
             <a:avLst/>
@@ -2422,7 +1535,249 @@
           <a:bodyPr wrap="square" lIns="0" tIns="0" rIns="0" bIns="0" rtlCol="0" anchor="ctr"/>
           <a:lstStyle/>
           <a:p>
-            <a:pPr indent="0" marL="0">
+            <a:pPr marL="0" indent="0">
+              <a:buNone/>
+            </a:pPr>
+            <a:r>
+              <a:rPr lang="en-US" sz="1400" b="1" kern="0" spc="300" dirty="0">
+                <a:solidFill>
+                  <a:srgbClr val="12B5A5"/>
+                </a:solidFill>
+                <a:latin typeface="Calibri" pitchFamily="34" charset="0"/>
+                <a:ea typeface="Calibri" pitchFamily="34" charset="-122"/>
+                <a:cs typeface="Calibri" pitchFamily="34" charset="-120"/>
+              </a:rPr>
+              <a:t>MASSIVE MUSIC  ·  TECHNICAL TEST</a:t>
+            </a:r>
+            <a:endParaRPr lang="en-US" sz="1400" dirty="0"/>
+          </a:p>
+        </p:txBody>
+      </p:sp>
+      <p:sp>
+        <p:nvSpPr>
+          <p:cNvPr id="7" name="Text 4"/>
+          <p:cNvSpPr/>
+          <p:nvPr/>
+        </p:nvSpPr>
+        <p:spPr>
+          <a:xfrm>
+            <a:off x="777240" y="2286000"/>
+            <a:ext cx="10515600" cy="1005840"/>
+          </a:xfrm>
+          <a:prstGeom prst="rect">
+            <a:avLst/>
+          </a:prstGeom>
+          <a:noFill/>
+          <a:ln/>
+        </p:spPr>
+        <p:txBody>
+          <a:bodyPr wrap="square" lIns="0" tIns="0" rIns="0" bIns="0" rtlCol="0" anchor="ctr"/>
+          <a:lstStyle/>
+          <a:p>
+            <a:pPr marL="0" indent="0">
+              <a:buNone/>
+            </a:pPr>
+            <a:r>
+              <a:rPr lang="en-US" sz="5400" b="1" dirty="0">
+                <a:solidFill>
+                  <a:srgbClr val="FFFFFF"/>
+                </a:solidFill>
+                <a:latin typeface="Cambria" pitchFamily="34" charset="0"/>
+                <a:ea typeface="Cambria" pitchFamily="34" charset="-122"/>
+                <a:cs typeface="Cambria" pitchFamily="34" charset="-120"/>
+              </a:rPr>
+              <a:t>DSP Metadata Pipeline</a:t>
+            </a:r>
+            <a:endParaRPr lang="en-US" sz="5400" dirty="0"/>
+          </a:p>
+        </p:txBody>
+      </p:sp>
+      <p:sp>
+        <p:nvSpPr>
+          <p:cNvPr id="8" name="Text 5"/>
+          <p:cNvSpPr/>
+          <p:nvPr/>
+        </p:nvSpPr>
+        <p:spPr>
+          <a:xfrm>
+            <a:off x="822960" y="3383280"/>
+            <a:ext cx="9601200" cy="914400"/>
+          </a:xfrm>
+          <a:prstGeom prst="rect">
+            <a:avLst/>
+          </a:prstGeom>
+          <a:noFill/>
+          <a:ln/>
+        </p:spPr>
+        <p:txBody>
+          <a:bodyPr wrap="square" lIns="0" tIns="0" rIns="0" bIns="0" rtlCol="0" anchor="ctr"/>
+          <a:lstStyle/>
+          <a:p>
+            <a:pPr marL="0" indent="0">
+              <a:lnSpc>
+                <a:spcPct val="115000"/>
+              </a:lnSpc>
+              <a:buNone/>
+            </a:pPr>
+            <a:r>
+              <a:rPr lang="en-US" sz="1800" dirty="0">
+                <a:solidFill>
+                  <a:srgbClr val="C7CDD9"/>
+                </a:solidFill>
+                <a:latin typeface="Calibri" pitchFamily="34" charset="0"/>
+                <a:ea typeface="Calibri" pitchFamily="34" charset="-122"/>
+                <a:cs typeface="Calibri" pitchFamily="34" charset="-120"/>
+              </a:rPr>
+              <a:t>Automated retrieval, cleaning &amp; storage of song / video metadata</a:t>
+            </a:r>
+            <a:endParaRPr lang="en-US" sz="1800" dirty="0"/>
+          </a:p>
+          <a:p>
+            <a:pPr marL="0" indent="0">
+              <a:lnSpc>
+                <a:spcPct val="115000"/>
+              </a:lnSpc>
+              <a:buNone/>
+            </a:pPr>
+            <a:r>
+              <a:rPr lang="en-US" sz="1800" dirty="0">
+                <a:solidFill>
+                  <a:srgbClr val="C7CDD9"/>
+                </a:solidFill>
+                <a:latin typeface="Calibri" pitchFamily="34" charset="0"/>
+                <a:ea typeface="Calibri" pitchFamily="34" charset="-122"/>
+                <a:cs typeface="Calibri" pitchFamily="34" charset="-120"/>
+              </a:rPr>
+              <a:t>from Spotify and YouTube — built for analysts and data scientists.</a:t>
+            </a:r>
+            <a:endParaRPr lang="en-US" sz="1800" dirty="0"/>
+          </a:p>
+        </p:txBody>
+      </p:sp>
+      <p:sp>
+        <p:nvSpPr>
+          <p:cNvPr id="9" name="Shape 6"/>
+          <p:cNvSpPr/>
+          <p:nvPr/>
+        </p:nvSpPr>
+        <p:spPr>
+          <a:xfrm>
+            <a:off x="822960" y="4892040"/>
+            <a:ext cx="640080" cy="640080"/>
+          </a:xfrm>
+          <a:prstGeom prst="ellipse">
+            <a:avLst/>
+          </a:prstGeom>
+          <a:solidFill>
+            <a:srgbClr val="FFFFFF"/>
+          </a:solidFill>
+          <a:ln/>
+          <a:effectLst>
+            <a:outerShdw blurRad="101600" dist="38100" dir="5400000" algn="bl" rotWithShape="0">
+              <a:srgbClr val="000000">
+                <a:alpha val="12000"/>
+              </a:srgbClr>
+            </a:outerShdw>
+          </a:effectLst>
+        </p:spPr>
+      </p:sp>
+      <p:pic>
+        <p:nvPicPr>
+          <p:cNvPr id="10" name="Image 1" descr="preencoded.png"/>
+          <p:cNvPicPr>
+            <a:picLocks noChangeAspect="1"/>
+          </p:cNvPicPr>
+          <p:nvPr/>
+        </p:nvPicPr>
+        <p:blipFill>
+          <a:blip r:embed="rId4"/>
+          <a:stretch>
+            <a:fillRect/>
+          </a:stretch>
+        </p:blipFill>
+        <p:spPr>
+          <a:xfrm>
+            <a:off x="989381" y="5058461"/>
+            <a:ext cx="307238" cy="307238"/>
+          </a:xfrm>
+          <a:prstGeom prst="rect">
+            <a:avLst/>
+          </a:prstGeom>
+        </p:spPr>
+      </p:pic>
+      <p:sp>
+        <p:nvSpPr>
+          <p:cNvPr id="11" name="Shape 7"/>
+          <p:cNvSpPr/>
+          <p:nvPr/>
+        </p:nvSpPr>
+        <p:spPr>
+          <a:xfrm>
+            <a:off x="1600200" y="4892040"/>
+            <a:ext cx="640080" cy="640080"/>
+          </a:xfrm>
+          <a:prstGeom prst="ellipse">
+            <a:avLst/>
+          </a:prstGeom>
+          <a:solidFill>
+            <a:srgbClr val="FFFFFF"/>
+          </a:solidFill>
+          <a:ln/>
+          <a:effectLst>
+            <a:outerShdw blurRad="101600" dist="38100" dir="5400000" algn="bl" rotWithShape="0">
+              <a:srgbClr val="000000">
+                <a:alpha val="12000"/>
+              </a:srgbClr>
+            </a:outerShdw>
+          </a:effectLst>
+        </p:spPr>
+      </p:sp>
+      <p:pic>
+        <p:nvPicPr>
+          <p:cNvPr id="12" name="Image 2" descr="preencoded.png"/>
+          <p:cNvPicPr>
+            <a:picLocks noChangeAspect="1"/>
+          </p:cNvPicPr>
+          <p:nvPr/>
+        </p:nvPicPr>
+        <p:blipFill>
+          <a:blip r:embed="rId5"/>
+          <a:stretch>
+            <a:fillRect/>
+          </a:stretch>
+        </p:blipFill>
+        <p:spPr>
+          <a:xfrm>
+            <a:off x="1766621" y="5058461"/>
+            <a:ext cx="307238" cy="307238"/>
+          </a:xfrm>
+          <a:prstGeom prst="rect">
+            <a:avLst/>
+          </a:prstGeom>
+        </p:spPr>
+      </p:pic>
+      <p:sp>
+        <p:nvSpPr>
+          <p:cNvPr id="13" name="Text 8"/>
+          <p:cNvSpPr/>
+          <p:nvPr/>
+        </p:nvSpPr>
+        <p:spPr>
+          <a:xfrm>
+            <a:off x="2468880" y="4892040"/>
+            <a:ext cx="5486400" cy="640080"/>
+          </a:xfrm>
+          <a:prstGeom prst="rect">
+            <a:avLst/>
+          </a:prstGeom>
+          <a:noFill/>
+          <a:ln/>
+        </p:spPr>
+        <p:txBody>
+          <a:bodyPr wrap="square" lIns="0" tIns="0" rIns="0" bIns="0" rtlCol="0" anchor="ctr"/>
+          <a:lstStyle/>
+          <a:p>
+            <a:pPr marL="0" indent="0">
               <a:buNone/>
             </a:pPr>
             <a:r>
@@ -2456,6 +1811,7 @@
         <a:solidFill>
           <a:srgbClr val="14121C"/>
         </a:solidFill>
+        <a:effectLst/>
       </p:bgPr>
     </p:bg>
     <p:spTree>
@@ -2511,7 +1867,7 @@
           </a:solidFill>
           <a:ln/>
           <a:effectLst>
-            <a:outerShdw sx="100000" sy="100000" kx="0" ky="0" algn="bl" rotWithShape="0" blurRad="101600" dist="38100" dir="5400000">
+            <a:outerShdw blurRad="101600" dist="38100" dir="5400000" algn="bl" rotWithShape="0">
               <a:srgbClr val="000000">
                 <a:alpha val="12000"/>
               </a:srgbClr>
@@ -2521,14 +1877,14 @@
       </p:sp>
       <p:pic>
         <p:nvPicPr>
-          <p:cNvPr id="4" name="Image 0" descr="preencoded.png">    </p:cNvPr>
+          <p:cNvPr id="4" name="Image 0" descr="preencoded.png"/>
           <p:cNvPicPr>
             <a:picLocks noChangeAspect="1"/>
           </p:cNvPicPr>
           <p:nvPr/>
         </p:nvPicPr>
         <p:blipFill>
-          <a:blip r:embed="rId1"/>
+          <a:blip r:embed="rId3"/>
           <a:stretch>
             <a:fillRect/>
           </a:stretch>
@@ -2564,7 +1920,7 @@
           <a:bodyPr wrap="square" lIns="0" tIns="0" rIns="0" bIns="0" rtlCol="0" anchor="ctr"/>
           <a:lstStyle/>
           <a:p>
-            <a:pPr indent="0" marL="0">
+            <a:pPr marL="0" indent="0">
               <a:buNone/>
             </a:pPr>
             <a:r>
@@ -2623,7 +1979,7 @@
           </a:solidFill>
           <a:ln/>
           <a:effectLst>
-            <a:outerShdw sx="100000" sy="100000" kx="0" ky="0" algn="bl" rotWithShape="0" blurRad="101600" dist="38100" dir="5400000">
+            <a:outerShdw blurRad="101600" dist="38100" dir="5400000" algn="bl" rotWithShape="0">
               <a:srgbClr val="000000">
                 <a:alpha val="12000"/>
               </a:srgbClr>
@@ -2633,14 +1989,14 @@
       </p:sp>
       <p:pic>
         <p:nvPicPr>
-          <p:cNvPr id="8" name="Image 1" descr="preencoded.png">    </p:cNvPr>
+          <p:cNvPr id="8" name="Image 1" descr="preencoded.png"/>
           <p:cNvPicPr>
             <a:picLocks noChangeAspect="1"/>
           </p:cNvPicPr>
           <p:nvPr/>
         </p:nvPicPr>
         <p:blipFill>
-          <a:blip r:embed="rId2"/>
+          <a:blip r:embed="rId4"/>
           <a:stretch>
             <a:fillRect/>
           </a:stretch>
@@ -2676,7 +2032,7 @@
           <a:bodyPr wrap="square" lIns="0" tIns="0" rIns="0" bIns="0" rtlCol="0" anchor="ctr"/>
           <a:lstStyle/>
           <a:p>
-            <a:pPr indent="0" marL="0">
+            <a:pPr marL="0" indent="0">
               <a:buNone/>
             </a:pPr>
             <a:r>
@@ -2715,7 +2071,7 @@
           <a:bodyPr wrap="square" lIns="0" tIns="0" rIns="0" bIns="0" rtlCol="0" anchor="ctr"/>
           <a:lstStyle/>
           <a:p>
-            <a:pPr indent="0" marL="0">
+            <a:pPr marL="0" indent="0">
               <a:lnSpc>
                 <a:spcPct val="125000"/>
               </a:lnSpc>
@@ -2735,7 +2091,7 @@
             <a:endParaRPr lang="en-US" sz="1350" dirty="0"/>
           </a:p>
           <a:p>
-            <a:pPr indent="0" marL="0">
+            <a:pPr marL="0" indent="0">
               <a:lnSpc>
                 <a:spcPct val="125000"/>
               </a:lnSpc>
@@ -2755,7 +2111,7 @@
             <a:endParaRPr lang="en-US" sz="1350" dirty="0"/>
           </a:p>
           <a:p>
-            <a:pPr indent="0" marL="0">
+            <a:pPr marL="0" indent="0">
               <a:lnSpc>
                 <a:spcPct val="125000"/>
               </a:lnSpc>
@@ -2797,7 +2153,7 @@
           <a:bodyPr wrap="square" lIns="0" tIns="0" rIns="0" bIns="0" rtlCol="0" anchor="ctr"/>
           <a:lstStyle/>
           <a:p>
-            <a:pPr indent="0" marL="0">
+            <a:pPr marL="0" indent="0">
               <a:buNone/>
             </a:pPr>
             <a:r>
@@ -2894,7 +2250,7 @@
                 <a:ea typeface="Calibri" pitchFamily="34" charset="-122"/>
                 <a:cs typeface="Calibri" pitchFamily="34" charset="-120"/>
               </a:rPr>
-              <a:t>Reconcile Spotify ISRC ↔ catalog ISRC</a:t>
+              <a:t>ISRC source pluggable: Spotify needs Extended Quota Mode (2026 dev-mode) → used free MusicBrainz</a:t>
             </a:r>
             <a:endParaRPr lang="en-US" sz="1400" dirty="0"/>
           </a:p>
@@ -2963,7 +2319,7 @@
           </a:solidFill>
           <a:ln/>
           <a:effectLst>
-            <a:outerShdw sx="100000" sy="100000" kx="0" ky="0" algn="bl" rotWithShape="0" blurRad="101600" dist="38100" dir="5400000">
+            <a:outerShdw blurRad="101600" dist="38100" dir="5400000" algn="bl" rotWithShape="0">
               <a:srgbClr val="000000">
                 <a:alpha val="12000"/>
               </a:srgbClr>
@@ -2973,14 +2329,14 @@
       </p:sp>
       <p:pic>
         <p:nvPicPr>
-          <p:cNvPr id="15" name="Image 2" descr="preencoded.png">    </p:cNvPr>
+          <p:cNvPr id="15" name="Image 2" descr="preencoded.png"/>
           <p:cNvPicPr>
             <a:picLocks noChangeAspect="1"/>
           </p:cNvPicPr>
           <p:nvPr/>
         </p:nvPicPr>
         <p:blipFill>
-          <a:blip r:embed="rId3"/>
+          <a:blip r:embed="rId5"/>
           <a:stretch>
             <a:fillRect/>
           </a:stretch>
@@ -3016,7 +2372,7 @@
           <a:bodyPr wrap="square" lIns="0" tIns="0" rIns="0" bIns="0" rtlCol="0" anchor="ctr"/>
           <a:lstStyle/>
           <a:p>
-            <a:pPr indent="0" marL="0">
+            <a:pPr marL="0" indent="0">
               <a:buNone/>
             </a:pPr>
             <a:r>
@@ -3030,9 +2386,6 @@
               </a:rPr>
               <a:t>Thank you  ·  </a:t>
             </a:r>
-            <a:pPr indent="0" marL="0">
-              <a:buNone/>
-            </a:pPr>
             <a:r>
               <a:rPr lang="en-US" sz="1500" dirty="0">
                 <a:solidFill>
@@ -3064,6 +2417,7 @@
         <a:solidFill>
           <a:srgbClr val="FFFFFF"/>
         </a:solidFill>
+        <a:effectLst/>
       </p:bgPr>
     </p:bg>
     <p:spTree>
@@ -3101,7 +2455,7 @@
           <a:bodyPr wrap="square" rtlCol="0" anchor="ctr"/>
           <a:lstStyle/>
           <a:p>
-            <a:pPr algn="l" indent="0" marL="0">
+            <a:pPr marL="0" indent="0" algn="l">
               <a:buNone/>
             </a:pPr>
             <a:r>
@@ -3140,7 +2494,7 @@
           <a:bodyPr wrap="square" lIns="0" tIns="0" rIns="0" bIns="0" rtlCol="0" anchor="ctr"/>
           <a:lstStyle/>
           <a:p>
-            <a:pPr indent="0" marL="0">
+            <a:pPr marL="0" indent="0">
               <a:buNone/>
             </a:pPr>
             <a:r>
@@ -3179,7 +2533,7 @@
           <a:bodyPr wrap="square" lIns="0" tIns="0" rIns="0" bIns="0" rtlCol="0" anchor="ctr"/>
           <a:lstStyle/>
           <a:p>
-            <a:pPr indent="0" marL="0">
+            <a:pPr marL="0" indent="0">
               <a:buNone/>
             </a:pPr>
             <a:r>
@@ -3218,7 +2572,7 @@
           </a:solidFill>
           <a:ln/>
           <a:effectLst>
-            <a:outerShdw sx="100000" sy="100000" kx="0" ky="0" algn="bl" rotWithShape="0" blurRad="101600" dist="38100" dir="5400000">
+            <a:outerShdw blurRad="101600" dist="38100" dir="5400000" algn="bl" rotWithShape="0">
               <a:srgbClr val="000000">
                 <a:alpha val="12000"/>
               </a:srgbClr>
@@ -3245,7 +2599,7 @@
           </a:solidFill>
           <a:ln/>
           <a:effectLst>
-            <a:outerShdw sx="100000" sy="100000" kx="0" ky="0" algn="bl" rotWithShape="0" blurRad="101600" dist="38100" dir="5400000">
+            <a:outerShdw blurRad="101600" dist="38100" dir="5400000" algn="bl" rotWithShape="0">
               <a:srgbClr val="000000">
                 <a:alpha val="12000"/>
               </a:srgbClr>
@@ -3255,14 +2609,14 @@
       </p:sp>
       <p:pic>
         <p:nvPicPr>
-          <p:cNvPr id="7" name="Image 0" descr="preencoded.png">    </p:cNvPr>
+          <p:cNvPr id="7" name="Image 0" descr="preencoded.png"/>
           <p:cNvPicPr>
             <a:picLocks noChangeAspect="1"/>
           </p:cNvPicPr>
           <p:nvPr/>
         </p:nvPicPr>
         <p:blipFill>
-          <a:blip r:embed="rId1"/>
+          <a:blip r:embed="rId3"/>
           <a:stretch>
             <a:fillRect/>
           </a:stretch>
@@ -3298,7 +2652,7 @@
           <a:bodyPr wrap="square" lIns="0" tIns="0" rIns="0" bIns="0" rtlCol="0" anchor="ctr"/>
           <a:lstStyle/>
           <a:p>
-            <a:pPr indent="0" marL="0">
+            <a:pPr marL="0" indent="0">
               <a:buNone/>
             </a:pPr>
             <a:r>
@@ -3337,7 +2691,7 @@
           <a:bodyPr wrap="square" lIns="0" tIns="0" rIns="0" bIns="0" rtlCol="0" anchor="ctr"/>
           <a:lstStyle/>
           <a:p>
-            <a:pPr indent="0" marL="0">
+            <a:pPr marL="0" indent="0">
               <a:lnSpc>
                 <a:spcPct val="110000"/>
               </a:lnSpc>
@@ -3379,7 +2733,7 @@
           <a:bodyPr wrap="square" lIns="0" tIns="0" rIns="0" bIns="0" rtlCol="0" anchor="ctr"/>
           <a:lstStyle/>
           <a:p>
-            <a:pPr indent="0" marL="0">
+            <a:pPr marL="0" indent="0">
               <a:buNone/>
             </a:pPr>
             <a:r>
@@ -3393,9 +2747,6 @@
               </a:rPr>
               <a:t>OUTPUT  </a:t>
             </a:r>
-            <a:pPr indent="0" marL="0">
-              <a:buNone/>
-            </a:pPr>
             <a:r>
               <a:rPr lang="en-US" sz="1250" b="1" dirty="0">
                 <a:solidFill>
@@ -3432,7 +2783,7 @@
           </a:solidFill>
           <a:ln/>
           <a:effectLst>
-            <a:outerShdw sx="100000" sy="100000" kx="0" ky="0" algn="bl" rotWithShape="0" blurRad="101600" dist="38100" dir="5400000">
+            <a:outerShdw blurRad="101600" dist="38100" dir="5400000" algn="bl" rotWithShape="0">
               <a:srgbClr val="000000">
                 <a:alpha val="12000"/>
               </a:srgbClr>
@@ -3459,7 +2810,7 @@
           </a:solidFill>
           <a:ln/>
           <a:effectLst>
-            <a:outerShdw sx="100000" sy="100000" kx="0" ky="0" algn="bl" rotWithShape="0" blurRad="101600" dist="38100" dir="5400000">
+            <a:outerShdw blurRad="101600" dist="38100" dir="5400000" algn="bl" rotWithShape="0">
               <a:srgbClr val="000000">
                 <a:alpha val="12000"/>
               </a:srgbClr>
@@ -3469,14 +2820,14 @@
       </p:sp>
       <p:pic>
         <p:nvPicPr>
-          <p:cNvPr id="13" name="Image 1" descr="preencoded.png">    </p:cNvPr>
+          <p:cNvPr id="13" name="Image 1" descr="preencoded.png"/>
           <p:cNvPicPr>
             <a:picLocks noChangeAspect="1"/>
           </p:cNvPicPr>
           <p:nvPr/>
         </p:nvPicPr>
         <p:blipFill>
-          <a:blip r:embed="rId2"/>
+          <a:blip r:embed="rId4"/>
           <a:stretch>
             <a:fillRect/>
           </a:stretch>
@@ -3512,7 +2863,7 @@
           <a:bodyPr wrap="square" lIns="0" tIns="0" rIns="0" bIns="0" rtlCol="0" anchor="ctr"/>
           <a:lstStyle/>
           <a:p>
-            <a:pPr indent="0" marL="0">
+            <a:pPr marL="0" indent="0">
               <a:buNone/>
             </a:pPr>
             <a:r>
@@ -3551,7 +2902,7 @@
           <a:bodyPr wrap="square" lIns="0" tIns="0" rIns="0" bIns="0" rtlCol="0" anchor="ctr"/>
           <a:lstStyle/>
           <a:p>
-            <a:pPr indent="0" marL="0">
+            <a:pPr marL="0" indent="0">
               <a:lnSpc>
                 <a:spcPct val="110000"/>
               </a:lnSpc>
@@ -3593,7 +2944,7 @@
           <a:bodyPr wrap="square" lIns="0" tIns="0" rIns="0" bIns="0" rtlCol="0" anchor="ctr"/>
           <a:lstStyle/>
           <a:p>
-            <a:pPr indent="0" marL="0">
+            <a:pPr marL="0" indent="0">
               <a:buNone/>
             </a:pPr>
             <a:r>
@@ -3607,9 +2958,6 @@
               </a:rPr>
               <a:t>OUTPUT  </a:t>
             </a:r>
-            <a:pPr indent="0" marL="0">
-              <a:buNone/>
-            </a:pPr>
             <a:r>
               <a:rPr lang="en-US" sz="1250" b="1" dirty="0">
                 <a:solidFill>
@@ -3646,7 +2994,7 @@
           <a:bodyPr wrap="square" lIns="0" tIns="0" rIns="0" bIns="0" rtlCol="0" anchor="ctr"/>
           <a:lstStyle/>
           <a:p>
-            <a:pPr algn="ctr" indent="0" marL="0">
+            <a:pPr marL="0" indent="0" algn="ctr">
               <a:buNone/>
             </a:pPr>
             <a:r>
@@ -3680,6 +3028,7 @@
         <a:solidFill>
           <a:srgbClr val="FFFFFF"/>
         </a:solidFill>
+        <a:effectLst/>
       </p:bgPr>
     </p:bg>
     <p:spTree>
@@ -3717,7 +3066,7 @@
           <a:bodyPr wrap="square" rtlCol="0" anchor="ctr"/>
           <a:lstStyle/>
           <a:p>
-            <a:pPr algn="l" indent="0" marL="0">
+            <a:pPr marL="0" indent="0" algn="l">
               <a:buNone/>
             </a:pPr>
             <a:r>
@@ -3756,7 +3105,7 @@
           <a:bodyPr wrap="square" lIns="0" tIns="0" rIns="0" bIns="0" rtlCol="0" anchor="ctr"/>
           <a:lstStyle/>
           <a:p>
-            <a:pPr indent="0" marL="0">
+            <a:pPr marL="0" indent="0">
               <a:buNone/>
             </a:pPr>
             <a:r>
@@ -3795,7 +3144,7 @@
           <a:bodyPr wrap="square" lIns="0" tIns="0" rIns="0" bIns="0" rtlCol="0" anchor="ctr"/>
           <a:lstStyle/>
           <a:p>
-            <a:pPr indent="0" marL="0">
+            <a:pPr marL="0" indent="0">
               <a:buNone/>
             </a:pPr>
             <a:r>
@@ -3834,7 +3183,7 @@
           </a:solidFill>
           <a:ln/>
           <a:effectLst>
-            <a:outerShdw sx="100000" sy="100000" kx="0" ky="0" algn="bl" rotWithShape="0" blurRad="101600" dist="38100" dir="5400000">
+            <a:outerShdw blurRad="101600" dist="38100" dir="5400000" algn="bl" rotWithShape="0">
               <a:srgbClr val="000000">
                 <a:alpha val="12000"/>
               </a:srgbClr>
@@ -3861,7 +3210,7 @@
           </a:solidFill>
           <a:ln/>
           <a:effectLst>
-            <a:outerShdw sx="100000" sy="100000" kx="0" ky="0" algn="bl" rotWithShape="0" blurRad="101600" dist="38100" dir="5400000">
+            <a:outerShdw blurRad="101600" dist="38100" dir="5400000" algn="bl" rotWithShape="0">
               <a:srgbClr val="000000">
                 <a:alpha val="12000"/>
               </a:srgbClr>
@@ -3871,192 +3220,7 @@
       </p:sp>
       <p:pic>
         <p:nvPicPr>
-          <p:cNvPr id="7" name="Image 0" descr="preencoded.png">    </p:cNvPr>
-          <p:cNvPicPr>
-            <a:picLocks noChangeAspect="1"/>
-          </p:cNvPicPr>
-          <p:nvPr/>
-        </p:nvPicPr>
-        <p:blipFill>
-          <a:blip r:embed="rId1"/>
-          <a:stretch>
-            <a:fillRect/>
-          </a:stretch>
-        </p:blipFill>
-        <p:spPr>
-          <a:xfrm>
-            <a:off x="1691640" y="2523744"/>
-            <a:ext cx="438912" cy="438912"/>
-          </a:xfrm>
-          <a:prstGeom prst="rect">
-            <a:avLst/>
-          </a:prstGeom>
-        </p:spPr>
-      </p:pic>
-      <p:sp>
-        <p:nvSpPr>
-          <p:cNvPr id="8" name="Text 5"/>
-          <p:cNvSpPr/>
-          <p:nvPr/>
-        </p:nvSpPr>
-        <p:spPr>
-          <a:xfrm>
-            <a:off x="640080" y="3337560"/>
-            <a:ext cx="2542032" cy="457200"/>
-          </a:xfrm>
-          <a:prstGeom prst="rect">
-            <a:avLst/>
-          </a:prstGeom>
-          <a:noFill/>
-          <a:ln/>
-        </p:spPr>
-        <p:txBody>
-          <a:bodyPr wrap="square" lIns="0" tIns="0" rIns="0" bIns="0" rtlCol="0" anchor="ctr"/>
-          <a:lstStyle/>
-          <a:p>
-            <a:pPr algn="ctr" indent="0" marL="0">
-              <a:buNone/>
-            </a:pPr>
-            <a:r>
-              <a:rPr lang="en-US" sz="1700" b="1" dirty="0">
-                <a:solidFill>
-                  <a:srgbClr val="1F2430"/>
-                </a:solidFill>
-                <a:latin typeface="Cambria" pitchFamily="34" charset="0"/>
-                <a:ea typeface="Cambria" pitchFamily="34" charset="-122"/>
-                <a:cs typeface="Cambria" pitchFamily="34" charset="-120"/>
-              </a:rPr>
-              <a:t>EXTRACT</a:t>
-            </a:r>
-            <a:endParaRPr lang="en-US" sz="1700" dirty="0"/>
-          </a:p>
-        </p:txBody>
-      </p:sp>
-      <p:sp>
-        <p:nvSpPr>
-          <p:cNvPr id="9" name="Text 6"/>
-          <p:cNvSpPr/>
-          <p:nvPr/>
-        </p:nvSpPr>
-        <p:spPr>
-          <a:xfrm>
-            <a:off x="868680" y="3794760"/>
-            <a:ext cx="2084832" cy="1005840"/>
-          </a:xfrm>
-          <a:prstGeom prst="rect">
-            <a:avLst/>
-          </a:prstGeom>
-          <a:noFill/>
-          <a:ln/>
-        </p:spPr>
-        <p:txBody>
-          <a:bodyPr wrap="square" lIns="0" tIns="0" rIns="0" bIns="0" rtlCol="0" anchor="ctr"/>
-          <a:lstStyle/>
-          <a:p>
-            <a:pPr algn="ctr" indent="0" marL="0">
-              <a:lnSpc>
-                <a:spcPct val="105000"/>
-              </a:lnSpc>
-              <a:buNone/>
-            </a:pPr>
-            <a:r>
-              <a:rPr lang="en-US" sz="1250" dirty="0">
-                <a:solidFill>
-                  <a:srgbClr val="44505F"/>
-                </a:solidFill>
-                <a:latin typeface="Calibri" pitchFamily="34" charset="0"/>
-                <a:ea typeface="Calibri" pitchFamily="34" charset="-122"/>
-                <a:cs typeface="Calibri" pitchFamily="34" charset="-120"/>
-              </a:rPr>
-              <a:t>Python jobs pull catalog, Spotify tracks &amp; YouTube videos. Retries + backoff, quota guard.</a:t>
-            </a:r>
-            <a:endParaRPr lang="en-US" sz="1250" dirty="0"/>
-          </a:p>
-        </p:txBody>
-      </p:sp>
-      <p:pic>
-        <p:nvPicPr>
-          <p:cNvPr id="10" name="Image 1" descr="preencoded.png">    </p:cNvPr>
-          <p:cNvPicPr>
-            <a:picLocks noChangeAspect="1"/>
-          </p:cNvPicPr>
-          <p:nvPr/>
-        </p:nvPicPr>
-        <p:blipFill>
-          <a:blip r:embed="rId2"/>
-          <a:stretch>
-            <a:fillRect/>
-          </a:stretch>
-        </p:blipFill>
-        <p:spPr>
-          <a:xfrm>
-            <a:off x="3172968" y="2606040"/>
-            <a:ext cx="310896" cy="310896"/>
-          </a:xfrm>
-          <a:prstGeom prst="rect">
-            <a:avLst/>
-          </a:prstGeom>
-        </p:spPr>
-      </p:pic>
-      <p:sp>
-        <p:nvSpPr>
-          <p:cNvPr id="11" name="Shape 7"/>
-          <p:cNvSpPr/>
-          <p:nvPr/>
-        </p:nvSpPr>
-        <p:spPr>
-          <a:xfrm>
-            <a:off x="3474720" y="1965960"/>
-            <a:ext cx="2542032" cy="2926080"/>
-          </a:xfrm>
-          <a:prstGeom prst="roundRect">
-            <a:avLst>
-              <a:gd name="adj" fmla="val 3597"/>
-            </a:avLst>
-          </a:prstGeom>
-          <a:solidFill>
-            <a:srgbClr val="F4F6F8"/>
-          </a:solidFill>
-          <a:ln/>
-          <a:effectLst>
-            <a:outerShdw sx="100000" sy="100000" kx="0" ky="0" algn="bl" rotWithShape="0" blurRad="101600" dist="38100" dir="5400000">
-              <a:srgbClr val="000000">
-                <a:alpha val="12000"/>
-              </a:srgbClr>
-            </a:outerShdw>
-          </a:effectLst>
-        </p:spPr>
-      </p:sp>
-      <p:sp>
-        <p:nvSpPr>
-          <p:cNvPr id="12" name="Shape 8"/>
-          <p:cNvSpPr/>
-          <p:nvPr/>
-        </p:nvSpPr>
-        <p:spPr>
-          <a:xfrm>
-            <a:off x="4288536" y="2286000"/>
-            <a:ext cx="914400" cy="914400"/>
-          </a:xfrm>
-          <a:prstGeom prst="ellipse">
-            <a:avLst/>
-          </a:prstGeom>
-          <a:solidFill>
-            <a:srgbClr val="1F2430"/>
-          </a:solidFill>
-          <a:ln/>
-          <a:effectLst>
-            <a:outerShdw sx="100000" sy="100000" kx="0" ky="0" algn="bl" rotWithShape="0" blurRad="101600" dist="38100" dir="5400000">
-              <a:srgbClr val="000000">
-                <a:alpha val="12000"/>
-              </a:srgbClr>
-            </a:outerShdw>
-          </a:effectLst>
-        </p:spPr>
-      </p:sp>
-      <p:pic>
-        <p:nvPicPr>
-          <p:cNvPr id="13" name="Image 2" descr="preencoded.png">    </p:cNvPr>
+          <p:cNvPr id="7" name="Image 0" descr="preencoded.png"/>
           <p:cNvPicPr>
             <a:picLocks noChangeAspect="1"/>
           </p:cNvPicPr>
@@ -4070,7 +3234,7 @@
         </p:blipFill>
         <p:spPr>
           <a:xfrm>
-            <a:off x="4526280" y="2523744"/>
+            <a:off x="1691640" y="2523744"/>
             <a:ext cx="438912" cy="438912"/>
           </a:xfrm>
           <a:prstGeom prst="rect">
@@ -4080,13 +3244,13 @@
       </p:pic>
       <p:sp>
         <p:nvSpPr>
-          <p:cNvPr id="14" name="Text 9"/>
-          <p:cNvSpPr/>
-          <p:nvPr/>
-        </p:nvSpPr>
-        <p:spPr>
-          <a:xfrm>
-            <a:off x="3474720" y="3337560"/>
+          <p:cNvPr id="8" name="Text 5"/>
+          <p:cNvSpPr/>
+          <p:nvPr/>
+        </p:nvSpPr>
+        <p:spPr>
+          <a:xfrm>
+            <a:off x="640080" y="3337560"/>
             <a:ext cx="2542032" cy="457200"/>
           </a:xfrm>
           <a:prstGeom prst="rect">
@@ -4099,7 +3263,7 @@
           <a:bodyPr wrap="square" lIns="0" tIns="0" rIns="0" bIns="0" rtlCol="0" anchor="ctr"/>
           <a:lstStyle/>
           <a:p>
-            <a:pPr algn="ctr" indent="0" marL="0">
+            <a:pPr marL="0" indent="0" algn="ctr">
               <a:buNone/>
             </a:pPr>
             <a:r>
@@ -4111,7 +3275,7 @@
                 <a:ea typeface="Cambria" pitchFamily="34" charset="-122"/>
                 <a:cs typeface="Cambria" pitchFamily="34" charset="-120"/>
               </a:rPr>
-              <a:t>LOAD → RAW</a:t>
+              <a:t>EXTRACT</a:t>
             </a:r>
             <a:endParaRPr lang="en-US" sz="1700" dirty="0"/>
           </a:p>
@@ -4119,13 +3283,13 @@
       </p:sp>
       <p:sp>
         <p:nvSpPr>
-          <p:cNvPr id="15" name="Text 10"/>
-          <p:cNvSpPr/>
-          <p:nvPr/>
-        </p:nvSpPr>
-        <p:spPr>
-          <a:xfrm>
-            <a:off x="3703320" y="3794760"/>
+          <p:cNvPr id="9" name="Text 6"/>
+          <p:cNvSpPr/>
+          <p:nvPr/>
+        </p:nvSpPr>
+        <p:spPr>
+          <a:xfrm>
+            <a:off x="868680" y="3794760"/>
             <a:ext cx="2084832" cy="1005840"/>
           </a:xfrm>
           <a:prstGeom prst="rect">
@@ -4138,7 +3302,7 @@
           <a:bodyPr wrap="square" lIns="0" tIns="0" rIns="0" bIns="0" rtlCol="0" anchor="ctr"/>
           <a:lstStyle/>
           <a:p>
-            <a:pPr algn="ctr" indent="0" marL="0">
+            <a:pPr marL="0" indent="0" algn="ctr">
               <a:lnSpc>
                 <a:spcPct val="105000"/>
               </a:lnSpc>
@@ -4153,7 +3317,7 @@
                 <a:ea typeface="Calibri" pitchFamily="34" charset="-122"/>
                 <a:cs typeface="Calibri" pitchFamily="34" charset="-120"/>
               </a:rPr>
-              <a:t>Immutable landing zone with ingest metadata + load-audit for lineage.</a:t>
+              <a:t>Python jobs pull catalog, ISRCs (Spotify → MusicBrainz fallback) &amp; YouTube videos. Retries, backoff, quota guard.</a:t>
             </a:r>
             <a:endParaRPr lang="en-US" sz="1250" dirty="0"/>
           </a:p>
@@ -4161,7 +3325,7 @@
       </p:sp>
       <p:pic>
         <p:nvPicPr>
-          <p:cNvPr id="16" name="Image 3" descr="preencoded.png">    </p:cNvPr>
+          <p:cNvPr id="10" name="Image 1" descr="preencoded.png"/>
           <p:cNvPicPr>
             <a:picLocks noChangeAspect="1"/>
           </p:cNvPicPr>
@@ -4175,7 +3339,7 @@
         </p:blipFill>
         <p:spPr>
           <a:xfrm>
-            <a:off x="6007608" y="2606040"/>
+            <a:off x="3172968" y="2606040"/>
             <a:ext cx="310896" cy="310896"/>
           </a:xfrm>
           <a:prstGeom prst="rect">
@@ -4185,13 +3349,13 @@
       </p:pic>
       <p:sp>
         <p:nvSpPr>
-          <p:cNvPr id="17" name="Shape 11"/>
-          <p:cNvSpPr/>
-          <p:nvPr/>
-        </p:nvSpPr>
-        <p:spPr>
-          <a:xfrm>
-            <a:off x="6309360" y="1965960"/>
+          <p:cNvPr id="11" name="Shape 7"/>
+          <p:cNvSpPr/>
+          <p:nvPr/>
+        </p:nvSpPr>
+        <p:spPr>
+          <a:xfrm>
+            <a:off x="3474720" y="1965960"/>
             <a:ext cx="2542032" cy="2926080"/>
           </a:xfrm>
           <a:prstGeom prst="roundRect">
@@ -4204,7 +3368,7 @@
           </a:solidFill>
           <a:ln/>
           <a:effectLst>
-            <a:outerShdw sx="100000" sy="100000" kx="0" ky="0" algn="bl" rotWithShape="0" blurRad="101600" dist="38100" dir="5400000">
+            <a:outerShdw blurRad="101600" dist="38100" dir="5400000" algn="bl" rotWithShape="0">
               <a:srgbClr val="000000">
                 <a:alpha val="12000"/>
               </a:srgbClr>
@@ -4214,24 +3378,24 @@
       </p:sp>
       <p:sp>
         <p:nvSpPr>
-          <p:cNvPr id="18" name="Shape 12"/>
-          <p:cNvSpPr/>
-          <p:nvPr/>
-        </p:nvSpPr>
-        <p:spPr>
-          <a:xfrm>
-            <a:off x="7123176" y="2286000"/>
+          <p:cNvPr id="12" name="Shape 8"/>
+          <p:cNvSpPr/>
+          <p:nvPr/>
+        </p:nvSpPr>
+        <p:spPr>
+          <a:xfrm>
+            <a:off x="4288536" y="2286000"/>
             <a:ext cx="914400" cy="914400"/>
           </a:xfrm>
           <a:prstGeom prst="ellipse">
             <a:avLst/>
           </a:prstGeom>
           <a:solidFill>
-            <a:srgbClr val="12B5A5"/>
+            <a:srgbClr val="1F2430"/>
           </a:solidFill>
           <a:ln/>
           <a:effectLst>
-            <a:outerShdw sx="100000" sy="100000" kx="0" ky="0" algn="bl" rotWithShape="0" blurRad="101600" dist="38100" dir="5400000">
+            <a:outerShdw blurRad="101600" dist="38100" dir="5400000" algn="bl" rotWithShape="0">
               <a:srgbClr val="000000">
                 <a:alpha val="12000"/>
               </a:srgbClr>
@@ -4241,7 +3405,7 @@
       </p:sp>
       <p:pic>
         <p:nvPicPr>
-          <p:cNvPr id="19" name="Image 4" descr="preencoded.png">    </p:cNvPr>
+          <p:cNvPr id="13" name="Image 2" descr="preencoded.png"/>
           <p:cNvPicPr>
             <a:picLocks noChangeAspect="1"/>
           </p:cNvPicPr>
@@ -4255,7 +3419,7 @@
         </p:blipFill>
         <p:spPr>
           <a:xfrm>
-            <a:off x="7360920" y="2523744"/>
+            <a:off x="4526280" y="2523744"/>
             <a:ext cx="438912" cy="438912"/>
           </a:xfrm>
           <a:prstGeom prst="rect">
@@ -4265,13 +3429,13 @@
       </p:pic>
       <p:sp>
         <p:nvSpPr>
-          <p:cNvPr id="20" name="Text 13"/>
-          <p:cNvSpPr/>
-          <p:nvPr/>
-        </p:nvSpPr>
-        <p:spPr>
-          <a:xfrm>
-            <a:off x="6309360" y="3337560"/>
+          <p:cNvPr id="14" name="Text 9"/>
+          <p:cNvSpPr/>
+          <p:nvPr/>
+        </p:nvSpPr>
+        <p:spPr>
+          <a:xfrm>
+            <a:off x="3474720" y="3337560"/>
             <a:ext cx="2542032" cy="457200"/>
           </a:xfrm>
           <a:prstGeom prst="rect">
@@ -4284,7 +3448,7 @@
           <a:bodyPr wrap="square" lIns="0" tIns="0" rIns="0" bIns="0" rtlCol="0" anchor="ctr"/>
           <a:lstStyle/>
           <a:p>
-            <a:pPr algn="ctr" indent="0" marL="0">
+            <a:pPr marL="0" indent="0" algn="ctr">
               <a:buNone/>
             </a:pPr>
             <a:r>
@@ -4296,7 +3460,7 @@
                 <a:ea typeface="Cambria" pitchFamily="34" charset="-122"/>
                 <a:cs typeface="Cambria" pitchFamily="34" charset="-120"/>
               </a:rPr>
-              <a:t>TRANSFORM (dbt)</a:t>
+              <a:t>LOAD → RAW</a:t>
             </a:r>
             <a:endParaRPr lang="en-US" sz="1700" dirty="0"/>
           </a:p>
@@ -4304,13 +3468,13 @@
       </p:sp>
       <p:sp>
         <p:nvSpPr>
-          <p:cNvPr id="21" name="Text 14"/>
-          <p:cNvSpPr/>
-          <p:nvPr/>
-        </p:nvSpPr>
-        <p:spPr>
-          <a:xfrm>
-            <a:off x="6537960" y="3794760"/>
+          <p:cNvPr id="15" name="Text 10"/>
+          <p:cNvSpPr/>
+          <p:nvPr/>
+        </p:nvSpPr>
+        <p:spPr>
+          <a:xfrm>
+            <a:off x="3703320" y="3794760"/>
             <a:ext cx="2084832" cy="1005840"/>
           </a:xfrm>
           <a:prstGeom prst="rect">
@@ -4323,7 +3487,7 @@
           <a:bodyPr wrap="square" lIns="0" tIns="0" rIns="0" bIns="0" rtlCol="0" anchor="ctr"/>
           <a:lstStyle/>
           <a:p>
-            <a:pPr algn="ctr" indent="0" marL="0">
+            <a:pPr marL="0" indent="0" algn="ctr">
               <a:lnSpc>
                 <a:spcPct val="105000"/>
               </a:lnSpc>
@@ -4338,7 +3502,7 @@
                 <a:ea typeface="Calibri" pitchFamily="34" charset="-122"/>
                 <a:cs typeface="Calibri" pitchFamily="34" charset="-120"/>
               </a:rPr>
-              <a:t>staging: clean, standardize, dedup, validate.  marts: dim + facts + answers.</a:t>
+              <a:t>Immutable landing zone with ingest metadata + load-audit for lineage.</a:t>
             </a:r>
             <a:endParaRPr lang="en-US" sz="1250" dirty="0"/>
           </a:p>
@@ -4346,7 +3510,87 @@
       </p:sp>
       <p:pic>
         <p:nvPicPr>
-          <p:cNvPr id="22" name="Image 5" descr="preencoded.png">    </p:cNvPr>
+          <p:cNvPr id="16" name="Image 3" descr="preencoded.png"/>
+          <p:cNvPicPr>
+            <a:picLocks noChangeAspect="1"/>
+          </p:cNvPicPr>
+          <p:nvPr/>
+        </p:nvPicPr>
+        <p:blipFill>
+          <a:blip r:embed="rId4"/>
+          <a:stretch>
+            <a:fillRect/>
+          </a:stretch>
+        </p:blipFill>
+        <p:spPr>
+          <a:xfrm>
+            <a:off x="6007608" y="2606040"/>
+            <a:ext cx="310896" cy="310896"/>
+          </a:xfrm>
+          <a:prstGeom prst="rect">
+            <a:avLst/>
+          </a:prstGeom>
+        </p:spPr>
+      </p:pic>
+      <p:sp>
+        <p:nvSpPr>
+          <p:cNvPr id="17" name="Shape 11"/>
+          <p:cNvSpPr/>
+          <p:nvPr/>
+        </p:nvSpPr>
+        <p:spPr>
+          <a:xfrm>
+            <a:off x="6309360" y="1965960"/>
+            <a:ext cx="2542032" cy="2926080"/>
+          </a:xfrm>
+          <a:prstGeom prst="roundRect">
+            <a:avLst>
+              <a:gd name="adj" fmla="val 3597"/>
+            </a:avLst>
+          </a:prstGeom>
+          <a:solidFill>
+            <a:srgbClr val="F4F6F8"/>
+          </a:solidFill>
+          <a:ln/>
+          <a:effectLst>
+            <a:outerShdw blurRad="101600" dist="38100" dir="5400000" algn="bl" rotWithShape="0">
+              <a:srgbClr val="000000">
+                <a:alpha val="12000"/>
+              </a:srgbClr>
+            </a:outerShdw>
+          </a:effectLst>
+        </p:spPr>
+      </p:sp>
+      <p:sp>
+        <p:nvSpPr>
+          <p:cNvPr id="18" name="Shape 12"/>
+          <p:cNvSpPr/>
+          <p:nvPr/>
+        </p:nvSpPr>
+        <p:spPr>
+          <a:xfrm>
+            <a:off x="7123176" y="2286000"/>
+            <a:ext cx="914400" cy="914400"/>
+          </a:xfrm>
+          <a:prstGeom prst="ellipse">
+            <a:avLst/>
+          </a:prstGeom>
+          <a:solidFill>
+            <a:srgbClr val="12B5A5"/>
+          </a:solidFill>
+          <a:ln/>
+          <a:effectLst>
+            <a:outerShdw blurRad="101600" dist="38100" dir="5400000" algn="bl" rotWithShape="0">
+              <a:srgbClr val="000000">
+                <a:alpha val="12000"/>
+              </a:srgbClr>
+            </a:outerShdw>
+          </a:effectLst>
+        </p:spPr>
+      </p:sp>
+      <p:pic>
+        <p:nvPicPr>
+          <p:cNvPr id="19" name="Image 4" descr="preencoded.png"/>
           <p:cNvPicPr>
             <a:picLocks noChangeAspect="1"/>
           </p:cNvPicPr>
@@ -4360,6 +3604,111 @@
         </p:blipFill>
         <p:spPr>
           <a:xfrm>
+            <a:off x="7360920" y="2523744"/>
+            <a:ext cx="438912" cy="438912"/>
+          </a:xfrm>
+          <a:prstGeom prst="rect">
+            <a:avLst/>
+          </a:prstGeom>
+        </p:spPr>
+      </p:pic>
+      <p:sp>
+        <p:nvSpPr>
+          <p:cNvPr id="20" name="Text 13"/>
+          <p:cNvSpPr/>
+          <p:nvPr/>
+        </p:nvSpPr>
+        <p:spPr>
+          <a:xfrm>
+            <a:off x="6309360" y="3337560"/>
+            <a:ext cx="2542032" cy="457200"/>
+          </a:xfrm>
+          <a:prstGeom prst="rect">
+            <a:avLst/>
+          </a:prstGeom>
+          <a:noFill/>
+          <a:ln/>
+        </p:spPr>
+        <p:txBody>
+          <a:bodyPr wrap="square" lIns="0" tIns="0" rIns="0" bIns="0" rtlCol="0" anchor="ctr"/>
+          <a:lstStyle/>
+          <a:p>
+            <a:pPr marL="0" indent="0" algn="ctr">
+              <a:buNone/>
+            </a:pPr>
+            <a:r>
+              <a:rPr lang="en-US" sz="1700" b="1" dirty="0">
+                <a:solidFill>
+                  <a:srgbClr val="1F2430"/>
+                </a:solidFill>
+                <a:latin typeface="Cambria" pitchFamily="34" charset="0"/>
+                <a:ea typeface="Cambria" pitchFamily="34" charset="-122"/>
+                <a:cs typeface="Cambria" pitchFamily="34" charset="-120"/>
+              </a:rPr>
+              <a:t>TRANSFORM (dbt)</a:t>
+            </a:r>
+            <a:endParaRPr lang="en-US" sz="1700" dirty="0"/>
+          </a:p>
+        </p:txBody>
+      </p:sp>
+      <p:sp>
+        <p:nvSpPr>
+          <p:cNvPr id="21" name="Text 14"/>
+          <p:cNvSpPr/>
+          <p:nvPr/>
+        </p:nvSpPr>
+        <p:spPr>
+          <a:xfrm>
+            <a:off x="6537960" y="3794760"/>
+            <a:ext cx="2084832" cy="1005840"/>
+          </a:xfrm>
+          <a:prstGeom prst="rect">
+            <a:avLst/>
+          </a:prstGeom>
+          <a:noFill/>
+          <a:ln/>
+        </p:spPr>
+        <p:txBody>
+          <a:bodyPr wrap="square" lIns="0" tIns="0" rIns="0" bIns="0" rtlCol="0" anchor="ctr"/>
+          <a:lstStyle/>
+          <a:p>
+            <a:pPr marL="0" indent="0" algn="ctr">
+              <a:lnSpc>
+                <a:spcPct val="105000"/>
+              </a:lnSpc>
+              <a:buNone/>
+            </a:pPr>
+            <a:r>
+              <a:rPr lang="en-US" sz="1250" dirty="0">
+                <a:solidFill>
+                  <a:srgbClr val="44505F"/>
+                </a:solidFill>
+                <a:latin typeface="Calibri" pitchFamily="34" charset="0"/>
+                <a:ea typeface="Calibri" pitchFamily="34" charset="-122"/>
+                <a:cs typeface="Calibri" pitchFamily="34" charset="-120"/>
+              </a:rPr>
+              <a:t>staging: clean, standardize, dedup, validate.  marts: dim + facts + answers.</a:t>
+            </a:r>
+            <a:endParaRPr lang="en-US" sz="1250" dirty="0"/>
+          </a:p>
+        </p:txBody>
+      </p:sp>
+      <p:pic>
+        <p:nvPicPr>
+          <p:cNvPr id="22" name="Image 5" descr="preencoded.png"/>
+          <p:cNvPicPr>
+            <a:picLocks noChangeAspect="1"/>
+          </p:cNvPicPr>
+          <p:nvPr/>
+        </p:nvPicPr>
+        <p:blipFill>
+          <a:blip r:embed="rId4"/>
+          <a:stretch>
+            <a:fillRect/>
+          </a:stretch>
+        </p:blipFill>
+        <p:spPr>
+          <a:xfrm>
             <a:off x="8842248" y="2606040"/>
             <a:ext cx="310896" cy="310896"/>
           </a:xfrm>
@@ -4389,7 +3738,7 @@
           </a:solidFill>
           <a:ln/>
           <a:effectLst>
-            <a:outerShdw sx="100000" sy="100000" kx="0" ky="0" algn="bl" rotWithShape="0" blurRad="101600" dist="38100" dir="5400000">
+            <a:outerShdw blurRad="101600" dist="38100" dir="5400000" algn="bl" rotWithShape="0">
               <a:srgbClr val="000000">
                 <a:alpha val="12000"/>
               </a:srgbClr>
@@ -4416,7 +3765,7 @@
           </a:solidFill>
           <a:ln/>
           <a:effectLst>
-            <a:outerShdw sx="100000" sy="100000" kx="0" ky="0" algn="bl" rotWithShape="0" blurRad="101600" dist="38100" dir="5400000">
+            <a:outerShdw blurRad="101600" dist="38100" dir="5400000" algn="bl" rotWithShape="0">
               <a:srgbClr val="000000">
                 <a:alpha val="12000"/>
               </a:srgbClr>
@@ -4426,7 +3775,7 @@
       </p:sp>
       <p:pic>
         <p:nvPicPr>
-          <p:cNvPr id="25" name="Image 6" descr="preencoded.png">    </p:cNvPr>
+          <p:cNvPr id="25" name="Image 6" descr="preencoded.png"/>
           <p:cNvPicPr>
             <a:picLocks noChangeAspect="1"/>
           </p:cNvPicPr>
@@ -4469,7 +3818,7 @@
           <a:bodyPr wrap="square" lIns="0" tIns="0" rIns="0" bIns="0" rtlCol="0" anchor="ctr"/>
           <a:lstStyle/>
           <a:p>
-            <a:pPr algn="ctr" indent="0" marL="0">
+            <a:pPr marL="0" indent="0" algn="ctr">
               <a:buNone/>
             </a:pPr>
             <a:r>
@@ -4508,7 +3857,7 @@
           <a:bodyPr wrap="square" lIns="0" tIns="0" rIns="0" bIns="0" rtlCol="0" anchor="ctr"/>
           <a:lstStyle/>
           <a:p>
-            <a:pPr algn="ctr" indent="0" marL="0">
+            <a:pPr marL="0" indent="0" algn="ctr">
               <a:lnSpc>
                 <a:spcPct val="105000"/>
               </a:lnSpc>
@@ -4550,7 +3899,7 @@
           </a:solidFill>
           <a:ln/>
           <a:effectLst>
-            <a:outerShdw sx="100000" sy="100000" kx="0" ky="0" algn="bl" rotWithShape="0" blurRad="101600" dist="38100" dir="5400000">
+            <a:outerShdw blurRad="101600" dist="38100" dir="5400000" algn="bl" rotWithShape="0">
               <a:srgbClr val="000000">
                 <a:alpha val="12000"/>
               </a:srgbClr>
@@ -4577,7 +3926,7 @@
           </a:solidFill>
           <a:ln/>
           <a:effectLst>
-            <a:outerShdw sx="100000" sy="100000" kx="0" ky="0" algn="bl" rotWithShape="0" blurRad="101600" dist="38100" dir="5400000">
+            <a:outerShdw blurRad="101600" dist="38100" dir="5400000" algn="bl" rotWithShape="0">
               <a:srgbClr val="000000">
                 <a:alpha val="12000"/>
               </a:srgbClr>
@@ -4587,7 +3936,7 @@
       </p:sp>
       <p:pic>
         <p:nvPicPr>
-          <p:cNvPr id="30" name="Image 7" descr="preencoded.png">    </p:cNvPr>
+          <p:cNvPr id="30" name="Image 7" descr="preencoded.png"/>
           <p:cNvPicPr>
             <a:picLocks noChangeAspect="1"/>
           </p:cNvPicPr>
@@ -4630,7 +3979,7 @@
           <a:bodyPr wrap="square" lIns="0" tIns="0" rIns="0" bIns="0" rtlCol="0" anchor="ctr"/>
           <a:lstStyle/>
           <a:p>
-            <a:pPr indent="0" marL="0">
+            <a:pPr marL="0" indent="0">
               <a:buNone/>
             </a:pPr>
             <a:r>
@@ -4644,9 +3993,6 @@
               </a:rPr>
               <a:t>Orchestration — Apache Airflow:  </a:t>
             </a:r>
-            <a:pPr indent="0" marL="0">
-              <a:buNone/>
-            </a:pPr>
             <a:r>
               <a:rPr lang="en-US" sz="1350" dirty="0">
                 <a:solidFill>
@@ -4678,6 +4024,7 @@
         <a:solidFill>
           <a:srgbClr val="FFFFFF"/>
         </a:solidFill>
+        <a:effectLst/>
       </p:bgPr>
     </p:bg>
     <p:spTree>
@@ -4715,7 +4062,7 @@
           <a:bodyPr wrap="square" rtlCol="0" anchor="ctr"/>
           <a:lstStyle/>
           <a:p>
-            <a:pPr algn="l" indent="0" marL="0">
+            <a:pPr marL="0" indent="0" algn="l">
               <a:buNone/>
             </a:pPr>
             <a:r>
@@ -4754,7 +4101,7 @@
           <a:bodyPr wrap="square" lIns="0" tIns="0" rIns="0" bIns="0" rtlCol="0" anchor="ctr"/>
           <a:lstStyle/>
           <a:p>
-            <a:pPr indent="0" marL="0">
+            <a:pPr marL="0" indent="0">
               <a:buNone/>
             </a:pPr>
             <a:r>
@@ -4793,7 +4140,7 @@
           <a:bodyPr wrap="square" lIns="0" tIns="0" rIns="0" bIns="0" rtlCol="0" anchor="ctr"/>
           <a:lstStyle/>
           <a:p>
-            <a:pPr indent="0" marL="0">
+            <a:pPr marL="0" indent="0">
               <a:buNone/>
             </a:pPr>
             <a:r>
@@ -4832,7 +4179,7 @@
           </a:solidFill>
           <a:ln/>
           <a:effectLst>
-            <a:outerShdw sx="100000" sy="100000" kx="0" ky="0" algn="bl" rotWithShape="0" blurRad="101600" dist="38100" dir="5400000">
+            <a:outerShdw blurRad="101600" dist="38100" dir="5400000" algn="bl" rotWithShape="0">
               <a:srgbClr val="000000">
                 <a:alpha val="12000"/>
               </a:srgbClr>
@@ -4859,7 +4206,7 @@
           </a:solidFill>
           <a:ln/>
           <a:effectLst>
-            <a:outerShdw sx="100000" sy="100000" kx="0" ky="0" algn="bl" rotWithShape="0" blurRad="101600" dist="38100" dir="5400000">
+            <a:outerShdw blurRad="101600" dist="38100" dir="5400000" algn="bl" rotWithShape="0">
               <a:srgbClr val="000000">
                 <a:alpha val="12000"/>
               </a:srgbClr>
@@ -4869,329 +4216,7 @@
       </p:sp>
       <p:pic>
         <p:nvPicPr>
-          <p:cNvPr id="7" name="Image 0" descr="preencoded.png">    </p:cNvPr>
-          <p:cNvPicPr>
-            <a:picLocks noChangeAspect="1"/>
-          </p:cNvPicPr>
-          <p:nvPr/>
-        </p:nvPicPr>
-        <p:blipFill>
-          <a:blip r:embed="rId1"/>
-          <a:stretch>
-            <a:fillRect/>
-          </a:stretch>
-        </p:blipFill>
-        <p:spPr>
-          <a:xfrm>
-            <a:off x="1162202" y="2277770"/>
-            <a:ext cx="373075" cy="373075"/>
-          </a:xfrm>
-          <a:prstGeom prst="rect">
-            <a:avLst/>
-          </a:prstGeom>
-        </p:spPr>
-      </p:pic>
-      <p:sp>
-        <p:nvSpPr>
-          <p:cNvPr id="8" name="Text 5"/>
-          <p:cNvSpPr/>
-          <p:nvPr/>
-        </p:nvSpPr>
-        <p:spPr>
-          <a:xfrm>
-            <a:off x="1874520" y="2075688"/>
-            <a:ext cx="2148840" cy="777240"/>
-          </a:xfrm>
-          <a:prstGeom prst="rect">
-            <a:avLst/>
-          </a:prstGeom>
-          <a:noFill/>
-          <a:ln/>
-        </p:spPr>
-        <p:txBody>
-          <a:bodyPr wrap="square" lIns="0" tIns="0" rIns="0" bIns="0" rtlCol="0" anchor="ctr"/>
-          <a:lstStyle/>
-          <a:p>
-            <a:pPr indent="0" marL="0">
-              <a:buNone/>
-            </a:pPr>
-            <a:r>
-              <a:rPr lang="en-US" sz="1550" b="1" dirty="0">
-                <a:solidFill>
-                  <a:srgbClr val="1F2430"/>
-                </a:solidFill>
-                <a:latin typeface="Cambria" pitchFamily="34" charset="0"/>
-                <a:ea typeface="Cambria" pitchFamily="34" charset="-122"/>
-                <a:cs typeface="Cambria" pitchFamily="34" charset="-120"/>
-              </a:rPr>
-              <a:t>Python + spotipy / google-api</a:t>
-            </a:r>
-            <a:endParaRPr lang="en-US" sz="1550" dirty="0"/>
-          </a:p>
-        </p:txBody>
-      </p:sp>
-      <p:sp>
-        <p:nvSpPr>
-          <p:cNvPr id="9" name="Text 6"/>
-          <p:cNvSpPr/>
-          <p:nvPr/>
-        </p:nvSpPr>
-        <p:spPr>
-          <a:xfrm>
-            <a:off x="960120" y="2926080"/>
-            <a:ext cx="2926080" cy="640080"/>
-          </a:xfrm>
-          <a:prstGeom prst="rect">
-            <a:avLst/>
-          </a:prstGeom>
-          <a:noFill/>
-          <a:ln/>
-        </p:spPr>
-        <p:txBody>
-          <a:bodyPr wrap="square" lIns="0" tIns="0" rIns="0" bIns="0" rtlCol="0" anchor="ctr"/>
-          <a:lstStyle/>
-          <a:p>
-            <a:pPr indent="0" marL="0">
-              <a:lnSpc>
-                <a:spcPct val="105000"/>
-              </a:lnSpc>
-              <a:buNone/>
-            </a:pPr>
-            <a:r>
-              <a:rPr lang="en-US" sz="1250" dirty="0">
-                <a:solidFill>
-                  <a:srgbClr val="44505F"/>
-                </a:solidFill>
-                <a:latin typeface="Calibri" pitchFamily="34" charset="0"/>
-                <a:ea typeface="Calibri" pitchFamily="34" charset="-122"/>
-                <a:cs typeface="Calibri" pitchFamily="34" charset="-120"/>
-              </a:rPr>
-              <a:t>Ingestion with official SDKs; tenacity for retries &amp; backoff.</a:t>
-            </a:r>
-            <a:endParaRPr lang="en-US" sz="1250" dirty="0"/>
-          </a:p>
-        </p:txBody>
-      </p:sp>
-      <p:sp>
-        <p:nvSpPr>
-          <p:cNvPr id="10" name="Shape 7"/>
-          <p:cNvSpPr/>
-          <p:nvPr/>
-        </p:nvSpPr>
-        <p:spPr>
-          <a:xfrm>
-            <a:off x="4343400" y="1783080"/>
-            <a:ext cx="3474720" cy="1828800"/>
-          </a:xfrm>
-          <a:prstGeom prst="roundRect">
-            <a:avLst>
-              <a:gd name="adj" fmla="val 5000"/>
-            </a:avLst>
-          </a:prstGeom>
-          <a:solidFill>
-            <a:srgbClr val="F4F6F8"/>
-          </a:solidFill>
-          <a:ln/>
-          <a:effectLst>
-            <a:outerShdw sx="100000" sy="100000" kx="0" ky="0" algn="bl" rotWithShape="0" blurRad="101600" dist="38100" dir="5400000">
-              <a:srgbClr val="000000">
-                <a:alpha val="12000"/>
-              </a:srgbClr>
-            </a:outerShdw>
-          </a:effectLst>
-        </p:spPr>
-      </p:sp>
-      <p:sp>
-        <p:nvSpPr>
-          <p:cNvPr id="11" name="Shape 8"/>
-          <p:cNvSpPr/>
-          <p:nvPr/>
-        </p:nvSpPr>
-        <p:spPr>
-          <a:xfrm>
-            <a:off x="4663440" y="2075688"/>
-            <a:ext cx="777240" cy="777240"/>
-          </a:xfrm>
-          <a:prstGeom prst="ellipse">
-            <a:avLst/>
-          </a:prstGeom>
-          <a:solidFill>
-            <a:srgbClr val="12B5A5"/>
-          </a:solidFill>
-          <a:ln/>
-          <a:effectLst>
-            <a:outerShdw sx="100000" sy="100000" kx="0" ky="0" algn="bl" rotWithShape="0" blurRad="101600" dist="38100" dir="5400000">
-              <a:srgbClr val="000000">
-                <a:alpha val="12000"/>
-              </a:srgbClr>
-            </a:outerShdw>
-          </a:effectLst>
-        </p:spPr>
-      </p:sp>
-      <p:pic>
-        <p:nvPicPr>
-          <p:cNvPr id="12" name="Image 1" descr="preencoded.png">    </p:cNvPr>
-          <p:cNvPicPr>
-            <a:picLocks noChangeAspect="1"/>
-          </p:cNvPicPr>
-          <p:nvPr/>
-        </p:nvPicPr>
-        <p:blipFill>
-          <a:blip r:embed="rId2"/>
-          <a:stretch>
-            <a:fillRect/>
-          </a:stretch>
-        </p:blipFill>
-        <p:spPr>
-          <a:xfrm>
-            <a:off x="4865522" y="2277770"/>
-            <a:ext cx="373075" cy="373075"/>
-          </a:xfrm>
-          <a:prstGeom prst="rect">
-            <a:avLst/>
-          </a:prstGeom>
-        </p:spPr>
-      </p:pic>
-      <p:sp>
-        <p:nvSpPr>
-          <p:cNvPr id="13" name="Text 9"/>
-          <p:cNvSpPr/>
-          <p:nvPr/>
-        </p:nvSpPr>
-        <p:spPr>
-          <a:xfrm>
-            <a:off x="5577840" y="2075688"/>
-            <a:ext cx="2148840" cy="777240"/>
-          </a:xfrm>
-          <a:prstGeom prst="rect">
-            <a:avLst/>
-          </a:prstGeom>
-          <a:noFill/>
-          <a:ln/>
-        </p:spPr>
-        <p:txBody>
-          <a:bodyPr wrap="square" lIns="0" tIns="0" rIns="0" bIns="0" rtlCol="0" anchor="ctr"/>
-          <a:lstStyle/>
-          <a:p>
-            <a:pPr indent="0" marL="0">
-              <a:buNone/>
-            </a:pPr>
-            <a:r>
-              <a:rPr lang="en-US" sz="1550" b="1" dirty="0">
-                <a:solidFill>
-                  <a:srgbClr val="1F2430"/>
-                </a:solidFill>
-                <a:latin typeface="Cambria" pitchFamily="34" charset="0"/>
-                <a:ea typeface="Cambria" pitchFamily="34" charset="-122"/>
-                <a:cs typeface="Cambria" pitchFamily="34" charset="-120"/>
-              </a:rPr>
-              <a:t>dbt</a:t>
-            </a:r>
-            <a:endParaRPr lang="en-US" sz="1550" dirty="0"/>
-          </a:p>
-        </p:txBody>
-      </p:sp>
-      <p:sp>
-        <p:nvSpPr>
-          <p:cNvPr id="14" name="Text 10"/>
-          <p:cNvSpPr/>
-          <p:nvPr/>
-        </p:nvSpPr>
-        <p:spPr>
-          <a:xfrm>
-            <a:off x="4663440" y="2926080"/>
-            <a:ext cx="2926080" cy="640080"/>
-          </a:xfrm>
-          <a:prstGeom prst="rect">
-            <a:avLst/>
-          </a:prstGeom>
-          <a:noFill/>
-          <a:ln/>
-        </p:spPr>
-        <p:txBody>
-          <a:bodyPr wrap="square" lIns="0" tIns="0" rIns="0" bIns="0" rtlCol="0" anchor="ctr"/>
-          <a:lstStyle/>
-          <a:p>
-            <a:pPr indent="0" marL="0">
-              <a:lnSpc>
-                <a:spcPct val="105000"/>
-              </a:lnSpc>
-              <a:buNone/>
-            </a:pPr>
-            <a:r>
-              <a:rPr lang="en-US" sz="1250" dirty="0">
-                <a:solidFill>
-                  <a:srgbClr val="44505F"/>
-                </a:solidFill>
-                <a:latin typeface="Calibri" pitchFamily="34" charset="0"/>
-                <a:ea typeface="Calibri" pitchFamily="34" charset="-122"/>
-                <a:cs typeface="Calibri" pitchFamily="34" charset="-120"/>
-              </a:rPr>
-              <a:t>SQL-first, versioned, tested transforms. Lineage + docs for free.</a:t>
-            </a:r>
-            <a:endParaRPr lang="en-US" sz="1250" dirty="0"/>
-          </a:p>
-        </p:txBody>
-      </p:sp>
-      <p:sp>
-        <p:nvSpPr>
-          <p:cNvPr id="15" name="Shape 11"/>
-          <p:cNvSpPr/>
-          <p:nvPr/>
-        </p:nvSpPr>
-        <p:spPr>
-          <a:xfrm>
-            <a:off x="8046720" y="1783080"/>
-            <a:ext cx="3474720" cy="1828800"/>
-          </a:xfrm>
-          <a:prstGeom prst="roundRect">
-            <a:avLst>
-              <a:gd name="adj" fmla="val 5000"/>
-            </a:avLst>
-          </a:prstGeom>
-          <a:solidFill>
-            <a:srgbClr val="F4F6F8"/>
-          </a:solidFill>
-          <a:ln/>
-          <a:effectLst>
-            <a:outerShdw sx="100000" sy="100000" kx="0" ky="0" algn="bl" rotWithShape="0" blurRad="101600" dist="38100" dir="5400000">
-              <a:srgbClr val="000000">
-                <a:alpha val="12000"/>
-              </a:srgbClr>
-            </a:outerShdw>
-          </a:effectLst>
-        </p:spPr>
-      </p:sp>
-      <p:sp>
-        <p:nvSpPr>
-          <p:cNvPr id="16" name="Shape 12"/>
-          <p:cNvSpPr/>
-          <p:nvPr/>
-        </p:nvSpPr>
-        <p:spPr>
-          <a:xfrm>
-            <a:off x="8366760" y="2075688"/>
-            <a:ext cx="777240" cy="777240"/>
-          </a:xfrm>
-          <a:prstGeom prst="ellipse">
-            <a:avLst/>
-          </a:prstGeom>
-          <a:solidFill>
-            <a:srgbClr val="3B82F6"/>
-          </a:solidFill>
-          <a:ln/>
-          <a:effectLst>
-            <a:outerShdw sx="100000" sy="100000" kx="0" ky="0" algn="bl" rotWithShape="0" blurRad="101600" dist="38100" dir="5400000">
-              <a:srgbClr val="000000">
-                <a:alpha val="12000"/>
-              </a:srgbClr>
-            </a:outerShdw>
-          </a:effectLst>
-        </p:spPr>
-      </p:sp>
-      <p:pic>
-        <p:nvPicPr>
-          <p:cNvPr id="17" name="Image 2" descr="preencoded.png">    </p:cNvPr>
+          <p:cNvPr id="7" name="Image 0" descr="preencoded.png"/>
           <p:cNvPicPr>
             <a:picLocks noChangeAspect="1"/>
           </p:cNvPicPr>
@@ -5205,7 +4230,7 @@
         </p:blipFill>
         <p:spPr>
           <a:xfrm>
-            <a:off x="8568842" y="2277770"/>
+            <a:off x="1162202" y="2277770"/>
             <a:ext cx="373075" cy="373075"/>
           </a:xfrm>
           <a:prstGeom prst="rect">
@@ -5215,13 +4240,13 @@
       </p:pic>
       <p:sp>
         <p:nvSpPr>
-          <p:cNvPr id="18" name="Text 13"/>
-          <p:cNvSpPr/>
-          <p:nvPr/>
-        </p:nvSpPr>
-        <p:spPr>
-          <a:xfrm>
-            <a:off x="9281160" y="2075688"/>
+          <p:cNvPr id="8" name="Text 5"/>
+          <p:cNvSpPr/>
+          <p:nvPr/>
+        </p:nvSpPr>
+        <p:spPr>
+          <a:xfrm>
+            <a:off x="1874520" y="2075688"/>
             <a:ext cx="2148840" cy="777240"/>
           </a:xfrm>
           <a:prstGeom prst="rect">
@@ -5234,7 +4259,7 @@
           <a:bodyPr wrap="square" lIns="0" tIns="0" rIns="0" bIns="0" rtlCol="0" anchor="ctr"/>
           <a:lstStyle/>
           <a:p>
-            <a:pPr indent="0" marL="0">
+            <a:pPr marL="0" indent="0">
               <a:buNone/>
             </a:pPr>
             <a:r>
@@ -5246,7 +4271,7 @@
                 <a:ea typeface="Cambria" pitchFamily="34" charset="-122"/>
                 <a:cs typeface="Cambria" pitchFamily="34" charset="-120"/>
               </a:rPr>
-              <a:t>PostgreSQL (medallion)</a:t>
+              <a:t>Python: spotipy · MusicBrainz · YouTube</a:t>
             </a:r>
             <a:endParaRPr lang="en-US" sz="1550" dirty="0"/>
           </a:p>
@@ -5254,13 +4279,13 @@
       </p:sp>
       <p:sp>
         <p:nvSpPr>
-          <p:cNvPr id="19" name="Text 14"/>
-          <p:cNvSpPr/>
-          <p:nvPr/>
-        </p:nvSpPr>
-        <p:spPr>
-          <a:xfrm>
-            <a:off x="8366760" y="2926080"/>
+          <p:cNvPr id="9" name="Text 6"/>
+          <p:cNvSpPr/>
+          <p:nvPr/>
+        </p:nvSpPr>
+        <p:spPr>
+          <a:xfrm>
+            <a:off x="960120" y="2926080"/>
             <a:ext cx="2926080" cy="640080"/>
           </a:xfrm>
           <a:prstGeom prst="rect">
@@ -5273,7 +4298,7 @@
           <a:bodyPr wrap="square" lIns="0" tIns="0" rIns="0" bIns="0" rtlCol="0" anchor="ctr"/>
           <a:lstStyle/>
           <a:p>
-            <a:pPr indent="0" marL="0">
+            <a:pPr marL="0" indent="0">
               <a:lnSpc>
                 <a:spcPct val="105000"/>
               </a:lnSpc>
@@ -5288,7 +4313,7 @@
                 <a:ea typeface="Calibri" pitchFamily="34" charset="-122"/>
                 <a:cs typeface="Calibri" pitchFamily="34" charset="-120"/>
               </a:rPr>
-              <a:t>raw / staging / marts schemas. ANSI-SQL = lift-and-shift to cloud.</a:t>
+              <a:t>Pluggable ISRC source (Spotify or free MusicBrainz); tenacity retries.</a:t>
             </a:r>
             <a:endParaRPr lang="en-US" sz="1250" dirty="0"/>
           </a:p>
@@ -5296,13 +4321,13 @@
       </p:sp>
       <p:sp>
         <p:nvSpPr>
-          <p:cNvPr id="20" name="Shape 15"/>
-          <p:cNvSpPr/>
-          <p:nvPr/>
-        </p:nvSpPr>
-        <p:spPr>
-          <a:xfrm>
-            <a:off x="640080" y="3840480"/>
+          <p:cNvPr id="10" name="Shape 7"/>
+          <p:cNvSpPr/>
+          <p:nvPr/>
+        </p:nvSpPr>
+        <p:spPr>
+          <a:xfrm>
+            <a:off x="4343400" y="1783080"/>
             <a:ext cx="3474720" cy="1828800"/>
           </a:xfrm>
           <a:prstGeom prst="roundRect">
@@ -5315,7 +4340,7 @@
           </a:solidFill>
           <a:ln/>
           <a:effectLst>
-            <a:outerShdw sx="100000" sy="100000" kx="0" ky="0" algn="bl" rotWithShape="0" blurRad="101600" dist="38100" dir="5400000">
+            <a:outerShdw blurRad="101600" dist="38100" dir="5400000" algn="bl" rotWithShape="0">
               <a:srgbClr val="000000">
                 <a:alpha val="12000"/>
               </a:srgbClr>
@@ -5325,24 +4350,24 @@
       </p:sp>
       <p:sp>
         <p:nvSpPr>
-          <p:cNvPr id="21" name="Shape 16"/>
-          <p:cNvSpPr/>
-          <p:nvPr/>
-        </p:nvSpPr>
-        <p:spPr>
-          <a:xfrm>
-            <a:off x="960120" y="4133088"/>
+          <p:cNvPr id="11" name="Shape 8"/>
+          <p:cNvSpPr/>
+          <p:nvPr/>
+        </p:nvSpPr>
+        <p:spPr>
+          <a:xfrm>
+            <a:off x="4663440" y="2075688"/>
             <a:ext cx="777240" cy="777240"/>
           </a:xfrm>
           <a:prstGeom prst="ellipse">
             <a:avLst/>
           </a:prstGeom>
           <a:solidFill>
-            <a:srgbClr val="8B5CF6"/>
+            <a:srgbClr val="12B5A5"/>
           </a:solidFill>
           <a:ln/>
           <a:effectLst>
-            <a:outerShdw sx="100000" sy="100000" kx="0" ky="0" algn="bl" rotWithShape="0" blurRad="101600" dist="38100" dir="5400000">
+            <a:outerShdw blurRad="101600" dist="38100" dir="5400000" algn="bl" rotWithShape="0">
               <a:srgbClr val="000000">
                 <a:alpha val="12000"/>
               </a:srgbClr>
@@ -5352,7 +4377,7 @@
       </p:sp>
       <p:pic>
         <p:nvPicPr>
-          <p:cNvPr id="22" name="Image 3" descr="preencoded.png">    </p:cNvPr>
+          <p:cNvPr id="12" name="Image 1" descr="preencoded.png"/>
           <p:cNvPicPr>
             <a:picLocks noChangeAspect="1"/>
           </p:cNvPicPr>
@@ -5366,7 +4391,7 @@
         </p:blipFill>
         <p:spPr>
           <a:xfrm>
-            <a:off x="1162202" y="4335170"/>
+            <a:off x="4865522" y="2277770"/>
             <a:ext cx="373075" cy="373075"/>
           </a:xfrm>
           <a:prstGeom prst="rect">
@@ -5376,13 +4401,13 @@
       </p:pic>
       <p:sp>
         <p:nvSpPr>
-          <p:cNvPr id="23" name="Text 17"/>
-          <p:cNvSpPr/>
-          <p:nvPr/>
-        </p:nvSpPr>
-        <p:spPr>
-          <a:xfrm>
-            <a:off x="1874520" y="4133088"/>
+          <p:cNvPr id="13" name="Text 9"/>
+          <p:cNvSpPr/>
+          <p:nvPr/>
+        </p:nvSpPr>
+        <p:spPr>
+          <a:xfrm>
+            <a:off x="5577840" y="2075688"/>
             <a:ext cx="2148840" cy="777240"/>
           </a:xfrm>
           <a:prstGeom prst="rect">
@@ -5395,7 +4420,7 @@
           <a:bodyPr wrap="square" lIns="0" tIns="0" rIns="0" bIns="0" rtlCol="0" anchor="ctr"/>
           <a:lstStyle/>
           <a:p>
-            <a:pPr indent="0" marL="0">
+            <a:pPr marL="0" indent="0">
               <a:buNone/>
             </a:pPr>
             <a:r>
@@ -5407,7 +4432,7 @@
                 <a:ea typeface="Cambria" pitchFamily="34" charset="-122"/>
                 <a:cs typeface="Cambria" pitchFamily="34" charset="-120"/>
               </a:rPr>
-              <a:t>Apache Airflow</a:t>
+              <a:t>dbt</a:t>
             </a:r>
             <a:endParaRPr lang="en-US" sz="1550" dirty="0"/>
           </a:p>
@@ -5415,13 +4440,13 @@
       </p:sp>
       <p:sp>
         <p:nvSpPr>
-          <p:cNvPr id="24" name="Text 18"/>
-          <p:cNvSpPr/>
-          <p:nvPr/>
-        </p:nvSpPr>
-        <p:spPr>
-          <a:xfrm>
-            <a:off x="960120" y="4983480"/>
+          <p:cNvPr id="14" name="Text 10"/>
+          <p:cNvSpPr/>
+          <p:nvPr/>
+        </p:nvSpPr>
+        <p:spPr>
+          <a:xfrm>
+            <a:off x="4663440" y="2926080"/>
             <a:ext cx="2926080" cy="640080"/>
           </a:xfrm>
           <a:prstGeom prst="rect">
@@ -5434,7 +4459,7 @@
           <a:bodyPr wrap="square" lIns="0" tIns="0" rIns="0" bIns="0" rtlCol="0" anchor="ctr"/>
           <a:lstStyle/>
           <a:p>
-            <a:pPr indent="0" marL="0">
+            <a:pPr marL="0" indent="0">
               <a:lnSpc>
                 <a:spcPct val="105000"/>
               </a:lnSpc>
@@ -5449,7 +4474,7 @@
                 <a:ea typeface="Calibri" pitchFamily="34" charset="-122"/>
                 <a:cs typeface="Calibri" pitchFamily="34" charset="-120"/>
               </a:rPr>
-              <a:t>Scheduling, retries, observability; orchestration ≠ execution.</a:t>
+              <a:t>SQL-first, versioned, tested transforms. Lineage + docs for free.</a:t>
             </a:r>
             <a:endParaRPr lang="en-US" sz="1250" dirty="0"/>
           </a:p>
@@ -5457,13 +4482,13 @@
       </p:sp>
       <p:sp>
         <p:nvSpPr>
-          <p:cNvPr id="25" name="Shape 19"/>
-          <p:cNvSpPr/>
-          <p:nvPr/>
-        </p:nvSpPr>
-        <p:spPr>
-          <a:xfrm>
-            <a:off x="4343400" y="3840480"/>
+          <p:cNvPr id="15" name="Shape 11"/>
+          <p:cNvSpPr/>
+          <p:nvPr/>
+        </p:nvSpPr>
+        <p:spPr>
+          <a:xfrm>
+            <a:off x="8046720" y="1783080"/>
             <a:ext cx="3474720" cy="1828800"/>
           </a:xfrm>
           <a:prstGeom prst="roundRect">
@@ -5476,7 +4501,7 @@
           </a:solidFill>
           <a:ln/>
           <a:effectLst>
-            <a:outerShdw sx="100000" sy="100000" kx="0" ky="0" algn="bl" rotWithShape="0" blurRad="101600" dist="38100" dir="5400000">
+            <a:outerShdw blurRad="101600" dist="38100" dir="5400000" algn="bl" rotWithShape="0">
               <a:srgbClr val="000000">
                 <a:alpha val="12000"/>
               </a:srgbClr>
@@ -5486,24 +4511,24 @@
       </p:sp>
       <p:sp>
         <p:nvSpPr>
-          <p:cNvPr id="26" name="Shape 20"/>
-          <p:cNvSpPr/>
-          <p:nvPr/>
-        </p:nvSpPr>
-        <p:spPr>
-          <a:xfrm>
-            <a:off x="4663440" y="4133088"/>
+          <p:cNvPr id="16" name="Shape 12"/>
+          <p:cNvSpPr/>
+          <p:nvPr/>
+        </p:nvSpPr>
+        <p:spPr>
+          <a:xfrm>
+            <a:off x="8366760" y="2075688"/>
             <a:ext cx="777240" cy="777240"/>
           </a:xfrm>
           <a:prstGeom prst="ellipse">
             <a:avLst/>
           </a:prstGeom>
           <a:solidFill>
-            <a:srgbClr val="F59E0B"/>
+            <a:srgbClr val="3B82F6"/>
           </a:solidFill>
           <a:ln/>
           <a:effectLst>
-            <a:outerShdw sx="100000" sy="100000" kx="0" ky="0" algn="bl" rotWithShape="0" blurRad="101600" dist="38100" dir="5400000">
+            <a:outerShdw blurRad="101600" dist="38100" dir="5400000" algn="bl" rotWithShape="0">
               <a:srgbClr val="000000">
                 <a:alpha val="12000"/>
               </a:srgbClr>
@@ -5513,7 +4538,7 @@
       </p:sp>
       <p:pic>
         <p:nvPicPr>
-          <p:cNvPr id="27" name="Image 4" descr="preencoded.png">    </p:cNvPr>
+          <p:cNvPr id="17" name="Image 2" descr="preencoded.png"/>
           <p:cNvPicPr>
             <a:picLocks noChangeAspect="1"/>
           </p:cNvPicPr>
@@ -5527,7 +4552,7 @@
         </p:blipFill>
         <p:spPr>
           <a:xfrm>
-            <a:off x="4865522" y="4335170"/>
+            <a:off x="8568842" y="2277770"/>
             <a:ext cx="373075" cy="373075"/>
           </a:xfrm>
           <a:prstGeom prst="rect">
@@ -5537,13 +4562,13 @@
       </p:pic>
       <p:sp>
         <p:nvSpPr>
-          <p:cNvPr id="28" name="Text 21"/>
-          <p:cNvSpPr/>
-          <p:nvPr/>
-        </p:nvSpPr>
-        <p:spPr>
-          <a:xfrm>
-            <a:off x="5577840" y="4133088"/>
+          <p:cNvPr id="18" name="Text 13"/>
+          <p:cNvSpPr/>
+          <p:nvPr/>
+        </p:nvSpPr>
+        <p:spPr>
+          <a:xfrm>
+            <a:off x="9281160" y="2075688"/>
             <a:ext cx="2148840" cy="777240"/>
           </a:xfrm>
           <a:prstGeom prst="rect">
@@ -5556,7 +4581,7 @@
           <a:bodyPr wrap="square" lIns="0" tIns="0" rIns="0" bIns="0" rtlCol="0" anchor="ctr"/>
           <a:lstStyle/>
           <a:p>
-            <a:pPr indent="0" marL="0">
+            <a:pPr marL="0" indent="0">
               <a:buNone/>
             </a:pPr>
             <a:r>
@@ -5568,7 +4593,7 @@
                 <a:ea typeface="Cambria" pitchFamily="34" charset="-122"/>
                 <a:cs typeface="Cambria" pitchFamily="34" charset="-120"/>
               </a:rPr>
-              <a:t>dbt tests</a:t>
+              <a:t>PostgreSQL (medallion)</a:t>
             </a:r>
             <a:endParaRPr lang="en-US" sz="1550" dirty="0"/>
           </a:p>
@@ -5576,13 +4601,13 @@
       </p:sp>
       <p:sp>
         <p:nvSpPr>
-          <p:cNvPr id="29" name="Text 22"/>
-          <p:cNvSpPr/>
-          <p:nvPr/>
-        </p:nvSpPr>
-        <p:spPr>
-          <a:xfrm>
-            <a:off x="4663440" y="4983480"/>
+          <p:cNvPr id="19" name="Text 14"/>
+          <p:cNvSpPr/>
+          <p:nvPr/>
+        </p:nvSpPr>
+        <p:spPr>
+          <a:xfrm>
+            <a:off x="8366760" y="2926080"/>
             <a:ext cx="2926080" cy="640080"/>
           </a:xfrm>
           <a:prstGeom prst="rect">
@@ -5595,7 +4620,7 @@
           <a:bodyPr wrap="square" lIns="0" tIns="0" rIns="0" bIns="0" rtlCol="0" anchor="ctr"/>
           <a:lstStyle/>
           <a:p>
-            <a:pPr indent="0" marL="0">
+            <a:pPr marL="0" indent="0">
               <a:lnSpc>
                 <a:spcPct val="105000"/>
               </a:lnSpc>
@@ -5610,7 +4635,7 @@
                 <a:ea typeface="Calibri" pitchFamily="34" charset="-122"/>
                 <a:cs typeface="Calibri" pitchFamily="34" charset="-120"/>
               </a:rPr>
-              <a:t>Uniqueness, not-null, relationships, format &amp; range checks.</a:t>
+              <a:t>raw / staging / marts schemas. ANSI-SQL = lift-and-shift to cloud.</a:t>
             </a:r>
             <a:endParaRPr lang="en-US" sz="1250" dirty="0"/>
           </a:p>
@@ -5618,13 +4643,13 @@
       </p:sp>
       <p:sp>
         <p:nvSpPr>
-          <p:cNvPr id="30" name="Shape 23"/>
-          <p:cNvSpPr/>
-          <p:nvPr/>
-        </p:nvSpPr>
-        <p:spPr>
-          <a:xfrm>
-            <a:off x="8046720" y="3840480"/>
+          <p:cNvPr id="20" name="Shape 15"/>
+          <p:cNvSpPr/>
+          <p:nvPr/>
+        </p:nvSpPr>
+        <p:spPr>
+          <a:xfrm>
+            <a:off x="640080" y="3840480"/>
             <a:ext cx="3474720" cy="1828800"/>
           </a:xfrm>
           <a:prstGeom prst="roundRect">
@@ -5637,7 +4662,7 @@
           </a:solidFill>
           <a:ln/>
           <a:effectLst>
-            <a:outerShdw sx="100000" sy="100000" kx="0" ky="0" algn="bl" rotWithShape="0" blurRad="101600" dist="38100" dir="5400000">
+            <a:outerShdw blurRad="101600" dist="38100" dir="5400000" algn="bl" rotWithShape="0">
               <a:srgbClr val="000000">
                 <a:alpha val="12000"/>
               </a:srgbClr>
@@ -5647,24 +4672,24 @@
       </p:sp>
       <p:sp>
         <p:nvSpPr>
-          <p:cNvPr id="31" name="Shape 24"/>
-          <p:cNvSpPr/>
-          <p:nvPr/>
-        </p:nvSpPr>
-        <p:spPr>
-          <a:xfrm>
-            <a:off x="8366760" y="4133088"/>
+          <p:cNvPr id="21" name="Shape 16"/>
+          <p:cNvSpPr/>
+          <p:nvPr/>
+        </p:nvSpPr>
+        <p:spPr>
+          <a:xfrm>
+            <a:off x="960120" y="4133088"/>
             <a:ext cx="777240" cy="777240"/>
           </a:xfrm>
           <a:prstGeom prst="ellipse">
             <a:avLst/>
           </a:prstGeom>
           <a:solidFill>
-            <a:srgbClr val="1F2430"/>
+            <a:srgbClr val="8B5CF6"/>
           </a:solidFill>
           <a:ln/>
           <a:effectLst>
-            <a:outerShdw sx="100000" sy="100000" kx="0" ky="0" algn="bl" rotWithShape="0" blurRad="101600" dist="38100" dir="5400000">
+            <a:outerShdw blurRad="101600" dist="38100" dir="5400000" algn="bl" rotWithShape="0">
               <a:srgbClr val="000000">
                 <a:alpha val="12000"/>
               </a:srgbClr>
@@ -5674,7 +4699,7 @@
       </p:sp>
       <p:pic>
         <p:nvPicPr>
-          <p:cNvPr id="32" name="Image 5" descr="preencoded.png">    </p:cNvPr>
+          <p:cNvPr id="22" name="Image 3" descr="preencoded.png"/>
           <p:cNvPicPr>
             <a:picLocks noChangeAspect="1"/>
           </p:cNvPicPr>
@@ -5688,7 +4713,7 @@
         </p:blipFill>
         <p:spPr>
           <a:xfrm>
-            <a:off x="8568842" y="4335170"/>
+            <a:off x="1162202" y="4335170"/>
             <a:ext cx="373075" cy="373075"/>
           </a:xfrm>
           <a:prstGeom prst="rect">
@@ -5698,13 +4723,13 @@
       </p:pic>
       <p:sp>
         <p:nvSpPr>
-          <p:cNvPr id="33" name="Text 25"/>
-          <p:cNvSpPr/>
-          <p:nvPr/>
-        </p:nvSpPr>
-        <p:spPr>
-          <a:xfrm>
-            <a:off x="9281160" y="4133088"/>
+          <p:cNvPr id="23" name="Text 17"/>
+          <p:cNvSpPr/>
+          <p:nvPr/>
+        </p:nvSpPr>
+        <p:spPr>
+          <a:xfrm>
+            <a:off x="1874520" y="4133088"/>
             <a:ext cx="2148840" cy="777240"/>
           </a:xfrm>
           <a:prstGeom prst="rect">
@@ -5717,7 +4742,7 @@
           <a:bodyPr wrap="square" lIns="0" tIns="0" rIns="0" bIns="0" rtlCol="0" anchor="ctr"/>
           <a:lstStyle/>
           <a:p>
-            <a:pPr indent="0" marL="0">
+            <a:pPr marL="0" indent="0">
               <a:buNone/>
             </a:pPr>
             <a:r>
@@ -5729,7 +4754,7 @@
                 <a:ea typeface="Cambria" pitchFamily="34" charset="-122"/>
                 <a:cs typeface="Cambria" pitchFamily="34" charset="-120"/>
               </a:rPr>
-              <a:t>Docker Compose</a:t>
+              <a:t>Apache Airflow</a:t>
             </a:r>
             <a:endParaRPr lang="en-US" sz="1550" dirty="0"/>
           </a:p>
@@ -5737,13 +4762,13 @@
       </p:sp>
       <p:sp>
         <p:nvSpPr>
-          <p:cNvPr id="34" name="Text 26"/>
-          <p:cNvSpPr/>
-          <p:nvPr/>
-        </p:nvSpPr>
-        <p:spPr>
-          <a:xfrm>
-            <a:off x="8366760" y="4983480"/>
+          <p:cNvPr id="24" name="Text 18"/>
+          <p:cNvSpPr/>
+          <p:nvPr/>
+        </p:nvSpPr>
+        <p:spPr>
+          <a:xfrm>
+            <a:off x="960120" y="4983480"/>
             <a:ext cx="2926080" cy="640080"/>
           </a:xfrm>
           <a:prstGeom prst="rect">
@@ -5756,7 +4781,329 @@
           <a:bodyPr wrap="square" lIns="0" tIns="0" rIns="0" bIns="0" rtlCol="0" anchor="ctr"/>
           <a:lstStyle/>
           <a:p>
-            <a:pPr indent="0" marL="0">
+            <a:pPr marL="0" indent="0">
+              <a:lnSpc>
+                <a:spcPct val="105000"/>
+              </a:lnSpc>
+              <a:buNone/>
+            </a:pPr>
+            <a:r>
+              <a:rPr lang="en-US" sz="1250" dirty="0">
+                <a:solidFill>
+                  <a:srgbClr val="44505F"/>
+                </a:solidFill>
+                <a:latin typeface="Calibri" pitchFamily="34" charset="0"/>
+                <a:ea typeface="Calibri" pitchFamily="34" charset="-122"/>
+                <a:cs typeface="Calibri" pitchFamily="34" charset="-120"/>
+              </a:rPr>
+              <a:t>Scheduling, retries, observability; orchestration ≠ execution.</a:t>
+            </a:r>
+            <a:endParaRPr lang="en-US" sz="1250" dirty="0"/>
+          </a:p>
+        </p:txBody>
+      </p:sp>
+      <p:sp>
+        <p:nvSpPr>
+          <p:cNvPr id="25" name="Shape 19"/>
+          <p:cNvSpPr/>
+          <p:nvPr/>
+        </p:nvSpPr>
+        <p:spPr>
+          <a:xfrm>
+            <a:off x="4343400" y="3840480"/>
+            <a:ext cx="3474720" cy="1828800"/>
+          </a:xfrm>
+          <a:prstGeom prst="roundRect">
+            <a:avLst>
+              <a:gd name="adj" fmla="val 5000"/>
+            </a:avLst>
+          </a:prstGeom>
+          <a:solidFill>
+            <a:srgbClr val="F4F6F8"/>
+          </a:solidFill>
+          <a:ln/>
+          <a:effectLst>
+            <a:outerShdw blurRad="101600" dist="38100" dir="5400000" algn="bl" rotWithShape="0">
+              <a:srgbClr val="000000">
+                <a:alpha val="12000"/>
+              </a:srgbClr>
+            </a:outerShdw>
+          </a:effectLst>
+        </p:spPr>
+      </p:sp>
+      <p:sp>
+        <p:nvSpPr>
+          <p:cNvPr id="26" name="Shape 20"/>
+          <p:cNvSpPr/>
+          <p:nvPr/>
+        </p:nvSpPr>
+        <p:spPr>
+          <a:xfrm>
+            <a:off x="4663440" y="4133088"/>
+            <a:ext cx="777240" cy="777240"/>
+          </a:xfrm>
+          <a:prstGeom prst="ellipse">
+            <a:avLst/>
+          </a:prstGeom>
+          <a:solidFill>
+            <a:srgbClr val="F59E0B"/>
+          </a:solidFill>
+          <a:ln/>
+          <a:effectLst>
+            <a:outerShdw blurRad="101600" dist="38100" dir="5400000" algn="bl" rotWithShape="0">
+              <a:srgbClr val="000000">
+                <a:alpha val="12000"/>
+              </a:srgbClr>
+            </a:outerShdw>
+          </a:effectLst>
+        </p:spPr>
+      </p:sp>
+      <p:pic>
+        <p:nvPicPr>
+          <p:cNvPr id="27" name="Image 4" descr="preencoded.png"/>
+          <p:cNvPicPr>
+            <a:picLocks noChangeAspect="1"/>
+          </p:cNvPicPr>
+          <p:nvPr/>
+        </p:nvPicPr>
+        <p:blipFill>
+          <a:blip r:embed="rId7"/>
+          <a:stretch>
+            <a:fillRect/>
+          </a:stretch>
+        </p:blipFill>
+        <p:spPr>
+          <a:xfrm>
+            <a:off x="4865522" y="4335170"/>
+            <a:ext cx="373075" cy="373075"/>
+          </a:xfrm>
+          <a:prstGeom prst="rect">
+            <a:avLst/>
+          </a:prstGeom>
+        </p:spPr>
+      </p:pic>
+      <p:sp>
+        <p:nvSpPr>
+          <p:cNvPr id="28" name="Text 21"/>
+          <p:cNvSpPr/>
+          <p:nvPr/>
+        </p:nvSpPr>
+        <p:spPr>
+          <a:xfrm>
+            <a:off x="5577840" y="4133088"/>
+            <a:ext cx="2148840" cy="777240"/>
+          </a:xfrm>
+          <a:prstGeom prst="rect">
+            <a:avLst/>
+          </a:prstGeom>
+          <a:noFill/>
+          <a:ln/>
+        </p:spPr>
+        <p:txBody>
+          <a:bodyPr wrap="square" lIns="0" tIns="0" rIns="0" bIns="0" rtlCol="0" anchor="ctr"/>
+          <a:lstStyle/>
+          <a:p>
+            <a:pPr marL="0" indent="0">
+              <a:buNone/>
+            </a:pPr>
+            <a:r>
+              <a:rPr lang="en-US" sz="1550" b="1" dirty="0">
+                <a:solidFill>
+                  <a:srgbClr val="1F2430"/>
+                </a:solidFill>
+                <a:latin typeface="Cambria" pitchFamily="34" charset="0"/>
+                <a:ea typeface="Cambria" pitchFamily="34" charset="-122"/>
+                <a:cs typeface="Cambria" pitchFamily="34" charset="-120"/>
+              </a:rPr>
+              <a:t>dbt tests</a:t>
+            </a:r>
+            <a:endParaRPr lang="en-US" sz="1550" dirty="0"/>
+          </a:p>
+        </p:txBody>
+      </p:sp>
+      <p:sp>
+        <p:nvSpPr>
+          <p:cNvPr id="29" name="Text 22"/>
+          <p:cNvSpPr/>
+          <p:nvPr/>
+        </p:nvSpPr>
+        <p:spPr>
+          <a:xfrm>
+            <a:off x="4663440" y="4983480"/>
+            <a:ext cx="2926080" cy="640080"/>
+          </a:xfrm>
+          <a:prstGeom prst="rect">
+            <a:avLst/>
+          </a:prstGeom>
+          <a:noFill/>
+          <a:ln/>
+        </p:spPr>
+        <p:txBody>
+          <a:bodyPr wrap="square" lIns="0" tIns="0" rIns="0" bIns="0" rtlCol="0" anchor="ctr"/>
+          <a:lstStyle/>
+          <a:p>
+            <a:pPr marL="0" indent="0">
+              <a:lnSpc>
+                <a:spcPct val="105000"/>
+              </a:lnSpc>
+              <a:buNone/>
+            </a:pPr>
+            <a:r>
+              <a:rPr lang="en-US" sz="1250" dirty="0">
+                <a:solidFill>
+                  <a:srgbClr val="44505F"/>
+                </a:solidFill>
+                <a:latin typeface="Calibri" pitchFamily="34" charset="0"/>
+                <a:ea typeface="Calibri" pitchFamily="34" charset="-122"/>
+                <a:cs typeface="Calibri" pitchFamily="34" charset="-120"/>
+              </a:rPr>
+              <a:t>Uniqueness, not-null, relationships, format &amp; range checks.</a:t>
+            </a:r>
+            <a:endParaRPr lang="en-US" sz="1250" dirty="0"/>
+          </a:p>
+        </p:txBody>
+      </p:sp>
+      <p:sp>
+        <p:nvSpPr>
+          <p:cNvPr id="30" name="Shape 23"/>
+          <p:cNvSpPr/>
+          <p:nvPr/>
+        </p:nvSpPr>
+        <p:spPr>
+          <a:xfrm>
+            <a:off x="8046720" y="3840480"/>
+            <a:ext cx="3474720" cy="1828800"/>
+          </a:xfrm>
+          <a:prstGeom prst="roundRect">
+            <a:avLst>
+              <a:gd name="adj" fmla="val 5000"/>
+            </a:avLst>
+          </a:prstGeom>
+          <a:solidFill>
+            <a:srgbClr val="F4F6F8"/>
+          </a:solidFill>
+          <a:ln/>
+          <a:effectLst>
+            <a:outerShdw blurRad="101600" dist="38100" dir="5400000" algn="bl" rotWithShape="0">
+              <a:srgbClr val="000000">
+                <a:alpha val="12000"/>
+              </a:srgbClr>
+            </a:outerShdw>
+          </a:effectLst>
+        </p:spPr>
+      </p:sp>
+      <p:sp>
+        <p:nvSpPr>
+          <p:cNvPr id="31" name="Shape 24"/>
+          <p:cNvSpPr/>
+          <p:nvPr/>
+        </p:nvSpPr>
+        <p:spPr>
+          <a:xfrm>
+            <a:off x="8366760" y="4133088"/>
+            <a:ext cx="777240" cy="777240"/>
+          </a:xfrm>
+          <a:prstGeom prst="ellipse">
+            <a:avLst/>
+          </a:prstGeom>
+          <a:solidFill>
+            <a:srgbClr val="1F2430"/>
+          </a:solidFill>
+          <a:ln/>
+          <a:effectLst>
+            <a:outerShdw blurRad="101600" dist="38100" dir="5400000" algn="bl" rotWithShape="0">
+              <a:srgbClr val="000000">
+                <a:alpha val="12000"/>
+              </a:srgbClr>
+            </a:outerShdw>
+          </a:effectLst>
+        </p:spPr>
+      </p:sp>
+      <p:pic>
+        <p:nvPicPr>
+          <p:cNvPr id="32" name="Image 5" descr="preencoded.png"/>
+          <p:cNvPicPr>
+            <a:picLocks noChangeAspect="1"/>
+          </p:cNvPicPr>
+          <p:nvPr/>
+        </p:nvPicPr>
+        <p:blipFill>
+          <a:blip r:embed="rId8"/>
+          <a:stretch>
+            <a:fillRect/>
+          </a:stretch>
+        </p:blipFill>
+        <p:spPr>
+          <a:xfrm>
+            <a:off x="8568842" y="4335170"/>
+            <a:ext cx="373075" cy="373075"/>
+          </a:xfrm>
+          <a:prstGeom prst="rect">
+            <a:avLst/>
+          </a:prstGeom>
+        </p:spPr>
+      </p:pic>
+      <p:sp>
+        <p:nvSpPr>
+          <p:cNvPr id="33" name="Text 25"/>
+          <p:cNvSpPr/>
+          <p:nvPr/>
+        </p:nvSpPr>
+        <p:spPr>
+          <a:xfrm>
+            <a:off x="9281160" y="4133088"/>
+            <a:ext cx="2148840" cy="777240"/>
+          </a:xfrm>
+          <a:prstGeom prst="rect">
+            <a:avLst/>
+          </a:prstGeom>
+          <a:noFill/>
+          <a:ln/>
+        </p:spPr>
+        <p:txBody>
+          <a:bodyPr wrap="square" lIns="0" tIns="0" rIns="0" bIns="0" rtlCol="0" anchor="ctr"/>
+          <a:lstStyle/>
+          <a:p>
+            <a:pPr marL="0" indent="0">
+              <a:buNone/>
+            </a:pPr>
+            <a:r>
+              <a:rPr lang="en-US" sz="1550" b="1" dirty="0">
+                <a:solidFill>
+                  <a:srgbClr val="1F2430"/>
+                </a:solidFill>
+                <a:latin typeface="Cambria" pitchFamily="34" charset="0"/>
+                <a:ea typeface="Cambria" pitchFamily="34" charset="-122"/>
+                <a:cs typeface="Cambria" pitchFamily="34" charset="-120"/>
+              </a:rPr>
+              <a:t>Docker Compose</a:t>
+            </a:r>
+            <a:endParaRPr lang="en-US" sz="1550" dirty="0"/>
+          </a:p>
+        </p:txBody>
+      </p:sp>
+      <p:sp>
+        <p:nvSpPr>
+          <p:cNvPr id="34" name="Text 26"/>
+          <p:cNvSpPr/>
+          <p:nvPr/>
+        </p:nvSpPr>
+        <p:spPr>
+          <a:xfrm>
+            <a:off x="8366760" y="4983480"/>
+            <a:ext cx="2926080" cy="640080"/>
+          </a:xfrm>
+          <a:prstGeom prst="rect">
+            <a:avLst/>
+          </a:prstGeom>
+          <a:noFill/>
+          <a:ln/>
+        </p:spPr>
+        <p:txBody>
+          <a:bodyPr wrap="square" lIns="0" tIns="0" rIns="0" bIns="0" rtlCol="0" anchor="ctr"/>
+          <a:lstStyle/>
+          <a:p>
+            <a:pPr marL="0" indent="0">
               <a:lnSpc>
                 <a:spcPct val="105000"/>
               </a:lnSpc>
@@ -5793,6 +5140,7 @@
         <a:solidFill>
           <a:srgbClr val="FFFFFF"/>
         </a:solidFill>
+        <a:effectLst/>
       </p:bgPr>
     </p:bg>
     <p:spTree>
@@ -5830,7 +5178,7 @@
           <a:bodyPr wrap="square" rtlCol="0" anchor="ctr"/>
           <a:lstStyle/>
           <a:p>
-            <a:pPr algn="l" indent="0" marL="0">
+            <a:pPr marL="0" indent="0" algn="l">
               <a:buNone/>
             </a:pPr>
             <a:r>
@@ -5869,7 +5217,7 @@
           <a:bodyPr wrap="square" lIns="0" tIns="0" rIns="0" bIns="0" rtlCol="0" anchor="ctr"/>
           <a:lstStyle/>
           <a:p>
-            <a:pPr indent="0" marL="0">
+            <a:pPr marL="0" indent="0">
               <a:buNone/>
             </a:pPr>
             <a:r>
@@ -5908,7 +5256,7 @@
           <a:bodyPr wrap="square" lIns="0" tIns="0" rIns="0" bIns="0" rtlCol="0" anchor="ctr"/>
           <a:lstStyle/>
           <a:p>
-            <a:pPr indent="0" marL="0">
+            <a:pPr marL="0" indent="0">
               <a:buNone/>
             </a:pPr>
             <a:r>
@@ -5928,22 +5276,22 @@
       </p:sp>
       <p:pic>
         <p:nvPicPr>
-          <p:cNvPr id="5" name="Image 0" descr="../docs/erd.png">    </p:cNvPr>
+          <p:cNvPr id="5" name="Image 0" descr="../docs/erd.png"/>
           <p:cNvPicPr>
             <a:picLocks noChangeAspect="1"/>
           </p:cNvPicPr>
           <p:nvPr/>
         </p:nvPicPr>
         <p:blipFill>
-          <a:blip r:embed="rId1"/>
+          <a:blip r:embed="rId3"/>
           <a:stretch>
             <a:fillRect/>
           </a:stretch>
         </p:blipFill>
         <p:spPr>
           <a:xfrm>
-            <a:off x="548640" y="1371600"/>
-            <a:ext cx="2236013" cy="5120640"/>
+            <a:off x="548641" y="1627632"/>
+            <a:ext cx="3053542" cy="4864608"/>
           </a:xfrm>
           <a:prstGeom prst="rect">
             <a:avLst/>
@@ -5991,7 +5339,7 @@
           <a:bodyPr wrap="square" lIns="0" tIns="0" rIns="0" bIns="0" rtlCol="0" anchor="ctr"/>
           <a:lstStyle/>
           <a:p>
-            <a:pPr indent="0" marL="0">
+            <a:pPr marL="0" indent="0">
               <a:buNone/>
             </a:pPr>
             <a:r>
@@ -6005,9 +5353,6 @@
               </a:rPr>
               <a:t>dim_song  </a:t>
             </a:r>
-            <a:pPr indent="0" marL="0">
-              <a:buNone/>
-            </a:pPr>
             <a:r>
               <a:rPr lang="en-US" sz="1450" dirty="0">
                 <a:solidFill>
@@ -6064,7 +5409,7 @@
           <a:bodyPr wrap="square" lIns="0" tIns="0" rIns="0" bIns="0" rtlCol="0" anchor="ctr"/>
           <a:lstStyle/>
           <a:p>
-            <a:pPr indent="0" marL="0">
+            <a:pPr marL="0" indent="0">
               <a:buNone/>
             </a:pPr>
             <a:r>
@@ -6078,9 +5423,6 @@
               </a:rPr>
               <a:t>fct_spotify_tracks  </a:t>
             </a:r>
-            <a:pPr indent="0" marL="0">
-              <a:buNone/>
-            </a:pPr>
             <a:r>
               <a:rPr lang="en-US" sz="1450" dirty="0">
                 <a:solidFill>
@@ -6137,7 +5479,7 @@
           <a:bodyPr wrap="square" lIns="0" tIns="0" rIns="0" bIns="0" rtlCol="0" anchor="ctr"/>
           <a:lstStyle/>
           <a:p>
-            <a:pPr indent="0" marL="0">
+            <a:pPr marL="0" indent="0">
               <a:buNone/>
             </a:pPr>
             <a:r>
@@ -6151,9 +5493,6 @@
               </a:rPr>
               <a:t>fct_youtube_videos  </a:t>
             </a:r>
-            <a:pPr indent="0" marL="0">
-              <a:buNone/>
-            </a:pPr>
             <a:r>
               <a:rPr lang="en-US" sz="1450" dirty="0">
                 <a:solidFill>
@@ -6210,7 +5549,7 @@
           <a:bodyPr wrap="square" lIns="0" tIns="0" rIns="0" bIns="0" rtlCol="0" anchor="ctr"/>
           <a:lstStyle/>
           <a:p>
-            <a:pPr indent="0" marL="0">
+            <a:pPr marL="0" indent="0">
               <a:buNone/>
             </a:pPr>
             <a:r>
@@ -6224,9 +5563,6 @@
               </a:rPr>
               <a:t>mart_song_*_counts  </a:t>
             </a:r>
-            <a:pPr indent="0" marL="0">
-              <a:buNone/>
-            </a:pPr>
             <a:r>
               <a:rPr lang="en-US" sz="1450" dirty="0">
                 <a:solidFill>
@@ -6283,7 +5619,7 @@
           <a:bodyPr wrap="square" lIns="0" tIns="0" rIns="0" bIns="0" rtlCol="0" anchor="ctr"/>
           <a:lstStyle/>
           <a:p>
-            <a:pPr indent="0" marL="0">
+            <a:pPr marL="0" indent="0">
               <a:buNone/>
             </a:pPr>
             <a:r>
@@ -6297,9 +5633,6 @@
               </a:rPr>
               <a:t>mart_song_overview  </a:t>
             </a:r>
-            <a:pPr indent="0" marL="0">
-              <a:buNone/>
-            </a:pPr>
             <a:r>
               <a:rPr lang="en-US" sz="1450" dirty="0">
                 <a:solidFill>
@@ -6336,7 +5669,7 @@
           <a:bodyPr wrap="square" lIns="0" tIns="0" rIns="0" bIns="0" rtlCol="0" anchor="ctr"/>
           <a:lstStyle/>
           <a:p>
-            <a:pPr indent="0" marL="0">
+            <a:pPr marL="0" indent="0">
               <a:buNone/>
             </a:pPr>
             <a:r>
@@ -6370,6 +5703,7 @@
         <a:solidFill>
           <a:srgbClr val="FFFFFF"/>
         </a:solidFill>
+        <a:effectLst/>
       </p:bgPr>
     </p:bg>
     <p:spTree>
@@ -6407,7 +5741,7 @@
           <a:bodyPr wrap="square" rtlCol="0" anchor="ctr"/>
           <a:lstStyle/>
           <a:p>
-            <a:pPr algn="l" indent="0" marL="0">
+            <a:pPr marL="0" indent="0" algn="l">
               <a:buNone/>
             </a:pPr>
             <a:r>
@@ -6446,7 +5780,7 @@
           <a:bodyPr wrap="square" lIns="0" tIns="0" rIns="0" bIns="0" rtlCol="0" anchor="ctr"/>
           <a:lstStyle/>
           <a:p>
-            <a:pPr indent="0" marL="0">
+            <a:pPr marL="0" indent="0">
               <a:buNone/>
             </a:pPr>
             <a:r>
@@ -6485,7 +5819,7 @@
           <a:bodyPr wrap="square" lIns="0" tIns="0" rIns="0" bIns="0" rtlCol="0" anchor="ctr"/>
           <a:lstStyle/>
           <a:p>
-            <a:pPr indent="0" marL="0">
+            <a:pPr marL="0" indent="0">
               <a:buNone/>
             </a:pPr>
             <a:r>
@@ -6544,7 +5878,7 @@
           </a:solidFill>
           <a:ln/>
           <a:effectLst>
-            <a:outerShdw sx="100000" sy="100000" kx="0" ky="0" algn="bl" rotWithShape="0" blurRad="101600" dist="38100" dir="5400000">
+            <a:outerShdw blurRad="101600" dist="38100" dir="5400000" algn="bl" rotWithShape="0">
               <a:srgbClr val="000000">
                 <a:alpha val="12000"/>
               </a:srgbClr>
@@ -6554,315 +5888,7 @@
       </p:sp>
       <p:pic>
         <p:nvPicPr>
-          <p:cNvPr id="7" name="Image 0" descr="preencoded.png">    </p:cNvPr>
-          <p:cNvPicPr>
-            <a:picLocks noChangeAspect="1"/>
-          </p:cNvPicPr>
-          <p:nvPr/>
-        </p:nvPicPr>
-        <p:blipFill>
-          <a:blip r:embed="rId1"/>
-          <a:stretch>
-            <a:fillRect/>
-          </a:stretch>
-        </p:blipFill>
-        <p:spPr>
-          <a:xfrm>
-            <a:off x="1080821" y="2196389"/>
-            <a:ext cx="307238" cy="307238"/>
-          </a:xfrm>
-          <a:prstGeom prst="rect">
-            <a:avLst/>
-          </a:prstGeom>
-        </p:spPr>
-      </p:pic>
-      <p:sp>
-        <p:nvSpPr>
-          <p:cNvPr id="8" name="Text 5"/>
-          <p:cNvSpPr/>
-          <p:nvPr/>
-        </p:nvSpPr>
-        <p:spPr>
-          <a:xfrm>
-            <a:off x="1737360" y="1901952"/>
-            <a:ext cx="4023360" cy="411480"/>
-          </a:xfrm>
-          <a:prstGeom prst="rect">
-            <a:avLst/>
-          </a:prstGeom>
-          <a:noFill/>
-          <a:ln/>
-        </p:spPr>
-        <p:txBody>
-          <a:bodyPr wrap="square" lIns="0" tIns="0" rIns="0" bIns="0" rtlCol="0" anchor="ctr"/>
-          <a:lstStyle/>
-          <a:p>
-            <a:pPr indent="0" marL="0">
-              <a:buNone/>
-            </a:pPr>
-            <a:r>
-              <a:rPr lang="en-US" sz="1500" b="1" dirty="0">
-                <a:solidFill>
-                  <a:srgbClr val="1F2430"/>
-                </a:solidFill>
-                <a:latin typeface="Cambria" pitchFamily="34" charset="0"/>
-                <a:ea typeface="Cambria" pitchFamily="34" charset="-122"/>
-                <a:cs typeface="Cambria" pitchFamily="34" charset="-120"/>
-              </a:rPr>
-              <a:t>Uniqueness &amp; not-null</a:t>
-            </a:r>
-            <a:endParaRPr lang="en-US" sz="1500" dirty="0"/>
-          </a:p>
-        </p:txBody>
-      </p:sp>
-      <p:sp>
-        <p:nvSpPr>
-          <p:cNvPr id="9" name="Text 6"/>
-          <p:cNvSpPr/>
-          <p:nvPr/>
-        </p:nvSpPr>
-        <p:spPr>
-          <a:xfrm>
-            <a:off x="1737360" y="2286000"/>
-            <a:ext cx="4069080" cy="640080"/>
-          </a:xfrm>
-          <a:prstGeom prst="rect">
-            <a:avLst/>
-          </a:prstGeom>
-          <a:noFill/>
-          <a:ln/>
-        </p:spPr>
-        <p:txBody>
-          <a:bodyPr wrap="square" lIns="0" tIns="0" rIns="0" bIns="0" rtlCol="0" anchor="ctr"/>
-          <a:lstStyle/>
-          <a:p>
-            <a:pPr indent="0" marL="0">
-              <a:lnSpc>
-                <a:spcPct val="100000"/>
-              </a:lnSpc>
-              <a:buNone/>
-            </a:pPr>
-            <a:r>
-              <a:rPr lang="en-US" sz="1200" dirty="0">
-                <a:solidFill>
-                  <a:srgbClr val="44505F"/>
-                </a:solidFill>
-                <a:latin typeface="Calibri" pitchFamily="34" charset="0"/>
-                <a:ea typeface="Calibri" pitchFamily="34" charset="-122"/>
-                <a:cs typeface="Calibri" pitchFamily="34" charset="-120"/>
-              </a:rPr>
-              <a:t>On every primary key (song_id, track_id, video_id) — catches dupes &amp; missing keys.</a:t>
-            </a:r>
-            <a:endParaRPr lang="en-US" sz="1200" dirty="0"/>
-          </a:p>
-        </p:txBody>
-      </p:sp>
-      <p:sp>
-        <p:nvSpPr>
-          <p:cNvPr id="10" name="Shape 7"/>
-          <p:cNvSpPr/>
-          <p:nvPr/>
-        </p:nvSpPr>
-        <p:spPr>
-          <a:xfrm>
-            <a:off x="6172200" y="1737360"/>
-            <a:ext cx="5303520" cy="1234440"/>
-          </a:xfrm>
-          <a:prstGeom prst="roundRect">
-            <a:avLst>
-              <a:gd name="adj" fmla="val 5926"/>
-            </a:avLst>
-          </a:prstGeom>
-          <a:solidFill>
-            <a:srgbClr val="F4F6F8"/>
-          </a:solidFill>
-          <a:ln/>
-        </p:spPr>
-      </p:sp>
-      <p:sp>
-        <p:nvSpPr>
-          <p:cNvPr id="11" name="Shape 8"/>
-          <p:cNvSpPr/>
-          <p:nvPr/>
-        </p:nvSpPr>
-        <p:spPr>
-          <a:xfrm>
-            <a:off x="6446520" y="2029968"/>
-            <a:ext cx="640080" cy="640080"/>
-          </a:xfrm>
-          <a:prstGeom prst="ellipse">
-            <a:avLst/>
-          </a:prstGeom>
-          <a:solidFill>
-            <a:srgbClr val="12B5A5"/>
-          </a:solidFill>
-          <a:ln/>
-          <a:effectLst>
-            <a:outerShdw sx="100000" sy="100000" kx="0" ky="0" algn="bl" rotWithShape="0" blurRad="101600" dist="38100" dir="5400000">
-              <a:srgbClr val="000000">
-                <a:alpha val="12000"/>
-              </a:srgbClr>
-            </a:outerShdw>
-          </a:effectLst>
-        </p:spPr>
-      </p:sp>
-      <p:pic>
-        <p:nvPicPr>
-          <p:cNvPr id="12" name="Image 1" descr="preencoded.png">    </p:cNvPr>
-          <p:cNvPicPr>
-            <a:picLocks noChangeAspect="1"/>
-          </p:cNvPicPr>
-          <p:nvPr/>
-        </p:nvPicPr>
-        <p:blipFill>
-          <a:blip r:embed="rId2"/>
-          <a:stretch>
-            <a:fillRect/>
-          </a:stretch>
-        </p:blipFill>
-        <p:spPr>
-          <a:xfrm>
-            <a:off x="6612941" y="2196389"/>
-            <a:ext cx="307238" cy="307238"/>
-          </a:xfrm>
-          <a:prstGeom prst="rect">
-            <a:avLst/>
-          </a:prstGeom>
-        </p:spPr>
-      </p:pic>
-      <p:sp>
-        <p:nvSpPr>
-          <p:cNvPr id="13" name="Text 9"/>
-          <p:cNvSpPr/>
-          <p:nvPr/>
-        </p:nvSpPr>
-        <p:spPr>
-          <a:xfrm>
-            <a:off x="7269480" y="1901952"/>
-            <a:ext cx="4023360" cy="411480"/>
-          </a:xfrm>
-          <a:prstGeom prst="rect">
-            <a:avLst/>
-          </a:prstGeom>
-          <a:noFill/>
-          <a:ln/>
-        </p:spPr>
-        <p:txBody>
-          <a:bodyPr wrap="square" lIns="0" tIns="0" rIns="0" bIns="0" rtlCol="0" anchor="ctr"/>
-          <a:lstStyle/>
-          <a:p>
-            <a:pPr indent="0" marL="0">
-              <a:buNone/>
-            </a:pPr>
-            <a:r>
-              <a:rPr lang="en-US" sz="1500" b="1" dirty="0">
-                <a:solidFill>
-                  <a:srgbClr val="1F2430"/>
-                </a:solidFill>
-                <a:latin typeface="Cambria" pitchFamily="34" charset="0"/>
-                <a:ea typeface="Cambria" pitchFamily="34" charset="-122"/>
-                <a:cs typeface="Cambria" pitchFamily="34" charset="-120"/>
-              </a:rPr>
-              <a:t>Referential integrity</a:t>
-            </a:r>
-            <a:endParaRPr lang="en-US" sz="1500" dirty="0"/>
-          </a:p>
-        </p:txBody>
-      </p:sp>
-      <p:sp>
-        <p:nvSpPr>
-          <p:cNvPr id="14" name="Text 10"/>
-          <p:cNvSpPr/>
-          <p:nvPr/>
-        </p:nvSpPr>
-        <p:spPr>
-          <a:xfrm>
-            <a:off x="7269480" y="2286000"/>
-            <a:ext cx="4069080" cy="640080"/>
-          </a:xfrm>
-          <a:prstGeom prst="rect">
-            <a:avLst/>
-          </a:prstGeom>
-          <a:noFill/>
-          <a:ln/>
-        </p:spPr>
-        <p:txBody>
-          <a:bodyPr wrap="square" lIns="0" tIns="0" rIns="0" bIns="0" rtlCol="0" anchor="ctr"/>
-          <a:lstStyle/>
-          <a:p>
-            <a:pPr indent="0" marL="0">
-              <a:lnSpc>
-                <a:spcPct val="100000"/>
-              </a:lnSpc>
-              <a:buNone/>
-            </a:pPr>
-            <a:r>
-              <a:rPr lang="en-US" sz="1200" dirty="0">
-                <a:solidFill>
-                  <a:srgbClr val="44505F"/>
-                </a:solidFill>
-                <a:latin typeface="Calibri" pitchFamily="34" charset="0"/>
-                <a:ea typeface="Calibri" pitchFamily="34" charset="-122"/>
-                <a:cs typeface="Calibri" pitchFamily="34" charset="-120"/>
-              </a:rPr>
-              <a:t>relationships tests ensure every fact row maps to a real dim_song.</a:t>
-            </a:r>
-            <a:endParaRPr lang="en-US" sz="1200" dirty="0"/>
-          </a:p>
-        </p:txBody>
-      </p:sp>
-      <p:sp>
-        <p:nvSpPr>
-          <p:cNvPr id="15" name="Shape 11"/>
-          <p:cNvSpPr/>
-          <p:nvPr/>
-        </p:nvSpPr>
-        <p:spPr>
-          <a:xfrm>
-            <a:off x="640080" y="3154680"/>
-            <a:ext cx="5303520" cy="1234440"/>
-          </a:xfrm>
-          <a:prstGeom prst="roundRect">
-            <a:avLst>
-              <a:gd name="adj" fmla="val 5926"/>
-            </a:avLst>
-          </a:prstGeom>
-          <a:solidFill>
-            <a:srgbClr val="F4F6F8"/>
-          </a:solidFill>
-          <a:ln/>
-        </p:spPr>
-      </p:sp>
-      <p:sp>
-        <p:nvSpPr>
-          <p:cNvPr id="16" name="Shape 12"/>
-          <p:cNvSpPr/>
-          <p:nvPr/>
-        </p:nvSpPr>
-        <p:spPr>
-          <a:xfrm>
-            <a:off x="914400" y="3447288"/>
-            <a:ext cx="640080" cy="640080"/>
-          </a:xfrm>
-          <a:prstGeom prst="ellipse">
-            <a:avLst/>
-          </a:prstGeom>
-          <a:solidFill>
-            <a:srgbClr val="12B5A5"/>
-          </a:solidFill>
-          <a:ln/>
-          <a:effectLst>
-            <a:outerShdw sx="100000" sy="100000" kx="0" ky="0" algn="bl" rotWithShape="0" blurRad="101600" dist="38100" dir="5400000">
-              <a:srgbClr val="000000">
-                <a:alpha val="12000"/>
-              </a:srgbClr>
-            </a:outerShdw>
-          </a:effectLst>
-        </p:spPr>
-      </p:sp>
-      <p:pic>
-        <p:nvPicPr>
-          <p:cNvPr id="17" name="Image 2" descr="preencoded.png">    </p:cNvPr>
+          <p:cNvPr id="7" name="Image 0" descr="preencoded.png"/>
           <p:cNvPicPr>
             <a:picLocks noChangeAspect="1"/>
           </p:cNvPicPr>
@@ -6876,7 +5902,7 @@
         </p:blipFill>
         <p:spPr>
           <a:xfrm>
-            <a:off x="1080821" y="3613709"/>
+            <a:off x="1080821" y="2196389"/>
             <a:ext cx="307238" cy="307238"/>
           </a:xfrm>
           <a:prstGeom prst="rect">
@@ -6886,13 +5912,13 @@
       </p:pic>
       <p:sp>
         <p:nvSpPr>
-          <p:cNvPr id="18" name="Text 13"/>
-          <p:cNvSpPr/>
-          <p:nvPr/>
-        </p:nvSpPr>
-        <p:spPr>
-          <a:xfrm>
-            <a:off x="1737360" y="3319272"/>
+          <p:cNvPr id="8" name="Text 5"/>
+          <p:cNvSpPr/>
+          <p:nvPr/>
+        </p:nvSpPr>
+        <p:spPr>
+          <a:xfrm>
+            <a:off x="1737360" y="1901952"/>
             <a:ext cx="4023360" cy="411480"/>
           </a:xfrm>
           <a:prstGeom prst="rect">
@@ -6905,7 +5931,7 @@
           <a:bodyPr wrap="square" lIns="0" tIns="0" rIns="0" bIns="0" rtlCol="0" anchor="ctr"/>
           <a:lstStyle/>
           <a:p>
-            <a:pPr indent="0" marL="0">
+            <a:pPr marL="0" indent="0">
               <a:buNone/>
             </a:pPr>
             <a:r>
@@ -6917,7 +5943,7 @@
                 <a:ea typeface="Cambria" pitchFamily="34" charset="-122"/>
                 <a:cs typeface="Cambria" pitchFamily="34" charset="-120"/>
               </a:rPr>
-              <a:t>Format validation</a:t>
+              <a:t>Uniqueness &amp; not-null</a:t>
             </a:r>
             <a:endParaRPr lang="en-US" sz="1500" dirty="0"/>
           </a:p>
@@ -6925,13 +5951,13 @@
       </p:sp>
       <p:sp>
         <p:nvSpPr>
-          <p:cNvPr id="19" name="Text 14"/>
-          <p:cNvSpPr/>
-          <p:nvPr/>
-        </p:nvSpPr>
-        <p:spPr>
-          <a:xfrm>
-            <a:off x="1737360" y="3703320"/>
+          <p:cNvPr id="9" name="Text 6"/>
+          <p:cNvSpPr/>
+          <p:nvPr/>
+        </p:nvSpPr>
+        <p:spPr>
+          <a:xfrm>
+            <a:off x="1737360" y="2286000"/>
             <a:ext cx="4069080" cy="640080"/>
           </a:xfrm>
           <a:prstGeom prst="rect">
@@ -6944,7 +5970,7 @@
           <a:bodyPr wrap="square" lIns="0" tIns="0" rIns="0" bIns="0" rtlCol="0" anchor="ctr"/>
           <a:lstStyle/>
           <a:p>
-            <a:pPr indent="0" marL="0">
+            <a:pPr marL="0" indent="0">
               <a:lnSpc>
                 <a:spcPct val="100000"/>
               </a:lnSpc>
@@ -6959,7 +5985,7 @@
                 <a:ea typeface="Calibri" pitchFamily="34" charset="-122"/>
                 <a:cs typeface="Calibri" pitchFamily="34" charset="-120"/>
               </a:rPr>
-              <a:t>ISRC must match CC-XXX-YY-NNNNN; malformed-but-present values flagged as anomalies.</a:t>
+              <a:t>On every primary key (song_id, track_id, video_id) — catches dupes &amp; missing keys.</a:t>
             </a:r>
             <a:endParaRPr lang="en-US" sz="1200" dirty="0"/>
           </a:p>
@@ -6967,13 +5993,13 @@
       </p:sp>
       <p:sp>
         <p:nvSpPr>
-          <p:cNvPr id="20" name="Shape 15"/>
-          <p:cNvSpPr/>
-          <p:nvPr/>
-        </p:nvSpPr>
-        <p:spPr>
-          <a:xfrm>
-            <a:off x="6172200" y="3154680"/>
+          <p:cNvPr id="10" name="Shape 7"/>
+          <p:cNvSpPr/>
+          <p:nvPr/>
+        </p:nvSpPr>
+        <p:spPr>
+          <a:xfrm>
+            <a:off x="6172200" y="1737360"/>
             <a:ext cx="5303520" cy="1234440"/>
           </a:xfrm>
           <a:prstGeom prst="roundRect">
@@ -6989,13 +6015,13 @@
       </p:sp>
       <p:sp>
         <p:nvSpPr>
-          <p:cNvPr id="21" name="Shape 16"/>
-          <p:cNvSpPr/>
-          <p:nvPr/>
-        </p:nvSpPr>
-        <p:spPr>
-          <a:xfrm>
-            <a:off x="6446520" y="3447288"/>
+          <p:cNvPr id="11" name="Shape 8"/>
+          <p:cNvSpPr/>
+          <p:nvPr/>
+        </p:nvSpPr>
+        <p:spPr>
+          <a:xfrm>
+            <a:off x="6446520" y="2029968"/>
             <a:ext cx="640080" cy="640080"/>
           </a:xfrm>
           <a:prstGeom prst="ellipse">
@@ -7006,7 +6032,7 @@
           </a:solidFill>
           <a:ln/>
           <a:effectLst>
-            <a:outerShdw sx="100000" sy="100000" kx="0" ky="0" algn="bl" rotWithShape="0" blurRad="101600" dist="38100" dir="5400000">
+            <a:outerShdw blurRad="101600" dist="38100" dir="5400000" algn="bl" rotWithShape="0">
               <a:srgbClr val="000000">
                 <a:alpha val="12000"/>
               </a:srgbClr>
@@ -7016,21 +6042,21 @@
       </p:sp>
       <p:pic>
         <p:nvPicPr>
-          <p:cNvPr id="22" name="Image 3" descr="preencoded.png">    </p:cNvPr>
+          <p:cNvPr id="12" name="Image 1" descr="preencoded.png"/>
           <p:cNvPicPr>
             <a:picLocks noChangeAspect="1"/>
           </p:cNvPicPr>
           <p:nvPr/>
         </p:nvPicPr>
         <p:blipFill>
-          <a:blip r:embed="rId4"/>
+          <a:blip r:embed="rId3"/>
           <a:stretch>
             <a:fillRect/>
           </a:stretch>
         </p:blipFill>
         <p:spPr>
           <a:xfrm>
-            <a:off x="6612941" y="3613709"/>
+            <a:off x="6612941" y="2196389"/>
             <a:ext cx="307238" cy="307238"/>
           </a:xfrm>
           <a:prstGeom prst="rect">
@@ -7040,13 +6066,13 @@
       </p:pic>
       <p:sp>
         <p:nvSpPr>
-          <p:cNvPr id="23" name="Text 17"/>
-          <p:cNvSpPr/>
-          <p:nvPr/>
-        </p:nvSpPr>
-        <p:spPr>
-          <a:xfrm>
-            <a:off x="7269480" y="3319272"/>
+          <p:cNvPr id="13" name="Text 9"/>
+          <p:cNvSpPr/>
+          <p:nvPr/>
+        </p:nvSpPr>
+        <p:spPr>
+          <a:xfrm>
+            <a:off x="7269480" y="1901952"/>
             <a:ext cx="4023360" cy="411480"/>
           </a:xfrm>
           <a:prstGeom prst="rect">
@@ -7059,7 +6085,7 @@
           <a:bodyPr wrap="square" lIns="0" tIns="0" rIns="0" bIns="0" rtlCol="0" anchor="ctr"/>
           <a:lstStyle/>
           <a:p>
-            <a:pPr indent="0" marL="0">
+            <a:pPr marL="0" indent="0">
               <a:buNone/>
             </a:pPr>
             <a:r>
@@ -7071,7 +6097,7 @@
                 <a:ea typeface="Cambria" pitchFamily="34" charset="-122"/>
                 <a:cs typeface="Cambria" pitchFamily="34" charset="-120"/>
               </a:rPr>
-              <a:t>Deduplication</a:t>
+              <a:t>Referential integrity</a:t>
             </a:r>
             <a:endParaRPr lang="en-US" sz="1500" dirty="0"/>
           </a:p>
@@ -7079,13 +6105,13 @@
       </p:sp>
       <p:sp>
         <p:nvSpPr>
-          <p:cNvPr id="24" name="Text 18"/>
-          <p:cNvSpPr/>
-          <p:nvPr/>
-        </p:nvSpPr>
-        <p:spPr>
-          <a:xfrm>
-            <a:off x="7269480" y="3703320"/>
+          <p:cNvPr id="14" name="Text 10"/>
+          <p:cNvSpPr/>
+          <p:nvPr/>
+        </p:nvSpPr>
+        <p:spPr>
+          <a:xfrm>
+            <a:off x="7269480" y="2286000"/>
             <a:ext cx="4069080" cy="640080"/>
           </a:xfrm>
           <a:prstGeom prst="rect">
@@ -7098,7 +6124,7 @@
           <a:bodyPr wrap="square" lIns="0" tIns="0" rIns="0" bIns="0" rtlCol="0" anchor="ctr"/>
           <a:lstStyle/>
           <a:p>
-            <a:pPr indent="0" marL="0">
+            <a:pPr marL="0" indent="0">
               <a:lnSpc>
                 <a:spcPct val="100000"/>
               </a:lnSpc>
@@ -7113,7 +6139,7 @@
                 <a:ea typeface="Calibri" pitchFamily="34" charset="-122"/>
                 <a:cs typeface="Calibri" pitchFamily="34" charset="-120"/>
               </a:rPr>
-              <a:t>row_number() windows keep the latest row per natural key in staging.</a:t>
+              <a:t>relationships tests ensure every fact row maps to a real dim_song.</a:t>
             </a:r>
             <a:endParaRPr lang="en-US" sz="1200" dirty="0"/>
           </a:p>
@@ -7121,13 +6147,13 @@
       </p:sp>
       <p:sp>
         <p:nvSpPr>
-          <p:cNvPr id="25" name="Shape 19"/>
-          <p:cNvSpPr/>
-          <p:nvPr/>
-        </p:nvSpPr>
-        <p:spPr>
-          <a:xfrm>
-            <a:off x="640080" y="4572000"/>
+          <p:cNvPr id="15" name="Shape 11"/>
+          <p:cNvSpPr/>
+          <p:nvPr/>
+        </p:nvSpPr>
+        <p:spPr>
+          <a:xfrm>
+            <a:off x="640080" y="3154680"/>
             <a:ext cx="5303520" cy="1234440"/>
           </a:xfrm>
           <a:prstGeom prst="roundRect">
@@ -7143,13 +6169,13 @@
       </p:sp>
       <p:sp>
         <p:nvSpPr>
-          <p:cNvPr id="26" name="Shape 20"/>
-          <p:cNvSpPr/>
-          <p:nvPr/>
-        </p:nvSpPr>
-        <p:spPr>
-          <a:xfrm>
-            <a:off x="914400" y="4864608"/>
+          <p:cNvPr id="16" name="Shape 12"/>
+          <p:cNvSpPr/>
+          <p:nvPr/>
+        </p:nvSpPr>
+        <p:spPr>
+          <a:xfrm>
+            <a:off x="914400" y="3447288"/>
             <a:ext cx="640080" cy="640080"/>
           </a:xfrm>
           <a:prstGeom prst="ellipse">
@@ -7160,7 +6186,7 @@
           </a:solidFill>
           <a:ln/>
           <a:effectLst>
-            <a:outerShdw sx="100000" sy="100000" kx="0" ky="0" algn="bl" rotWithShape="0" blurRad="101600" dist="38100" dir="5400000">
+            <a:outerShdw blurRad="101600" dist="38100" dir="5400000" algn="bl" rotWithShape="0">
               <a:srgbClr val="000000">
                 <a:alpha val="12000"/>
               </a:srgbClr>
@@ -7170,21 +6196,21 @@
       </p:sp>
       <p:pic>
         <p:nvPicPr>
-          <p:cNvPr id="27" name="Image 4" descr="preencoded.png">    </p:cNvPr>
+          <p:cNvPr id="17" name="Image 2" descr="preencoded.png"/>
           <p:cNvPicPr>
             <a:picLocks noChangeAspect="1"/>
           </p:cNvPicPr>
           <p:nvPr/>
         </p:nvPicPr>
         <p:blipFill>
-          <a:blip r:embed="rId5"/>
+          <a:blip r:embed="rId3"/>
           <a:stretch>
             <a:fillRect/>
           </a:stretch>
         </p:blipFill>
         <p:spPr>
           <a:xfrm>
-            <a:off x="1080821" y="5031029"/>
+            <a:off x="1080821" y="3613709"/>
             <a:ext cx="307238" cy="307238"/>
           </a:xfrm>
           <a:prstGeom prst="rect">
@@ -7194,13 +6220,13 @@
       </p:pic>
       <p:sp>
         <p:nvSpPr>
-          <p:cNvPr id="28" name="Text 21"/>
-          <p:cNvSpPr/>
-          <p:nvPr/>
-        </p:nvSpPr>
-        <p:spPr>
-          <a:xfrm>
-            <a:off x="1737360" y="4736592"/>
+          <p:cNvPr id="18" name="Text 13"/>
+          <p:cNvSpPr/>
+          <p:nvPr/>
+        </p:nvSpPr>
+        <p:spPr>
+          <a:xfrm>
+            <a:off x="1737360" y="3319272"/>
             <a:ext cx="4023360" cy="411480"/>
           </a:xfrm>
           <a:prstGeom prst="rect">
@@ -7213,7 +6239,7 @@
           <a:bodyPr wrap="square" lIns="0" tIns="0" rIns="0" bIns="0" rtlCol="0" anchor="ctr"/>
           <a:lstStyle/>
           <a:p>
-            <a:pPr indent="0" marL="0">
+            <a:pPr marL="0" indent="0">
               <a:buNone/>
             </a:pPr>
             <a:r>
@@ -7225,7 +6251,7 @@
                 <a:ea typeface="Cambria" pitchFamily="34" charset="-122"/>
                 <a:cs typeface="Cambria" pitchFamily="34" charset="-120"/>
               </a:rPr>
-              <a:t>Missing-data handling</a:t>
+              <a:t>Format validation</a:t>
             </a:r>
             <a:endParaRPr lang="en-US" sz="1500" dirty="0"/>
           </a:p>
@@ -7233,13 +6259,13 @@
       </p:sp>
       <p:sp>
         <p:nvSpPr>
-          <p:cNvPr id="29" name="Text 22"/>
-          <p:cNvSpPr/>
-          <p:nvPr/>
-        </p:nvSpPr>
-        <p:spPr>
-          <a:xfrm>
-            <a:off x="1737360" y="5120640"/>
+          <p:cNvPr id="19" name="Text 14"/>
+          <p:cNvSpPr/>
+          <p:nvPr/>
+        </p:nvSpPr>
+        <p:spPr>
+          <a:xfrm>
+            <a:off x="1737360" y="3703320"/>
             <a:ext cx="4069080" cy="640080"/>
           </a:xfrm>
           <a:prstGeom prst="rect">
@@ -7252,7 +6278,7 @@
           <a:bodyPr wrap="square" lIns="0" tIns="0" rIns="0" bIns="0" rtlCol="0" anchor="ctr"/>
           <a:lstStyle/>
           <a:p>
-            <a:pPr indent="0" marL="0">
+            <a:pPr marL="0" indent="0">
               <a:lnSpc>
                 <a:spcPct val="100000"/>
               </a:lnSpc>
@@ -7267,7 +6293,7 @@
                 <a:ea typeface="Calibri" pitchFamily="34" charset="-122"/>
                 <a:cs typeface="Calibri" pitchFamily="34" charset="-120"/>
               </a:rPr>
-              <a:t>LEFT JOINs keep zero-match songs (count = 0) instead of dropping them.</a:t>
+              <a:t>ISRC must match CC-XXX-YY-NNNNN; malformed-but-present values flagged as anomalies.</a:t>
             </a:r>
             <a:endParaRPr lang="en-US" sz="1200" dirty="0"/>
           </a:p>
@@ -7275,13 +6301,13 @@
       </p:sp>
       <p:sp>
         <p:nvSpPr>
-          <p:cNvPr id="30" name="Shape 23"/>
-          <p:cNvSpPr/>
-          <p:nvPr/>
-        </p:nvSpPr>
-        <p:spPr>
-          <a:xfrm>
-            <a:off x="6172200" y="4572000"/>
+          <p:cNvPr id="20" name="Shape 15"/>
+          <p:cNvSpPr/>
+          <p:nvPr/>
+        </p:nvSpPr>
+        <p:spPr>
+          <a:xfrm>
+            <a:off x="6172200" y="3154680"/>
             <a:ext cx="5303520" cy="1234440"/>
           </a:xfrm>
           <a:prstGeom prst="roundRect">
@@ -7297,13 +6323,13 @@
       </p:sp>
       <p:sp>
         <p:nvSpPr>
-          <p:cNvPr id="31" name="Shape 24"/>
-          <p:cNvSpPr/>
-          <p:nvPr/>
-        </p:nvSpPr>
-        <p:spPr>
-          <a:xfrm>
-            <a:off x="6446520" y="4864608"/>
+          <p:cNvPr id="21" name="Shape 16"/>
+          <p:cNvSpPr/>
+          <p:nvPr/>
+        </p:nvSpPr>
+        <p:spPr>
+          <a:xfrm>
+            <a:off x="6446520" y="3447288"/>
             <a:ext cx="640080" cy="640080"/>
           </a:xfrm>
           <a:prstGeom prst="ellipse">
@@ -7314,7 +6340,7 @@
           </a:solidFill>
           <a:ln/>
           <a:effectLst>
-            <a:outerShdw sx="100000" sy="100000" kx="0" ky="0" algn="bl" rotWithShape="0" blurRad="101600" dist="38100" dir="5400000">
+            <a:outerShdw blurRad="101600" dist="38100" dir="5400000" algn="bl" rotWithShape="0">
               <a:srgbClr val="000000">
                 <a:alpha val="12000"/>
               </a:srgbClr>
@@ -7324,21 +6350,21 @@
       </p:sp>
       <p:pic>
         <p:nvPicPr>
-          <p:cNvPr id="32" name="Image 5" descr="preencoded.png">    </p:cNvPr>
+          <p:cNvPr id="22" name="Image 3" descr="preencoded.png"/>
           <p:cNvPicPr>
             <a:picLocks noChangeAspect="1"/>
           </p:cNvPicPr>
           <p:nvPr/>
         </p:nvPicPr>
         <p:blipFill>
-          <a:blip r:embed="rId6"/>
+          <a:blip r:embed="rId3"/>
           <a:stretch>
             <a:fillRect/>
           </a:stretch>
         </p:blipFill>
         <p:spPr>
           <a:xfrm>
-            <a:off x="6612941" y="5031029"/>
+            <a:off x="6612941" y="3613709"/>
             <a:ext cx="307238" cy="307238"/>
           </a:xfrm>
           <a:prstGeom prst="rect">
@@ -7348,13 +6374,13 @@
       </p:pic>
       <p:sp>
         <p:nvSpPr>
-          <p:cNvPr id="33" name="Text 25"/>
-          <p:cNvSpPr/>
-          <p:nvPr/>
-        </p:nvSpPr>
-        <p:spPr>
-          <a:xfrm>
-            <a:off x="7269480" y="4736592"/>
+          <p:cNvPr id="23" name="Text 17"/>
+          <p:cNvSpPr/>
+          <p:nvPr/>
+        </p:nvSpPr>
+        <p:spPr>
+          <a:xfrm>
+            <a:off x="7269480" y="3319272"/>
             <a:ext cx="4023360" cy="411480"/>
           </a:xfrm>
           <a:prstGeom prst="rect">
@@ -7367,7 +6393,7 @@
           <a:bodyPr wrap="square" lIns="0" tIns="0" rIns="0" bIns="0" rtlCol="0" anchor="ctr"/>
           <a:lstStyle/>
           <a:p>
-            <a:pPr indent="0" marL="0">
+            <a:pPr marL="0" indent="0">
               <a:buNone/>
             </a:pPr>
             <a:r>
@@ -7379,7 +6405,7 @@
                 <a:ea typeface="Cambria" pitchFamily="34" charset="-122"/>
                 <a:cs typeface="Cambria" pitchFamily="34" charset="-120"/>
               </a:rPr>
-              <a:t>Corruption / anomaly</a:t>
+              <a:t>Deduplication</a:t>
             </a:r>
             <a:endParaRPr lang="en-US" sz="1500" dirty="0"/>
           </a:p>
@@ -7387,13 +6413,13 @@
       </p:sp>
       <p:sp>
         <p:nvSpPr>
-          <p:cNvPr id="34" name="Text 26"/>
-          <p:cNvSpPr/>
-          <p:nvPr/>
-        </p:nvSpPr>
-        <p:spPr>
-          <a:xfrm>
-            <a:off x="7269480" y="5120640"/>
+          <p:cNvPr id="24" name="Text 18"/>
+          <p:cNvSpPr/>
+          <p:nvPr/>
+        </p:nvSpPr>
+        <p:spPr>
+          <a:xfrm>
+            <a:off x="7269480" y="3703320"/>
             <a:ext cx="4069080" cy="640080"/>
           </a:xfrm>
           <a:prstGeom prst="rect">
@@ -7406,7 +6432,315 @@
           <a:bodyPr wrap="square" lIns="0" tIns="0" rIns="0" bIns="0" rtlCol="0" anchor="ctr"/>
           <a:lstStyle/>
           <a:p>
-            <a:pPr indent="0" marL="0">
+            <a:pPr marL="0" indent="0">
+              <a:lnSpc>
+                <a:spcPct val="100000"/>
+              </a:lnSpc>
+              <a:buNone/>
+            </a:pPr>
+            <a:r>
+              <a:rPr lang="en-US" sz="1200" dirty="0">
+                <a:solidFill>
+                  <a:srgbClr val="44505F"/>
+                </a:solidFill>
+                <a:latin typeface="Calibri" pitchFamily="34" charset="0"/>
+                <a:ea typeface="Calibri" pitchFamily="34" charset="-122"/>
+                <a:cs typeface="Calibri" pitchFamily="34" charset="-120"/>
+              </a:rPr>
+              <a:t>row_number() windows keep the latest row per natural key in staging.</a:t>
+            </a:r>
+            <a:endParaRPr lang="en-US" sz="1200" dirty="0"/>
+          </a:p>
+        </p:txBody>
+      </p:sp>
+      <p:sp>
+        <p:nvSpPr>
+          <p:cNvPr id="25" name="Shape 19"/>
+          <p:cNvSpPr/>
+          <p:nvPr/>
+        </p:nvSpPr>
+        <p:spPr>
+          <a:xfrm>
+            <a:off x="640080" y="4572000"/>
+            <a:ext cx="5303520" cy="1234440"/>
+          </a:xfrm>
+          <a:prstGeom prst="roundRect">
+            <a:avLst>
+              <a:gd name="adj" fmla="val 5926"/>
+            </a:avLst>
+          </a:prstGeom>
+          <a:solidFill>
+            <a:srgbClr val="F4F6F8"/>
+          </a:solidFill>
+          <a:ln/>
+        </p:spPr>
+      </p:sp>
+      <p:sp>
+        <p:nvSpPr>
+          <p:cNvPr id="26" name="Shape 20"/>
+          <p:cNvSpPr/>
+          <p:nvPr/>
+        </p:nvSpPr>
+        <p:spPr>
+          <a:xfrm>
+            <a:off x="914400" y="4864608"/>
+            <a:ext cx="640080" cy="640080"/>
+          </a:xfrm>
+          <a:prstGeom prst="ellipse">
+            <a:avLst/>
+          </a:prstGeom>
+          <a:solidFill>
+            <a:srgbClr val="12B5A5"/>
+          </a:solidFill>
+          <a:ln/>
+          <a:effectLst>
+            <a:outerShdw blurRad="101600" dist="38100" dir="5400000" algn="bl" rotWithShape="0">
+              <a:srgbClr val="000000">
+                <a:alpha val="12000"/>
+              </a:srgbClr>
+            </a:outerShdw>
+          </a:effectLst>
+        </p:spPr>
+      </p:sp>
+      <p:pic>
+        <p:nvPicPr>
+          <p:cNvPr id="27" name="Image 4" descr="preencoded.png"/>
+          <p:cNvPicPr>
+            <a:picLocks noChangeAspect="1"/>
+          </p:cNvPicPr>
+          <p:nvPr/>
+        </p:nvPicPr>
+        <p:blipFill>
+          <a:blip r:embed="rId3"/>
+          <a:stretch>
+            <a:fillRect/>
+          </a:stretch>
+        </p:blipFill>
+        <p:spPr>
+          <a:xfrm>
+            <a:off x="1080821" y="5031029"/>
+            <a:ext cx="307238" cy="307238"/>
+          </a:xfrm>
+          <a:prstGeom prst="rect">
+            <a:avLst/>
+          </a:prstGeom>
+        </p:spPr>
+      </p:pic>
+      <p:sp>
+        <p:nvSpPr>
+          <p:cNvPr id="28" name="Text 21"/>
+          <p:cNvSpPr/>
+          <p:nvPr/>
+        </p:nvSpPr>
+        <p:spPr>
+          <a:xfrm>
+            <a:off x="1737360" y="4736592"/>
+            <a:ext cx="4023360" cy="411480"/>
+          </a:xfrm>
+          <a:prstGeom prst="rect">
+            <a:avLst/>
+          </a:prstGeom>
+          <a:noFill/>
+          <a:ln/>
+        </p:spPr>
+        <p:txBody>
+          <a:bodyPr wrap="square" lIns="0" tIns="0" rIns="0" bIns="0" rtlCol="0" anchor="ctr"/>
+          <a:lstStyle/>
+          <a:p>
+            <a:pPr marL="0" indent="0">
+              <a:buNone/>
+            </a:pPr>
+            <a:r>
+              <a:rPr lang="en-US" sz="1500" b="1" dirty="0">
+                <a:solidFill>
+                  <a:srgbClr val="1F2430"/>
+                </a:solidFill>
+                <a:latin typeface="Cambria" pitchFamily="34" charset="0"/>
+                <a:ea typeface="Cambria" pitchFamily="34" charset="-122"/>
+                <a:cs typeface="Cambria" pitchFamily="34" charset="-120"/>
+              </a:rPr>
+              <a:t>Missing-data handling</a:t>
+            </a:r>
+            <a:endParaRPr lang="en-US" sz="1500" dirty="0"/>
+          </a:p>
+        </p:txBody>
+      </p:sp>
+      <p:sp>
+        <p:nvSpPr>
+          <p:cNvPr id="29" name="Text 22"/>
+          <p:cNvSpPr/>
+          <p:nvPr/>
+        </p:nvSpPr>
+        <p:spPr>
+          <a:xfrm>
+            <a:off x="1737360" y="5120640"/>
+            <a:ext cx="4069080" cy="640080"/>
+          </a:xfrm>
+          <a:prstGeom prst="rect">
+            <a:avLst/>
+          </a:prstGeom>
+          <a:noFill/>
+          <a:ln/>
+        </p:spPr>
+        <p:txBody>
+          <a:bodyPr wrap="square" lIns="0" tIns="0" rIns="0" bIns="0" rtlCol="0" anchor="ctr"/>
+          <a:lstStyle/>
+          <a:p>
+            <a:pPr marL="0" indent="0">
+              <a:lnSpc>
+                <a:spcPct val="100000"/>
+              </a:lnSpc>
+              <a:buNone/>
+            </a:pPr>
+            <a:r>
+              <a:rPr lang="en-US" sz="1200" dirty="0">
+                <a:solidFill>
+                  <a:srgbClr val="44505F"/>
+                </a:solidFill>
+                <a:latin typeface="Calibri" pitchFamily="34" charset="0"/>
+                <a:ea typeface="Calibri" pitchFamily="34" charset="-122"/>
+                <a:cs typeface="Calibri" pitchFamily="34" charset="-120"/>
+              </a:rPr>
+              <a:t>LEFT JOINs keep zero-match songs (count = 0) instead of dropping them.</a:t>
+            </a:r>
+            <a:endParaRPr lang="en-US" sz="1200" dirty="0"/>
+          </a:p>
+        </p:txBody>
+      </p:sp>
+      <p:sp>
+        <p:nvSpPr>
+          <p:cNvPr id="30" name="Shape 23"/>
+          <p:cNvSpPr/>
+          <p:nvPr/>
+        </p:nvSpPr>
+        <p:spPr>
+          <a:xfrm>
+            <a:off x="6172200" y="4572000"/>
+            <a:ext cx="5303520" cy="1234440"/>
+          </a:xfrm>
+          <a:prstGeom prst="roundRect">
+            <a:avLst>
+              <a:gd name="adj" fmla="val 5926"/>
+            </a:avLst>
+          </a:prstGeom>
+          <a:solidFill>
+            <a:srgbClr val="F4F6F8"/>
+          </a:solidFill>
+          <a:ln/>
+        </p:spPr>
+      </p:sp>
+      <p:sp>
+        <p:nvSpPr>
+          <p:cNvPr id="31" name="Shape 24"/>
+          <p:cNvSpPr/>
+          <p:nvPr/>
+        </p:nvSpPr>
+        <p:spPr>
+          <a:xfrm>
+            <a:off x="6446520" y="4864608"/>
+            <a:ext cx="640080" cy="640080"/>
+          </a:xfrm>
+          <a:prstGeom prst="ellipse">
+            <a:avLst/>
+          </a:prstGeom>
+          <a:solidFill>
+            <a:srgbClr val="12B5A5"/>
+          </a:solidFill>
+          <a:ln/>
+          <a:effectLst>
+            <a:outerShdw blurRad="101600" dist="38100" dir="5400000" algn="bl" rotWithShape="0">
+              <a:srgbClr val="000000">
+                <a:alpha val="12000"/>
+              </a:srgbClr>
+            </a:outerShdw>
+          </a:effectLst>
+        </p:spPr>
+      </p:sp>
+      <p:pic>
+        <p:nvPicPr>
+          <p:cNvPr id="32" name="Image 5" descr="preencoded.png"/>
+          <p:cNvPicPr>
+            <a:picLocks noChangeAspect="1"/>
+          </p:cNvPicPr>
+          <p:nvPr/>
+        </p:nvPicPr>
+        <p:blipFill>
+          <a:blip r:embed="rId3"/>
+          <a:stretch>
+            <a:fillRect/>
+          </a:stretch>
+        </p:blipFill>
+        <p:spPr>
+          <a:xfrm>
+            <a:off x="6612941" y="5031029"/>
+            <a:ext cx="307238" cy="307238"/>
+          </a:xfrm>
+          <a:prstGeom prst="rect">
+            <a:avLst/>
+          </a:prstGeom>
+        </p:spPr>
+      </p:pic>
+      <p:sp>
+        <p:nvSpPr>
+          <p:cNvPr id="33" name="Text 25"/>
+          <p:cNvSpPr/>
+          <p:nvPr/>
+        </p:nvSpPr>
+        <p:spPr>
+          <a:xfrm>
+            <a:off x="7269480" y="4736592"/>
+            <a:ext cx="4023360" cy="411480"/>
+          </a:xfrm>
+          <a:prstGeom prst="rect">
+            <a:avLst/>
+          </a:prstGeom>
+          <a:noFill/>
+          <a:ln/>
+        </p:spPr>
+        <p:txBody>
+          <a:bodyPr wrap="square" lIns="0" tIns="0" rIns="0" bIns="0" rtlCol="0" anchor="ctr"/>
+          <a:lstStyle/>
+          <a:p>
+            <a:pPr marL="0" indent="0">
+              <a:buNone/>
+            </a:pPr>
+            <a:r>
+              <a:rPr lang="en-US" sz="1500" b="1" dirty="0">
+                <a:solidFill>
+                  <a:srgbClr val="1F2430"/>
+                </a:solidFill>
+                <a:latin typeface="Cambria" pitchFamily="34" charset="0"/>
+                <a:ea typeface="Cambria" pitchFamily="34" charset="-122"/>
+                <a:cs typeface="Cambria" pitchFamily="34" charset="-120"/>
+              </a:rPr>
+              <a:t>Corruption / anomaly</a:t>
+            </a:r>
+            <a:endParaRPr lang="en-US" sz="1500" dirty="0"/>
+          </a:p>
+        </p:txBody>
+      </p:sp>
+      <p:sp>
+        <p:nvSpPr>
+          <p:cNvPr id="34" name="Text 26"/>
+          <p:cNvSpPr/>
+          <p:nvPr/>
+        </p:nvSpPr>
+        <p:spPr>
+          <a:xfrm>
+            <a:off x="7269480" y="5120640"/>
+            <a:ext cx="4069080" cy="640080"/>
+          </a:xfrm>
+          <a:prstGeom prst="rect">
+            <a:avLst/>
+          </a:prstGeom>
+          <a:noFill/>
+          <a:ln/>
+        </p:spPr>
+        <p:txBody>
+          <a:bodyPr wrap="square" lIns="0" tIns="0" rIns="0" bIns="0" rtlCol="0" anchor="ctr"/>
+          <a:lstStyle/>
+          <a:p>
+            <a:pPr marL="0" indent="0">
               <a:lnSpc>
                 <a:spcPct val="100000"/>
               </a:lnSpc>
@@ -7443,6 +6777,7 @@
         <a:solidFill>
           <a:srgbClr val="FFFFFF"/>
         </a:solidFill>
+        <a:effectLst/>
       </p:bgPr>
     </p:bg>
     <p:spTree>
@@ -7480,7 +6815,7 @@
           <a:bodyPr wrap="square" rtlCol="0" anchor="ctr"/>
           <a:lstStyle/>
           <a:p>
-            <a:pPr algn="l" indent="0" marL="0">
+            <a:pPr marL="0" indent="0" algn="l">
               <a:buNone/>
             </a:pPr>
             <a:r>
@@ -7519,7 +6854,7 @@
           <a:bodyPr wrap="square" lIns="0" tIns="0" rIns="0" bIns="0" rtlCol="0" anchor="ctr"/>
           <a:lstStyle/>
           <a:p>
-            <a:pPr indent="0" marL="0">
+            <a:pPr marL="0" indent="0">
               <a:buNone/>
             </a:pPr>
             <a:r>
@@ -7558,7 +6893,7 @@
           <a:bodyPr wrap="square" lIns="0" tIns="0" rIns="0" bIns="0" rtlCol="0" anchor="ctr"/>
           <a:lstStyle/>
           <a:p>
-            <a:pPr indent="0" marL="0">
+            <a:pPr marL="0" indent="0">
               <a:buNone/>
             </a:pPr>
             <a:r>
@@ -7597,7 +6932,7 @@
           </a:solidFill>
           <a:ln/>
           <a:effectLst>
-            <a:outerShdw sx="100000" sy="100000" kx="0" ky="0" algn="bl" rotWithShape="0" blurRad="101600" dist="38100" dir="5400000">
+            <a:outerShdw blurRad="101600" dist="38100" dir="5400000" algn="bl" rotWithShape="0">
               <a:srgbClr val="000000">
                 <a:alpha val="12000"/>
               </a:srgbClr>
@@ -7624,7 +6959,7 @@
           </a:solidFill>
           <a:ln/>
           <a:effectLst>
-            <a:outerShdw sx="100000" sy="100000" kx="0" ky="0" algn="bl" rotWithShape="0" blurRad="101600" dist="38100" dir="5400000">
+            <a:outerShdw blurRad="101600" dist="38100" dir="5400000" algn="bl" rotWithShape="0">
               <a:srgbClr val="000000">
                 <a:alpha val="12000"/>
               </a:srgbClr>
@@ -7634,14 +6969,14 @@
       </p:sp>
       <p:pic>
         <p:nvPicPr>
-          <p:cNvPr id="7" name="Image 0" descr="preencoded.png">    </p:cNvPr>
+          <p:cNvPr id="7" name="Image 0" descr="preencoded.png"/>
           <p:cNvPicPr>
             <a:picLocks noChangeAspect="1"/>
           </p:cNvPicPr>
           <p:nvPr/>
         </p:nvPicPr>
         <p:blipFill>
-          <a:blip r:embed="rId1"/>
+          <a:blip r:embed="rId3"/>
           <a:stretch>
             <a:fillRect/>
           </a:stretch>
@@ -7677,7 +7012,7 @@
           <a:bodyPr wrap="square" lIns="0" tIns="0" rIns="0" bIns="0" rtlCol="0" anchor="ctr"/>
           <a:lstStyle/>
           <a:p>
-            <a:pPr indent="0" marL="0">
+            <a:pPr marL="0" indent="0">
               <a:buNone/>
             </a:pPr>
             <a:r>
@@ -7822,7 +7157,7 @@
           </a:solidFill>
           <a:ln/>
           <a:effectLst>
-            <a:outerShdw sx="100000" sy="100000" kx="0" ky="0" algn="bl" rotWithShape="0" blurRad="101600" dist="38100" dir="5400000">
+            <a:outerShdw blurRad="101600" dist="38100" dir="5400000" algn="bl" rotWithShape="0">
               <a:srgbClr val="000000">
                 <a:alpha val="12000"/>
               </a:srgbClr>
@@ -7849,7 +7184,7 @@
           </a:solidFill>
           <a:ln/>
           <a:effectLst>
-            <a:outerShdw sx="100000" sy="100000" kx="0" ky="0" algn="bl" rotWithShape="0" blurRad="101600" dist="38100" dir="5400000">
+            <a:outerShdw blurRad="101600" dist="38100" dir="5400000" algn="bl" rotWithShape="0">
               <a:srgbClr val="000000">
                 <a:alpha val="12000"/>
               </a:srgbClr>
@@ -7859,14 +7194,14 @@
       </p:sp>
       <p:pic>
         <p:nvPicPr>
-          <p:cNvPr id="12" name="Image 1" descr="preencoded.png">    </p:cNvPr>
+          <p:cNvPr id="12" name="Image 1" descr="preencoded.png"/>
           <p:cNvPicPr>
             <a:picLocks noChangeAspect="1"/>
           </p:cNvPicPr>
           <p:nvPr/>
         </p:nvPicPr>
         <p:blipFill>
-          <a:blip r:embed="rId2"/>
+          <a:blip r:embed="rId4"/>
           <a:stretch>
             <a:fillRect/>
           </a:stretch>
@@ -7902,7 +7237,7 @@
           <a:bodyPr wrap="square" lIns="0" tIns="0" rIns="0" bIns="0" rtlCol="0" anchor="ctr"/>
           <a:lstStyle/>
           <a:p>
-            <a:pPr indent="0" marL="0">
+            <a:pPr marL="0" indent="0">
               <a:buNone/>
             </a:pPr>
             <a:r>
@@ -8042,6 +7377,7 @@
         <a:solidFill>
           <a:srgbClr val="FFFFFF"/>
         </a:solidFill>
+        <a:effectLst/>
       </p:bgPr>
     </p:bg>
     <p:spTree>
@@ -8079,7 +7415,7 @@
           <a:bodyPr wrap="square" rtlCol="0" anchor="ctr"/>
           <a:lstStyle/>
           <a:p>
-            <a:pPr algn="l" indent="0" marL="0">
+            <a:pPr marL="0" indent="0" algn="l">
               <a:buNone/>
             </a:pPr>
             <a:r>
@@ -8118,7 +7454,7 @@
           <a:bodyPr wrap="square" lIns="0" tIns="0" rIns="0" bIns="0" rtlCol="0" anchor="ctr"/>
           <a:lstStyle/>
           <a:p>
-            <a:pPr indent="0" marL="0">
+            <a:pPr marL="0" indent="0">
               <a:buNone/>
             </a:pPr>
             <a:r>
@@ -8157,7 +7493,7 @@
           <a:bodyPr wrap="square" lIns="0" tIns="0" rIns="0" bIns="0" rtlCol="0" anchor="ctr"/>
           <a:lstStyle/>
           <a:p>
-            <a:pPr indent="0" marL="0">
+            <a:pPr marL="0" indent="0">
               <a:buNone/>
             </a:pPr>
             <a:r>
@@ -8196,7 +7532,7 @@
           </a:solidFill>
           <a:ln/>
           <a:effectLst>
-            <a:outerShdw sx="100000" sy="100000" kx="0" ky="0" algn="bl" rotWithShape="0" blurRad="101600" dist="38100" dir="5400000">
+            <a:outerShdw blurRad="101600" dist="38100" dir="5400000" algn="bl" rotWithShape="0">
               <a:srgbClr val="000000">
                 <a:alpha val="12000"/>
               </a:srgbClr>
@@ -8223,7 +7559,7 @@
           </a:solidFill>
           <a:ln/>
           <a:effectLst>
-            <a:outerShdw sx="100000" sy="100000" kx="0" ky="0" algn="bl" rotWithShape="0" blurRad="101600" dist="38100" dir="5400000">
+            <a:outerShdw blurRad="101600" dist="38100" dir="5400000" algn="bl" rotWithShape="0">
               <a:srgbClr val="000000">
                 <a:alpha val="12000"/>
               </a:srgbClr>
@@ -8233,14 +7569,14 @@
       </p:sp>
       <p:pic>
         <p:nvPicPr>
-          <p:cNvPr id="7" name="Image 0" descr="preencoded.png">    </p:cNvPr>
+          <p:cNvPr id="7" name="Image 0" descr="preencoded.png"/>
           <p:cNvPicPr>
             <a:picLocks noChangeAspect="1"/>
           </p:cNvPicPr>
           <p:nvPr/>
         </p:nvPicPr>
         <p:blipFill>
-          <a:blip r:embed="rId1"/>
+          <a:blip r:embed="rId3"/>
           <a:stretch>
             <a:fillRect/>
           </a:stretch>
@@ -8276,7 +7612,7 @@
           <a:bodyPr wrap="square" lIns="0" tIns="0" rIns="0" bIns="0" rtlCol="0" anchor="ctr"/>
           <a:lstStyle/>
           <a:p>
-            <a:pPr indent="0" marL="0">
+            <a:pPr marL="0" indent="0">
               <a:buNone/>
             </a:pPr>
             <a:r>
@@ -8421,7 +7757,7 @@
           </a:solidFill>
           <a:ln/>
           <a:effectLst>
-            <a:outerShdw sx="100000" sy="100000" kx="0" ky="0" algn="bl" rotWithShape="0" blurRad="101600" dist="38100" dir="5400000">
+            <a:outerShdw blurRad="101600" dist="38100" dir="5400000" algn="bl" rotWithShape="0">
               <a:srgbClr val="000000">
                 <a:alpha val="12000"/>
               </a:srgbClr>
@@ -8448,7 +7784,7 @@
           </a:solidFill>
           <a:ln/>
           <a:effectLst>
-            <a:outerShdw sx="100000" sy="100000" kx="0" ky="0" algn="bl" rotWithShape="0" blurRad="101600" dist="38100" dir="5400000">
+            <a:outerShdw blurRad="101600" dist="38100" dir="5400000" algn="bl" rotWithShape="0">
               <a:srgbClr val="000000">
                 <a:alpha val="12000"/>
               </a:srgbClr>
@@ -8458,14 +7794,14 @@
       </p:sp>
       <p:pic>
         <p:nvPicPr>
-          <p:cNvPr id="12" name="Image 1" descr="preencoded.png">    </p:cNvPr>
+          <p:cNvPr id="12" name="Image 1" descr="preencoded.png"/>
           <p:cNvPicPr>
             <a:picLocks noChangeAspect="1"/>
           </p:cNvPicPr>
           <p:nvPr/>
         </p:nvPicPr>
         <p:blipFill>
-          <a:blip r:embed="rId2"/>
+          <a:blip r:embed="rId4"/>
           <a:stretch>
             <a:fillRect/>
           </a:stretch>
@@ -8501,7 +7837,7 @@
           <a:bodyPr wrap="square" lIns="0" tIns="0" rIns="0" bIns="0" rtlCol="0" anchor="ctr"/>
           <a:lstStyle/>
           <a:p>
-            <a:pPr indent="0" marL="0">
+            <a:pPr marL="0" indent="0">
               <a:buNone/>
             </a:pPr>
             <a:r>
@@ -8641,6 +7977,7 @@
         <a:solidFill>
           <a:srgbClr val="FFFFFF"/>
         </a:solidFill>
+        <a:effectLst/>
       </p:bgPr>
     </p:bg>
     <p:spTree>
@@ -8678,7 +8015,7 @@
           <a:bodyPr wrap="square" rtlCol="0" anchor="ctr"/>
           <a:lstStyle/>
           <a:p>
-            <a:pPr algn="l" indent="0" marL="0">
+            <a:pPr marL="0" indent="0" algn="l">
               <a:buNone/>
             </a:pPr>
             <a:r>
@@ -8717,7 +8054,7 @@
           <a:bodyPr wrap="square" lIns="0" tIns="0" rIns="0" bIns="0" rtlCol="0" anchor="ctr"/>
           <a:lstStyle/>
           <a:p>
-            <a:pPr indent="0" marL="0">
+            <a:pPr marL="0" indent="0">
               <a:buNone/>
             </a:pPr>
             <a:r>
@@ -8756,7 +8093,7 @@
           <a:bodyPr wrap="square" lIns="0" tIns="0" rIns="0" bIns="0" rtlCol="0" anchor="ctr"/>
           <a:lstStyle/>
           <a:p>
-            <a:pPr indent="0" marL="0">
+            <a:pPr marL="0" indent="0">
               <a:buNone/>
             </a:pPr>
             <a:r>
@@ -8768,7 +8105,7 @@
                 <a:ea typeface="Calibri" pitchFamily="34" charset="-122"/>
                 <a:cs typeface="Calibri" pitchFamily="34" charset="-120"/>
               </a:rPr>
-              <a:t>End-to-end run on a 15-song sample — both answers, materialized</a:t>
+              <a:t>Real run on the provided catalog (698 songs; 30 processed this run)</a:t>
             </a:r>
             <a:endParaRPr lang="en-US" sz="1400" dirty="0"/>
           </a:p>
@@ -8776,17 +8113,2568 @@
       </p:sp>
       <p:graphicFrame>
         <p:nvGraphicFramePr>
-          <p:cNvPr id="5" name="Chart 0" descr=""/>
-          <p:cNvGraphicFramePr/>
-          <p:nvPr/>
+          <p:cNvPr id="10" name="Table 0"/>
+          <p:cNvGraphicFramePr>
+            <a:graphicFrameLocks noGrp="1"/>
+          </p:cNvGraphicFramePr>
+          <p:nvPr>
+            <p:extLst>
+              <p:ext uri="{D42A27DB-BD31-4B8C-83A1-F6EECF244321}">
+                <p14:modId xmlns:p14="http://schemas.microsoft.com/office/powerpoint/2010/main" val="1579011935"/>
+              </p:ext>
+            </p:extLst>
+          </p:nvPr>
         </p:nvGraphicFramePr>
         <p:xfrm>
-          <a:off x="640080" y="1691640"/>
-          <a:ext cx="6949440" cy="4297680"/>
+          <a:off x="640080" y="1783080"/>
+          <a:ext cx="6858000" cy="3456432"/>
         </p:xfrm>
-        <a:graphic xmlns:a="http://schemas.openxmlformats.org/drawingml/2006/main">
-          <a:graphicData uri="http://schemas.openxmlformats.org/drawingml/2006/chart">
-            <c:chart xmlns:c="http://schemas.openxmlformats.org/drawingml/2006/chart" r:id="rId1"/>
+        <a:graphic>
+          <a:graphicData uri="http://schemas.openxmlformats.org/drawingml/2006/table">
+            <a:tbl>
+              <a:tblPr/>
+              <a:tblGrid>
+                <a:gridCol w="3017520">
+                  <a:extLst>
+                    <a:ext uri="{9D8B030D-6E8A-4147-A177-3AD203B41FA5}">
+                      <a16:colId xmlns:a16="http://schemas.microsoft.com/office/drawing/2014/main" val="20000"/>
+                    </a:ext>
+                  </a:extLst>
+                </a:gridCol>
+                <a:gridCol w="1737360">
+                  <a:extLst>
+                    <a:ext uri="{9D8B030D-6E8A-4147-A177-3AD203B41FA5}">
+                      <a16:colId xmlns:a16="http://schemas.microsoft.com/office/drawing/2014/main" val="20001"/>
+                    </a:ext>
+                  </a:extLst>
+                </a:gridCol>
+                <a:gridCol w="1005840">
+                  <a:extLst>
+                    <a:ext uri="{9D8B030D-6E8A-4147-A177-3AD203B41FA5}">
+                      <a16:colId xmlns:a16="http://schemas.microsoft.com/office/drawing/2014/main" val="20002"/>
+                    </a:ext>
+                  </a:extLst>
+                </a:gridCol>
+                <a:gridCol w="1097280">
+                  <a:extLst>
+                    <a:ext uri="{9D8B030D-6E8A-4147-A177-3AD203B41FA5}">
+                      <a16:colId xmlns:a16="http://schemas.microsoft.com/office/drawing/2014/main" val="20003"/>
+                    </a:ext>
+                  </a:extLst>
+                </a:gridCol>
+              </a:tblGrid>
+              <a:tr h="384048">
+                <a:tc>
+                  <a:txBody>
+                    <a:bodyPr/>
+                    <a:lstStyle/>
+                    <a:p>
+                      <a:pPr marL="0" indent="0" algn="l">
+                        <a:buNone/>
+                      </a:pPr>
+                      <a:r>
+                        <a:rPr lang="en-US" sz="1200" b="1" dirty="0">
+                          <a:solidFill>
+                            <a:srgbClr val="FFFFFF"/>
+                          </a:solidFill>
+                          <a:latin typeface="Calibri" pitchFamily="34" charset="0"/>
+                          <a:ea typeface="Calibri" pitchFamily="34" charset="-122"/>
+                          <a:cs typeface="Calibri" pitchFamily="34" charset="-120"/>
+                        </a:rPr>
+                        <a:t>Song</a:t>
+                      </a:r>
+                      <a:endParaRPr lang="en-US" sz="1200" dirty="0">
+                        <a:latin typeface="Calibri" charset="0"/>
+                        <a:ea typeface="Calibri" charset="0"/>
+                        <a:cs typeface="Calibri" charset="0"/>
+                      </a:endParaRPr>
+                    </a:p>
+                  </a:txBody>
+                  <a:tcPr marL="38100" marR="38100" marT="38100" marB="38100" anchor="ctr">
+                    <a:lnL w="12700" cap="flat" cmpd="sng" algn="ctr">
+                      <a:solidFill>
+                        <a:srgbClr val="E2E6EC"/>
+                      </a:solidFill>
+                      <a:prstDash val="solid"/>
+                      <a:round/>
+                      <a:headEnd type="none" w="med" len="med"/>
+                      <a:tailEnd type="none" w="med" len="med"/>
+                    </a:lnL>
+                    <a:lnR w="12700" cap="flat" cmpd="sng" algn="ctr">
+                      <a:solidFill>
+                        <a:srgbClr val="E2E6EC"/>
+                      </a:solidFill>
+                      <a:prstDash val="solid"/>
+                      <a:round/>
+                      <a:headEnd type="none" w="med" len="med"/>
+                      <a:tailEnd type="none" w="med" len="med"/>
+                    </a:lnR>
+                    <a:lnT w="12700" cap="flat" cmpd="sng" algn="ctr">
+                      <a:solidFill>
+                        <a:srgbClr val="E2E6EC"/>
+                      </a:solidFill>
+                      <a:prstDash val="solid"/>
+                      <a:round/>
+                      <a:headEnd type="none" w="med" len="med"/>
+                      <a:tailEnd type="none" w="med" len="med"/>
+                    </a:lnT>
+                    <a:lnB w="12700" cap="flat" cmpd="sng" algn="ctr">
+                      <a:solidFill>
+                        <a:srgbClr val="E2E6EC"/>
+                      </a:solidFill>
+                      <a:prstDash val="solid"/>
+                      <a:round/>
+                      <a:headEnd type="none" w="med" len="med"/>
+                      <a:tailEnd type="none" w="med" len="med"/>
+                    </a:lnB>
+                    <a:solidFill>
+                      <a:srgbClr val="14121C"/>
+                    </a:solidFill>
+                  </a:tcPr>
+                </a:tc>
+                <a:tc>
+                  <a:txBody>
+                    <a:bodyPr/>
+                    <a:lstStyle/>
+                    <a:p>
+                      <a:pPr marL="0" indent="0" algn="l">
+                        <a:buNone/>
+                      </a:pPr>
+                      <a:r>
+                        <a:rPr lang="en-US" sz="1200" b="1" dirty="0">
+                          <a:solidFill>
+                            <a:srgbClr val="FFFFFF"/>
+                          </a:solidFill>
+                          <a:latin typeface="Calibri" pitchFamily="34" charset="0"/>
+                          <a:ea typeface="Calibri" pitchFamily="34" charset="-122"/>
+                          <a:cs typeface="Calibri" pitchFamily="34" charset="-120"/>
+                        </a:rPr>
+                        <a:t>Artist</a:t>
+                      </a:r>
+                      <a:endParaRPr lang="en-US" sz="1200" dirty="0">
+                        <a:latin typeface="Calibri" charset="0"/>
+                        <a:ea typeface="Calibri" charset="0"/>
+                        <a:cs typeface="Calibri" charset="0"/>
+                      </a:endParaRPr>
+                    </a:p>
+                  </a:txBody>
+                  <a:tcPr marL="38100" marR="38100" marT="38100" marB="38100" anchor="ctr">
+                    <a:lnL w="12700" cap="flat" cmpd="sng" algn="ctr">
+                      <a:solidFill>
+                        <a:srgbClr val="E2E6EC"/>
+                      </a:solidFill>
+                      <a:prstDash val="solid"/>
+                      <a:round/>
+                      <a:headEnd type="none" w="med" len="med"/>
+                      <a:tailEnd type="none" w="med" len="med"/>
+                    </a:lnL>
+                    <a:lnR w="12700" cap="flat" cmpd="sng" algn="ctr">
+                      <a:solidFill>
+                        <a:srgbClr val="E2E6EC"/>
+                      </a:solidFill>
+                      <a:prstDash val="solid"/>
+                      <a:round/>
+                      <a:headEnd type="none" w="med" len="med"/>
+                      <a:tailEnd type="none" w="med" len="med"/>
+                    </a:lnR>
+                    <a:lnT w="12700" cap="flat" cmpd="sng" algn="ctr">
+                      <a:solidFill>
+                        <a:srgbClr val="E2E6EC"/>
+                      </a:solidFill>
+                      <a:prstDash val="solid"/>
+                      <a:round/>
+                      <a:headEnd type="none" w="med" len="med"/>
+                      <a:tailEnd type="none" w="med" len="med"/>
+                    </a:lnT>
+                    <a:lnB w="12700" cap="flat" cmpd="sng" algn="ctr">
+                      <a:solidFill>
+                        <a:srgbClr val="E2E6EC"/>
+                      </a:solidFill>
+                      <a:prstDash val="solid"/>
+                      <a:round/>
+                      <a:headEnd type="none" w="med" len="med"/>
+                      <a:tailEnd type="none" w="med" len="med"/>
+                    </a:lnB>
+                    <a:solidFill>
+                      <a:srgbClr val="14121C"/>
+                    </a:solidFill>
+                  </a:tcPr>
+                </a:tc>
+                <a:tc>
+                  <a:txBody>
+                    <a:bodyPr/>
+                    <a:lstStyle/>
+                    <a:p>
+                      <a:pPr marL="0" indent="0" algn="ctr">
+                        <a:buNone/>
+                      </a:pPr>
+                      <a:r>
+                        <a:rPr lang="en-US" sz="1200" b="1" dirty="0">
+                          <a:solidFill>
+                            <a:srgbClr val="FFFFFF"/>
+                          </a:solidFill>
+                          <a:latin typeface="Calibri" pitchFamily="34" charset="0"/>
+                          <a:ea typeface="Calibri" pitchFamily="34" charset="-122"/>
+                          <a:cs typeface="Calibri" pitchFamily="34" charset="-120"/>
+                        </a:rPr>
+                        <a:t>ISRC</a:t>
+                      </a:r>
+                      <a:endParaRPr lang="en-US" sz="1200" dirty="0">
+                        <a:latin typeface="Calibri" charset="0"/>
+                        <a:ea typeface="Calibri" charset="0"/>
+                        <a:cs typeface="Calibri" charset="0"/>
+                      </a:endParaRPr>
+                    </a:p>
+                  </a:txBody>
+                  <a:tcPr marL="38100" marR="38100" marT="38100" marB="38100" anchor="ctr">
+                    <a:lnL w="12700" cap="flat" cmpd="sng" algn="ctr">
+                      <a:solidFill>
+                        <a:srgbClr val="E2E6EC"/>
+                      </a:solidFill>
+                      <a:prstDash val="solid"/>
+                      <a:round/>
+                      <a:headEnd type="none" w="med" len="med"/>
+                      <a:tailEnd type="none" w="med" len="med"/>
+                    </a:lnL>
+                    <a:lnR w="12700" cap="flat" cmpd="sng" algn="ctr">
+                      <a:solidFill>
+                        <a:srgbClr val="E2E6EC"/>
+                      </a:solidFill>
+                      <a:prstDash val="solid"/>
+                      <a:round/>
+                      <a:headEnd type="none" w="med" len="med"/>
+                      <a:tailEnd type="none" w="med" len="med"/>
+                    </a:lnR>
+                    <a:lnT w="12700" cap="flat" cmpd="sng" algn="ctr">
+                      <a:solidFill>
+                        <a:srgbClr val="E2E6EC"/>
+                      </a:solidFill>
+                      <a:prstDash val="solid"/>
+                      <a:round/>
+                      <a:headEnd type="none" w="med" len="med"/>
+                      <a:tailEnd type="none" w="med" len="med"/>
+                    </a:lnT>
+                    <a:lnB w="12700" cap="flat" cmpd="sng" algn="ctr">
+                      <a:solidFill>
+                        <a:srgbClr val="E2E6EC"/>
+                      </a:solidFill>
+                      <a:prstDash val="solid"/>
+                      <a:round/>
+                      <a:headEnd type="none" w="med" len="med"/>
+                      <a:tailEnd type="none" w="med" len="med"/>
+                    </a:lnB>
+                    <a:solidFill>
+                      <a:srgbClr val="14121C"/>
+                    </a:solidFill>
+                  </a:tcPr>
+                </a:tc>
+                <a:tc>
+                  <a:txBody>
+                    <a:bodyPr/>
+                    <a:lstStyle/>
+                    <a:p>
+                      <a:pPr marL="0" indent="0" algn="ctr">
+                        <a:buNone/>
+                      </a:pPr>
+                      <a:r>
+                        <a:rPr lang="en-US" sz="1200" b="1" dirty="0">
+                          <a:solidFill>
+                            <a:srgbClr val="FFFFFF"/>
+                          </a:solidFill>
+                          <a:latin typeface="Calibri" pitchFamily="34" charset="0"/>
+                          <a:ea typeface="Calibri" pitchFamily="34" charset="-122"/>
+                          <a:cs typeface="Calibri" pitchFamily="34" charset="-120"/>
+                        </a:rPr>
+                        <a:t>YT videos</a:t>
+                      </a:r>
+                      <a:endParaRPr lang="en-US" sz="1200" dirty="0">
+                        <a:latin typeface="Calibri" charset="0"/>
+                        <a:ea typeface="Calibri" charset="0"/>
+                        <a:cs typeface="Calibri" charset="0"/>
+                      </a:endParaRPr>
+                    </a:p>
+                  </a:txBody>
+                  <a:tcPr marL="38100" marR="38100" marT="38100" marB="38100" anchor="ctr">
+                    <a:lnL w="12700" cap="flat" cmpd="sng" algn="ctr">
+                      <a:solidFill>
+                        <a:srgbClr val="E2E6EC"/>
+                      </a:solidFill>
+                      <a:prstDash val="solid"/>
+                      <a:round/>
+                      <a:headEnd type="none" w="med" len="med"/>
+                      <a:tailEnd type="none" w="med" len="med"/>
+                    </a:lnL>
+                    <a:lnR w="12700" cap="flat" cmpd="sng" algn="ctr">
+                      <a:solidFill>
+                        <a:srgbClr val="E2E6EC"/>
+                      </a:solidFill>
+                      <a:prstDash val="solid"/>
+                      <a:round/>
+                      <a:headEnd type="none" w="med" len="med"/>
+                      <a:tailEnd type="none" w="med" len="med"/>
+                    </a:lnR>
+                    <a:lnT w="12700" cap="flat" cmpd="sng" algn="ctr">
+                      <a:solidFill>
+                        <a:srgbClr val="E2E6EC"/>
+                      </a:solidFill>
+                      <a:prstDash val="solid"/>
+                      <a:round/>
+                      <a:headEnd type="none" w="med" len="med"/>
+                      <a:tailEnd type="none" w="med" len="med"/>
+                    </a:lnT>
+                    <a:lnB w="12700" cap="flat" cmpd="sng" algn="ctr">
+                      <a:solidFill>
+                        <a:srgbClr val="E2E6EC"/>
+                      </a:solidFill>
+                      <a:prstDash val="solid"/>
+                      <a:round/>
+                      <a:headEnd type="none" w="med" len="med"/>
+                      <a:tailEnd type="none" w="med" len="med"/>
+                    </a:lnB>
+                    <a:solidFill>
+                      <a:srgbClr val="14121C"/>
+                    </a:solidFill>
+                  </a:tcPr>
+                </a:tc>
+                <a:extLst>
+                  <a:ext uri="{0D108BD9-81ED-4DB2-BD59-A6C34878D82A}">
+                    <a16:rowId xmlns:a16="http://schemas.microsoft.com/office/drawing/2014/main" val="10000"/>
+                  </a:ext>
+                </a:extLst>
+              </a:tr>
+              <a:tr h="384048">
+                <a:tc>
+                  <a:txBody>
+                    <a:bodyPr/>
+                    <a:lstStyle/>
+                    <a:p>
+                      <a:pPr marL="0" indent="0">
+                        <a:buNone/>
+                      </a:pPr>
+                      <a:r>
+                        <a:rPr lang="en-US" sz="1200" dirty="0">
+                          <a:solidFill>
+                            <a:srgbClr val="1F2430"/>
+                          </a:solidFill>
+                          <a:latin typeface="Calibri" pitchFamily="34" charset="0"/>
+                          <a:ea typeface="Calibri" pitchFamily="34" charset="-122"/>
+                          <a:cs typeface="Calibri" pitchFamily="34" charset="-120"/>
+                        </a:rPr>
+                        <a:t>Dusta</a:t>
+                      </a:r>
+                      <a:endParaRPr lang="en-US" sz="1200" dirty="0">
+                        <a:latin typeface="Calibri" charset="0"/>
+                        <a:ea typeface="Calibri" charset="0"/>
+                        <a:cs typeface="Calibri" charset="0"/>
+                      </a:endParaRPr>
+                    </a:p>
+                  </a:txBody>
+                  <a:tcPr marL="38100" marR="38100" marT="38100" marB="38100" anchor="ctr">
+                    <a:lnL w="12700" cap="flat" cmpd="sng" algn="ctr">
+                      <a:solidFill>
+                        <a:srgbClr val="E2E6EC"/>
+                      </a:solidFill>
+                      <a:prstDash val="solid"/>
+                      <a:round/>
+                      <a:headEnd type="none" w="med" len="med"/>
+                      <a:tailEnd type="none" w="med" len="med"/>
+                    </a:lnL>
+                    <a:lnR w="12700" cap="flat" cmpd="sng" algn="ctr">
+                      <a:solidFill>
+                        <a:srgbClr val="E2E6EC"/>
+                      </a:solidFill>
+                      <a:prstDash val="solid"/>
+                      <a:round/>
+                      <a:headEnd type="none" w="med" len="med"/>
+                      <a:tailEnd type="none" w="med" len="med"/>
+                    </a:lnR>
+                    <a:lnT w="12700" cap="flat" cmpd="sng" algn="ctr">
+                      <a:solidFill>
+                        <a:srgbClr val="E2E6EC"/>
+                      </a:solidFill>
+                      <a:prstDash val="solid"/>
+                      <a:round/>
+                      <a:headEnd type="none" w="med" len="med"/>
+                      <a:tailEnd type="none" w="med" len="med"/>
+                    </a:lnT>
+                    <a:lnB w="12700" cap="flat" cmpd="sng" algn="ctr">
+                      <a:solidFill>
+                        <a:srgbClr val="E2E6EC"/>
+                      </a:solidFill>
+                      <a:prstDash val="solid"/>
+                      <a:round/>
+                      <a:headEnd type="none" w="med" len="med"/>
+                      <a:tailEnd type="none" w="med" len="med"/>
+                    </a:lnB>
+                    <a:solidFill>
+                      <a:srgbClr val="FFFFFF"/>
+                    </a:solidFill>
+                  </a:tcPr>
+                </a:tc>
+                <a:tc>
+                  <a:txBody>
+                    <a:bodyPr/>
+                    <a:lstStyle/>
+                    <a:p>
+                      <a:pPr marL="0" indent="0">
+                        <a:buNone/>
+                      </a:pPr>
+                      <a:r>
+                        <a:rPr lang="en-US" sz="1200" dirty="0">
+                          <a:solidFill>
+                            <a:srgbClr val="64748B"/>
+                          </a:solidFill>
+                          <a:latin typeface="Calibri" pitchFamily="34" charset="0"/>
+                          <a:ea typeface="Calibri" pitchFamily="34" charset="-122"/>
+                          <a:cs typeface="Calibri" pitchFamily="34" charset="-120"/>
+                        </a:rPr>
+                        <a:t>—</a:t>
+                      </a:r>
+                      <a:endParaRPr lang="en-US" sz="1200" dirty="0">
+                        <a:latin typeface="Calibri" charset="0"/>
+                        <a:ea typeface="Calibri" charset="0"/>
+                        <a:cs typeface="Calibri" charset="0"/>
+                      </a:endParaRPr>
+                    </a:p>
+                  </a:txBody>
+                  <a:tcPr marL="38100" marR="38100" marT="38100" marB="38100" anchor="ctr">
+                    <a:lnL w="12700" cap="flat" cmpd="sng" algn="ctr">
+                      <a:solidFill>
+                        <a:srgbClr val="E2E6EC"/>
+                      </a:solidFill>
+                      <a:prstDash val="solid"/>
+                      <a:round/>
+                      <a:headEnd type="none" w="med" len="med"/>
+                      <a:tailEnd type="none" w="med" len="med"/>
+                    </a:lnL>
+                    <a:lnR w="12700" cap="flat" cmpd="sng" algn="ctr">
+                      <a:solidFill>
+                        <a:srgbClr val="E2E6EC"/>
+                      </a:solidFill>
+                      <a:prstDash val="solid"/>
+                      <a:round/>
+                      <a:headEnd type="none" w="med" len="med"/>
+                      <a:tailEnd type="none" w="med" len="med"/>
+                    </a:lnR>
+                    <a:lnT w="12700" cap="flat" cmpd="sng" algn="ctr">
+                      <a:solidFill>
+                        <a:srgbClr val="E2E6EC"/>
+                      </a:solidFill>
+                      <a:prstDash val="solid"/>
+                      <a:round/>
+                      <a:headEnd type="none" w="med" len="med"/>
+                      <a:tailEnd type="none" w="med" len="med"/>
+                    </a:lnT>
+                    <a:lnB w="12700" cap="flat" cmpd="sng" algn="ctr">
+                      <a:solidFill>
+                        <a:srgbClr val="E2E6EC"/>
+                      </a:solidFill>
+                      <a:prstDash val="solid"/>
+                      <a:round/>
+                      <a:headEnd type="none" w="med" len="med"/>
+                      <a:tailEnd type="none" w="med" len="med"/>
+                    </a:lnB>
+                    <a:solidFill>
+                      <a:srgbClr val="FFFFFF"/>
+                    </a:solidFill>
+                  </a:tcPr>
+                </a:tc>
+                <a:tc>
+                  <a:txBody>
+                    <a:bodyPr/>
+                    <a:lstStyle/>
+                    <a:p>
+                      <a:pPr marL="0" indent="0" algn="ctr">
+                        <a:buNone/>
+                      </a:pPr>
+                      <a:r>
+                        <a:rPr lang="en-US" sz="1200" b="1" dirty="0">
+                          <a:solidFill>
+                            <a:srgbClr val="12B5A5"/>
+                          </a:solidFill>
+                          <a:latin typeface="Calibri" pitchFamily="34" charset="0"/>
+                          <a:ea typeface="Calibri" pitchFamily="34" charset="-122"/>
+                          <a:cs typeface="Calibri" pitchFamily="34" charset="-120"/>
+                        </a:rPr>
+                        <a:t>2</a:t>
+                      </a:r>
+                      <a:endParaRPr lang="en-US" sz="1200" dirty="0">
+                        <a:latin typeface="Calibri" charset="0"/>
+                        <a:ea typeface="Calibri" charset="0"/>
+                        <a:cs typeface="Calibri" charset="0"/>
+                      </a:endParaRPr>
+                    </a:p>
+                  </a:txBody>
+                  <a:tcPr marL="38100" marR="38100" marT="38100" marB="38100" anchor="ctr">
+                    <a:lnL w="12700" cap="flat" cmpd="sng" algn="ctr">
+                      <a:solidFill>
+                        <a:srgbClr val="E2E6EC"/>
+                      </a:solidFill>
+                      <a:prstDash val="solid"/>
+                      <a:round/>
+                      <a:headEnd type="none" w="med" len="med"/>
+                      <a:tailEnd type="none" w="med" len="med"/>
+                    </a:lnL>
+                    <a:lnR w="12700" cap="flat" cmpd="sng" algn="ctr">
+                      <a:solidFill>
+                        <a:srgbClr val="E2E6EC"/>
+                      </a:solidFill>
+                      <a:prstDash val="solid"/>
+                      <a:round/>
+                      <a:headEnd type="none" w="med" len="med"/>
+                      <a:tailEnd type="none" w="med" len="med"/>
+                    </a:lnR>
+                    <a:lnT w="12700" cap="flat" cmpd="sng" algn="ctr">
+                      <a:solidFill>
+                        <a:srgbClr val="E2E6EC"/>
+                      </a:solidFill>
+                      <a:prstDash val="solid"/>
+                      <a:round/>
+                      <a:headEnd type="none" w="med" len="med"/>
+                      <a:tailEnd type="none" w="med" len="med"/>
+                    </a:lnT>
+                    <a:lnB w="12700" cap="flat" cmpd="sng" algn="ctr">
+                      <a:solidFill>
+                        <a:srgbClr val="E2E6EC"/>
+                      </a:solidFill>
+                      <a:prstDash val="solid"/>
+                      <a:round/>
+                      <a:headEnd type="none" w="med" len="med"/>
+                      <a:tailEnd type="none" w="med" len="med"/>
+                    </a:lnB>
+                    <a:solidFill>
+                      <a:srgbClr val="FFFFFF"/>
+                    </a:solidFill>
+                  </a:tcPr>
+                </a:tc>
+                <a:tc>
+                  <a:txBody>
+                    <a:bodyPr/>
+                    <a:lstStyle/>
+                    <a:p>
+                      <a:pPr marL="0" indent="0" algn="ctr">
+                        <a:buNone/>
+                      </a:pPr>
+                      <a:r>
+                        <a:rPr lang="en-US" sz="1200" b="1" dirty="0">
+                          <a:solidFill>
+                            <a:srgbClr val="E11D2A"/>
+                          </a:solidFill>
+                          <a:latin typeface="Calibri" pitchFamily="34" charset="0"/>
+                          <a:ea typeface="Calibri" pitchFamily="34" charset="-122"/>
+                          <a:cs typeface="Calibri" pitchFamily="34" charset="-120"/>
+                        </a:rPr>
+                        <a:t>50</a:t>
+                      </a:r>
+                      <a:endParaRPr lang="en-US" sz="1200" dirty="0">
+                        <a:latin typeface="Calibri" charset="0"/>
+                        <a:ea typeface="Calibri" charset="0"/>
+                        <a:cs typeface="Calibri" charset="0"/>
+                      </a:endParaRPr>
+                    </a:p>
+                  </a:txBody>
+                  <a:tcPr marL="38100" marR="38100" marT="38100" marB="38100" anchor="ctr">
+                    <a:lnL w="12700" cap="flat" cmpd="sng" algn="ctr">
+                      <a:solidFill>
+                        <a:srgbClr val="E2E6EC"/>
+                      </a:solidFill>
+                      <a:prstDash val="solid"/>
+                      <a:round/>
+                      <a:headEnd type="none" w="med" len="med"/>
+                      <a:tailEnd type="none" w="med" len="med"/>
+                    </a:lnL>
+                    <a:lnR w="12700" cap="flat" cmpd="sng" algn="ctr">
+                      <a:solidFill>
+                        <a:srgbClr val="E2E6EC"/>
+                      </a:solidFill>
+                      <a:prstDash val="solid"/>
+                      <a:round/>
+                      <a:headEnd type="none" w="med" len="med"/>
+                      <a:tailEnd type="none" w="med" len="med"/>
+                    </a:lnR>
+                    <a:lnT w="12700" cap="flat" cmpd="sng" algn="ctr">
+                      <a:solidFill>
+                        <a:srgbClr val="E2E6EC"/>
+                      </a:solidFill>
+                      <a:prstDash val="solid"/>
+                      <a:round/>
+                      <a:headEnd type="none" w="med" len="med"/>
+                      <a:tailEnd type="none" w="med" len="med"/>
+                    </a:lnT>
+                    <a:lnB w="12700" cap="flat" cmpd="sng" algn="ctr">
+                      <a:solidFill>
+                        <a:srgbClr val="E2E6EC"/>
+                      </a:solidFill>
+                      <a:prstDash val="solid"/>
+                      <a:round/>
+                      <a:headEnd type="none" w="med" len="med"/>
+                      <a:tailEnd type="none" w="med" len="med"/>
+                    </a:lnB>
+                    <a:solidFill>
+                      <a:srgbClr val="FFFFFF"/>
+                    </a:solidFill>
+                  </a:tcPr>
+                </a:tc>
+                <a:extLst>
+                  <a:ext uri="{0D108BD9-81ED-4DB2-BD59-A6C34878D82A}">
+                    <a16:rowId xmlns:a16="http://schemas.microsoft.com/office/drawing/2014/main" val="10001"/>
+                  </a:ext>
+                </a:extLst>
+              </a:tr>
+              <a:tr h="384048">
+                <a:tc>
+                  <a:txBody>
+                    <a:bodyPr/>
+                    <a:lstStyle/>
+                    <a:p>
+                      <a:pPr marL="0" indent="0">
+                        <a:buNone/>
+                      </a:pPr>
+                      <a:r>
+                        <a:rPr lang="en-US" sz="1200" dirty="0">
+                          <a:solidFill>
+                            <a:srgbClr val="1F2430"/>
+                          </a:solidFill>
+                          <a:latin typeface="Calibri" pitchFamily="34" charset="0"/>
+                          <a:ea typeface="Calibri" pitchFamily="34" charset="-122"/>
+                          <a:cs typeface="Calibri" pitchFamily="34" charset="-120"/>
+                        </a:rPr>
+                        <a:t>Be Free</a:t>
+                      </a:r>
+                      <a:endParaRPr lang="en-US" sz="1200" dirty="0">
+                        <a:latin typeface="Calibri" charset="0"/>
+                        <a:ea typeface="Calibri" charset="0"/>
+                        <a:cs typeface="Calibri" charset="0"/>
+                      </a:endParaRPr>
+                    </a:p>
+                  </a:txBody>
+                  <a:tcPr marL="38100" marR="38100" marT="38100" marB="38100" anchor="ctr">
+                    <a:lnL w="12700" cap="flat" cmpd="sng" algn="ctr">
+                      <a:solidFill>
+                        <a:srgbClr val="E2E6EC"/>
+                      </a:solidFill>
+                      <a:prstDash val="solid"/>
+                      <a:round/>
+                      <a:headEnd type="none" w="med" len="med"/>
+                      <a:tailEnd type="none" w="med" len="med"/>
+                    </a:lnL>
+                    <a:lnR w="12700" cap="flat" cmpd="sng" algn="ctr">
+                      <a:solidFill>
+                        <a:srgbClr val="E2E6EC"/>
+                      </a:solidFill>
+                      <a:prstDash val="solid"/>
+                      <a:round/>
+                      <a:headEnd type="none" w="med" len="med"/>
+                      <a:tailEnd type="none" w="med" len="med"/>
+                    </a:lnR>
+                    <a:lnT w="12700" cap="flat" cmpd="sng" algn="ctr">
+                      <a:solidFill>
+                        <a:srgbClr val="E2E6EC"/>
+                      </a:solidFill>
+                      <a:prstDash val="solid"/>
+                      <a:round/>
+                      <a:headEnd type="none" w="med" len="med"/>
+                      <a:tailEnd type="none" w="med" len="med"/>
+                    </a:lnT>
+                    <a:lnB w="12700" cap="flat" cmpd="sng" algn="ctr">
+                      <a:solidFill>
+                        <a:srgbClr val="E2E6EC"/>
+                      </a:solidFill>
+                      <a:prstDash val="solid"/>
+                      <a:round/>
+                      <a:headEnd type="none" w="med" len="med"/>
+                      <a:tailEnd type="none" w="med" len="med"/>
+                    </a:lnB>
+                    <a:solidFill>
+                      <a:srgbClr val="F4F6F8"/>
+                    </a:solidFill>
+                  </a:tcPr>
+                </a:tc>
+                <a:tc>
+                  <a:txBody>
+                    <a:bodyPr/>
+                    <a:lstStyle/>
+                    <a:p>
+                      <a:pPr marL="0" indent="0">
+                        <a:buNone/>
+                      </a:pPr>
+                      <a:r>
+                        <a:rPr lang="en-US" sz="1200" dirty="0">
+                          <a:solidFill>
+                            <a:srgbClr val="64748B"/>
+                          </a:solidFill>
+                          <a:latin typeface="Calibri" pitchFamily="34" charset="0"/>
+                          <a:ea typeface="Calibri" pitchFamily="34" charset="-122"/>
+                          <a:cs typeface="Calibri" pitchFamily="34" charset="-120"/>
+                        </a:rPr>
+                        <a:t>—</a:t>
+                      </a:r>
+                      <a:endParaRPr lang="en-US" sz="1200" dirty="0">
+                        <a:latin typeface="Calibri" charset="0"/>
+                        <a:ea typeface="Calibri" charset="0"/>
+                        <a:cs typeface="Calibri" charset="0"/>
+                      </a:endParaRPr>
+                    </a:p>
+                  </a:txBody>
+                  <a:tcPr marL="38100" marR="38100" marT="38100" marB="38100" anchor="ctr">
+                    <a:lnL w="12700" cap="flat" cmpd="sng" algn="ctr">
+                      <a:solidFill>
+                        <a:srgbClr val="E2E6EC"/>
+                      </a:solidFill>
+                      <a:prstDash val="solid"/>
+                      <a:round/>
+                      <a:headEnd type="none" w="med" len="med"/>
+                      <a:tailEnd type="none" w="med" len="med"/>
+                    </a:lnL>
+                    <a:lnR w="12700" cap="flat" cmpd="sng" algn="ctr">
+                      <a:solidFill>
+                        <a:srgbClr val="E2E6EC"/>
+                      </a:solidFill>
+                      <a:prstDash val="solid"/>
+                      <a:round/>
+                      <a:headEnd type="none" w="med" len="med"/>
+                      <a:tailEnd type="none" w="med" len="med"/>
+                    </a:lnR>
+                    <a:lnT w="12700" cap="flat" cmpd="sng" algn="ctr">
+                      <a:solidFill>
+                        <a:srgbClr val="E2E6EC"/>
+                      </a:solidFill>
+                      <a:prstDash val="solid"/>
+                      <a:round/>
+                      <a:headEnd type="none" w="med" len="med"/>
+                      <a:tailEnd type="none" w="med" len="med"/>
+                    </a:lnT>
+                    <a:lnB w="12700" cap="flat" cmpd="sng" algn="ctr">
+                      <a:solidFill>
+                        <a:srgbClr val="E2E6EC"/>
+                      </a:solidFill>
+                      <a:prstDash val="solid"/>
+                      <a:round/>
+                      <a:headEnd type="none" w="med" len="med"/>
+                      <a:tailEnd type="none" w="med" len="med"/>
+                    </a:lnB>
+                    <a:solidFill>
+                      <a:srgbClr val="F4F6F8"/>
+                    </a:solidFill>
+                  </a:tcPr>
+                </a:tc>
+                <a:tc>
+                  <a:txBody>
+                    <a:bodyPr/>
+                    <a:lstStyle/>
+                    <a:p>
+                      <a:pPr marL="0" indent="0" algn="ctr">
+                        <a:buNone/>
+                      </a:pPr>
+                      <a:r>
+                        <a:rPr lang="en-US" sz="1200" b="1" dirty="0">
+                          <a:solidFill>
+                            <a:srgbClr val="12B5A5"/>
+                          </a:solidFill>
+                          <a:latin typeface="Calibri" pitchFamily="34" charset="0"/>
+                          <a:ea typeface="Calibri" pitchFamily="34" charset="-122"/>
+                          <a:cs typeface="Calibri" pitchFamily="34" charset="-120"/>
+                        </a:rPr>
+                        <a:t>1</a:t>
+                      </a:r>
+                      <a:endParaRPr lang="en-US" sz="1200" dirty="0">
+                        <a:latin typeface="Calibri" charset="0"/>
+                        <a:ea typeface="Calibri" charset="0"/>
+                        <a:cs typeface="Calibri" charset="0"/>
+                      </a:endParaRPr>
+                    </a:p>
+                  </a:txBody>
+                  <a:tcPr marL="38100" marR="38100" marT="38100" marB="38100" anchor="ctr">
+                    <a:lnL w="12700" cap="flat" cmpd="sng" algn="ctr">
+                      <a:solidFill>
+                        <a:srgbClr val="E2E6EC"/>
+                      </a:solidFill>
+                      <a:prstDash val="solid"/>
+                      <a:round/>
+                      <a:headEnd type="none" w="med" len="med"/>
+                      <a:tailEnd type="none" w="med" len="med"/>
+                    </a:lnL>
+                    <a:lnR w="12700" cap="flat" cmpd="sng" algn="ctr">
+                      <a:solidFill>
+                        <a:srgbClr val="E2E6EC"/>
+                      </a:solidFill>
+                      <a:prstDash val="solid"/>
+                      <a:round/>
+                      <a:headEnd type="none" w="med" len="med"/>
+                      <a:tailEnd type="none" w="med" len="med"/>
+                    </a:lnR>
+                    <a:lnT w="12700" cap="flat" cmpd="sng" algn="ctr">
+                      <a:solidFill>
+                        <a:srgbClr val="E2E6EC"/>
+                      </a:solidFill>
+                      <a:prstDash val="solid"/>
+                      <a:round/>
+                      <a:headEnd type="none" w="med" len="med"/>
+                      <a:tailEnd type="none" w="med" len="med"/>
+                    </a:lnT>
+                    <a:lnB w="12700" cap="flat" cmpd="sng" algn="ctr">
+                      <a:solidFill>
+                        <a:srgbClr val="E2E6EC"/>
+                      </a:solidFill>
+                      <a:prstDash val="solid"/>
+                      <a:round/>
+                      <a:headEnd type="none" w="med" len="med"/>
+                      <a:tailEnd type="none" w="med" len="med"/>
+                    </a:lnB>
+                    <a:solidFill>
+                      <a:srgbClr val="F4F6F8"/>
+                    </a:solidFill>
+                  </a:tcPr>
+                </a:tc>
+                <a:tc>
+                  <a:txBody>
+                    <a:bodyPr/>
+                    <a:lstStyle/>
+                    <a:p>
+                      <a:pPr marL="0" indent="0" algn="ctr">
+                        <a:buNone/>
+                      </a:pPr>
+                      <a:r>
+                        <a:rPr lang="en-US" sz="1200" b="1" dirty="0">
+                          <a:solidFill>
+                            <a:srgbClr val="E11D2A"/>
+                          </a:solidFill>
+                          <a:latin typeface="Calibri" pitchFamily="34" charset="0"/>
+                          <a:ea typeface="Calibri" pitchFamily="34" charset="-122"/>
+                          <a:cs typeface="Calibri" pitchFamily="34" charset="-120"/>
+                        </a:rPr>
+                        <a:t>50</a:t>
+                      </a:r>
+                      <a:endParaRPr lang="en-US" sz="1200" dirty="0">
+                        <a:latin typeface="Calibri" charset="0"/>
+                        <a:ea typeface="Calibri" charset="0"/>
+                        <a:cs typeface="Calibri" charset="0"/>
+                      </a:endParaRPr>
+                    </a:p>
+                  </a:txBody>
+                  <a:tcPr marL="38100" marR="38100" marT="38100" marB="38100" anchor="ctr">
+                    <a:lnL w="12700" cap="flat" cmpd="sng" algn="ctr">
+                      <a:solidFill>
+                        <a:srgbClr val="E2E6EC"/>
+                      </a:solidFill>
+                      <a:prstDash val="solid"/>
+                      <a:round/>
+                      <a:headEnd type="none" w="med" len="med"/>
+                      <a:tailEnd type="none" w="med" len="med"/>
+                    </a:lnL>
+                    <a:lnR w="12700" cap="flat" cmpd="sng" algn="ctr">
+                      <a:solidFill>
+                        <a:srgbClr val="E2E6EC"/>
+                      </a:solidFill>
+                      <a:prstDash val="solid"/>
+                      <a:round/>
+                      <a:headEnd type="none" w="med" len="med"/>
+                      <a:tailEnd type="none" w="med" len="med"/>
+                    </a:lnR>
+                    <a:lnT w="12700" cap="flat" cmpd="sng" algn="ctr">
+                      <a:solidFill>
+                        <a:srgbClr val="E2E6EC"/>
+                      </a:solidFill>
+                      <a:prstDash val="solid"/>
+                      <a:round/>
+                      <a:headEnd type="none" w="med" len="med"/>
+                      <a:tailEnd type="none" w="med" len="med"/>
+                    </a:lnT>
+                    <a:lnB w="12700" cap="flat" cmpd="sng" algn="ctr">
+                      <a:solidFill>
+                        <a:srgbClr val="E2E6EC"/>
+                      </a:solidFill>
+                      <a:prstDash val="solid"/>
+                      <a:round/>
+                      <a:headEnd type="none" w="med" len="med"/>
+                      <a:tailEnd type="none" w="med" len="med"/>
+                    </a:lnB>
+                    <a:solidFill>
+                      <a:srgbClr val="F4F6F8"/>
+                    </a:solidFill>
+                  </a:tcPr>
+                </a:tc>
+                <a:extLst>
+                  <a:ext uri="{0D108BD9-81ED-4DB2-BD59-A6C34878D82A}">
+                    <a16:rowId xmlns:a16="http://schemas.microsoft.com/office/drawing/2014/main" val="10002"/>
+                  </a:ext>
+                </a:extLst>
+              </a:tr>
+              <a:tr h="384048">
+                <a:tc>
+                  <a:txBody>
+                    <a:bodyPr/>
+                    <a:lstStyle/>
+                    <a:p>
+                      <a:pPr marL="0" indent="0">
+                        <a:buNone/>
+                      </a:pPr>
+                      <a:r>
+                        <a:rPr lang="en-US" sz="1200" dirty="0">
+                          <a:solidFill>
+                            <a:srgbClr val="1F2430"/>
+                          </a:solidFill>
+                          <a:latin typeface="Calibri" pitchFamily="34" charset="0"/>
+                          <a:ea typeface="Calibri" pitchFamily="34" charset="-122"/>
+                          <a:cs typeface="Calibri" pitchFamily="34" charset="-120"/>
+                        </a:rPr>
+                        <a:t>Puja Pau Sen Ta Ti / …</a:t>
+                      </a:r>
+                      <a:endParaRPr lang="en-US" sz="1200" dirty="0">
+                        <a:latin typeface="Calibri" charset="0"/>
+                        <a:ea typeface="Calibri" charset="0"/>
+                        <a:cs typeface="Calibri" charset="0"/>
+                      </a:endParaRPr>
+                    </a:p>
+                  </a:txBody>
+                  <a:tcPr marL="38100" marR="38100" marT="38100" marB="38100" anchor="ctr">
+                    <a:lnL w="12700" cap="flat" cmpd="sng" algn="ctr">
+                      <a:solidFill>
+                        <a:srgbClr val="E2E6EC"/>
+                      </a:solidFill>
+                      <a:prstDash val="solid"/>
+                      <a:round/>
+                      <a:headEnd type="none" w="med" len="med"/>
+                      <a:tailEnd type="none" w="med" len="med"/>
+                    </a:lnL>
+                    <a:lnR w="12700" cap="flat" cmpd="sng" algn="ctr">
+                      <a:solidFill>
+                        <a:srgbClr val="E2E6EC"/>
+                      </a:solidFill>
+                      <a:prstDash val="solid"/>
+                      <a:round/>
+                      <a:headEnd type="none" w="med" len="med"/>
+                      <a:tailEnd type="none" w="med" len="med"/>
+                    </a:lnR>
+                    <a:lnT w="12700" cap="flat" cmpd="sng" algn="ctr">
+                      <a:solidFill>
+                        <a:srgbClr val="E2E6EC"/>
+                      </a:solidFill>
+                      <a:prstDash val="solid"/>
+                      <a:round/>
+                      <a:headEnd type="none" w="med" len="med"/>
+                      <a:tailEnd type="none" w="med" len="med"/>
+                    </a:lnT>
+                    <a:lnB w="12700" cap="flat" cmpd="sng" algn="ctr">
+                      <a:solidFill>
+                        <a:srgbClr val="E2E6EC"/>
+                      </a:solidFill>
+                      <a:prstDash val="solid"/>
+                      <a:round/>
+                      <a:headEnd type="none" w="med" len="med"/>
+                      <a:tailEnd type="none" w="med" len="med"/>
+                    </a:lnB>
+                    <a:solidFill>
+                      <a:srgbClr val="FFFFFF"/>
+                    </a:solidFill>
+                  </a:tcPr>
+                </a:tc>
+                <a:tc>
+                  <a:txBody>
+                    <a:bodyPr/>
+                    <a:lstStyle/>
+                    <a:p>
+                      <a:pPr marL="0" indent="0">
+                        <a:buNone/>
+                      </a:pPr>
+                      <a:r>
+                        <a:rPr lang="en-US" sz="1200" dirty="0">
+                          <a:solidFill>
+                            <a:srgbClr val="64748B"/>
+                          </a:solidFill>
+                          <a:latin typeface="Calibri" pitchFamily="34" charset="0"/>
+                          <a:ea typeface="Calibri" pitchFamily="34" charset="-122"/>
+                          <a:cs typeface="Calibri" pitchFamily="34" charset="-120"/>
+                        </a:rPr>
+                        <a:t>—</a:t>
+                      </a:r>
+                      <a:endParaRPr lang="en-US" sz="1200" dirty="0">
+                        <a:latin typeface="Calibri" charset="0"/>
+                        <a:ea typeface="Calibri" charset="0"/>
+                        <a:cs typeface="Calibri" charset="0"/>
+                      </a:endParaRPr>
+                    </a:p>
+                  </a:txBody>
+                  <a:tcPr marL="38100" marR="38100" marT="38100" marB="38100" anchor="ctr">
+                    <a:lnL w="12700" cap="flat" cmpd="sng" algn="ctr">
+                      <a:solidFill>
+                        <a:srgbClr val="E2E6EC"/>
+                      </a:solidFill>
+                      <a:prstDash val="solid"/>
+                      <a:round/>
+                      <a:headEnd type="none" w="med" len="med"/>
+                      <a:tailEnd type="none" w="med" len="med"/>
+                    </a:lnL>
+                    <a:lnR w="12700" cap="flat" cmpd="sng" algn="ctr">
+                      <a:solidFill>
+                        <a:srgbClr val="E2E6EC"/>
+                      </a:solidFill>
+                      <a:prstDash val="solid"/>
+                      <a:round/>
+                      <a:headEnd type="none" w="med" len="med"/>
+                      <a:tailEnd type="none" w="med" len="med"/>
+                    </a:lnR>
+                    <a:lnT w="12700" cap="flat" cmpd="sng" algn="ctr">
+                      <a:solidFill>
+                        <a:srgbClr val="E2E6EC"/>
+                      </a:solidFill>
+                      <a:prstDash val="solid"/>
+                      <a:round/>
+                      <a:headEnd type="none" w="med" len="med"/>
+                      <a:tailEnd type="none" w="med" len="med"/>
+                    </a:lnT>
+                    <a:lnB w="12700" cap="flat" cmpd="sng" algn="ctr">
+                      <a:solidFill>
+                        <a:srgbClr val="E2E6EC"/>
+                      </a:solidFill>
+                      <a:prstDash val="solid"/>
+                      <a:round/>
+                      <a:headEnd type="none" w="med" len="med"/>
+                      <a:tailEnd type="none" w="med" len="med"/>
+                    </a:lnB>
+                    <a:solidFill>
+                      <a:srgbClr val="FFFFFF"/>
+                    </a:solidFill>
+                  </a:tcPr>
+                </a:tc>
+                <a:tc>
+                  <a:txBody>
+                    <a:bodyPr/>
+                    <a:lstStyle/>
+                    <a:p>
+                      <a:pPr marL="0" indent="0" algn="ctr">
+                        <a:buNone/>
+                      </a:pPr>
+                      <a:r>
+                        <a:rPr lang="en-US" sz="1200" b="1" dirty="0">
+                          <a:solidFill>
+                            <a:srgbClr val="12B5A5"/>
+                          </a:solidFill>
+                          <a:latin typeface="Calibri" pitchFamily="34" charset="0"/>
+                          <a:ea typeface="Calibri" pitchFamily="34" charset="-122"/>
+                          <a:cs typeface="Calibri" pitchFamily="34" charset="-120"/>
+                        </a:rPr>
+                        <a:t>0</a:t>
+                      </a:r>
+                      <a:endParaRPr lang="en-US" sz="1200" dirty="0">
+                        <a:latin typeface="Calibri" charset="0"/>
+                        <a:ea typeface="Calibri" charset="0"/>
+                        <a:cs typeface="Calibri" charset="0"/>
+                      </a:endParaRPr>
+                    </a:p>
+                  </a:txBody>
+                  <a:tcPr marL="38100" marR="38100" marT="38100" marB="38100" anchor="ctr">
+                    <a:lnL w="12700" cap="flat" cmpd="sng" algn="ctr">
+                      <a:solidFill>
+                        <a:srgbClr val="E2E6EC"/>
+                      </a:solidFill>
+                      <a:prstDash val="solid"/>
+                      <a:round/>
+                      <a:headEnd type="none" w="med" len="med"/>
+                      <a:tailEnd type="none" w="med" len="med"/>
+                    </a:lnL>
+                    <a:lnR w="12700" cap="flat" cmpd="sng" algn="ctr">
+                      <a:solidFill>
+                        <a:srgbClr val="E2E6EC"/>
+                      </a:solidFill>
+                      <a:prstDash val="solid"/>
+                      <a:round/>
+                      <a:headEnd type="none" w="med" len="med"/>
+                      <a:tailEnd type="none" w="med" len="med"/>
+                    </a:lnR>
+                    <a:lnT w="12700" cap="flat" cmpd="sng" algn="ctr">
+                      <a:solidFill>
+                        <a:srgbClr val="E2E6EC"/>
+                      </a:solidFill>
+                      <a:prstDash val="solid"/>
+                      <a:round/>
+                      <a:headEnd type="none" w="med" len="med"/>
+                      <a:tailEnd type="none" w="med" len="med"/>
+                    </a:lnT>
+                    <a:lnB w="12700" cap="flat" cmpd="sng" algn="ctr">
+                      <a:solidFill>
+                        <a:srgbClr val="E2E6EC"/>
+                      </a:solidFill>
+                      <a:prstDash val="solid"/>
+                      <a:round/>
+                      <a:headEnd type="none" w="med" len="med"/>
+                      <a:tailEnd type="none" w="med" len="med"/>
+                    </a:lnB>
+                    <a:solidFill>
+                      <a:srgbClr val="FFFFFF"/>
+                    </a:solidFill>
+                  </a:tcPr>
+                </a:tc>
+                <a:tc>
+                  <a:txBody>
+                    <a:bodyPr/>
+                    <a:lstStyle/>
+                    <a:p>
+                      <a:pPr marL="0" indent="0" algn="ctr">
+                        <a:buNone/>
+                      </a:pPr>
+                      <a:r>
+                        <a:rPr lang="en-US" sz="1200" b="1" dirty="0">
+                          <a:solidFill>
+                            <a:srgbClr val="E11D2A"/>
+                          </a:solidFill>
+                          <a:latin typeface="Calibri" pitchFamily="34" charset="0"/>
+                          <a:ea typeface="Calibri" pitchFamily="34" charset="-122"/>
+                          <a:cs typeface="Calibri" pitchFamily="34" charset="-120"/>
+                        </a:rPr>
+                        <a:t>50</a:t>
+                      </a:r>
+                      <a:endParaRPr lang="en-US" sz="1200" dirty="0">
+                        <a:latin typeface="Calibri" charset="0"/>
+                        <a:ea typeface="Calibri" charset="0"/>
+                        <a:cs typeface="Calibri" charset="0"/>
+                      </a:endParaRPr>
+                    </a:p>
+                  </a:txBody>
+                  <a:tcPr marL="38100" marR="38100" marT="38100" marB="38100" anchor="ctr">
+                    <a:lnL w="12700" cap="flat" cmpd="sng" algn="ctr">
+                      <a:solidFill>
+                        <a:srgbClr val="E2E6EC"/>
+                      </a:solidFill>
+                      <a:prstDash val="solid"/>
+                      <a:round/>
+                      <a:headEnd type="none" w="med" len="med"/>
+                      <a:tailEnd type="none" w="med" len="med"/>
+                    </a:lnL>
+                    <a:lnR w="12700" cap="flat" cmpd="sng" algn="ctr">
+                      <a:solidFill>
+                        <a:srgbClr val="E2E6EC"/>
+                      </a:solidFill>
+                      <a:prstDash val="solid"/>
+                      <a:round/>
+                      <a:headEnd type="none" w="med" len="med"/>
+                      <a:tailEnd type="none" w="med" len="med"/>
+                    </a:lnR>
+                    <a:lnT w="12700" cap="flat" cmpd="sng" algn="ctr">
+                      <a:solidFill>
+                        <a:srgbClr val="E2E6EC"/>
+                      </a:solidFill>
+                      <a:prstDash val="solid"/>
+                      <a:round/>
+                      <a:headEnd type="none" w="med" len="med"/>
+                      <a:tailEnd type="none" w="med" len="med"/>
+                    </a:lnT>
+                    <a:lnB w="12700" cap="flat" cmpd="sng" algn="ctr">
+                      <a:solidFill>
+                        <a:srgbClr val="E2E6EC"/>
+                      </a:solidFill>
+                      <a:prstDash val="solid"/>
+                      <a:round/>
+                      <a:headEnd type="none" w="med" len="med"/>
+                      <a:tailEnd type="none" w="med" len="med"/>
+                    </a:lnB>
+                    <a:solidFill>
+                      <a:srgbClr val="FFFFFF"/>
+                    </a:solidFill>
+                  </a:tcPr>
+                </a:tc>
+                <a:extLst>
+                  <a:ext uri="{0D108BD9-81ED-4DB2-BD59-A6C34878D82A}">
+                    <a16:rowId xmlns:a16="http://schemas.microsoft.com/office/drawing/2014/main" val="10003"/>
+                  </a:ext>
+                </a:extLst>
+              </a:tr>
+              <a:tr h="384048">
+                <a:tc>
+                  <a:txBody>
+                    <a:bodyPr/>
+                    <a:lstStyle/>
+                    <a:p>
+                      <a:pPr marL="0" indent="0">
+                        <a:buNone/>
+                      </a:pPr>
+                      <a:r>
+                        <a:rPr lang="en-US" sz="1200" dirty="0">
+                          <a:solidFill>
+                            <a:srgbClr val="1F2430"/>
+                          </a:solidFill>
+                          <a:latin typeface="Calibri" pitchFamily="34" charset="0"/>
+                          <a:ea typeface="Calibri" pitchFamily="34" charset="-122"/>
+                          <a:cs typeface="Calibri" pitchFamily="34" charset="-120"/>
+                        </a:rPr>
+                        <a:t>Ora Nitik</a:t>
+                      </a:r>
+                      <a:endParaRPr lang="en-US" sz="1200" dirty="0">
+                        <a:latin typeface="Calibri" charset="0"/>
+                        <a:ea typeface="Calibri" charset="0"/>
+                        <a:cs typeface="Calibri" charset="0"/>
+                      </a:endParaRPr>
+                    </a:p>
+                  </a:txBody>
+                  <a:tcPr marL="38100" marR="38100" marT="38100" marB="38100" anchor="ctr">
+                    <a:lnL w="12700" cap="flat" cmpd="sng" algn="ctr">
+                      <a:solidFill>
+                        <a:srgbClr val="E2E6EC"/>
+                      </a:solidFill>
+                      <a:prstDash val="solid"/>
+                      <a:round/>
+                      <a:headEnd type="none" w="med" len="med"/>
+                      <a:tailEnd type="none" w="med" len="med"/>
+                    </a:lnL>
+                    <a:lnR w="12700" cap="flat" cmpd="sng" algn="ctr">
+                      <a:solidFill>
+                        <a:srgbClr val="E2E6EC"/>
+                      </a:solidFill>
+                      <a:prstDash val="solid"/>
+                      <a:round/>
+                      <a:headEnd type="none" w="med" len="med"/>
+                      <a:tailEnd type="none" w="med" len="med"/>
+                    </a:lnR>
+                    <a:lnT w="12700" cap="flat" cmpd="sng" algn="ctr">
+                      <a:solidFill>
+                        <a:srgbClr val="E2E6EC"/>
+                      </a:solidFill>
+                      <a:prstDash val="solid"/>
+                      <a:round/>
+                      <a:headEnd type="none" w="med" len="med"/>
+                      <a:tailEnd type="none" w="med" len="med"/>
+                    </a:lnT>
+                    <a:lnB w="12700" cap="flat" cmpd="sng" algn="ctr">
+                      <a:solidFill>
+                        <a:srgbClr val="E2E6EC"/>
+                      </a:solidFill>
+                      <a:prstDash val="solid"/>
+                      <a:round/>
+                      <a:headEnd type="none" w="med" len="med"/>
+                      <a:tailEnd type="none" w="med" len="med"/>
+                    </a:lnB>
+                    <a:solidFill>
+                      <a:srgbClr val="F4F6F8"/>
+                    </a:solidFill>
+                  </a:tcPr>
+                </a:tc>
+                <a:tc>
+                  <a:txBody>
+                    <a:bodyPr/>
+                    <a:lstStyle/>
+                    <a:p>
+                      <a:pPr marL="0" indent="0">
+                        <a:buNone/>
+                      </a:pPr>
+                      <a:r>
+                        <a:rPr lang="en-US" sz="1200" dirty="0">
+                          <a:solidFill>
+                            <a:srgbClr val="64748B"/>
+                          </a:solidFill>
+                          <a:latin typeface="Calibri" pitchFamily="34" charset="0"/>
+                          <a:ea typeface="Calibri" pitchFamily="34" charset="-122"/>
+                          <a:cs typeface="Calibri" pitchFamily="34" charset="-120"/>
+                        </a:rPr>
+                        <a:t>—</a:t>
+                      </a:r>
+                      <a:endParaRPr lang="en-US" sz="1200" dirty="0">
+                        <a:latin typeface="Calibri" charset="0"/>
+                        <a:ea typeface="Calibri" charset="0"/>
+                        <a:cs typeface="Calibri" charset="0"/>
+                      </a:endParaRPr>
+                    </a:p>
+                  </a:txBody>
+                  <a:tcPr marL="38100" marR="38100" marT="38100" marB="38100" anchor="ctr">
+                    <a:lnL w="12700" cap="flat" cmpd="sng" algn="ctr">
+                      <a:solidFill>
+                        <a:srgbClr val="E2E6EC"/>
+                      </a:solidFill>
+                      <a:prstDash val="solid"/>
+                      <a:round/>
+                      <a:headEnd type="none" w="med" len="med"/>
+                      <a:tailEnd type="none" w="med" len="med"/>
+                    </a:lnL>
+                    <a:lnR w="12700" cap="flat" cmpd="sng" algn="ctr">
+                      <a:solidFill>
+                        <a:srgbClr val="E2E6EC"/>
+                      </a:solidFill>
+                      <a:prstDash val="solid"/>
+                      <a:round/>
+                      <a:headEnd type="none" w="med" len="med"/>
+                      <a:tailEnd type="none" w="med" len="med"/>
+                    </a:lnR>
+                    <a:lnT w="12700" cap="flat" cmpd="sng" algn="ctr">
+                      <a:solidFill>
+                        <a:srgbClr val="E2E6EC"/>
+                      </a:solidFill>
+                      <a:prstDash val="solid"/>
+                      <a:round/>
+                      <a:headEnd type="none" w="med" len="med"/>
+                      <a:tailEnd type="none" w="med" len="med"/>
+                    </a:lnT>
+                    <a:lnB w="12700" cap="flat" cmpd="sng" algn="ctr">
+                      <a:solidFill>
+                        <a:srgbClr val="E2E6EC"/>
+                      </a:solidFill>
+                      <a:prstDash val="solid"/>
+                      <a:round/>
+                      <a:headEnd type="none" w="med" len="med"/>
+                      <a:tailEnd type="none" w="med" len="med"/>
+                    </a:lnB>
+                    <a:solidFill>
+                      <a:srgbClr val="F4F6F8"/>
+                    </a:solidFill>
+                  </a:tcPr>
+                </a:tc>
+                <a:tc>
+                  <a:txBody>
+                    <a:bodyPr/>
+                    <a:lstStyle/>
+                    <a:p>
+                      <a:pPr marL="0" indent="0" algn="ctr">
+                        <a:buNone/>
+                      </a:pPr>
+                      <a:r>
+                        <a:rPr lang="en-US" sz="1200" b="1" dirty="0">
+                          <a:solidFill>
+                            <a:srgbClr val="12B5A5"/>
+                          </a:solidFill>
+                          <a:latin typeface="Calibri" pitchFamily="34" charset="0"/>
+                          <a:ea typeface="Calibri" pitchFamily="34" charset="-122"/>
+                          <a:cs typeface="Calibri" pitchFamily="34" charset="-120"/>
+                        </a:rPr>
+                        <a:t>0</a:t>
+                      </a:r>
+                      <a:endParaRPr lang="en-US" sz="1200" dirty="0">
+                        <a:latin typeface="Calibri" charset="0"/>
+                        <a:ea typeface="Calibri" charset="0"/>
+                        <a:cs typeface="Calibri" charset="0"/>
+                      </a:endParaRPr>
+                    </a:p>
+                  </a:txBody>
+                  <a:tcPr marL="38100" marR="38100" marT="38100" marB="38100" anchor="ctr">
+                    <a:lnL w="12700" cap="flat" cmpd="sng" algn="ctr">
+                      <a:solidFill>
+                        <a:srgbClr val="E2E6EC"/>
+                      </a:solidFill>
+                      <a:prstDash val="solid"/>
+                      <a:round/>
+                      <a:headEnd type="none" w="med" len="med"/>
+                      <a:tailEnd type="none" w="med" len="med"/>
+                    </a:lnL>
+                    <a:lnR w="12700" cap="flat" cmpd="sng" algn="ctr">
+                      <a:solidFill>
+                        <a:srgbClr val="E2E6EC"/>
+                      </a:solidFill>
+                      <a:prstDash val="solid"/>
+                      <a:round/>
+                      <a:headEnd type="none" w="med" len="med"/>
+                      <a:tailEnd type="none" w="med" len="med"/>
+                    </a:lnR>
+                    <a:lnT w="12700" cap="flat" cmpd="sng" algn="ctr">
+                      <a:solidFill>
+                        <a:srgbClr val="E2E6EC"/>
+                      </a:solidFill>
+                      <a:prstDash val="solid"/>
+                      <a:round/>
+                      <a:headEnd type="none" w="med" len="med"/>
+                      <a:tailEnd type="none" w="med" len="med"/>
+                    </a:lnT>
+                    <a:lnB w="12700" cap="flat" cmpd="sng" algn="ctr">
+                      <a:solidFill>
+                        <a:srgbClr val="E2E6EC"/>
+                      </a:solidFill>
+                      <a:prstDash val="solid"/>
+                      <a:round/>
+                      <a:headEnd type="none" w="med" len="med"/>
+                      <a:tailEnd type="none" w="med" len="med"/>
+                    </a:lnB>
+                    <a:solidFill>
+                      <a:srgbClr val="F4F6F8"/>
+                    </a:solidFill>
+                  </a:tcPr>
+                </a:tc>
+                <a:tc>
+                  <a:txBody>
+                    <a:bodyPr/>
+                    <a:lstStyle/>
+                    <a:p>
+                      <a:pPr marL="0" indent="0" algn="ctr">
+                        <a:buNone/>
+                      </a:pPr>
+                      <a:r>
+                        <a:rPr lang="en-US" sz="1200" b="1" dirty="0">
+                          <a:solidFill>
+                            <a:srgbClr val="E11D2A"/>
+                          </a:solidFill>
+                          <a:latin typeface="Calibri" pitchFamily="34" charset="0"/>
+                          <a:ea typeface="Calibri" pitchFamily="34" charset="-122"/>
+                          <a:cs typeface="Calibri" pitchFamily="34" charset="-120"/>
+                        </a:rPr>
+                        <a:t>50</a:t>
+                      </a:r>
+                      <a:endParaRPr lang="en-US" sz="1200" dirty="0">
+                        <a:latin typeface="Calibri" charset="0"/>
+                        <a:ea typeface="Calibri" charset="0"/>
+                        <a:cs typeface="Calibri" charset="0"/>
+                      </a:endParaRPr>
+                    </a:p>
+                  </a:txBody>
+                  <a:tcPr marL="38100" marR="38100" marT="38100" marB="38100" anchor="ctr">
+                    <a:lnL w="12700" cap="flat" cmpd="sng" algn="ctr">
+                      <a:solidFill>
+                        <a:srgbClr val="E2E6EC"/>
+                      </a:solidFill>
+                      <a:prstDash val="solid"/>
+                      <a:round/>
+                      <a:headEnd type="none" w="med" len="med"/>
+                      <a:tailEnd type="none" w="med" len="med"/>
+                    </a:lnL>
+                    <a:lnR w="12700" cap="flat" cmpd="sng" algn="ctr">
+                      <a:solidFill>
+                        <a:srgbClr val="E2E6EC"/>
+                      </a:solidFill>
+                      <a:prstDash val="solid"/>
+                      <a:round/>
+                      <a:headEnd type="none" w="med" len="med"/>
+                      <a:tailEnd type="none" w="med" len="med"/>
+                    </a:lnR>
+                    <a:lnT w="12700" cap="flat" cmpd="sng" algn="ctr">
+                      <a:solidFill>
+                        <a:srgbClr val="E2E6EC"/>
+                      </a:solidFill>
+                      <a:prstDash val="solid"/>
+                      <a:round/>
+                      <a:headEnd type="none" w="med" len="med"/>
+                      <a:tailEnd type="none" w="med" len="med"/>
+                    </a:lnT>
+                    <a:lnB w="12700" cap="flat" cmpd="sng" algn="ctr">
+                      <a:solidFill>
+                        <a:srgbClr val="E2E6EC"/>
+                      </a:solidFill>
+                      <a:prstDash val="solid"/>
+                      <a:round/>
+                      <a:headEnd type="none" w="med" len="med"/>
+                      <a:tailEnd type="none" w="med" len="med"/>
+                    </a:lnB>
+                    <a:solidFill>
+                      <a:srgbClr val="F4F6F8"/>
+                    </a:solidFill>
+                  </a:tcPr>
+                </a:tc>
+                <a:extLst>
+                  <a:ext uri="{0D108BD9-81ED-4DB2-BD59-A6C34878D82A}">
+                    <a16:rowId xmlns:a16="http://schemas.microsoft.com/office/drawing/2014/main" val="10004"/>
+                  </a:ext>
+                </a:extLst>
+              </a:tr>
+              <a:tr h="384048">
+                <a:tc>
+                  <a:txBody>
+                    <a:bodyPr/>
+                    <a:lstStyle/>
+                    <a:p>
+                      <a:pPr marL="0" indent="0">
+                        <a:buNone/>
+                      </a:pPr>
+                      <a:r>
+                        <a:rPr lang="en-US" sz="1200" dirty="0">
+                          <a:solidFill>
+                            <a:srgbClr val="1F2430"/>
+                          </a:solidFill>
+                          <a:latin typeface="Calibri" pitchFamily="34" charset="0"/>
+                          <a:ea typeface="Calibri" pitchFamily="34" charset="-122"/>
+                          <a:cs typeface="Calibri" pitchFamily="34" charset="-120"/>
+                        </a:rPr>
+                        <a:t>Mmm Pengen</a:t>
+                      </a:r>
+                      <a:endParaRPr lang="en-US" sz="1200" dirty="0">
+                        <a:latin typeface="Calibri" charset="0"/>
+                        <a:ea typeface="Calibri" charset="0"/>
+                        <a:cs typeface="Calibri" charset="0"/>
+                      </a:endParaRPr>
+                    </a:p>
+                  </a:txBody>
+                  <a:tcPr marL="38100" marR="38100" marT="38100" marB="38100" anchor="ctr">
+                    <a:lnL w="12700" cap="flat" cmpd="sng" algn="ctr">
+                      <a:solidFill>
+                        <a:srgbClr val="E2E6EC"/>
+                      </a:solidFill>
+                      <a:prstDash val="solid"/>
+                      <a:round/>
+                      <a:headEnd type="none" w="med" len="med"/>
+                      <a:tailEnd type="none" w="med" len="med"/>
+                    </a:lnL>
+                    <a:lnR w="12700" cap="flat" cmpd="sng" algn="ctr">
+                      <a:solidFill>
+                        <a:srgbClr val="E2E6EC"/>
+                      </a:solidFill>
+                      <a:prstDash val="solid"/>
+                      <a:round/>
+                      <a:headEnd type="none" w="med" len="med"/>
+                      <a:tailEnd type="none" w="med" len="med"/>
+                    </a:lnR>
+                    <a:lnT w="12700" cap="flat" cmpd="sng" algn="ctr">
+                      <a:solidFill>
+                        <a:srgbClr val="E2E6EC"/>
+                      </a:solidFill>
+                      <a:prstDash val="solid"/>
+                      <a:round/>
+                      <a:headEnd type="none" w="med" len="med"/>
+                      <a:tailEnd type="none" w="med" len="med"/>
+                    </a:lnT>
+                    <a:lnB w="12700" cap="flat" cmpd="sng" algn="ctr">
+                      <a:solidFill>
+                        <a:srgbClr val="E2E6EC"/>
+                      </a:solidFill>
+                      <a:prstDash val="solid"/>
+                      <a:round/>
+                      <a:headEnd type="none" w="med" len="med"/>
+                      <a:tailEnd type="none" w="med" len="med"/>
+                    </a:lnB>
+                    <a:solidFill>
+                      <a:srgbClr val="FFFFFF"/>
+                    </a:solidFill>
+                  </a:tcPr>
+                </a:tc>
+                <a:tc>
+                  <a:txBody>
+                    <a:bodyPr/>
+                    <a:lstStyle/>
+                    <a:p>
+                      <a:pPr marL="0" indent="0">
+                        <a:buNone/>
+                      </a:pPr>
+                      <a:r>
+                        <a:rPr lang="en-US" sz="1200" dirty="0">
+                          <a:solidFill>
+                            <a:srgbClr val="64748B"/>
+                          </a:solidFill>
+                          <a:latin typeface="Calibri" pitchFamily="34" charset="0"/>
+                          <a:ea typeface="Calibri" pitchFamily="34" charset="-122"/>
+                          <a:cs typeface="Calibri" pitchFamily="34" charset="-120"/>
+                        </a:rPr>
+                        <a:t>—</a:t>
+                      </a:r>
+                      <a:endParaRPr lang="en-US" sz="1200" dirty="0">
+                        <a:latin typeface="Calibri" charset="0"/>
+                        <a:ea typeface="Calibri" charset="0"/>
+                        <a:cs typeface="Calibri" charset="0"/>
+                      </a:endParaRPr>
+                    </a:p>
+                  </a:txBody>
+                  <a:tcPr marL="38100" marR="38100" marT="38100" marB="38100" anchor="ctr">
+                    <a:lnL w="12700" cap="flat" cmpd="sng" algn="ctr">
+                      <a:solidFill>
+                        <a:srgbClr val="E2E6EC"/>
+                      </a:solidFill>
+                      <a:prstDash val="solid"/>
+                      <a:round/>
+                      <a:headEnd type="none" w="med" len="med"/>
+                      <a:tailEnd type="none" w="med" len="med"/>
+                    </a:lnL>
+                    <a:lnR w="12700" cap="flat" cmpd="sng" algn="ctr">
+                      <a:solidFill>
+                        <a:srgbClr val="E2E6EC"/>
+                      </a:solidFill>
+                      <a:prstDash val="solid"/>
+                      <a:round/>
+                      <a:headEnd type="none" w="med" len="med"/>
+                      <a:tailEnd type="none" w="med" len="med"/>
+                    </a:lnR>
+                    <a:lnT w="12700" cap="flat" cmpd="sng" algn="ctr">
+                      <a:solidFill>
+                        <a:srgbClr val="E2E6EC"/>
+                      </a:solidFill>
+                      <a:prstDash val="solid"/>
+                      <a:round/>
+                      <a:headEnd type="none" w="med" len="med"/>
+                      <a:tailEnd type="none" w="med" len="med"/>
+                    </a:lnT>
+                    <a:lnB w="12700" cap="flat" cmpd="sng" algn="ctr">
+                      <a:solidFill>
+                        <a:srgbClr val="E2E6EC"/>
+                      </a:solidFill>
+                      <a:prstDash val="solid"/>
+                      <a:round/>
+                      <a:headEnd type="none" w="med" len="med"/>
+                      <a:tailEnd type="none" w="med" len="med"/>
+                    </a:lnB>
+                    <a:solidFill>
+                      <a:srgbClr val="FFFFFF"/>
+                    </a:solidFill>
+                  </a:tcPr>
+                </a:tc>
+                <a:tc>
+                  <a:txBody>
+                    <a:bodyPr/>
+                    <a:lstStyle/>
+                    <a:p>
+                      <a:pPr marL="0" indent="0" algn="ctr">
+                        <a:buNone/>
+                      </a:pPr>
+                      <a:r>
+                        <a:rPr lang="en-US" sz="1200" b="1" dirty="0">
+                          <a:solidFill>
+                            <a:srgbClr val="12B5A5"/>
+                          </a:solidFill>
+                          <a:latin typeface="Calibri" pitchFamily="34" charset="0"/>
+                          <a:ea typeface="Calibri" pitchFamily="34" charset="-122"/>
+                          <a:cs typeface="Calibri" pitchFamily="34" charset="-120"/>
+                        </a:rPr>
+                        <a:t>0</a:t>
+                      </a:r>
+                      <a:endParaRPr lang="en-US" sz="1200" dirty="0">
+                        <a:latin typeface="Calibri" charset="0"/>
+                        <a:ea typeface="Calibri" charset="0"/>
+                        <a:cs typeface="Calibri" charset="0"/>
+                      </a:endParaRPr>
+                    </a:p>
+                  </a:txBody>
+                  <a:tcPr marL="38100" marR="38100" marT="38100" marB="38100" anchor="ctr">
+                    <a:lnL w="12700" cap="flat" cmpd="sng" algn="ctr">
+                      <a:solidFill>
+                        <a:srgbClr val="E2E6EC"/>
+                      </a:solidFill>
+                      <a:prstDash val="solid"/>
+                      <a:round/>
+                      <a:headEnd type="none" w="med" len="med"/>
+                      <a:tailEnd type="none" w="med" len="med"/>
+                    </a:lnL>
+                    <a:lnR w="12700" cap="flat" cmpd="sng" algn="ctr">
+                      <a:solidFill>
+                        <a:srgbClr val="E2E6EC"/>
+                      </a:solidFill>
+                      <a:prstDash val="solid"/>
+                      <a:round/>
+                      <a:headEnd type="none" w="med" len="med"/>
+                      <a:tailEnd type="none" w="med" len="med"/>
+                    </a:lnR>
+                    <a:lnT w="12700" cap="flat" cmpd="sng" algn="ctr">
+                      <a:solidFill>
+                        <a:srgbClr val="E2E6EC"/>
+                      </a:solidFill>
+                      <a:prstDash val="solid"/>
+                      <a:round/>
+                      <a:headEnd type="none" w="med" len="med"/>
+                      <a:tailEnd type="none" w="med" len="med"/>
+                    </a:lnT>
+                    <a:lnB w="12700" cap="flat" cmpd="sng" algn="ctr">
+                      <a:solidFill>
+                        <a:srgbClr val="E2E6EC"/>
+                      </a:solidFill>
+                      <a:prstDash val="solid"/>
+                      <a:round/>
+                      <a:headEnd type="none" w="med" len="med"/>
+                      <a:tailEnd type="none" w="med" len="med"/>
+                    </a:lnB>
+                    <a:solidFill>
+                      <a:srgbClr val="FFFFFF"/>
+                    </a:solidFill>
+                  </a:tcPr>
+                </a:tc>
+                <a:tc>
+                  <a:txBody>
+                    <a:bodyPr/>
+                    <a:lstStyle/>
+                    <a:p>
+                      <a:pPr marL="0" indent="0" algn="ctr">
+                        <a:buNone/>
+                      </a:pPr>
+                      <a:r>
+                        <a:rPr lang="en-US" sz="1200" b="1" dirty="0">
+                          <a:solidFill>
+                            <a:srgbClr val="E11D2A"/>
+                          </a:solidFill>
+                          <a:latin typeface="Calibri" pitchFamily="34" charset="0"/>
+                          <a:ea typeface="Calibri" pitchFamily="34" charset="-122"/>
+                          <a:cs typeface="Calibri" pitchFamily="34" charset="-120"/>
+                        </a:rPr>
+                        <a:t>50</a:t>
+                      </a:r>
+                      <a:endParaRPr lang="en-US" sz="1200" dirty="0">
+                        <a:latin typeface="Calibri" charset="0"/>
+                        <a:ea typeface="Calibri" charset="0"/>
+                        <a:cs typeface="Calibri" charset="0"/>
+                      </a:endParaRPr>
+                    </a:p>
+                  </a:txBody>
+                  <a:tcPr marL="38100" marR="38100" marT="38100" marB="38100" anchor="ctr">
+                    <a:lnL w="12700" cap="flat" cmpd="sng" algn="ctr">
+                      <a:solidFill>
+                        <a:srgbClr val="E2E6EC"/>
+                      </a:solidFill>
+                      <a:prstDash val="solid"/>
+                      <a:round/>
+                      <a:headEnd type="none" w="med" len="med"/>
+                      <a:tailEnd type="none" w="med" len="med"/>
+                    </a:lnL>
+                    <a:lnR w="12700" cap="flat" cmpd="sng" algn="ctr">
+                      <a:solidFill>
+                        <a:srgbClr val="E2E6EC"/>
+                      </a:solidFill>
+                      <a:prstDash val="solid"/>
+                      <a:round/>
+                      <a:headEnd type="none" w="med" len="med"/>
+                      <a:tailEnd type="none" w="med" len="med"/>
+                    </a:lnR>
+                    <a:lnT w="12700" cap="flat" cmpd="sng" algn="ctr">
+                      <a:solidFill>
+                        <a:srgbClr val="E2E6EC"/>
+                      </a:solidFill>
+                      <a:prstDash val="solid"/>
+                      <a:round/>
+                      <a:headEnd type="none" w="med" len="med"/>
+                      <a:tailEnd type="none" w="med" len="med"/>
+                    </a:lnT>
+                    <a:lnB w="12700" cap="flat" cmpd="sng" algn="ctr">
+                      <a:solidFill>
+                        <a:srgbClr val="E2E6EC"/>
+                      </a:solidFill>
+                      <a:prstDash val="solid"/>
+                      <a:round/>
+                      <a:headEnd type="none" w="med" len="med"/>
+                      <a:tailEnd type="none" w="med" len="med"/>
+                    </a:lnB>
+                    <a:solidFill>
+                      <a:srgbClr val="FFFFFF"/>
+                    </a:solidFill>
+                  </a:tcPr>
+                </a:tc>
+                <a:extLst>
+                  <a:ext uri="{0D108BD9-81ED-4DB2-BD59-A6C34878D82A}">
+                    <a16:rowId xmlns:a16="http://schemas.microsoft.com/office/drawing/2014/main" val="10005"/>
+                  </a:ext>
+                </a:extLst>
+              </a:tr>
+              <a:tr h="384048">
+                <a:tc>
+                  <a:txBody>
+                    <a:bodyPr/>
+                    <a:lstStyle/>
+                    <a:p>
+                      <a:pPr marL="0" indent="0">
+                        <a:buNone/>
+                      </a:pPr>
+                      <a:r>
+                        <a:rPr lang="en-US" sz="1200" dirty="0">
+                          <a:solidFill>
+                            <a:srgbClr val="1F2430"/>
+                          </a:solidFill>
+                          <a:latin typeface="Calibri" pitchFamily="34" charset="0"/>
+                          <a:ea typeface="Calibri" pitchFamily="34" charset="-122"/>
+                          <a:cs typeface="Calibri" pitchFamily="34" charset="-120"/>
+                        </a:rPr>
+                        <a:t>Bertahan Hidup</a:t>
+                      </a:r>
+                      <a:endParaRPr lang="en-US" sz="1200" dirty="0">
+                        <a:latin typeface="Calibri" charset="0"/>
+                        <a:ea typeface="Calibri" charset="0"/>
+                        <a:cs typeface="Calibri" charset="0"/>
+                      </a:endParaRPr>
+                    </a:p>
+                  </a:txBody>
+                  <a:tcPr marL="38100" marR="38100" marT="38100" marB="38100" anchor="ctr">
+                    <a:lnL w="12700" cap="flat" cmpd="sng" algn="ctr">
+                      <a:solidFill>
+                        <a:srgbClr val="E2E6EC"/>
+                      </a:solidFill>
+                      <a:prstDash val="solid"/>
+                      <a:round/>
+                      <a:headEnd type="none" w="med" len="med"/>
+                      <a:tailEnd type="none" w="med" len="med"/>
+                    </a:lnL>
+                    <a:lnR w="12700" cap="flat" cmpd="sng" algn="ctr">
+                      <a:solidFill>
+                        <a:srgbClr val="E2E6EC"/>
+                      </a:solidFill>
+                      <a:prstDash val="solid"/>
+                      <a:round/>
+                      <a:headEnd type="none" w="med" len="med"/>
+                      <a:tailEnd type="none" w="med" len="med"/>
+                    </a:lnR>
+                    <a:lnT w="12700" cap="flat" cmpd="sng" algn="ctr">
+                      <a:solidFill>
+                        <a:srgbClr val="E2E6EC"/>
+                      </a:solidFill>
+                      <a:prstDash val="solid"/>
+                      <a:round/>
+                      <a:headEnd type="none" w="med" len="med"/>
+                      <a:tailEnd type="none" w="med" len="med"/>
+                    </a:lnT>
+                    <a:lnB w="12700" cap="flat" cmpd="sng" algn="ctr">
+                      <a:solidFill>
+                        <a:srgbClr val="E2E6EC"/>
+                      </a:solidFill>
+                      <a:prstDash val="solid"/>
+                      <a:round/>
+                      <a:headEnd type="none" w="med" len="med"/>
+                      <a:tailEnd type="none" w="med" len="med"/>
+                    </a:lnB>
+                    <a:solidFill>
+                      <a:srgbClr val="F4F6F8"/>
+                    </a:solidFill>
+                  </a:tcPr>
+                </a:tc>
+                <a:tc>
+                  <a:txBody>
+                    <a:bodyPr/>
+                    <a:lstStyle/>
+                    <a:p>
+                      <a:pPr marL="0" indent="0">
+                        <a:buNone/>
+                      </a:pPr>
+                      <a:r>
+                        <a:rPr lang="en-US" sz="1200" dirty="0">
+                          <a:solidFill>
+                            <a:srgbClr val="64748B"/>
+                          </a:solidFill>
+                          <a:latin typeface="Calibri" pitchFamily="34" charset="0"/>
+                          <a:ea typeface="Calibri" pitchFamily="34" charset="-122"/>
+                          <a:cs typeface="Calibri" pitchFamily="34" charset="-120"/>
+                        </a:rPr>
+                        <a:t>8 Ball</a:t>
+                      </a:r>
+                      <a:endParaRPr lang="en-US" sz="1200" dirty="0">
+                        <a:latin typeface="Calibri" charset="0"/>
+                        <a:ea typeface="Calibri" charset="0"/>
+                        <a:cs typeface="Calibri" charset="0"/>
+                      </a:endParaRPr>
+                    </a:p>
+                  </a:txBody>
+                  <a:tcPr marL="38100" marR="38100" marT="38100" marB="38100" anchor="ctr">
+                    <a:lnL w="12700" cap="flat" cmpd="sng" algn="ctr">
+                      <a:solidFill>
+                        <a:srgbClr val="E2E6EC"/>
+                      </a:solidFill>
+                      <a:prstDash val="solid"/>
+                      <a:round/>
+                      <a:headEnd type="none" w="med" len="med"/>
+                      <a:tailEnd type="none" w="med" len="med"/>
+                    </a:lnL>
+                    <a:lnR w="12700" cap="flat" cmpd="sng" algn="ctr">
+                      <a:solidFill>
+                        <a:srgbClr val="E2E6EC"/>
+                      </a:solidFill>
+                      <a:prstDash val="solid"/>
+                      <a:round/>
+                      <a:headEnd type="none" w="med" len="med"/>
+                      <a:tailEnd type="none" w="med" len="med"/>
+                    </a:lnR>
+                    <a:lnT w="12700" cap="flat" cmpd="sng" algn="ctr">
+                      <a:solidFill>
+                        <a:srgbClr val="E2E6EC"/>
+                      </a:solidFill>
+                      <a:prstDash val="solid"/>
+                      <a:round/>
+                      <a:headEnd type="none" w="med" len="med"/>
+                      <a:tailEnd type="none" w="med" len="med"/>
+                    </a:lnT>
+                    <a:lnB w="12700" cap="flat" cmpd="sng" algn="ctr">
+                      <a:solidFill>
+                        <a:srgbClr val="E2E6EC"/>
+                      </a:solidFill>
+                      <a:prstDash val="solid"/>
+                      <a:round/>
+                      <a:headEnd type="none" w="med" len="med"/>
+                      <a:tailEnd type="none" w="med" len="med"/>
+                    </a:lnB>
+                    <a:solidFill>
+                      <a:srgbClr val="F4F6F8"/>
+                    </a:solidFill>
+                  </a:tcPr>
+                </a:tc>
+                <a:tc>
+                  <a:txBody>
+                    <a:bodyPr/>
+                    <a:lstStyle/>
+                    <a:p>
+                      <a:pPr marL="0" indent="0" algn="ctr">
+                        <a:buNone/>
+                      </a:pPr>
+                      <a:r>
+                        <a:rPr lang="en-US" sz="1200" b="1" dirty="0">
+                          <a:solidFill>
+                            <a:srgbClr val="12B5A5"/>
+                          </a:solidFill>
+                          <a:latin typeface="Calibri" pitchFamily="34" charset="0"/>
+                          <a:ea typeface="Calibri" pitchFamily="34" charset="-122"/>
+                          <a:cs typeface="Calibri" pitchFamily="34" charset="-120"/>
+                        </a:rPr>
+                        <a:t>0</a:t>
+                      </a:r>
+                      <a:endParaRPr lang="en-US" sz="1200" dirty="0">
+                        <a:latin typeface="Calibri" charset="0"/>
+                        <a:ea typeface="Calibri" charset="0"/>
+                        <a:cs typeface="Calibri" charset="0"/>
+                      </a:endParaRPr>
+                    </a:p>
+                  </a:txBody>
+                  <a:tcPr marL="38100" marR="38100" marT="38100" marB="38100" anchor="ctr">
+                    <a:lnL w="12700" cap="flat" cmpd="sng" algn="ctr">
+                      <a:solidFill>
+                        <a:srgbClr val="E2E6EC"/>
+                      </a:solidFill>
+                      <a:prstDash val="solid"/>
+                      <a:round/>
+                      <a:headEnd type="none" w="med" len="med"/>
+                      <a:tailEnd type="none" w="med" len="med"/>
+                    </a:lnL>
+                    <a:lnR w="12700" cap="flat" cmpd="sng" algn="ctr">
+                      <a:solidFill>
+                        <a:srgbClr val="E2E6EC"/>
+                      </a:solidFill>
+                      <a:prstDash val="solid"/>
+                      <a:round/>
+                      <a:headEnd type="none" w="med" len="med"/>
+                      <a:tailEnd type="none" w="med" len="med"/>
+                    </a:lnR>
+                    <a:lnT w="12700" cap="flat" cmpd="sng" algn="ctr">
+                      <a:solidFill>
+                        <a:srgbClr val="E2E6EC"/>
+                      </a:solidFill>
+                      <a:prstDash val="solid"/>
+                      <a:round/>
+                      <a:headEnd type="none" w="med" len="med"/>
+                      <a:tailEnd type="none" w="med" len="med"/>
+                    </a:lnT>
+                    <a:lnB w="12700" cap="flat" cmpd="sng" algn="ctr">
+                      <a:solidFill>
+                        <a:srgbClr val="E2E6EC"/>
+                      </a:solidFill>
+                      <a:prstDash val="solid"/>
+                      <a:round/>
+                      <a:headEnd type="none" w="med" len="med"/>
+                      <a:tailEnd type="none" w="med" len="med"/>
+                    </a:lnB>
+                    <a:solidFill>
+                      <a:srgbClr val="F4F6F8"/>
+                    </a:solidFill>
+                  </a:tcPr>
+                </a:tc>
+                <a:tc>
+                  <a:txBody>
+                    <a:bodyPr/>
+                    <a:lstStyle/>
+                    <a:p>
+                      <a:pPr marL="0" indent="0" algn="ctr">
+                        <a:buNone/>
+                      </a:pPr>
+                      <a:r>
+                        <a:rPr lang="en-US" sz="1200" b="1" dirty="0">
+                          <a:solidFill>
+                            <a:srgbClr val="E11D2A"/>
+                          </a:solidFill>
+                          <a:latin typeface="Calibri" pitchFamily="34" charset="0"/>
+                          <a:ea typeface="Calibri" pitchFamily="34" charset="-122"/>
+                          <a:cs typeface="Calibri" pitchFamily="34" charset="-120"/>
+                        </a:rPr>
+                        <a:t>50</a:t>
+                      </a:r>
+                      <a:endParaRPr lang="en-US" sz="1200" dirty="0">
+                        <a:latin typeface="Calibri" charset="0"/>
+                        <a:ea typeface="Calibri" charset="0"/>
+                        <a:cs typeface="Calibri" charset="0"/>
+                      </a:endParaRPr>
+                    </a:p>
+                  </a:txBody>
+                  <a:tcPr marL="38100" marR="38100" marT="38100" marB="38100" anchor="ctr">
+                    <a:lnL w="12700" cap="flat" cmpd="sng" algn="ctr">
+                      <a:solidFill>
+                        <a:srgbClr val="E2E6EC"/>
+                      </a:solidFill>
+                      <a:prstDash val="solid"/>
+                      <a:round/>
+                      <a:headEnd type="none" w="med" len="med"/>
+                      <a:tailEnd type="none" w="med" len="med"/>
+                    </a:lnL>
+                    <a:lnR w="12700" cap="flat" cmpd="sng" algn="ctr">
+                      <a:solidFill>
+                        <a:srgbClr val="E2E6EC"/>
+                      </a:solidFill>
+                      <a:prstDash val="solid"/>
+                      <a:round/>
+                      <a:headEnd type="none" w="med" len="med"/>
+                      <a:tailEnd type="none" w="med" len="med"/>
+                    </a:lnR>
+                    <a:lnT w="12700" cap="flat" cmpd="sng" algn="ctr">
+                      <a:solidFill>
+                        <a:srgbClr val="E2E6EC"/>
+                      </a:solidFill>
+                      <a:prstDash val="solid"/>
+                      <a:round/>
+                      <a:headEnd type="none" w="med" len="med"/>
+                      <a:tailEnd type="none" w="med" len="med"/>
+                    </a:lnT>
+                    <a:lnB w="12700" cap="flat" cmpd="sng" algn="ctr">
+                      <a:solidFill>
+                        <a:srgbClr val="E2E6EC"/>
+                      </a:solidFill>
+                      <a:prstDash val="solid"/>
+                      <a:round/>
+                      <a:headEnd type="none" w="med" len="med"/>
+                      <a:tailEnd type="none" w="med" len="med"/>
+                    </a:lnB>
+                    <a:solidFill>
+                      <a:srgbClr val="F4F6F8"/>
+                    </a:solidFill>
+                  </a:tcPr>
+                </a:tc>
+                <a:extLst>
+                  <a:ext uri="{0D108BD9-81ED-4DB2-BD59-A6C34878D82A}">
+                    <a16:rowId xmlns:a16="http://schemas.microsoft.com/office/drawing/2014/main" val="10006"/>
+                  </a:ext>
+                </a:extLst>
+              </a:tr>
+              <a:tr h="384048">
+                <a:tc>
+                  <a:txBody>
+                    <a:bodyPr/>
+                    <a:lstStyle/>
+                    <a:p>
+                      <a:pPr marL="0" indent="0">
+                        <a:buNone/>
+                      </a:pPr>
+                      <a:r>
+                        <a:rPr lang="en-US" sz="1200" dirty="0">
+                          <a:solidFill>
+                            <a:srgbClr val="1F2430"/>
+                          </a:solidFill>
+                          <a:latin typeface="Calibri" pitchFamily="34" charset="0"/>
+                          <a:ea typeface="Calibri" pitchFamily="34" charset="-122"/>
+                          <a:cs typeface="Calibri" pitchFamily="34" charset="-120"/>
+                        </a:rPr>
+                        <a:t>Rindu Mama</a:t>
+                      </a:r>
+                      <a:endParaRPr lang="en-US" sz="1200" dirty="0">
+                        <a:latin typeface="Calibri" charset="0"/>
+                        <a:ea typeface="Calibri" charset="0"/>
+                        <a:cs typeface="Calibri" charset="0"/>
+                      </a:endParaRPr>
+                    </a:p>
+                  </a:txBody>
+                  <a:tcPr marL="38100" marR="38100" marT="38100" marB="38100" anchor="ctr">
+                    <a:lnL w="12700" cap="flat" cmpd="sng" algn="ctr">
+                      <a:solidFill>
+                        <a:srgbClr val="E2E6EC"/>
+                      </a:solidFill>
+                      <a:prstDash val="solid"/>
+                      <a:round/>
+                      <a:headEnd type="none" w="med" len="med"/>
+                      <a:tailEnd type="none" w="med" len="med"/>
+                    </a:lnL>
+                    <a:lnR w="12700" cap="flat" cmpd="sng" algn="ctr">
+                      <a:solidFill>
+                        <a:srgbClr val="E2E6EC"/>
+                      </a:solidFill>
+                      <a:prstDash val="solid"/>
+                      <a:round/>
+                      <a:headEnd type="none" w="med" len="med"/>
+                      <a:tailEnd type="none" w="med" len="med"/>
+                    </a:lnR>
+                    <a:lnT w="12700" cap="flat" cmpd="sng" algn="ctr">
+                      <a:solidFill>
+                        <a:srgbClr val="E2E6EC"/>
+                      </a:solidFill>
+                      <a:prstDash val="solid"/>
+                      <a:round/>
+                      <a:headEnd type="none" w="med" len="med"/>
+                      <a:tailEnd type="none" w="med" len="med"/>
+                    </a:lnT>
+                    <a:lnB w="12700" cap="flat" cmpd="sng" algn="ctr">
+                      <a:solidFill>
+                        <a:srgbClr val="E2E6EC"/>
+                      </a:solidFill>
+                      <a:prstDash val="solid"/>
+                      <a:round/>
+                      <a:headEnd type="none" w="med" len="med"/>
+                      <a:tailEnd type="none" w="med" len="med"/>
+                    </a:lnB>
+                    <a:solidFill>
+                      <a:srgbClr val="FFFFFF"/>
+                    </a:solidFill>
+                  </a:tcPr>
+                </a:tc>
+                <a:tc>
+                  <a:txBody>
+                    <a:bodyPr/>
+                    <a:lstStyle/>
+                    <a:p>
+                      <a:pPr marL="0" indent="0">
+                        <a:buNone/>
+                      </a:pPr>
+                      <a:r>
+                        <a:rPr lang="en-US" sz="1200" dirty="0">
+                          <a:solidFill>
+                            <a:srgbClr val="64748B"/>
+                          </a:solidFill>
+                          <a:latin typeface="Calibri" pitchFamily="34" charset="0"/>
+                          <a:ea typeface="Calibri" pitchFamily="34" charset="-122"/>
+                          <a:cs typeface="Calibri" pitchFamily="34" charset="-120"/>
+                        </a:rPr>
+                        <a:t>—</a:t>
+                      </a:r>
+                      <a:endParaRPr lang="en-US" sz="1200" dirty="0">
+                        <a:latin typeface="Calibri" charset="0"/>
+                        <a:ea typeface="Calibri" charset="0"/>
+                        <a:cs typeface="Calibri" charset="0"/>
+                      </a:endParaRPr>
+                    </a:p>
+                  </a:txBody>
+                  <a:tcPr marL="38100" marR="38100" marT="38100" marB="38100" anchor="ctr">
+                    <a:lnL w="12700" cap="flat" cmpd="sng" algn="ctr">
+                      <a:solidFill>
+                        <a:srgbClr val="E2E6EC"/>
+                      </a:solidFill>
+                      <a:prstDash val="solid"/>
+                      <a:round/>
+                      <a:headEnd type="none" w="med" len="med"/>
+                      <a:tailEnd type="none" w="med" len="med"/>
+                    </a:lnL>
+                    <a:lnR w="12700" cap="flat" cmpd="sng" algn="ctr">
+                      <a:solidFill>
+                        <a:srgbClr val="E2E6EC"/>
+                      </a:solidFill>
+                      <a:prstDash val="solid"/>
+                      <a:round/>
+                      <a:headEnd type="none" w="med" len="med"/>
+                      <a:tailEnd type="none" w="med" len="med"/>
+                    </a:lnR>
+                    <a:lnT w="12700" cap="flat" cmpd="sng" algn="ctr">
+                      <a:solidFill>
+                        <a:srgbClr val="E2E6EC"/>
+                      </a:solidFill>
+                      <a:prstDash val="solid"/>
+                      <a:round/>
+                      <a:headEnd type="none" w="med" len="med"/>
+                      <a:tailEnd type="none" w="med" len="med"/>
+                    </a:lnT>
+                    <a:lnB w="12700" cap="flat" cmpd="sng" algn="ctr">
+                      <a:solidFill>
+                        <a:srgbClr val="E2E6EC"/>
+                      </a:solidFill>
+                      <a:prstDash val="solid"/>
+                      <a:round/>
+                      <a:headEnd type="none" w="med" len="med"/>
+                      <a:tailEnd type="none" w="med" len="med"/>
+                    </a:lnB>
+                    <a:solidFill>
+                      <a:srgbClr val="FFFFFF"/>
+                    </a:solidFill>
+                  </a:tcPr>
+                </a:tc>
+                <a:tc>
+                  <a:txBody>
+                    <a:bodyPr/>
+                    <a:lstStyle/>
+                    <a:p>
+                      <a:pPr marL="0" indent="0" algn="ctr">
+                        <a:buNone/>
+                      </a:pPr>
+                      <a:r>
+                        <a:rPr lang="en-US" sz="1200" b="1" dirty="0">
+                          <a:solidFill>
+                            <a:srgbClr val="12B5A5"/>
+                          </a:solidFill>
+                          <a:latin typeface="Calibri" pitchFamily="34" charset="0"/>
+                          <a:ea typeface="Calibri" pitchFamily="34" charset="-122"/>
+                          <a:cs typeface="Calibri" pitchFamily="34" charset="-120"/>
+                        </a:rPr>
+                        <a:t>0</a:t>
+                      </a:r>
+                      <a:endParaRPr lang="en-US" sz="1200" dirty="0">
+                        <a:latin typeface="Calibri" charset="0"/>
+                        <a:ea typeface="Calibri" charset="0"/>
+                        <a:cs typeface="Calibri" charset="0"/>
+                      </a:endParaRPr>
+                    </a:p>
+                  </a:txBody>
+                  <a:tcPr marL="38100" marR="38100" marT="38100" marB="38100" anchor="ctr">
+                    <a:lnL w="12700" cap="flat" cmpd="sng" algn="ctr">
+                      <a:solidFill>
+                        <a:srgbClr val="E2E6EC"/>
+                      </a:solidFill>
+                      <a:prstDash val="solid"/>
+                      <a:round/>
+                      <a:headEnd type="none" w="med" len="med"/>
+                      <a:tailEnd type="none" w="med" len="med"/>
+                    </a:lnL>
+                    <a:lnR w="12700" cap="flat" cmpd="sng" algn="ctr">
+                      <a:solidFill>
+                        <a:srgbClr val="E2E6EC"/>
+                      </a:solidFill>
+                      <a:prstDash val="solid"/>
+                      <a:round/>
+                      <a:headEnd type="none" w="med" len="med"/>
+                      <a:tailEnd type="none" w="med" len="med"/>
+                    </a:lnR>
+                    <a:lnT w="12700" cap="flat" cmpd="sng" algn="ctr">
+                      <a:solidFill>
+                        <a:srgbClr val="E2E6EC"/>
+                      </a:solidFill>
+                      <a:prstDash val="solid"/>
+                      <a:round/>
+                      <a:headEnd type="none" w="med" len="med"/>
+                      <a:tailEnd type="none" w="med" len="med"/>
+                    </a:lnT>
+                    <a:lnB w="12700" cap="flat" cmpd="sng" algn="ctr">
+                      <a:solidFill>
+                        <a:srgbClr val="E2E6EC"/>
+                      </a:solidFill>
+                      <a:prstDash val="solid"/>
+                      <a:round/>
+                      <a:headEnd type="none" w="med" len="med"/>
+                      <a:tailEnd type="none" w="med" len="med"/>
+                    </a:lnB>
+                    <a:solidFill>
+                      <a:srgbClr val="FFFFFF"/>
+                    </a:solidFill>
+                  </a:tcPr>
+                </a:tc>
+                <a:tc>
+                  <a:txBody>
+                    <a:bodyPr/>
+                    <a:lstStyle/>
+                    <a:p>
+                      <a:pPr marL="0" indent="0" algn="ctr">
+                        <a:buNone/>
+                      </a:pPr>
+                      <a:r>
+                        <a:rPr lang="en-US" sz="1200" b="1" dirty="0">
+                          <a:solidFill>
+                            <a:srgbClr val="E11D2A"/>
+                          </a:solidFill>
+                          <a:latin typeface="Calibri" pitchFamily="34" charset="0"/>
+                          <a:ea typeface="Calibri" pitchFamily="34" charset="-122"/>
+                          <a:cs typeface="Calibri" pitchFamily="34" charset="-120"/>
+                        </a:rPr>
+                        <a:t>50</a:t>
+                      </a:r>
+                      <a:endParaRPr lang="en-US" sz="1200" dirty="0">
+                        <a:latin typeface="Calibri" charset="0"/>
+                        <a:ea typeface="Calibri" charset="0"/>
+                        <a:cs typeface="Calibri" charset="0"/>
+                      </a:endParaRPr>
+                    </a:p>
+                  </a:txBody>
+                  <a:tcPr marL="38100" marR="38100" marT="38100" marB="38100" anchor="ctr">
+                    <a:lnL w="12700" cap="flat" cmpd="sng" algn="ctr">
+                      <a:solidFill>
+                        <a:srgbClr val="E2E6EC"/>
+                      </a:solidFill>
+                      <a:prstDash val="solid"/>
+                      <a:round/>
+                      <a:headEnd type="none" w="med" len="med"/>
+                      <a:tailEnd type="none" w="med" len="med"/>
+                    </a:lnL>
+                    <a:lnR w="12700" cap="flat" cmpd="sng" algn="ctr">
+                      <a:solidFill>
+                        <a:srgbClr val="E2E6EC"/>
+                      </a:solidFill>
+                      <a:prstDash val="solid"/>
+                      <a:round/>
+                      <a:headEnd type="none" w="med" len="med"/>
+                      <a:tailEnd type="none" w="med" len="med"/>
+                    </a:lnR>
+                    <a:lnT w="12700" cap="flat" cmpd="sng" algn="ctr">
+                      <a:solidFill>
+                        <a:srgbClr val="E2E6EC"/>
+                      </a:solidFill>
+                      <a:prstDash val="solid"/>
+                      <a:round/>
+                      <a:headEnd type="none" w="med" len="med"/>
+                      <a:tailEnd type="none" w="med" len="med"/>
+                    </a:lnT>
+                    <a:lnB w="12700" cap="flat" cmpd="sng" algn="ctr">
+                      <a:solidFill>
+                        <a:srgbClr val="E2E6EC"/>
+                      </a:solidFill>
+                      <a:prstDash val="solid"/>
+                      <a:round/>
+                      <a:headEnd type="none" w="med" len="med"/>
+                      <a:tailEnd type="none" w="med" len="med"/>
+                    </a:lnB>
+                    <a:solidFill>
+                      <a:srgbClr val="FFFFFF"/>
+                    </a:solidFill>
+                  </a:tcPr>
+                </a:tc>
+                <a:extLst>
+                  <a:ext uri="{0D108BD9-81ED-4DB2-BD59-A6C34878D82A}">
+                    <a16:rowId xmlns:a16="http://schemas.microsoft.com/office/drawing/2014/main" val="10007"/>
+                  </a:ext>
+                </a:extLst>
+              </a:tr>
+              <a:tr h="384048">
+                <a:tc>
+                  <a:txBody>
+                    <a:bodyPr/>
+                    <a:lstStyle/>
+                    <a:p>
+                      <a:pPr marL="0" indent="0">
+                        <a:buNone/>
+                      </a:pPr>
+                      <a:r>
+                        <a:rPr lang="en-US" sz="1200" dirty="0">
+                          <a:solidFill>
+                            <a:srgbClr val="1F2430"/>
+                          </a:solidFill>
+                          <a:latin typeface="Calibri" pitchFamily="34" charset="0"/>
+                          <a:ea typeface="Calibri" pitchFamily="34" charset="-122"/>
+                          <a:cs typeface="Calibri" pitchFamily="34" charset="-120"/>
+                        </a:rPr>
+                        <a:t>Idk How To Fall</a:t>
+                      </a:r>
+                      <a:endParaRPr lang="en-US" sz="1200" dirty="0">
+                        <a:latin typeface="Calibri" charset="0"/>
+                        <a:ea typeface="Calibri" charset="0"/>
+                        <a:cs typeface="Calibri" charset="0"/>
+                      </a:endParaRPr>
+                    </a:p>
+                  </a:txBody>
+                  <a:tcPr marL="38100" marR="38100" marT="38100" marB="38100" anchor="ctr">
+                    <a:lnL w="12700" cap="flat" cmpd="sng" algn="ctr">
+                      <a:solidFill>
+                        <a:srgbClr val="E2E6EC"/>
+                      </a:solidFill>
+                      <a:prstDash val="solid"/>
+                      <a:round/>
+                      <a:headEnd type="none" w="med" len="med"/>
+                      <a:tailEnd type="none" w="med" len="med"/>
+                    </a:lnL>
+                    <a:lnR w="12700" cap="flat" cmpd="sng" algn="ctr">
+                      <a:solidFill>
+                        <a:srgbClr val="E2E6EC"/>
+                      </a:solidFill>
+                      <a:prstDash val="solid"/>
+                      <a:round/>
+                      <a:headEnd type="none" w="med" len="med"/>
+                      <a:tailEnd type="none" w="med" len="med"/>
+                    </a:lnR>
+                    <a:lnT w="12700" cap="flat" cmpd="sng" algn="ctr">
+                      <a:solidFill>
+                        <a:srgbClr val="E2E6EC"/>
+                      </a:solidFill>
+                      <a:prstDash val="solid"/>
+                      <a:round/>
+                      <a:headEnd type="none" w="med" len="med"/>
+                      <a:tailEnd type="none" w="med" len="med"/>
+                    </a:lnT>
+                    <a:lnB w="12700" cap="flat" cmpd="sng" algn="ctr">
+                      <a:solidFill>
+                        <a:srgbClr val="E2E6EC"/>
+                      </a:solidFill>
+                      <a:prstDash val="solid"/>
+                      <a:round/>
+                      <a:headEnd type="none" w="med" len="med"/>
+                      <a:tailEnd type="none" w="med" len="med"/>
+                    </a:lnB>
+                    <a:solidFill>
+                      <a:srgbClr val="F4F6F8"/>
+                    </a:solidFill>
+                  </a:tcPr>
+                </a:tc>
+                <a:tc>
+                  <a:txBody>
+                    <a:bodyPr/>
+                    <a:lstStyle/>
+                    <a:p>
+                      <a:pPr marL="0" indent="0">
+                        <a:buNone/>
+                      </a:pPr>
+                      <a:r>
+                        <a:rPr lang="en-US" sz="1200" dirty="0">
+                          <a:solidFill>
+                            <a:srgbClr val="64748B"/>
+                          </a:solidFill>
+                          <a:latin typeface="Calibri" pitchFamily="34" charset="0"/>
+                          <a:ea typeface="Calibri" pitchFamily="34" charset="-122"/>
+                          <a:cs typeface="Calibri" pitchFamily="34" charset="-120"/>
+                        </a:rPr>
+                        <a:t>—</a:t>
+                      </a:r>
+                      <a:endParaRPr lang="en-US" sz="1200" dirty="0">
+                        <a:latin typeface="Calibri" charset="0"/>
+                        <a:ea typeface="Calibri" charset="0"/>
+                        <a:cs typeface="Calibri" charset="0"/>
+                      </a:endParaRPr>
+                    </a:p>
+                  </a:txBody>
+                  <a:tcPr marL="38100" marR="38100" marT="38100" marB="38100" anchor="ctr">
+                    <a:lnL w="12700" cap="flat" cmpd="sng" algn="ctr">
+                      <a:solidFill>
+                        <a:srgbClr val="E2E6EC"/>
+                      </a:solidFill>
+                      <a:prstDash val="solid"/>
+                      <a:round/>
+                      <a:headEnd type="none" w="med" len="med"/>
+                      <a:tailEnd type="none" w="med" len="med"/>
+                    </a:lnL>
+                    <a:lnR w="12700" cap="flat" cmpd="sng" algn="ctr">
+                      <a:solidFill>
+                        <a:srgbClr val="E2E6EC"/>
+                      </a:solidFill>
+                      <a:prstDash val="solid"/>
+                      <a:round/>
+                      <a:headEnd type="none" w="med" len="med"/>
+                      <a:tailEnd type="none" w="med" len="med"/>
+                    </a:lnR>
+                    <a:lnT w="12700" cap="flat" cmpd="sng" algn="ctr">
+                      <a:solidFill>
+                        <a:srgbClr val="E2E6EC"/>
+                      </a:solidFill>
+                      <a:prstDash val="solid"/>
+                      <a:round/>
+                      <a:headEnd type="none" w="med" len="med"/>
+                      <a:tailEnd type="none" w="med" len="med"/>
+                    </a:lnT>
+                    <a:lnB w="12700" cap="flat" cmpd="sng" algn="ctr">
+                      <a:solidFill>
+                        <a:srgbClr val="E2E6EC"/>
+                      </a:solidFill>
+                      <a:prstDash val="solid"/>
+                      <a:round/>
+                      <a:headEnd type="none" w="med" len="med"/>
+                      <a:tailEnd type="none" w="med" len="med"/>
+                    </a:lnB>
+                    <a:solidFill>
+                      <a:srgbClr val="F4F6F8"/>
+                    </a:solidFill>
+                  </a:tcPr>
+                </a:tc>
+                <a:tc>
+                  <a:txBody>
+                    <a:bodyPr/>
+                    <a:lstStyle/>
+                    <a:p>
+                      <a:pPr marL="0" indent="0" algn="ctr">
+                        <a:buNone/>
+                      </a:pPr>
+                      <a:r>
+                        <a:rPr lang="en-US" sz="1200" b="1" dirty="0">
+                          <a:solidFill>
+                            <a:srgbClr val="12B5A5"/>
+                          </a:solidFill>
+                          <a:latin typeface="Calibri" pitchFamily="34" charset="0"/>
+                          <a:ea typeface="Calibri" pitchFamily="34" charset="-122"/>
+                          <a:cs typeface="Calibri" pitchFamily="34" charset="-120"/>
+                        </a:rPr>
+                        <a:t>0</a:t>
+                      </a:r>
+                      <a:endParaRPr lang="en-US" sz="1200" dirty="0">
+                        <a:latin typeface="Calibri" charset="0"/>
+                        <a:ea typeface="Calibri" charset="0"/>
+                        <a:cs typeface="Calibri" charset="0"/>
+                      </a:endParaRPr>
+                    </a:p>
+                  </a:txBody>
+                  <a:tcPr marL="38100" marR="38100" marT="38100" marB="38100" anchor="ctr">
+                    <a:lnL w="12700" cap="flat" cmpd="sng" algn="ctr">
+                      <a:solidFill>
+                        <a:srgbClr val="E2E6EC"/>
+                      </a:solidFill>
+                      <a:prstDash val="solid"/>
+                      <a:round/>
+                      <a:headEnd type="none" w="med" len="med"/>
+                      <a:tailEnd type="none" w="med" len="med"/>
+                    </a:lnL>
+                    <a:lnR w="12700" cap="flat" cmpd="sng" algn="ctr">
+                      <a:solidFill>
+                        <a:srgbClr val="E2E6EC"/>
+                      </a:solidFill>
+                      <a:prstDash val="solid"/>
+                      <a:round/>
+                      <a:headEnd type="none" w="med" len="med"/>
+                      <a:tailEnd type="none" w="med" len="med"/>
+                    </a:lnR>
+                    <a:lnT w="12700" cap="flat" cmpd="sng" algn="ctr">
+                      <a:solidFill>
+                        <a:srgbClr val="E2E6EC"/>
+                      </a:solidFill>
+                      <a:prstDash val="solid"/>
+                      <a:round/>
+                      <a:headEnd type="none" w="med" len="med"/>
+                      <a:tailEnd type="none" w="med" len="med"/>
+                    </a:lnT>
+                    <a:lnB w="12700" cap="flat" cmpd="sng" algn="ctr">
+                      <a:solidFill>
+                        <a:srgbClr val="E2E6EC"/>
+                      </a:solidFill>
+                      <a:prstDash val="solid"/>
+                      <a:round/>
+                      <a:headEnd type="none" w="med" len="med"/>
+                      <a:tailEnd type="none" w="med" len="med"/>
+                    </a:lnB>
+                    <a:solidFill>
+                      <a:srgbClr val="F4F6F8"/>
+                    </a:solidFill>
+                  </a:tcPr>
+                </a:tc>
+                <a:tc>
+                  <a:txBody>
+                    <a:bodyPr/>
+                    <a:lstStyle/>
+                    <a:p>
+                      <a:pPr marL="0" indent="0" algn="ctr">
+                        <a:buNone/>
+                      </a:pPr>
+                      <a:r>
+                        <a:rPr lang="en-US" sz="1200" b="1" dirty="0">
+                          <a:solidFill>
+                            <a:srgbClr val="E11D2A"/>
+                          </a:solidFill>
+                          <a:latin typeface="Calibri" pitchFamily="34" charset="0"/>
+                          <a:ea typeface="Calibri" pitchFamily="34" charset="-122"/>
+                          <a:cs typeface="Calibri" pitchFamily="34" charset="-120"/>
+                        </a:rPr>
+                        <a:t>50</a:t>
+                      </a:r>
+                      <a:endParaRPr lang="en-US" sz="1200" dirty="0">
+                        <a:latin typeface="Calibri" charset="0"/>
+                        <a:ea typeface="Calibri" charset="0"/>
+                        <a:cs typeface="Calibri" charset="0"/>
+                      </a:endParaRPr>
+                    </a:p>
+                  </a:txBody>
+                  <a:tcPr marL="38100" marR="38100" marT="38100" marB="38100" anchor="ctr">
+                    <a:lnL w="12700" cap="flat" cmpd="sng" algn="ctr">
+                      <a:solidFill>
+                        <a:srgbClr val="E2E6EC"/>
+                      </a:solidFill>
+                      <a:prstDash val="solid"/>
+                      <a:round/>
+                      <a:headEnd type="none" w="med" len="med"/>
+                      <a:tailEnd type="none" w="med" len="med"/>
+                    </a:lnL>
+                    <a:lnR w="12700" cap="flat" cmpd="sng" algn="ctr">
+                      <a:solidFill>
+                        <a:srgbClr val="E2E6EC"/>
+                      </a:solidFill>
+                      <a:prstDash val="solid"/>
+                      <a:round/>
+                      <a:headEnd type="none" w="med" len="med"/>
+                      <a:tailEnd type="none" w="med" len="med"/>
+                    </a:lnR>
+                    <a:lnT w="12700" cap="flat" cmpd="sng" algn="ctr">
+                      <a:solidFill>
+                        <a:srgbClr val="E2E6EC"/>
+                      </a:solidFill>
+                      <a:prstDash val="solid"/>
+                      <a:round/>
+                      <a:headEnd type="none" w="med" len="med"/>
+                      <a:tailEnd type="none" w="med" len="med"/>
+                    </a:lnT>
+                    <a:lnB w="12700" cap="flat" cmpd="sng" algn="ctr">
+                      <a:solidFill>
+                        <a:srgbClr val="E2E6EC"/>
+                      </a:solidFill>
+                      <a:prstDash val="solid"/>
+                      <a:round/>
+                      <a:headEnd type="none" w="med" len="med"/>
+                      <a:tailEnd type="none" w="med" len="med"/>
+                    </a:lnB>
+                    <a:solidFill>
+                      <a:srgbClr val="F4F6F8"/>
+                    </a:solidFill>
+                  </a:tcPr>
+                </a:tc>
+                <a:extLst>
+                  <a:ext uri="{0D108BD9-81ED-4DB2-BD59-A6C34878D82A}">
+                    <a16:rowId xmlns:a16="http://schemas.microsoft.com/office/drawing/2014/main" val="10008"/>
+                  </a:ext>
+                </a:extLst>
+              </a:tr>
+            </a:tbl>
           </a:graphicData>
         </a:graphic>
       </p:graphicFrame>
@@ -8798,12 +10686,12 @@
         </p:nvSpPr>
         <p:spPr>
           <a:xfrm>
-            <a:off x="7863840" y="1783080"/>
-            <a:ext cx="3657600" cy="4160520"/>
+            <a:off x="7772400" y="1783080"/>
+            <a:ext cx="3749040" cy="4206240"/>
           </a:xfrm>
           <a:prstGeom prst="roundRect">
             <a:avLst>
-              <a:gd name="adj" fmla="val 2500"/>
+              <a:gd name="adj" fmla="val 2439"/>
             </a:avLst>
           </a:prstGeom>
           <a:solidFill>
@@ -8811,7 +10699,7 @@
           </a:solidFill>
           <a:ln/>
           <a:effectLst>
-            <a:outerShdw sx="100000" sy="100000" kx="0" ky="0" algn="bl" rotWithShape="0" blurRad="101600" dist="38100" dir="5400000">
+            <a:outerShdw blurRad="101600" dist="38100" dir="5400000" algn="bl" rotWithShape="0">
               <a:srgbClr val="000000">
                 <a:alpha val="12000"/>
               </a:srgbClr>
@@ -8827,8 +10715,8 @@
         </p:nvSpPr>
         <p:spPr>
           <a:xfrm>
-            <a:off x="8092440" y="2011680"/>
-            <a:ext cx="3200400" cy="457200"/>
+            <a:off x="8001000" y="1965960"/>
+            <a:ext cx="3383280" cy="365760"/>
           </a:xfrm>
           <a:prstGeom prst="rect">
             <a:avLst/>
@@ -8840,21 +10728,21 @@
           <a:bodyPr wrap="square" lIns="0" tIns="0" rIns="0" bIns="0" rtlCol="0" anchor="ctr"/>
           <a:lstStyle/>
           <a:p>
-            <a:pPr indent="0" marL="0">
+            <a:pPr marL="0" indent="0">
               <a:buNone/>
             </a:pPr>
             <a:r>
-              <a:rPr lang="en-US" sz="1500" b="1" dirty="0">
-                <a:solidFill>
-                  <a:srgbClr val="FFFFFF"/>
-                </a:solidFill>
-                <a:latin typeface="Cambria" pitchFamily="34" charset="0"/>
-                <a:ea typeface="Cambria" pitchFamily="34" charset="-122"/>
-                <a:cs typeface="Cambria" pitchFamily="34" charset="-120"/>
-              </a:rPr>
-              <a:t>Both marts in one query</a:t>
-            </a:r>
-            <a:endParaRPr lang="en-US" sz="1500" dirty="0"/>
+              <a:rPr lang="en-US" sz="1100" dirty="0">
+                <a:solidFill>
+                  <a:srgbClr val="12B5A5"/>
+                </a:solidFill>
+                <a:latin typeface="Courier New" pitchFamily="34" charset="0"/>
+                <a:ea typeface="Courier New" pitchFamily="34" charset="-122"/>
+                <a:cs typeface="Courier New" pitchFamily="34" charset="-120"/>
+              </a:rPr>
+              <a:t>marts.mart_song_overview</a:t>
+            </a:r>
+            <a:endParaRPr lang="en-US" sz="1100" dirty="0"/>
           </a:p>
         </p:txBody>
       </p:sp>
@@ -8866,8 +10754,8 @@
         </p:nvSpPr>
         <p:spPr>
           <a:xfrm>
-            <a:off x="8092440" y="2423160"/>
-            <a:ext cx="3291840" cy="365760"/>
+            <a:off x="8001000" y="2331720"/>
+            <a:ext cx="3383280" cy="502920"/>
           </a:xfrm>
           <a:prstGeom prst="rect">
             <a:avLst/>
@@ -8879,21 +10767,32 @@
           <a:bodyPr wrap="square" lIns="0" tIns="0" rIns="0" bIns="0" rtlCol="0" anchor="ctr"/>
           <a:lstStyle/>
           <a:p>
-            <a:pPr indent="0" marL="0">
+            <a:pPr marL="0" indent="0">
               <a:buNone/>
             </a:pPr>
             <a:r>
-              <a:rPr lang="en-US" sz="1100" dirty="0">
-                <a:solidFill>
-                  <a:srgbClr val="12B5A5"/>
-                </a:solidFill>
-                <a:latin typeface="Courier New" pitchFamily="34" charset="0"/>
-                <a:ea typeface="Courier New" pitchFamily="34" charset="-122"/>
-                <a:cs typeface="Courier New" pitchFamily="34" charset="-120"/>
-              </a:rPr>
-              <a:t>marts.mart_song_overview</a:t>
-            </a:r>
-            <a:endParaRPr lang="en-US" sz="1100" dirty="0"/>
+              <a:rPr lang="en-US" sz="2800" b="1" dirty="0">
+                <a:solidFill>
+                  <a:srgbClr val="FFFFFF"/>
+                </a:solidFill>
+                <a:latin typeface="Calibri" pitchFamily="34" charset="0"/>
+                <a:ea typeface="Calibri" pitchFamily="34" charset="-122"/>
+                <a:cs typeface="Calibri" pitchFamily="34" charset="-120"/>
+              </a:rPr>
+              <a:t>698</a:t>
+            </a:r>
+            <a:r>
+              <a:rPr lang="en-US" sz="1200" dirty="0">
+                <a:solidFill>
+                  <a:srgbClr val="C7CDD9"/>
+                </a:solidFill>
+                <a:latin typeface="Calibri" pitchFamily="34" charset="0"/>
+                <a:ea typeface="Calibri" pitchFamily="34" charset="-122"/>
+                <a:cs typeface="Calibri" pitchFamily="34" charset="-120"/>
+              </a:rPr>
+              <a:t>  songs in catalog</a:t>
+            </a:r>
+            <a:endParaRPr lang="en-US" sz="2800" dirty="0"/>
           </a:p>
         </p:txBody>
       </p:sp>
@@ -8905,8 +10804,8 @@
         </p:nvSpPr>
         <p:spPr>
           <a:xfrm>
-            <a:off x="8092440" y="2926080"/>
-            <a:ext cx="3291840" cy="731520"/>
+            <a:off x="8001000" y="2880360"/>
+            <a:ext cx="3383280" cy="502920"/>
           </a:xfrm>
           <a:prstGeom prst="rect">
             <a:avLst/>
@@ -8918,11 +10817,11 @@
           <a:bodyPr wrap="square" lIns="0" tIns="0" rIns="0" bIns="0" rtlCol="0" anchor="ctr"/>
           <a:lstStyle/>
           <a:p>
-            <a:pPr indent="0" marL="0">
+            <a:pPr marL="0" indent="0">
               <a:buNone/>
             </a:pPr>
             <a:r>
-              <a:rPr lang="en-US" sz="4000" b="1" dirty="0">
+              <a:rPr lang="en-US" sz="2800" b="1" dirty="0">
                 <a:solidFill>
                   <a:srgbClr val="FFFFFF"/>
                 </a:solidFill>
@@ -8930,13 +10829,10 @@
                 <a:ea typeface="Calibri" pitchFamily="34" charset="-122"/>
                 <a:cs typeface="Calibri" pitchFamily="34" charset="-120"/>
               </a:rPr>
-              <a:t>37</a:t>
-            </a:r>
-            <a:pPr indent="0" marL="0">
-              <a:buNone/>
-            </a:pPr>
-            <a:r>
-              <a:rPr lang="en-US" sz="1300" dirty="0">
+              <a:t>30</a:t>
+            </a:r>
+            <a:r>
+              <a:rPr lang="en-US" sz="1200" dirty="0">
                 <a:solidFill>
                   <a:srgbClr val="C7CDD9"/>
                 </a:solidFill>
@@ -8944,22 +10840,22 @@
                 <a:ea typeface="Calibri" pitchFamily="34" charset="-122"/>
                 <a:cs typeface="Calibri" pitchFamily="34" charset="-120"/>
               </a:rPr>
-              <a:t>  dbt models + tests passing</a:t>
-            </a:r>
-            <a:endParaRPr lang="en-US" sz="4000" dirty="0"/>
+              <a:t>  processed / run (quota cap)</a:t>
+            </a:r>
+            <a:endParaRPr lang="en-US" sz="2800" dirty="0"/>
           </a:p>
         </p:txBody>
       </p:sp>
       <p:sp>
         <p:nvSpPr>
-          <p:cNvPr id="10" name="Text 7"/>
-          <p:cNvSpPr/>
-          <p:nvPr/>
-        </p:nvSpPr>
-        <p:spPr>
-          <a:xfrm>
-            <a:off x="8092440" y="3703320"/>
-            <a:ext cx="3291840" cy="731520"/>
+          <p:cNvPr id="5" name="Text 7"/>
+          <p:cNvSpPr/>
+          <p:nvPr/>
+        </p:nvSpPr>
+        <p:spPr>
+          <a:xfrm>
+            <a:off x="8001000" y="3429000"/>
+            <a:ext cx="3383280" cy="502920"/>
           </a:xfrm>
           <a:prstGeom prst="rect">
             <a:avLst/>
@@ -8971,11 +10867,11 @@
           <a:bodyPr wrap="square" lIns="0" tIns="0" rIns="0" bIns="0" rtlCol="0" anchor="ctr"/>
           <a:lstStyle/>
           <a:p>
-            <a:pPr indent="0" marL="0">
+            <a:pPr marL="0" indent="0">
               <a:buNone/>
             </a:pPr>
             <a:r>
-              <a:rPr lang="en-US" sz="4000" b="1" dirty="0">
+              <a:rPr lang="en-US" sz="2800" b="1" dirty="0">
                 <a:solidFill>
                   <a:srgbClr val="FFFFFF"/>
                 </a:solidFill>
@@ -8983,13 +10879,10 @@
                 <a:ea typeface="Calibri" pitchFamily="34" charset="-122"/>
                 <a:cs typeface="Calibri" pitchFamily="34" charset="-120"/>
               </a:rPr>
-              <a:t>0</a:t>
-            </a:r>
-            <a:pPr indent="0" marL="0">
-              <a:buNone/>
-            </a:pPr>
-            <a:r>
-              <a:rPr lang="en-US" sz="1300" dirty="0">
+              <a:t>36 / 0</a:t>
+            </a:r>
+            <a:r>
+              <a:rPr lang="en-US" sz="1200" dirty="0">
                 <a:solidFill>
                   <a:srgbClr val="C7CDD9"/>
                 </a:solidFill>
@@ -8997,9 +10890,9 @@
                 <a:ea typeface="Calibri" pitchFamily="34" charset="-122"/>
                 <a:cs typeface="Calibri" pitchFamily="34" charset="-120"/>
               </a:rPr>
-              <a:t>  failures · idempotent re-runs</a:t>
-            </a:r>
-            <a:endParaRPr lang="en-US" sz="4000" dirty="0"/>
+              <a:t>  dbt tests pass / fail</a:t>
+            </a:r>
+            <a:endParaRPr lang="en-US" sz="2800" dirty="0"/>
           </a:p>
         </p:txBody>
       </p:sp>
@@ -9011,8 +10904,8 @@
         </p:nvSpPr>
         <p:spPr>
           <a:xfrm>
-            <a:off x="8092440" y="4572000"/>
-            <a:ext cx="3246120" cy="1097280"/>
+            <a:off x="8001000" y="4114800"/>
+            <a:ext cx="3383280" cy="1737360"/>
           </a:xfrm>
           <a:prstGeom prst="rect">
             <a:avLst/>
@@ -9024,14 +10917,14 @@
           <a:bodyPr wrap="square" lIns="0" tIns="0" rIns="0" bIns="0" rtlCol="0" anchor="ctr"/>
           <a:lstStyle/>
           <a:p>
-            <a:pPr indent="0" marL="0">
+            <a:pPr marL="0" indent="0">
               <a:lnSpc>
-                <a:spcPct val="110000"/>
+                <a:spcPct val="112000"/>
               </a:lnSpc>
               <a:buNone/>
             </a:pPr>
             <a:r>
-              <a:rPr lang="en-US" sz="1300" i="1" dirty="0">
+              <a:rPr lang="en-US" sz="1100" i="1" dirty="0">
                 <a:solidFill>
                   <a:srgbClr val="C7CDD9"/>
                 </a:solidFill>
@@ -9039,9 +10932,9 @@
                 <a:ea typeface="Calibri" pitchFamily="34" charset="-122"/>
                 <a:cs typeface="Calibri" pitchFamily="34" charset="-120"/>
               </a:rPr>
-              <a:t>Runs with real API keys, or in mock mode for an offline demo.</a:t>
-            </a:r>
-            <a:endParaRPr lang="en-US" sz="1300" dirty="0"/>
+              <a:t>YouTube count is capped at 50 (search max). ISRC via MusicBrainz is sparse for this niche catalog; switches to Spotify once Extended Quota Mode is granted — no pipeline change.</a:t>
+            </a:r>
+            <a:endParaRPr lang="en-US" sz="1100" dirty="0"/>
           </a:p>
         </p:txBody>
       </p:sp>
@@ -9346,4 +11239,299 @@
     </a:ext>
   </a:extLst>
 </a:theme>
+</file>
+
+<file path=ppt/theme/theme2.xml><?xml version="1.0" encoding="utf-8"?>
+<a:theme xmlns:a="http://schemas.openxmlformats.org/drawingml/2006/main" name="Tema Office">
+  <a:themeElements>
+    <a:clrScheme name="Office">
+      <a:dk1>
+        <a:sysClr val="windowText" lastClr="000000"/>
+      </a:dk1>
+      <a:lt1>
+        <a:sysClr val="window" lastClr="FFFFFF"/>
+      </a:lt1>
+      <a:dk2>
+        <a:srgbClr val="44546A"/>
+      </a:dk2>
+      <a:lt2>
+        <a:srgbClr val="E7E6E6"/>
+      </a:lt2>
+      <a:accent1>
+        <a:srgbClr val="4472C4"/>
+      </a:accent1>
+      <a:accent2>
+        <a:srgbClr val="ED7D31"/>
+      </a:accent2>
+      <a:accent3>
+        <a:srgbClr val="A5A5A5"/>
+      </a:accent3>
+      <a:accent4>
+        <a:srgbClr val="FFC000"/>
+      </a:accent4>
+      <a:accent5>
+        <a:srgbClr val="5B9BD5"/>
+      </a:accent5>
+      <a:accent6>
+        <a:srgbClr val="70AD47"/>
+      </a:accent6>
+      <a:hlink>
+        <a:srgbClr val="0563C1"/>
+      </a:hlink>
+      <a:folHlink>
+        <a:srgbClr val="954F72"/>
+      </a:folHlink>
+    </a:clrScheme>
+    <a:fontScheme name="Office">
+      <a:majorFont>
+        <a:latin typeface="Calibri Light" panose="020F0302020204030204"/>
+        <a:ea typeface=""/>
+        <a:cs typeface=""/>
+        <a:font script="Jpan" typeface="游ゴシック Light"/>
+        <a:font script="Hang" typeface="맑은 고딕"/>
+        <a:font script="Hans" typeface="等线 Light"/>
+        <a:font script="Hant" typeface="新細明體"/>
+        <a:font script="Arab" typeface="Times New Roman"/>
+        <a:font script="Hebr" typeface="Times New Roman"/>
+        <a:font script="Thai" typeface="Angsana New"/>
+        <a:font script="Ethi" typeface="Nyala"/>
+        <a:font script="Beng" typeface="Vrinda"/>
+        <a:font script="Gujr" typeface="Shruti"/>
+        <a:font script="Khmr" typeface="MoolBoran"/>
+        <a:font script="Knda" typeface="Tunga"/>
+        <a:font script="Guru" typeface="Raavi"/>
+        <a:font script="Cans" typeface="Euphemia"/>
+        <a:font script="Cher" typeface="Plantagenet Cherokee"/>
+        <a:font script="Yiii" typeface="Microsoft Yi Baiti"/>
+        <a:font script="Tibt" typeface="Microsoft Himalaya"/>
+        <a:font script="Thaa" typeface="MV Boli"/>
+        <a:font script="Deva" typeface="Mangal"/>
+        <a:font script="Telu" typeface="Gautami"/>
+        <a:font script="Taml" typeface="Latha"/>
+        <a:font script="Syrc" typeface="Estrangelo Edessa"/>
+        <a:font script="Orya" typeface="Kalinga"/>
+        <a:font script="Mlym" typeface="Kartika"/>
+        <a:font script="Laoo" typeface="DokChampa"/>
+        <a:font script="Sinh" typeface="Iskoola Pota"/>
+        <a:font script="Mong" typeface="Mongolian Baiti"/>
+        <a:font script="Viet" typeface="Times New Roman"/>
+        <a:font script="Uigh" typeface="Microsoft Uighur"/>
+        <a:font script="Geor" typeface="Sylfaen"/>
+        <a:font script="Armn" typeface="Arial"/>
+        <a:font script="Bugi" typeface="Leelawadee UI"/>
+        <a:font script="Bopo" typeface="Microsoft JhengHei"/>
+        <a:font script="Java" typeface="Javanese Text"/>
+        <a:font script="Lisu" typeface="Segoe UI"/>
+        <a:font script="Mymr" typeface="Myanmar Text"/>
+        <a:font script="Nkoo" typeface="Ebrima"/>
+        <a:font script="Olck" typeface="Nirmala UI"/>
+        <a:font script="Osma" typeface="Ebrima"/>
+        <a:font script="Phag" typeface="Phagspa"/>
+        <a:font script="Syrn" typeface="Estrangelo Edessa"/>
+        <a:font script="Syrj" typeface="Estrangelo Edessa"/>
+        <a:font script="Syre" typeface="Estrangelo Edessa"/>
+        <a:font script="Sora" typeface="Nirmala UI"/>
+        <a:font script="Tale" typeface="Microsoft Tai Le"/>
+        <a:font script="Talu" typeface="Microsoft New Tai Lue"/>
+        <a:font script="Tfng" typeface="Ebrima"/>
+      </a:majorFont>
+      <a:minorFont>
+        <a:latin typeface="Calibri" panose="020F0502020204030204"/>
+        <a:ea typeface=""/>
+        <a:cs typeface=""/>
+        <a:font script="Jpan" typeface="游ゴシック"/>
+        <a:font script="Hang" typeface="맑은 고딕"/>
+        <a:font script="Hans" typeface="等线"/>
+        <a:font script="Hant" typeface="新細明體"/>
+        <a:font script="Arab" typeface="Arial"/>
+        <a:font script="Hebr" typeface="Arial"/>
+        <a:font script="Thai" typeface="Cordia New"/>
+        <a:font script="Ethi" typeface="Nyala"/>
+        <a:font script="Beng" typeface="Vrinda"/>
+        <a:font script="Gujr" typeface="Shruti"/>
+        <a:font script="Khmr" typeface="DaunPenh"/>
+        <a:font script="Knda" typeface="Tunga"/>
+        <a:font script="Guru" typeface="Raavi"/>
+        <a:font script="Cans" typeface="Euphemia"/>
+        <a:font script="Cher" typeface="Plantagenet Cherokee"/>
+        <a:font script="Yiii" typeface="Microsoft Yi Baiti"/>
+        <a:font script="Tibt" typeface="Microsoft Himalaya"/>
+        <a:font script="Thaa" typeface="MV Boli"/>
+        <a:font script="Deva" typeface="Mangal"/>
+        <a:font script="Telu" typeface="Gautami"/>
+        <a:font script="Taml" typeface="Latha"/>
+        <a:font script="Syrc" typeface="Estrangelo Edessa"/>
+        <a:font script="Orya" typeface="Kalinga"/>
+        <a:font script="Mlym" typeface="Kartika"/>
+        <a:font script="Laoo" typeface="DokChampa"/>
+        <a:font script="Sinh" typeface="Iskoola Pota"/>
+        <a:font script="Mong" typeface="Mongolian Baiti"/>
+        <a:font script="Viet" typeface="Arial"/>
+        <a:font script="Uigh" typeface="Microsoft Uighur"/>
+        <a:font script="Geor" typeface="Sylfaen"/>
+        <a:font script="Armn" typeface="Arial"/>
+        <a:font script="Bugi" typeface="Leelawadee UI"/>
+        <a:font script="Bopo" typeface="Microsoft JhengHei"/>
+        <a:font script="Java" typeface="Javanese Text"/>
+        <a:font script="Lisu" typeface="Segoe UI"/>
+        <a:font script="Mymr" typeface="Myanmar Text"/>
+        <a:font script="Nkoo" typeface="Ebrima"/>
+        <a:font script="Olck" typeface="Nirmala UI"/>
+        <a:font script="Osma" typeface="Ebrima"/>
+        <a:font script="Phag" typeface="Phagspa"/>
+        <a:font script="Syrn" typeface="Estrangelo Edessa"/>
+        <a:font script="Syrj" typeface="Estrangelo Edessa"/>
+        <a:font script="Syre" typeface="Estrangelo Edessa"/>
+        <a:font script="Sora" typeface="Nirmala UI"/>
+        <a:font script="Tale" typeface="Microsoft Tai Le"/>
+        <a:font script="Talu" typeface="Microsoft New Tai Lue"/>
+        <a:font script="Tfng" typeface="Ebrima"/>
+      </a:minorFont>
+    </a:fontScheme>
+    <a:fmtScheme name="Office">
+      <a:fillStyleLst>
+        <a:solidFill>
+          <a:schemeClr val="phClr"/>
+        </a:solidFill>
+        <a:gradFill rotWithShape="1">
+          <a:gsLst>
+            <a:gs pos="0">
+              <a:schemeClr val="phClr">
+                <a:lumMod val="110000"/>
+                <a:satMod val="105000"/>
+                <a:tint val="67000"/>
+              </a:schemeClr>
+            </a:gs>
+            <a:gs pos="50000">
+              <a:schemeClr val="phClr">
+                <a:lumMod val="105000"/>
+                <a:satMod val="103000"/>
+                <a:tint val="73000"/>
+              </a:schemeClr>
+            </a:gs>
+            <a:gs pos="100000">
+              <a:schemeClr val="phClr">
+                <a:lumMod val="105000"/>
+                <a:satMod val="109000"/>
+                <a:tint val="81000"/>
+              </a:schemeClr>
+            </a:gs>
+          </a:gsLst>
+          <a:lin ang="5400000" scaled="0"/>
+        </a:gradFill>
+        <a:gradFill rotWithShape="1">
+          <a:gsLst>
+            <a:gs pos="0">
+              <a:schemeClr val="phClr">
+                <a:satMod val="103000"/>
+                <a:lumMod val="102000"/>
+                <a:tint val="94000"/>
+              </a:schemeClr>
+            </a:gs>
+            <a:gs pos="50000">
+              <a:schemeClr val="phClr">
+                <a:satMod val="110000"/>
+                <a:lumMod val="100000"/>
+                <a:shade val="100000"/>
+              </a:schemeClr>
+            </a:gs>
+            <a:gs pos="100000">
+              <a:schemeClr val="phClr">
+                <a:lumMod val="99000"/>
+                <a:satMod val="120000"/>
+                <a:shade val="78000"/>
+              </a:schemeClr>
+            </a:gs>
+          </a:gsLst>
+          <a:lin ang="5400000" scaled="0"/>
+        </a:gradFill>
+      </a:fillStyleLst>
+      <a:lnStyleLst>
+        <a:ln w="6350" cap="flat" cmpd="sng" algn="ctr">
+          <a:solidFill>
+            <a:schemeClr val="phClr"/>
+          </a:solidFill>
+          <a:prstDash val="solid"/>
+          <a:miter lim="800000"/>
+        </a:ln>
+        <a:ln w="12700" cap="flat" cmpd="sng" algn="ctr">
+          <a:solidFill>
+            <a:schemeClr val="phClr"/>
+          </a:solidFill>
+          <a:prstDash val="solid"/>
+          <a:miter lim="800000"/>
+        </a:ln>
+        <a:ln w="19050" cap="flat" cmpd="sng" algn="ctr">
+          <a:solidFill>
+            <a:schemeClr val="phClr"/>
+          </a:solidFill>
+          <a:prstDash val="solid"/>
+          <a:miter lim="800000"/>
+        </a:ln>
+      </a:lnStyleLst>
+      <a:effectStyleLst>
+        <a:effectStyle>
+          <a:effectLst/>
+        </a:effectStyle>
+        <a:effectStyle>
+          <a:effectLst/>
+        </a:effectStyle>
+        <a:effectStyle>
+          <a:effectLst>
+            <a:outerShdw blurRad="57150" dist="19050" dir="5400000" algn="ctr" rotWithShape="0">
+              <a:srgbClr val="000000">
+                <a:alpha val="63000"/>
+              </a:srgbClr>
+            </a:outerShdw>
+          </a:effectLst>
+        </a:effectStyle>
+      </a:effectStyleLst>
+      <a:bgFillStyleLst>
+        <a:solidFill>
+          <a:schemeClr val="phClr"/>
+        </a:solidFill>
+        <a:solidFill>
+          <a:schemeClr val="phClr">
+            <a:tint val="95000"/>
+            <a:satMod val="170000"/>
+          </a:schemeClr>
+        </a:solidFill>
+        <a:gradFill rotWithShape="1">
+          <a:gsLst>
+            <a:gs pos="0">
+              <a:schemeClr val="phClr">
+                <a:tint val="93000"/>
+                <a:satMod val="150000"/>
+                <a:shade val="98000"/>
+                <a:lumMod val="102000"/>
+              </a:schemeClr>
+            </a:gs>
+            <a:gs pos="50000">
+              <a:schemeClr val="phClr">
+                <a:tint val="98000"/>
+                <a:satMod val="130000"/>
+                <a:shade val="90000"/>
+                <a:lumMod val="103000"/>
+              </a:schemeClr>
+            </a:gs>
+            <a:gs pos="100000">
+              <a:schemeClr val="phClr">
+                <a:shade val="63000"/>
+                <a:satMod val="120000"/>
+              </a:schemeClr>
+            </a:gs>
+          </a:gsLst>
+          <a:lin ang="5400000" scaled="0"/>
+        </a:gradFill>
+      </a:bgFillStyleLst>
+    </a:fmtScheme>
+  </a:themeElements>
+  <a:objectDefaults/>
+  <a:extraClrSchemeLst/>
+  <a:extLst>
+    <a:ext uri="{05A4C25C-085E-4340-85A3-A5531E510DB2}">
+      <thm15:themeFamily xmlns:thm15="http://schemas.microsoft.com/office/thememl/2012/main" name="Office Theme" id="{62F939B6-93AF-4DB8-9C6B-D6C7DFDC589F}" vid="{4A3C46E8-61CC-4603-A589-7422A47A8E4A}"/>
+    </a:ext>
+  </a:extLst>
+</a:theme>
 </file>
--- a/slides/MassiveMusic_DE_TechTest.pptx
+++ b/slides/MassiveMusic_DE_TechTest.pptx
@@ -4,9 +4,6 @@
   <p:sldMasterIdLst>
     <p:sldMasterId id="2147483648" r:id="rId1"/>
   </p:sldMasterIdLst>
-  <p:notesMasterIdLst>
-    <p:notesMasterId r:id="rId12"/>
-  </p:notesMasterIdLst>
   <p:sldIdLst>
     <p:sldId id="256" r:id="rId2"/>
     <p:sldId id="257" r:id="rId3"/>
@@ -19,6 +16,9 @@
     <p:sldId id="264" r:id="rId10"/>
     <p:sldId id="265" r:id="rId11"/>
   </p:sldIdLst>
+  <p:notesMasterIdLst>
+    <p:notesMasterId r:id="rId12"/>
+  </p:notesMasterIdLst>
   <p:sldSz cx="12192000" cy="6858000"/>
   <p:notesSz cx="6858000" cy="12192000"/>
   <p:defaultTextStyle>
@@ -113,11 +113,6 @@
       </a:defRPr>
     </a:lvl9pPr>
   </p:defaultTextStyle>
-  <p:extLst>
-    <p:ext uri="{EFAFB233-063F-42B5-8137-9DF3F51BA10A}">
-      <p15:sldGuideLst xmlns:p15="http://schemas.microsoft.com/office/powerpoint/2012/main"/>
-    </p:ext>
-  </p:extLst>
 </p:presentation>
 </file>
 
@@ -143,10 +138,234 @@
           <a:chExt cx="0" cy="0"/>
         </a:xfrm>
       </p:grpSpPr>
+      <p:sp>
+        <p:nvSpPr>
+          <p:cNvPr id="2" name="Header Placeholder 1"/>
+          <p:cNvSpPr>
+            <a:spLocks noGrp="1"/>
+          </p:cNvSpPr>
+          <p:nvPr>
+            <p:ph type="hdr" sz="quarter"/>
+          </p:nvPr>
+        </p:nvSpPr>
+        <p:spPr>
+          <a:xfrm>
+            <a:off x="0" y="0"/>
+            <a:ext cx="2971800" cy="458788"/>
+          </a:xfrm>
+          <a:prstGeom prst="rect">
+            <a:avLst/>
+          </a:prstGeom>
+        </p:spPr>
+        <p:txBody>
+          <a:bodyPr vert="horz" lIns="91440" tIns="45720" rIns="91440" bIns="45720" rtlCol="0"/>
+          <a:lstStyle>
+            <a:lvl1pPr algn="l">
+              <a:defRPr sz="1200"/>
+            </a:lvl1pPr>
+          </a:lstStyle>
+          <a:p>
+            <a:endParaRPr lang="en-US"/>
+          </a:p>
+        </p:txBody>
+      </p:sp>
+      <p:sp>
+        <p:nvSpPr>
+          <p:cNvPr id="3" name="Date Placeholder 2"/>
+          <p:cNvSpPr>
+            <a:spLocks noGrp="1"/>
+          </p:cNvSpPr>
+          <p:nvPr>
+            <p:ph type="dt" idx="1"/>
+          </p:nvPr>
+        </p:nvSpPr>
+        <p:spPr>
+          <a:xfrm>
+            <a:off x="3884613" y="0"/>
+            <a:ext cx="2971800" cy="458788"/>
+          </a:xfrm>
+          <a:prstGeom prst="rect">
+            <a:avLst/>
+          </a:prstGeom>
+        </p:spPr>
+        <p:txBody>
+          <a:bodyPr vert="horz" lIns="91440" tIns="45720" rIns="91440" bIns="45720" rtlCol="0"/>
+          <a:lstStyle>
+            <a:lvl1pPr algn="r">
+              <a:defRPr sz="1200"/>
+            </a:lvl1pPr>
+          </a:lstStyle>
+          <a:p>
+            <a:fld id="{5282F153-3F37-0F45-9E97-73ACFA13230C}" type="datetimeFigureOut">
+              <a:rPr lang="en-US"/>
+              <a:t>7/23/19</a:t>
+            </a:fld>
+            <a:endParaRPr lang="en-US"/>
+          </a:p>
+        </p:txBody>
+      </p:sp>
+      <p:sp>
+        <p:nvSpPr>
+          <p:cNvPr id="4" name="Slide Image Placeholder 3"/>
+          <p:cNvSpPr>
+            <a:spLocks noGrp="1" noRot="1" noChangeAspect="1"/>
+          </p:cNvSpPr>
+          <p:nvPr>
+            <p:ph type="sldImg" idx="2"/>
+          </p:nvPr>
+        </p:nvSpPr>
+        <p:spPr>
+          <a:xfrm>
+            <a:off x="685800" y="1143000"/>
+            <a:ext cx="5486400" cy="3086100"/>
+          </a:xfrm>
+          <a:prstGeom prst="rect">
+            <a:avLst/>
+          </a:prstGeom>
+          <a:noFill/>
+          <a:ln w="12700">
+            <a:solidFill>
+              <a:prstClr val="black"/>
+            </a:solidFill>
+          </a:ln>
+        </p:spPr>
+        <p:txBody>
+          <a:bodyPr vert="horz" lIns="91440" tIns="45720" rIns="91440" bIns="45720" rtlCol="0" anchor="ctr"/>
+          <a:lstStyle/>
+          <a:p>
+            <a:endParaRPr lang="en-US"/>
+          </a:p>
+        </p:txBody>
+      </p:sp>
+      <p:sp>
+        <p:nvSpPr>
+          <p:cNvPr id="5" name="Notes Placeholder 4"/>
+          <p:cNvSpPr>
+            <a:spLocks noGrp="1"/>
+          </p:cNvSpPr>
+          <p:nvPr>
+            <p:ph type="body" sz="quarter" idx="3"/>
+          </p:nvPr>
+        </p:nvSpPr>
+        <p:spPr>
+          <a:xfrm>
+            <a:off x="685800" y="4400550"/>
+            <a:ext cx="5486400" cy="3600450"/>
+          </a:xfrm>
+          <a:prstGeom prst="rect">
+            <a:avLst/>
+          </a:prstGeom>
+        </p:spPr>
+        <p:txBody>
+          <a:bodyPr vert="horz" lIns="91440" tIns="45720" rIns="91440" bIns="45720" rtlCol="0"/>
+          <a:lstStyle/>
+          <a:p>
+            <a:pPr lvl="0"/>
+            <a:r>
+              <a:rPr lang="en-US"/>
+              <a:t>Click to edit Master text styles</a:t>
+            </a:r>
+          </a:p>
+          <a:p>
+            <a:pPr lvl="1"/>
+            <a:r>
+              <a:rPr lang="en-US"/>
+              <a:t>Second level</a:t>
+            </a:r>
+          </a:p>
+          <a:p>
+            <a:pPr lvl="2"/>
+            <a:r>
+              <a:rPr lang="en-US"/>
+              <a:t>Third level</a:t>
+            </a:r>
+          </a:p>
+          <a:p>
+            <a:pPr lvl="3"/>
+            <a:r>
+              <a:rPr lang="en-US"/>
+              <a:t>Fourth level</a:t>
+            </a:r>
+          </a:p>
+          <a:p>
+            <a:pPr lvl="4"/>
+            <a:r>
+              <a:rPr lang="en-US"/>
+              <a:t>Fifth level</a:t>
+            </a:r>
+          </a:p>
+        </p:txBody>
+      </p:sp>
+      <p:sp>
+        <p:nvSpPr>
+          <p:cNvPr id="6" name="Footer Placeholder 5"/>
+          <p:cNvSpPr>
+            <a:spLocks noGrp="1"/>
+          </p:cNvSpPr>
+          <p:nvPr>
+            <p:ph type="ftr" sz="quarter" idx="4"/>
+          </p:nvPr>
+        </p:nvSpPr>
+        <p:spPr>
+          <a:xfrm>
+            <a:off x="0" y="8685213"/>
+            <a:ext cx="2971800" cy="458787"/>
+          </a:xfrm>
+          <a:prstGeom prst="rect">
+            <a:avLst/>
+          </a:prstGeom>
+        </p:spPr>
+        <p:txBody>
+          <a:bodyPr vert="horz" lIns="91440" tIns="45720" rIns="91440" bIns="45720" rtlCol="0" anchor="b"/>
+          <a:lstStyle>
+            <a:lvl1pPr algn="l">
+              <a:defRPr sz="1200"/>
+            </a:lvl1pPr>
+          </a:lstStyle>
+          <a:p>
+            <a:endParaRPr lang="en-US"/>
+          </a:p>
+        </p:txBody>
+      </p:sp>
+      <p:sp>
+        <p:nvSpPr>
+          <p:cNvPr id="7" name="Slide Number Placeholder 6"/>
+          <p:cNvSpPr>
+            <a:spLocks noGrp="1"/>
+          </p:cNvSpPr>
+          <p:nvPr>
+            <p:ph type="sldNum" sz="quarter" idx="5"/>
+          </p:nvPr>
+        </p:nvSpPr>
+        <p:spPr>
+          <a:xfrm>
+            <a:off x="3884613" y="8685213"/>
+            <a:ext cx="2971800" cy="458787"/>
+          </a:xfrm>
+          <a:prstGeom prst="rect">
+            <a:avLst/>
+          </a:prstGeom>
+        </p:spPr>
+        <p:txBody>
+          <a:bodyPr vert="horz" lIns="91440" tIns="45720" rIns="91440" bIns="45720" rtlCol="0" anchor="b"/>
+          <a:lstStyle>
+            <a:lvl1pPr algn="r">
+              <a:defRPr sz="1200"/>
+            </a:lvl1pPr>
+          </a:lstStyle>
+          <a:p>
+            <a:fld id="{CE5E9CC1-C706-0F49-92D6-E571CC5EEA8F}" type="slidenum">
+              <a:rPr lang="en-US"/>
+              <a:t>‹#›</a:t>
+            </a:fld>
+            <a:endParaRPr lang="en-US"/>
+          </a:p>
+        </p:txBody>
+      </p:sp>
     </p:spTree>
     <p:extLst>
       <p:ext uri="{BB962C8B-B14F-4D97-AF65-F5344CB8AC3E}">
-        <p14:creationId xmlns:p14="http://schemas.microsoft.com/office/powerpoint/2010/main" val="1407727517"/>
+        <p14:creationId xmlns:p14="http://schemas.microsoft.com/office/powerpoint/2010/main" val="1024086991"/>
       </p:ext>
     </p:extLst>
   </p:cSld>
@@ -290,6 +509,10 @@
           <a:bodyPr/>
           <a:lstStyle/>
           <a:p>
+            <a:r>
+              <a:rPr lang="en-US" dirty="0"/>
+              <a:t/>
+            </a:r>
             <a:endParaRPr lang="en-US" dirty="0"/>
           </a:p>
         </p:txBody>
@@ -374,6 +597,10 @@
           <a:bodyPr/>
           <a:lstStyle/>
           <a:p>
+            <a:r>
+              <a:rPr lang="en-US" dirty="0"/>
+              <a:t/>
+            </a:r>
             <a:endParaRPr lang="en-US" dirty="0"/>
           </a:p>
         </p:txBody>
@@ -458,6 +685,10 @@
           <a:bodyPr/>
           <a:lstStyle/>
           <a:p>
+            <a:r>
+              <a:rPr lang="en-US" dirty="0"/>
+              <a:t/>
+            </a:r>
             <a:endParaRPr lang="en-US" dirty="0"/>
           </a:p>
         </p:txBody>
@@ -542,6 +773,10 @@
           <a:bodyPr/>
           <a:lstStyle/>
           <a:p>
+            <a:r>
+              <a:rPr lang="en-US" dirty="0"/>
+              <a:t/>
+            </a:r>
             <a:endParaRPr lang="en-US" dirty="0"/>
           </a:p>
         </p:txBody>
@@ -626,6 +861,10 @@
           <a:bodyPr/>
           <a:lstStyle/>
           <a:p>
+            <a:r>
+              <a:rPr lang="en-US" dirty="0"/>
+              <a:t/>
+            </a:r>
             <a:endParaRPr lang="en-US" dirty="0"/>
           </a:p>
         </p:txBody>
@@ -710,6 +949,10 @@
           <a:bodyPr/>
           <a:lstStyle/>
           <a:p>
+            <a:r>
+              <a:rPr lang="en-US" dirty="0"/>
+              <a:t/>
+            </a:r>
             <a:endParaRPr lang="en-US" dirty="0"/>
           </a:p>
         </p:txBody>
@@ -794,6 +1037,10 @@
           <a:bodyPr/>
           <a:lstStyle/>
           <a:p>
+            <a:r>
+              <a:rPr lang="en-US" dirty="0"/>
+              <a:t/>
+            </a:r>
             <a:endParaRPr lang="en-US" dirty="0"/>
           </a:p>
         </p:txBody>
@@ -878,6 +1125,10 @@
           <a:bodyPr/>
           <a:lstStyle/>
           <a:p>
+            <a:r>
+              <a:rPr lang="en-US" dirty="0"/>
+              <a:t/>
+            </a:r>
             <a:endParaRPr lang="en-US" dirty="0"/>
           </a:p>
         </p:txBody>
@@ -962,6 +1213,10 @@
           <a:bodyPr/>
           <a:lstStyle/>
           <a:p>
+            <a:r>
+              <a:rPr lang="en-US" dirty="0"/>
+              <a:t/>
+            </a:r>
             <a:endParaRPr lang="en-US" dirty="0"/>
           </a:p>
         </p:txBody>
@@ -1046,6 +1301,10 @@
           <a:bodyPr/>
           <a:lstStyle/>
           <a:p>
+            <a:r>
+              <a:rPr lang="en-US" dirty="0"/>
+              <a:t/>
+            </a:r>
             <a:endParaRPr lang="en-US" dirty="0"/>
           </a:p>
         </p:txBody>
@@ -1119,11 +1378,6 @@
 <file path=ppt/slideMasters/slideMaster1.xml><?xml version="1.0" encoding="utf-8"?>
 <p:sldMaster xmlns:a="http://schemas.openxmlformats.org/drawingml/2006/main" xmlns:r="http://schemas.openxmlformats.org/officeDocument/2006/relationships" xmlns:p="http://schemas.openxmlformats.org/presentationml/2006/main">
   <p:cSld>
-    <p:bg>
-      <p:bgRef idx="1001">
-        <a:schemeClr val="bg1"/>
-      </p:bgRef>
-    </p:bg>
     <p:spTree>
       <p:nvGrpSpPr>
         <p:cNvPr id="1" name=""/>
@@ -1406,7 +1660,6 @@
         <a:solidFill>
           <a:srgbClr val="14121C"/>
         </a:solidFill>
-        <a:effectLst/>
       </p:bgPr>
     </p:bg>
     <p:spTree>
@@ -1482,7 +1735,7 @@
           </a:solidFill>
           <a:ln/>
           <a:effectLst>
-            <a:outerShdw blurRad="101600" dist="38100" dir="5400000" algn="bl" rotWithShape="0">
+            <a:outerShdw sx="100000" sy="100000" kx="0" ky="0" algn="bl" rotWithShape="0" blurRad="101600" dist="38100" dir="5400000">
               <a:srgbClr val="000000">
                 <a:alpha val="12000"/>
               </a:srgbClr>
@@ -1492,7 +1745,249 @@
       </p:sp>
       <p:pic>
         <p:nvPicPr>
-          <p:cNvPr id="5" name="Image 0" descr="preencoded.png"/>
+          <p:cNvPr id="5" name="Image 0" descr="preencoded.png">    </p:cNvPr>
+          <p:cNvPicPr>
+            <a:picLocks noChangeAspect="1"/>
+          </p:cNvPicPr>
+          <p:nvPr/>
+        </p:nvPicPr>
+        <p:blipFill>
+          <a:blip r:embed="rId1"/>
+          <a:stretch>
+            <a:fillRect/>
+          </a:stretch>
+        </p:blipFill>
+        <p:spPr>
+          <a:xfrm>
+            <a:off x="1048817" y="1003097"/>
+            <a:ext cx="416966" cy="416966"/>
+          </a:xfrm>
+          <a:prstGeom prst="rect">
+            <a:avLst/>
+          </a:prstGeom>
+        </p:spPr>
+      </p:pic>
+      <p:sp>
+        <p:nvSpPr>
+          <p:cNvPr id="6" name="Text 3"/>
+          <p:cNvSpPr/>
+          <p:nvPr/>
+        </p:nvSpPr>
+        <p:spPr>
+          <a:xfrm>
+            <a:off x="1828800" y="868680"/>
+            <a:ext cx="7315200" cy="640080"/>
+          </a:xfrm>
+          <a:prstGeom prst="rect">
+            <a:avLst/>
+          </a:prstGeom>
+          <a:noFill/>
+          <a:ln/>
+        </p:spPr>
+        <p:txBody>
+          <a:bodyPr wrap="square" lIns="0" tIns="0" rIns="0" bIns="0" rtlCol="0" anchor="ctr"/>
+          <a:lstStyle/>
+          <a:p>
+            <a:pPr indent="0" marL="0">
+              <a:buNone/>
+            </a:pPr>
+            <a:r>
+              <a:rPr lang="en-US" sz="1400" b="1" spc="300" kern="0" dirty="0">
+                <a:solidFill>
+                  <a:srgbClr val="12B5A5"/>
+                </a:solidFill>
+                <a:latin typeface="Calibri" pitchFamily="34" charset="0"/>
+                <a:ea typeface="Calibri" pitchFamily="34" charset="-122"/>
+                <a:cs typeface="Calibri" pitchFamily="34" charset="-120"/>
+              </a:rPr>
+              <a:t>MASSIVE MUSIC  ·  TECHNICAL TEST</a:t>
+            </a:r>
+            <a:endParaRPr lang="en-US" sz="1400" dirty="0"/>
+          </a:p>
+        </p:txBody>
+      </p:sp>
+      <p:sp>
+        <p:nvSpPr>
+          <p:cNvPr id="7" name="Text 4"/>
+          <p:cNvSpPr/>
+          <p:nvPr/>
+        </p:nvSpPr>
+        <p:spPr>
+          <a:xfrm>
+            <a:off x="777240" y="2286000"/>
+            <a:ext cx="10515600" cy="1005840"/>
+          </a:xfrm>
+          <a:prstGeom prst="rect">
+            <a:avLst/>
+          </a:prstGeom>
+          <a:noFill/>
+          <a:ln/>
+        </p:spPr>
+        <p:txBody>
+          <a:bodyPr wrap="square" lIns="0" tIns="0" rIns="0" bIns="0" rtlCol="0" anchor="ctr"/>
+          <a:lstStyle/>
+          <a:p>
+            <a:pPr indent="0" marL="0">
+              <a:buNone/>
+            </a:pPr>
+            <a:r>
+              <a:rPr lang="en-US" sz="5400" b="1" dirty="0">
+                <a:solidFill>
+                  <a:srgbClr val="FFFFFF"/>
+                </a:solidFill>
+                <a:latin typeface="Cambria" pitchFamily="34" charset="0"/>
+                <a:ea typeface="Cambria" pitchFamily="34" charset="-122"/>
+                <a:cs typeface="Cambria" pitchFamily="34" charset="-120"/>
+              </a:rPr>
+              <a:t>DSP Metadata Pipeline</a:t>
+            </a:r>
+            <a:endParaRPr lang="en-US" sz="5400" dirty="0"/>
+          </a:p>
+        </p:txBody>
+      </p:sp>
+      <p:sp>
+        <p:nvSpPr>
+          <p:cNvPr id="8" name="Text 5"/>
+          <p:cNvSpPr/>
+          <p:nvPr/>
+        </p:nvSpPr>
+        <p:spPr>
+          <a:xfrm>
+            <a:off x="822960" y="3383280"/>
+            <a:ext cx="9601200" cy="914400"/>
+          </a:xfrm>
+          <a:prstGeom prst="rect">
+            <a:avLst/>
+          </a:prstGeom>
+          <a:noFill/>
+          <a:ln/>
+        </p:spPr>
+        <p:txBody>
+          <a:bodyPr wrap="square" lIns="0" tIns="0" rIns="0" bIns="0" rtlCol="0" anchor="ctr"/>
+          <a:lstStyle/>
+          <a:p>
+            <a:pPr indent="0" marL="0">
+              <a:lnSpc>
+                <a:spcPct val="115000"/>
+              </a:lnSpc>
+              <a:buNone/>
+            </a:pPr>
+            <a:r>
+              <a:rPr lang="en-US" sz="1800" dirty="0">
+                <a:solidFill>
+                  <a:srgbClr val="C7CDD9"/>
+                </a:solidFill>
+                <a:latin typeface="Calibri" pitchFamily="34" charset="0"/>
+                <a:ea typeface="Calibri" pitchFamily="34" charset="-122"/>
+                <a:cs typeface="Calibri" pitchFamily="34" charset="-120"/>
+              </a:rPr>
+              <a:t>Automated retrieval, cleaning &amp; storage of song / video metadata</a:t>
+            </a:r>
+            <a:endParaRPr lang="en-US" sz="1800" dirty="0"/>
+          </a:p>
+          <a:p>
+            <a:pPr indent="0" marL="0">
+              <a:lnSpc>
+                <a:spcPct val="115000"/>
+              </a:lnSpc>
+              <a:buNone/>
+            </a:pPr>
+            <a:r>
+              <a:rPr lang="en-US" sz="1800" dirty="0">
+                <a:solidFill>
+                  <a:srgbClr val="C7CDD9"/>
+                </a:solidFill>
+                <a:latin typeface="Calibri" pitchFamily="34" charset="0"/>
+                <a:ea typeface="Calibri" pitchFamily="34" charset="-122"/>
+                <a:cs typeface="Calibri" pitchFamily="34" charset="-120"/>
+              </a:rPr>
+              <a:t>from Spotify and YouTube — built for analysts and data scientists.</a:t>
+            </a:r>
+            <a:endParaRPr lang="en-US" sz="1800" dirty="0"/>
+          </a:p>
+        </p:txBody>
+      </p:sp>
+      <p:sp>
+        <p:nvSpPr>
+          <p:cNvPr id="9" name="Shape 6"/>
+          <p:cNvSpPr/>
+          <p:nvPr/>
+        </p:nvSpPr>
+        <p:spPr>
+          <a:xfrm>
+            <a:off x="822960" y="4892040"/>
+            <a:ext cx="640080" cy="640080"/>
+          </a:xfrm>
+          <a:prstGeom prst="ellipse">
+            <a:avLst/>
+          </a:prstGeom>
+          <a:solidFill>
+            <a:srgbClr val="FFFFFF"/>
+          </a:solidFill>
+          <a:ln/>
+          <a:effectLst>
+            <a:outerShdw sx="100000" sy="100000" kx="0" ky="0" algn="bl" rotWithShape="0" blurRad="101600" dist="38100" dir="5400000">
+              <a:srgbClr val="000000">
+                <a:alpha val="12000"/>
+              </a:srgbClr>
+            </a:outerShdw>
+          </a:effectLst>
+        </p:spPr>
+      </p:sp>
+      <p:pic>
+        <p:nvPicPr>
+          <p:cNvPr id="10" name="Image 1" descr="preencoded.png">    </p:cNvPr>
+          <p:cNvPicPr>
+            <a:picLocks noChangeAspect="1"/>
+          </p:cNvPicPr>
+          <p:nvPr/>
+        </p:nvPicPr>
+        <p:blipFill>
+          <a:blip r:embed="rId2"/>
+          <a:stretch>
+            <a:fillRect/>
+          </a:stretch>
+        </p:blipFill>
+        <p:spPr>
+          <a:xfrm>
+            <a:off x="989381" y="5058461"/>
+            <a:ext cx="307238" cy="307238"/>
+          </a:xfrm>
+          <a:prstGeom prst="rect">
+            <a:avLst/>
+          </a:prstGeom>
+        </p:spPr>
+      </p:pic>
+      <p:sp>
+        <p:nvSpPr>
+          <p:cNvPr id="11" name="Shape 7"/>
+          <p:cNvSpPr/>
+          <p:nvPr/>
+        </p:nvSpPr>
+        <p:spPr>
+          <a:xfrm>
+            <a:off x="1600200" y="4892040"/>
+            <a:ext cx="640080" cy="640080"/>
+          </a:xfrm>
+          <a:prstGeom prst="ellipse">
+            <a:avLst/>
+          </a:prstGeom>
+          <a:solidFill>
+            <a:srgbClr val="FFFFFF"/>
+          </a:solidFill>
+          <a:ln/>
+          <a:effectLst>
+            <a:outerShdw sx="100000" sy="100000" kx="0" ky="0" algn="bl" rotWithShape="0" blurRad="101600" dist="38100" dir="5400000">
+              <a:srgbClr val="000000">
+                <a:alpha val="12000"/>
+              </a:srgbClr>
+            </a:outerShdw>
+          </a:effectLst>
+        </p:spPr>
+      </p:sp>
+      <p:pic>
+        <p:nvPicPr>
+          <p:cNvPr id="12" name="Image 2" descr="preencoded.png">    </p:cNvPr>
           <p:cNvPicPr>
             <a:picLocks noChangeAspect="1"/>
           </p:cNvPicPr>
@@ -1506,8 +2001,8 @@
         </p:blipFill>
         <p:spPr>
           <a:xfrm>
-            <a:off x="1048817" y="1003097"/>
-            <a:ext cx="416966" cy="416966"/>
+            <a:off x="1766621" y="5058461"/>
+            <a:ext cx="307238" cy="307238"/>
           </a:xfrm>
           <a:prstGeom prst="rect">
             <a:avLst/>
@@ -1516,14 +2011,14 @@
       </p:pic>
       <p:sp>
         <p:nvSpPr>
-          <p:cNvPr id="6" name="Text 3"/>
-          <p:cNvSpPr/>
-          <p:nvPr/>
-        </p:nvSpPr>
-        <p:spPr>
-          <a:xfrm>
-            <a:off x="1828800" y="868680"/>
-            <a:ext cx="7315200" cy="640080"/>
+          <p:cNvPr id="13" name="Text 8"/>
+          <p:cNvSpPr/>
+          <p:nvPr/>
+        </p:nvSpPr>
+        <p:spPr>
+          <a:xfrm>
+            <a:off x="2468880" y="4892040"/>
+            <a:ext cx="5486400" cy="640080"/>
           </a:xfrm>
           <a:prstGeom prst="rect">
             <a:avLst/>
@@ -1535,249 +2030,7 @@
           <a:bodyPr wrap="square" lIns="0" tIns="0" rIns="0" bIns="0" rtlCol="0" anchor="ctr"/>
           <a:lstStyle/>
           <a:p>
-            <a:pPr marL="0" indent="0">
-              <a:buNone/>
-            </a:pPr>
-            <a:r>
-              <a:rPr lang="en-US" sz="1400" b="1" kern="0" spc="300" dirty="0">
-                <a:solidFill>
-                  <a:srgbClr val="12B5A5"/>
-                </a:solidFill>
-                <a:latin typeface="Calibri" pitchFamily="34" charset="0"/>
-                <a:ea typeface="Calibri" pitchFamily="34" charset="-122"/>
-                <a:cs typeface="Calibri" pitchFamily="34" charset="-120"/>
-              </a:rPr>
-              <a:t>MASSIVE MUSIC  ·  TECHNICAL TEST</a:t>
-            </a:r>
-            <a:endParaRPr lang="en-US" sz="1400" dirty="0"/>
-          </a:p>
-        </p:txBody>
-      </p:sp>
-      <p:sp>
-        <p:nvSpPr>
-          <p:cNvPr id="7" name="Text 4"/>
-          <p:cNvSpPr/>
-          <p:nvPr/>
-        </p:nvSpPr>
-        <p:spPr>
-          <a:xfrm>
-            <a:off x="777240" y="2286000"/>
-            <a:ext cx="10515600" cy="1005840"/>
-          </a:xfrm>
-          <a:prstGeom prst="rect">
-            <a:avLst/>
-          </a:prstGeom>
-          <a:noFill/>
-          <a:ln/>
-        </p:spPr>
-        <p:txBody>
-          <a:bodyPr wrap="square" lIns="0" tIns="0" rIns="0" bIns="0" rtlCol="0" anchor="ctr"/>
-          <a:lstStyle/>
-          <a:p>
-            <a:pPr marL="0" indent="0">
-              <a:buNone/>
-            </a:pPr>
-            <a:r>
-              <a:rPr lang="en-US" sz="5400" b="1" dirty="0">
-                <a:solidFill>
-                  <a:srgbClr val="FFFFFF"/>
-                </a:solidFill>
-                <a:latin typeface="Cambria" pitchFamily="34" charset="0"/>
-                <a:ea typeface="Cambria" pitchFamily="34" charset="-122"/>
-                <a:cs typeface="Cambria" pitchFamily="34" charset="-120"/>
-              </a:rPr>
-              <a:t>DSP Metadata Pipeline</a:t>
-            </a:r>
-            <a:endParaRPr lang="en-US" sz="5400" dirty="0"/>
-          </a:p>
-        </p:txBody>
-      </p:sp>
-      <p:sp>
-        <p:nvSpPr>
-          <p:cNvPr id="8" name="Text 5"/>
-          <p:cNvSpPr/>
-          <p:nvPr/>
-        </p:nvSpPr>
-        <p:spPr>
-          <a:xfrm>
-            <a:off x="822960" y="3383280"/>
-            <a:ext cx="9601200" cy="914400"/>
-          </a:xfrm>
-          <a:prstGeom prst="rect">
-            <a:avLst/>
-          </a:prstGeom>
-          <a:noFill/>
-          <a:ln/>
-        </p:spPr>
-        <p:txBody>
-          <a:bodyPr wrap="square" lIns="0" tIns="0" rIns="0" bIns="0" rtlCol="0" anchor="ctr"/>
-          <a:lstStyle/>
-          <a:p>
-            <a:pPr marL="0" indent="0">
-              <a:lnSpc>
-                <a:spcPct val="115000"/>
-              </a:lnSpc>
-              <a:buNone/>
-            </a:pPr>
-            <a:r>
-              <a:rPr lang="en-US" sz="1800" dirty="0">
-                <a:solidFill>
-                  <a:srgbClr val="C7CDD9"/>
-                </a:solidFill>
-                <a:latin typeface="Calibri" pitchFamily="34" charset="0"/>
-                <a:ea typeface="Calibri" pitchFamily="34" charset="-122"/>
-                <a:cs typeface="Calibri" pitchFamily="34" charset="-120"/>
-              </a:rPr>
-              <a:t>Automated retrieval, cleaning &amp; storage of song / video metadata</a:t>
-            </a:r>
-            <a:endParaRPr lang="en-US" sz="1800" dirty="0"/>
-          </a:p>
-          <a:p>
-            <a:pPr marL="0" indent="0">
-              <a:lnSpc>
-                <a:spcPct val="115000"/>
-              </a:lnSpc>
-              <a:buNone/>
-            </a:pPr>
-            <a:r>
-              <a:rPr lang="en-US" sz="1800" dirty="0">
-                <a:solidFill>
-                  <a:srgbClr val="C7CDD9"/>
-                </a:solidFill>
-                <a:latin typeface="Calibri" pitchFamily="34" charset="0"/>
-                <a:ea typeface="Calibri" pitchFamily="34" charset="-122"/>
-                <a:cs typeface="Calibri" pitchFamily="34" charset="-120"/>
-              </a:rPr>
-              <a:t>from Spotify and YouTube — built for analysts and data scientists.</a:t>
-            </a:r>
-            <a:endParaRPr lang="en-US" sz="1800" dirty="0"/>
-          </a:p>
-        </p:txBody>
-      </p:sp>
-      <p:sp>
-        <p:nvSpPr>
-          <p:cNvPr id="9" name="Shape 6"/>
-          <p:cNvSpPr/>
-          <p:nvPr/>
-        </p:nvSpPr>
-        <p:spPr>
-          <a:xfrm>
-            <a:off x="822960" y="4892040"/>
-            <a:ext cx="640080" cy="640080"/>
-          </a:xfrm>
-          <a:prstGeom prst="ellipse">
-            <a:avLst/>
-          </a:prstGeom>
-          <a:solidFill>
-            <a:srgbClr val="FFFFFF"/>
-          </a:solidFill>
-          <a:ln/>
-          <a:effectLst>
-            <a:outerShdw blurRad="101600" dist="38100" dir="5400000" algn="bl" rotWithShape="0">
-              <a:srgbClr val="000000">
-                <a:alpha val="12000"/>
-              </a:srgbClr>
-            </a:outerShdw>
-          </a:effectLst>
-        </p:spPr>
-      </p:sp>
-      <p:pic>
-        <p:nvPicPr>
-          <p:cNvPr id="10" name="Image 1" descr="preencoded.png"/>
-          <p:cNvPicPr>
-            <a:picLocks noChangeAspect="1"/>
-          </p:cNvPicPr>
-          <p:nvPr/>
-        </p:nvPicPr>
-        <p:blipFill>
-          <a:blip r:embed="rId4"/>
-          <a:stretch>
-            <a:fillRect/>
-          </a:stretch>
-        </p:blipFill>
-        <p:spPr>
-          <a:xfrm>
-            <a:off x="989381" y="5058461"/>
-            <a:ext cx="307238" cy="307238"/>
-          </a:xfrm>
-          <a:prstGeom prst="rect">
-            <a:avLst/>
-          </a:prstGeom>
-        </p:spPr>
-      </p:pic>
-      <p:sp>
-        <p:nvSpPr>
-          <p:cNvPr id="11" name="Shape 7"/>
-          <p:cNvSpPr/>
-          <p:nvPr/>
-        </p:nvSpPr>
-        <p:spPr>
-          <a:xfrm>
-            <a:off x="1600200" y="4892040"/>
-            <a:ext cx="640080" cy="640080"/>
-          </a:xfrm>
-          <a:prstGeom prst="ellipse">
-            <a:avLst/>
-          </a:prstGeom>
-          <a:solidFill>
-            <a:srgbClr val="FFFFFF"/>
-          </a:solidFill>
-          <a:ln/>
-          <a:effectLst>
-            <a:outerShdw blurRad="101600" dist="38100" dir="5400000" algn="bl" rotWithShape="0">
-              <a:srgbClr val="000000">
-                <a:alpha val="12000"/>
-              </a:srgbClr>
-            </a:outerShdw>
-          </a:effectLst>
-        </p:spPr>
-      </p:sp>
-      <p:pic>
-        <p:nvPicPr>
-          <p:cNvPr id="12" name="Image 2" descr="preencoded.png"/>
-          <p:cNvPicPr>
-            <a:picLocks noChangeAspect="1"/>
-          </p:cNvPicPr>
-          <p:nvPr/>
-        </p:nvPicPr>
-        <p:blipFill>
-          <a:blip r:embed="rId5"/>
-          <a:stretch>
-            <a:fillRect/>
-          </a:stretch>
-        </p:blipFill>
-        <p:spPr>
-          <a:xfrm>
-            <a:off x="1766621" y="5058461"/>
-            <a:ext cx="307238" cy="307238"/>
-          </a:xfrm>
-          <a:prstGeom prst="rect">
-            <a:avLst/>
-          </a:prstGeom>
-        </p:spPr>
-      </p:pic>
-      <p:sp>
-        <p:nvSpPr>
-          <p:cNvPr id="13" name="Text 8"/>
-          <p:cNvSpPr/>
-          <p:nvPr/>
-        </p:nvSpPr>
-        <p:spPr>
-          <a:xfrm>
-            <a:off x="2468880" y="4892040"/>
-            <a:ext cx="5486400" cy="640080"/>
-          </a:xfrm>
-          <a:prstGeom prst="rect">
-            <a:avLst/>
-          </a:prstGeom>
-          <a:noFill/>
-          <a:ln/>
-        </p:spPr>
-        <p:txBody>
-          <a:bodyPr wrap="square" lIns="0" tIns="0" rIns="0" bIns="0" rtlCol="0" anchor="ctr"/>
-          <a:lstStyle/>
-          <a:p>
-            <a:pPr marL="0" indent="0">
+            <a:pPr indent="0" marL="0">
               <a:buNone/>
             </a:pPr>
             <a:r>
@@ -1811,7 +2064,6 @@
         <a:solidFill>
           <a:srgbClr val="14121C"/>
         </a:solidFill>
-        <a:effectLst/>
       </p:bgPr>
     </p:bg>
     <p:spTree>
@@ -1867,7 +2119,7 @@
           </a:solidFill>
           <a:ln/>
           <a:effectLst>
-            <a:outerShdw blurRad="101600" dist="38100" dir="5400000" algn="bl" rotWithShape="0">
+            <a:outerShdw sx="100000" sy="100000" kx="0" ky="0" algn="bl" rotWithShape="0" blurRad="101600" dist="38100" dir="5400000">
               <a:srgbClr val="000000">
                 <a:alpha val="12000"/>
               </a:srgbClr>
@@ -1877,7 +2129,459 @@
       </p:sp>
       <p:pic>
         <p:nvPicPr>
-          <p:cNvPr id="4" name="Image 0" descr="preencoded.png"/>
+          <p:cNvPr id="4" name="Image 0" descr="preencoded.png">    </p:cNvPr>
+          <p:cNvPicPr>
+            <a:picLocks noChangeAspect="1"/>
+          </p:cNvPicPr>
+          <p:nvPr/>
+        </p:nvPicPr>
+        <p:blipFill>
+          <a:blip r:embed="rId1"/>
+          <a:stretch>
+            <a:fillRect/>
+          </a:stretch>
+        </p:blipFill>
+        <p:spPr>
+          <a:xfrm>
+            <a:off x="854050" y="762610"/>
+            <a:ext cx="395021" cy="395021"/>
+          </a:xfrm>
+          <a:prstGeom prst="rect">
+            <a:avLst/>
+          </a:prstGeom>
+        </p:spPr>
+      </p:pic>
+      <p:sp>
+        <p:nvSpPr>
+          <p:cNvPr id="5" name="Text 2"/>
+          <p:cNvSpPr/>
+          <p:nvPr/>
+        </p:nvSpPr>
+        <p:spPr>
+          <a:xfrm>
+            <a:off x="1600200" y="548640"/>
+            <a:ext cx="9144000" cy="822960"/>
+          </a:xfrm>
+          <a:prstGeom prst="rect">
+            <a:avLst/>
+          </a:prstGeom>
+          <a:noFill/>
+          <a:ln/>
+        </p:spPr>
+        <p:txBody>
+          <a:bodyPr wrap="square" lIns="0" tIns="0" rIns="0" bIns="0" rtlCol="0" anchor="ctr"/>
+          <a:lstStyle/>
+          <a:p>
+            <a:pPr indent="0" marL="0">
+              <a:buNone/>
+            </a:pPr>
+            <a:r>
+              <a:rPr lang="en-US" sz="3000" b="1" dirty="0">
+                <a:solidFill>
+                  <a:srgbClr val="FFFFFF"/>
+                </a:solidFill>
+                <a:latin typeface="Cambria" pitchFamily="34" charset="0"/>
+                <a:ea typeface="Cambria" pitchFamily="34" charset="-122"/>
+                <a:cs typeface="Cambria" pitchFamily="34" charset="-120"/>
+              </a:rPr>
+              <a:t>Run it &amp; what's next</a:t>
+            </a:r>
+            <a:endParaRPr lang="en-US" sz="3000" dirty="0"/>
+          </a:p>
+        </p:txBody>
+      </p:sp>
+      <p:sp>
+        <p:nvSpPr>
+          <p:cNvPr id="6" name="Shape 3"/>
+          <p:cNvSpPr/>
+          <p:nvPr/>
+        </p:nvSpPr>
+        <p:spPr>
+          <a:xfrm>
+            <a:off x="640080" y="1691640"/>
+            <a:ext cx="5486400" cy="2103120"/>
+          </a:xfrm>
+          <a:prstGeom prst="roundRect">
+            <a:avLst>
+              <a:gd name="adj" fmla="val 4348"/>
+            </a:avLst>
+          </a:prstGeom>
+          <a:solidFill>
+            <a:srgbClr val="0B0A12"/>
+          </a:solidFill>
+          <a:ln/>
+        </p:spPr>
+      </p:sp>
+      <p:sp>
+        <p:nvSpPr>
+          <p:cNvPr id="7" name="Shape 4"/>
+          <p:cNvSpPr/>
+          <p:nvPr/>
+        </p:nvSpPr>
+        <p:spPr>
+          <a:xfrm>
+            <a:off x="868680" y="1874520"/>
+            <a:ext cx="502920" cy="502920"/>
+          </a:xfrm>
+          <a:prstGeom prst="ellipse">
+            <a:avLst/>
+          </a:prstGeom>
+          <a:solidFill>
+            <a:srgbClr val="12B5A5"/>
+          </a:solidFill>
+          <a:ln/>
+          <a:effectLst>
+            <a:outerShdw sx="100000" sy="100000" kx="0" ky="0" algn="bl" rotWithShape="0" blurRad="101600" dist="38100" dir="5400000">
+              <a:srgbClr val="000000">
+                <a:alpha val="12000"/>
+              </a:srgbClr>
+            </a:outerShdw>
+          </a:effectLst>
+        </p:spPr>
+      </p:sp>
+      <p:pic>
+        <p:nvPicPr>
+          <p:cNvPr id="8" name="Image 1" descr="preencoded.png">    </p:cNvPr>
+          <p:cNvPicPr>
+            <a:picLocks noChangeAspect="1"/>
+          </p:cNvPicPr>
+          <p:nvPr/>
+        </p:nvPicPr>
+        <p:blipFill>
+          <a:blip r:embed="rId2"/>
+          <a:stretch>
+            <a:fillRect/>
+          </a:stretch>
+        </p:blipFill>
+        <p:spPr>
+          <a:xfrm>
+            <a:off x="999439" y="2005279"/>
+            <a:ext cx="241402" cy="241402"/>
+          </a:xfrm>
+          <a:prstGeom prst="rect">
+            <a:avLst/>
+          </a:prstGeom>
+        </p:spPr>
+      </p:pic>
+      <p:sp>
+        <p:nvSpPr>
+          <p:cNvPr id="9" name="Text 5"/>
+          <p:cNvSpPr/>
+          <p:nvPr/>
+        </p:nvSpPr>
+        <p:spPr>
+          <a:xfrm>
+            <a:off x="1508760" y="1874520"/>
+            <a:ext cx="4114800" cy="457200"/>
+          </a:xfrm>
+          <a:prstGeom prst="rect">
+            <a:avLst/>
+          </a:prstGeom>
+          <a:noFill/>
+          <a:ln/>
+        </p:spPr>
+        <p:txBody>
+          <a:bodyPr wrap="square" lIns="0" tIns="0" rIns="0" bIns="0" rtlCol="0" anchor="ctr"/>
+          <a:lstStyle/>
+          <a:p>
+            <a:pPr indent="0" marL="0">
+              <a:buNone/>
+            </a:pPr>
+            <a:r>
+              <a:rPr lang="en-US" sz="1400" b="1" dirty="0">
+                <a:solidFill>
+                  <a:srgbClr val="FFFFFF"/>
+                </a:solidFill>
+                <a:latin typeface="Calibri" pitchFamily="34" charset="0"/>
+                <a:ea typeface="Calibri" pitchFamily="34" charset="-122"/>
+                <a:cs typeface="Calibri" pitchFamily="34" charset="-120"/>
+              </a:rPr>
+              <a:t>Three commands</a:t>
+            </a:r>
+            <a:endParaRPr lang="en-US" sz="1400" dirty="0"/>
+          </a:p>
+        </p:txBody>
+      </p:sp>
+      <p:sp>
+        <p:nvSpPr>
+          <p:cNvPr id="10" name="Text 6"/>
+          <p:cNvSpPr/>
+          <p:nvPr/>
+        </p:nvSpPr>
+        <p:spPr>
+          <a:xfrm>
+            <a:off x="914400" y="2468880"/>
+            <a:ext cx="5029200" cy="1188720"/>
+          </a:xfrm>
+          <a:prstGeom prst="rect">
+            <a:avLst/>
+          </a:prstGeom>
+          <a:noFill/>
+          <a:ln/>
+        </p:spPr>
+        <p:txBody>
+          <a:bodyPr wrap="square" lIns="0" tIns="0" rIns="0" bIns="0" rtlCol="0" anchor="ctr"/>
+          <a:lstStyle/>
+          <a:p>
+            <a:pPr indent="0" marL="0">
+              <a:lnSpc>
+                <a:spcPct val="125000"/>
+              </a:lnSpc>
+              <a:buNone/>
+            </a:pPr>
+            <a:r>
+              <a:rPr lang="en-US" sz="1350" dirty="0">
+                <a:solidFill>
+                  <a:srgbClr val="7CF2D8"/>
+                </a:solidFill>
+                <a:latin typeface="Courier New" pitchFamily="34" charset="0"/>
+                <a:ea typeface="Courier New" pitchFamily="34" charset="-122"/>
+                <a:cs typeface="Courier New" pitchFamily="34" charset="-120"/>
+              </a:rPr>
+              <a:t>cp .env.example .env</a:t>
+            </a:r>
+            <a:endParaRPr lang="en-US" sz="1350" dirty="0"/>
+          </a:p>
+          <a:p>
+            <a:pPr indent="0" marL="0">
+              <a:lnSpc>
+                <a:spcPct val="125000"/>
+              </a:lnSpc>
+              <a:buNone/>
+            </a:pPr>
+            <a:r>
+              <a:rPr lang="en-US" sz="1350" dirty="0">
+                <a:solidFill>
+                  <a:srgbClr val="7CF2D8"/>
+                </a:solidFill>
+                <a:latin typeface="Courier New" pitchFamily="34" charset="0"/>
+                <a:ea typeface="Courier New" pitchFamily="34" charset="-122"/>
+                <a:cs typeface="Courier New" pitchFamily="34" charset="-120"/>
+              </a:rPr>
+              <a:t>docker compose build</a:t>
+            </a:r>
+            <a:endParaRPr lang="en-US" sz="1350" dirty="0"/>
+          </a:p>
+          <a:p>
+            <a:pPr indent="0" marL="0">
+              <a:lnSpc>
+                <a:spcPct val="125000"/>
+              </a:lnSpc>
+              <a:buNone/>
+            </a:pPr>
+            <a:r>
+              <a:rPr lang="en-US" sz="1350" dirty="0">
+                <a:solidFill>
+                  <a:srgbClr val="7CF2D8"/>
+                </a:solidFill>
+                <a:latin typeface="Courier New" pitchFamily="34" charset="0"/>
+                <a:ea typeface="Courier New" pitchFamily="34" charset="-122"/>
+                <a:cs typeface="Courier New" pitchFamily="34" charset="-120"/>
+              </a:rPr>
+              <a:t>docker compose run --rm pipeline run-all</a:t>
+            </a:r>
+            <a:endParaRPr lang="en-US" sz="1350" dirty="0"/>
+          </a:p>
+        </p:txBody>
+      </p:sp>
+      <p:sp>
+        <p:nvSpPr>
+          <p:cNvPr id="11" name="Text 7"/>
+          <p:cNvSpPr/>
+          <p:nvPr/>
+        </p:nvSpPr>
+        <p:spPr>
+          <a:xfrm>
+            <a:off x="6492240" y="1737360"/>
+            <a:ext cx="5029200" cy="457200"/>
+          </a:xfrm>
+          <a:prstGeom prst="rect">
+            <a:avLst/>
+          </a:prstGeom>
+          <a:noFill/>
+          <a:ln/>
+        </p:spPr>
+        <p:txBody>
+          <a:bodyPr wrap="square" lIns="0" tIns="0" rIns="0" bIns="0" rtlCol="0" anchor="ctr"/>
+          <a:lstStyle/>
+          <a:p>
+            <a:pPr indent="0" marL="0">
+              <a:buNone/>
+            </a:pPr>
+            <a:r>
+              <a:rPr lang="en-US" sz="1800" b="1" dirty="0">
+                <a:solidFill>
+                  <a:srgbClr val="FFFFFF"/>
+                </a:solidFill>
+                <a:latin typeface="Cambria" pitchFamily="34" charset="0"/>
+                <a:ea typeface="Cambria" pitchFamily="34" charset="-122"/>
+                <a:cs typeface="Cambria" pitchFamily="34" charset="-120"/>
+              </a:rPr>
+              <a:t>Next steps</a:t>
+            </a:r>
+            <a:endParaRPr lang="en-US" sz="1800" dirty="0"/>
+          </a:p>
+        </p:txBody>
+      </p:sp>
+      <p:sp>
+        <p:nvSpPr>
+          <p:cNvPr id="12" name="Text 8"/>
+          <p:cNvSpPr/>
+          <p:nvPr/>
+        </p:nvSpPr>
+        <p:spPr>
+          <a:xfrm>
+            <a:off x="6492240" y="2286000"/>
+            <a:ext cx="5029200" cy="2103120"/>
+          </a:xfrm>
+          <a:prstGeom prst="rect">
+            <a:avLst/>
+          </a:prstGeom>
+          <a:noFill/>
+          <a:ln/>
+        </p:spPr>
+        <p:txBody>
+          <a:bodyPr wrap="square" lIns="0" tIns="0" rIns="0" bIns="0" rtlCol="0" anchor="ctr"/>
+          <a:lstStyle/>
+          <a:p>
+            <a:pPr marL="342900" indent="-342900">
+              <a:spcAft>
+                <a:spcPts val="1000"/>
+              </a:spcAft>
+              <a:buSzPct val="100000"/>
+              <a:buChar char="•"/>
+            </a:pPr>
+            <a:r>
+              <a:rPr lang="en-US" sz="1400" dirty="0">
+                <a:solidFill>
+                  <a:srgbClr val="DDE2EC"/>
+                </a:solidFill>
+                <a:latin typeface="Calibri" pitchFamily="34" charset="0"/>
+                <a:ea typeface="Calibri" pitchFamily="34" charset="-122"/>
+                <a:cs typeface="Calibri" pitchFamily="34" charset="-120"/>
+              </a:rPr>
+              <a:t>Incremental fct_* models + freshness SLAs</a:t>
+            </a:r>
+            <a:endParaRPr lang="en-US" sz="1400" dirty="0"/>
+          </a:p>
+          <a:p>
+            <a:pPr marL="342900" indent="-342900">
+              <a:spcAft>
+                <a:spcPts val="1000"/>
+              </a:spcAft>
+              <a:buSzPct val="100000"/>
+              <a:buChar char="•"/>
+            </a:pPr>
+            <a:r>
+              <a:rPr lang="en-US" sz="1400" dirty="0">
+                <a:solidFill>
+                  <a:srgbClr val="DDE2EC"/>
+                </a:solidFill>
+                <a:latin typeface="Calibri" pitchFamily="34" charset="0"/>
+                <a:ea typeface="Calibri" pitchFamily="34" charset="-122"/>
+                <a:cs typeface="Calibri" pitchFamily="34" charset="-120"/>
+              </a:rPr>
+              <a:t>Relevance filtering on YouTube (Official Artist Channel, fuzzy match)</a:t>
+            </a:r>
+            <a:endParaRPr lang="en-US" sz="1400" dirty="0"/>
+          </a:p>
+          <a:p>
+            <a:pPr marL="342900" indent="-342900">
+              <a:spcAft>
+                <a:spcPts val="1000"/>
+              </a:spcAft>
+              <a:buSzPct val="100000"/>
+              <a:buChar char="•"/>
+            </a:pPr>
+            <a:r>
+              <a:rPr lang="en-US" sz="1400" dirty="0">
+                <a:solidFill>
+                  <a:srgbClr val="DDE2EC"/>
+                </a:solidFill>
+                <a:latin typeface="Calibri" pitchFamily="34" charset="0"/>
+                <a:ea typeface="Calibri" pitchFamily="34" charset="-122"/>
+                <a:cs typeface="Calibri" pitchFamily="34" charset="-120"/>
+              </a:rPr>
+              <a:t>ISRC source pluggable: Spotify needs Extended Quota Mode (2026 dev-mode) → used free MusicBrainz</a:t>
+            </a:r>
+            <a:endParaRPr lang="en-US" sz="1400" dirty="0"/>
+          </a:p>
+          <a:p>
+            <a:pPr marL="342900" indent="-342900">
+              <a:spcAft>
+                <a:spcPts val="1000"/>
+              </a:spcAft>
+              <a:buSzPct val="100000"/>
+              <a:buChar char="•"/>
+            </a:pPr>
+            <a:r>
+              <a:rPr lang="en-US" sz="1400" dirty="0">
+                <a:solidFill>
+                  <a:srgbClr val="DDE2EC"/>
+                </a:solidFill>
+                <a:latin typeface="Calibri" pitchFamily="34" charset="0"/>
+                <a:ea typeface="Calibri" pitchFamily="34" charset="-122"/>
+                <a:cs typeface="Calibri" pitchFamily="34" charset="-120"/>
+              </a:rPr>
+              <a:t>CI: run dbt tests on every PR</a:t>
+            </a:r>
+            <a:endParaRPr lang="en-US" sz="1400" dirty="0"/>
+          </a:p>
+        </p:txBody>
+      </p:sp>
+      <p:sp>
+        <p:nvSpPr>
+          <p:cNvPr id="13" name="Shape 9"/>
+          <p:cNvSpPr/>
+          <p:nvPr/>
+        </p:nvSpPr>
+        <p:spPr>
+          <a:xfrm>
+            <a:off x="640080" y="4572000"/>
+            <a:ext cx="10881360" cy="0"/>
+          </a:xfrm>
+          <a:prstGeom prst="line">
+            <a:avLst/>
+          </a:prstGeom>
+          <a:noFill/>
+          <a:ln w="12700">
+            <a:solidFill>
+              <a:srgbClr val="33304A"/>
+            </a:solidFill>
+            <a:prstDash val="solid"/>
+          </a:ln>
+        </p:spPr>
+      </p:sp>
+      <p:sp>
+        <p:nvSpPr>
+          <p:cNvPr id="14" name="Shape 10"/>
+          <p:cNvSpPr/>
+          <p:nvPr/>
+        </p:nvSpPr>
+        <p:spPr>
+          <a:xfrm>
+            <a:off x="640080" y="4983480"/>
+            <a:ext cx="640080" cy="640080"/>
+          </a:xfrm>
+          <a:prstGeom prst="ellipse">
+            <a:avLst/>
+          </a:prstGeom>
+          <a:solidFill>
+            <a:srgbClr val="E11D2A"/>
+          </a:solidFill>
+          <a:ln/>
+          <a:effectLst>
+            <a:outerShdw sx="100000" sy="100000" kx="0" ky="0" algn="bl" rotWithShape="0" blurRad="101600" dist="38100" dir="5400000">
+              <a:srgbClr val="000000">
+                <a:alpha val="12000"/>
+              </a:srgbClr>
+            </a:outerShdw>
+          </a:effectLst>
+        </p:spPr>
+      </p:sp>
+      <p:pic>
+        <p:nvPicPr>
+          <p:cNvPr id="15" name="Image 2" descr="preencoded.png">    </p:cNvPr>
           <p:cNvPicPr>
             <a:picLocks noChangeAspect="1"/>
           </p:cNvPicPr>
@@ -1891,8 +2595,8 @@
         </p:blipFill>
         <p:spPr>
           <a:xfrm>
-            <a:off x="854050" y="762610"/>
-            <a:ext cx="395021" cy="395021"/>
+            <a:off x="806501" y="5149901"/>
+            <a:ext cx="307238" cy="307238"/>
           </a:xfrm>
           <a:prstGeom prst="rect">
             <a:avLst/>
@@ -1901,14 +2605,14 @@
       </p:pic>
       <p:sp>
         <p:nvSpPr>
-          <p:cNvPr id="5" name="Text 2"/>
-          <p:cNvSpPr/>
-          <p:nvPr/>
-        </p:nvSpPr>
-        <p:spPr>
-          <a:xfrm>
-            <a:off x="1600200" y="548640"/>
-            <a:ext cx="9144000" cy="822960"/>
+          <p:cNvPr id="16" name="Text 11"/>
+          <p:cNvSpPr/>
+          <p:nvPr/>
+        </p:nvSpPr>
+        <p:spPr>
+          <a:xfrm>
+            <a:off x="1463040" y="4983480"/>
+            <a:ext cx="10058400" cy="640080"/>
           </a:xfrm>
           <a:prstGeom prst="rect">
             <a:avLst/>
@@ -1920,123 +2624,11 @@
           <a:bodyPr wrap="square" lIns="0" tIns="0" rIns="0" bIns="0" rtlCol="0" anchor="ctr"/>
           <a:lstStyle/>
           <a:p>
-            <a:pPr marL="0" indent="0">
+            <a:pPr indent="0" marL="0">
               <a:buNone/>
             </a:pPr>
             <a:r>
-              <a:rPr lang="en-US" sz="3000" b="1" dirty="0">
-                <a:solidFill>
-                  <a:srgbClr val="FFFFFF"/>
-                </a:solidFill>
-                <a:latin typeface="Cambria" pitchFamily="34" charset="0"/>
-                <a:ea typeface="Cambria" pitchFamily="34" charset="-122"/>
-                <a:cs typeface="Cambria" pitchFamily="34" charset="-120"/>
-              </a:rPr>
-              <a:t>Run it &amp; what's next</a:t>
-            </a:r>
-            <a:endParaRPr lang="en-US" sz="3000" dirty="0"/>
-          </a:p>
-        </p:txBody>
-      </p:sp>
-      <p:sp>
-        <p:nvSpPr>
-          <p:cNvPr id="6" name="Shape 3"/>
-          <p:cNvSpPr/>
-          <p:nvPr/>
-        </p:nvSpPr>
-        <p:spPr>
-          <a:xfrm>
-            <a:off x="640080" y="1691640"/>
-            <a:ext cx="5486400" cy="2103120"/>
-          </a:xfrm>
-          <a:prstGeom prst="roundRect">
-            <a:avLst>
-              <a:gd name="adj" fmla="val 4348"/>
-            </a:avLst>
-          </a:prstGeom>
-          <a:solidFill>
-            <a:srgbClr val="0B0A12"/>
-          </a:solidFill>
-          <a:ln/>
-        </p:spPr>
-      </p:sp>
-      <p:sp>
-        <p:nvSpPr>
-          <p:cNvPr id="7" name="Shape 4"/>
-          <p:cNvSpPr/>
-          <p:nvPr/>
-        </p:nvSpPr>
-        <p:spPr>
-          <a:xfrm>
-            <a:off x="868680" y="1874520"/>
-            <a:ext cx="502920" cy="502920"/>
-          </a:xfrm>
-          <a:prstGeom prst="ellipse">
-            <a:avLst/>
-          </a:prstGeom>
-          <a:solidFill>
-            <a:srgbClr val="12B5A5"/>
-          </a:solidFill>
-          <a:ln/>
-          <a:effectLst>
-            <a:outerShdw blurRad="101600" dist="38100" dir="5400000" algn="bl" rotWithShape="0">
-              <a:srgbClr val="000000">
-                <a:alpha val="12000"/>
-              </a:srgbClr>
-            </a:outerShdw>
-          </a:effectLst>
-        </p:spPr>
-      </p:sp>
-      <p:pic>
-        <p:nvPicPr>
-          <p:cNvPr id="8" name="Image 1" descr="preencoded.png"/>
-          <p:cNvPicPr>
-            <a:picLocks noChangeAspect="1"/>
-          </p:cNvPicPr>
-          <p:nvPr/>
-        </p:nvPicPr>
-        <p:blipFill>
-          <a:blip r:embed="rId4"/>
-          <a:stretch>
-            <a:fillRect/>
-          </a:stretch>
-        </p:blipFill>
-        <p:spPr>
-          <a:xfrm>
-            <a:off x="999439" y="2005279"/>
-            <a:ext cx="241402" cy="241402"/>
-          </a:xfrm>
-          <a:prstGeom prst="rect">
-            <a:avLst/>
-          </a:prstGeom>
-        </p:spPr>
-      </p:pic>
-      <p:sp>
-        <p:nvSpPr>
-          <p:cNvPr id="9" name="Text 5"/>
-          <p:cNvSpPr/>
-          <p:nvPr/>
-        </p:nvSpPr>
-        <p:spPr>
-          <a:xfrm>
-            <a:off x="1508760" y="1874520"/>
-            <a:ext cx="4114800" cy="457200"/>
-          </a:xfrm>
-          <a:prstGeom prst="rect">
-            <a:avLst/>
-          </a:prstGeom>
-          <a:noFill/>
-          <a:ln/>
-        </p:spPr>
-        <p:txBody>
-          <a:bodyPr wrap="square" lIns="0" tIns="0" rIns="0" bIns="0" rtlCol="0" anchor="ctr"/>
-          <a:lstStyle/>
-          <a:p>
-            <a:pPr marL="0" indent="0">
-              <a:buNone/>
-            </a:pPr>
-            <a:r>
-              <a:rPr lang="en-US" sz="1400" b="1" dirty="0">
+              <a:rPr lang="en-US" sz="1500" b="1" dirty="0">
                 <a:solidFill>
                   <a:srgbClr val="FFFFFF"/>
                 </a:solidFill>
@@ -2044,348 +2636,11 @@
                 <a:ea typeface="Calibri" pitchFamily="34" charset="-122"/>
                 <a:cs typeface="Calibri" pitchFamily="34" charset="-120"/>
               </a:rPr>
-              <a:t>Three commands</a:t>
-            </a:r>
-            <a:endParaRPr lang="en-US" sz="1400" dirty="0"/>
-          </a:p>
-        </p:txBody>
-      </p:sp>
-      <p:sp>
-        <p:nvSpPr>
-          <p:cNvPr id="10" name="Text 6"/>
-          <p:cNvSpPr/>
-          <p:nvPr/>
-        </p:nvSpPr>
-        <p:spPr>
-          <a:xfrm>
-            <a:off x="914400" y="2468880"/>
-            <a:ext cx="5029200" cy="1188720"/>
-          </a:xfrm>
-          <a:prstGeom prst="rect">
-            <a:avLst/>
-          </a:prstGeom>
-          <a:noFill/>
-          <a:ln/>
-        </p:spPr>
-        <p:txBody>
-          <a:bodyPr wrap="square" lIns="0" tIns="0" rIns="0" bIns="0" rtlCol="0" anchor="ctr"/>
-          <a:lstStyle/>
-          <a:p>
-            <a:pPr marL="0" indent="0">
-              <a:lnSpc>
-                <a:spcPct val="125000"/>
-              </a:lnSpc>
+              <a:t>Thank you  ·  </a:t>
+            </a:r>
+            <a:pPr indent="0" marL="0">
               <a:buNone/>
             </a:pPr>
-            <a:r>
-              <a:rPr lang="en-US" sz="1350" dirty="0">
-                <a:solidFill>
-                  <a:srgbClr val="7CF2D8"/>
-                </a:solidFill>
-                <a:latin typeface="Courier New" pitchFamily="34" charset="0"/>
-                <a:ea typeface="Courier New" pitchFamily="34" charset="-122"/>
-                <a:cs typeface="Courier New" pitchFamily="34" charset="-120"/>
-              </a:rPr>
-              <a:t>cp .env.example .env</a:t>
-            </a:r>
-            <a:endParaRPr lang="en-US" sz="1350" dirty="0"/>
-          </a:p>
-          <a:p>
-            <a:pPr marL="0" indent="0">
-              <a:lnSpc>
-                <a:spcPct val="125000"/>
-              </a:lnSpc>
-              <a:buNone/>
-            </a:pPr>
-            <a:r>
-              <a:rPr lang="en-US" sz="1350" dirty="0">
-                <a:solidFill>
-                  <a:srgbClr val="7CF2D8"/>
-                </a:solidFill>
-                <a:latin typeface="Courier New" pitchFamily="34" charset="0"/>
-                <a:ea typeface="Courier New" pitchFamily="34" charset="-122"/>
-                <a:cs typeface="Courier New" pitchFamily="34" charset="-120"/>
-              </a:rPr>
-              <a:t>docker compose build</a:t>
-            </a:r>
-            <a:endParaRPr lang="en-US" sz="1350" dirty="0"/>
-          </a:p>
-          <a:p>
-            <a:pPr marL="0" indent="0">
-              <a:lnSpc>
-                <a:spcPct val="125000"/>
-              </a:lnSpc>
-              <a:buNone/>
-            </a:pPr>
-            <a:r>
-              <a:rPr lang="en-US" sz="1350" dirty="0">
-                <a:solidFill>
-                  <a:srgbClr val="7CF2D8"/>
-                </a:solidFill>
-                <a:latin typeface="Courier New" pitchFamily="34" charset="0"/>
-                <a:ea typeface="Courier New" pitchFamily="34" charset="-122"/>
-                <a:cs typeface="Courier New" pitchFamily="34" charset="-120"/>
-              </a:rPr>
-              <a:t>docker compose run --rm pipeline run-all</a:t>
-            </a:r>
-            <a:endParaRPr lang="en-US" sz="1350" dirty="0"/>
-          </a:p>
-        </p:txBody>
-      </p:sp>
-      <p:sp>
-        <p:nvSpPr>
-          <p:cNvPr id="11" name="Text 7"/>
-          <p:cNvSpPr/>
-          <p:nvPr/>
-        </p:nvSpPr>
-        <p:spPr>
-          <a:xfrm>
-            <a:off x="6492240" y="1737360"/>
-            <a:ext cx="5029200" cy="457200"/>
-          </a:xfrm>
-          <a:prstGeom prst="rect">
-            <a:avLst/>
-          </a:prstGeom>
-          <a:noFill/>
-          <a:ln/>
-        </p:spPr>
-        <p:txBody>
-          <a:bodyPr wrap="square" lIns="0" tIns="0" rIns="0" bIns="0" rtlCol="0" anchor="ctr"/>
-          <a:lstStyle/>
-          <a:p>
-            <a:pPr marL="0" indent="0">
-              <a:buNone/>
-            </a:pPr>
-            <a:r>
-              <a:rPr lang="en-US" sz="1800" b="1" dirty="0">
-                <a:solidFill>
-                  <a:srgbClr val="FFFFFF"/>
-                </a:solidFill>
-                <a:latin typeface="Cambria" pitchFamily="34" charset="0"/>
-                <a:ea typeface="Cambria" pitchFamily="34" charset="-122"/>
-                <a:cs typeface="Cambria" pitchFamily="34" charset="-120"/>
-              </a:rPr>
-              <a:t>Next steps</a:t>
-            </a:r>
-            <a:endParaRPr lang="en-US" sz="1800" dirty="0"/>
-          </a:p>
-        </p:txBody>
-      </p:sp>
-      <p:sp>
-        <p:nvSpPr>
-          <p:cNvPr id="12" name="Text 8"/>
-          <p:cNvSpPr/>
-          <p:nvPr/>
-        </p:nvSpPr>
-        <p:spPr>
-          <a:xfrm>
-            <a:off x="6492240" y="2286000"/>
-            <a:ext cx="5029200" cy="2103120"/>
-          </a:xfrm>
-          <a:prstGeom prst="rect">
-            <a:avLst/>
-          </a:prstGeom>
-          <a:noFill/>
-          <a:ln/>
-        </p:spPr>
-        <p:txBody>
-          <a:bodyPr wrap="square" lIns="0" tIns="0" rIns="0" bIns="0" rtlCol="0" anchor="ctr"/>
-          <a:lstStyle/>
-          <a:p>
-            <a:pPr marL="342900" indent="-342900">
-              <a:spcAft>
-                <a:spcPts val="1000"/>
-              </a:spcAft>
-              <a:buSzPct val="100000"/>
-              <a:buChar char="•"/>
-            </a:pPr>
-            <a:r>
-              <a:rPr lang="en-US" sz="1400" dirty="0">
-                <a:solidFill>
-                  <a:srgbClr val="DDE2EC"/>
-                </a:solidFill>
-                <a:latin typeface="Calibri" pitchFamily="34" charset="0"/>
-                <a:ea typeface="Calibri" pitchFamily="34" charset="-122"/>
-                <a:cs typeface="Calibri" pitchFamily="34" charset="-120"/>
-              </a:rPr>
-              <a:t>Incremental fct_* models + freshness SLAs</a:t>
-            </a:r>
-            <a:endParaRPr lang="en-US" sz="1400" dirty="0"/>
-          </a:p>
-          <a:p>
-            <a:pPr marL="342900" indent="-342900">
-              <a:spcAft>
-                <a:spcPts val="1000"/>
-              </a:spcAft>
-              <a:buSzPct val="100000"/>
-              <a:buChar char="•"/>
-            </a:pPr>
-            <a:r>
-              <a:rPr lang="en-US" sz="1400" dirty="0">
-                <a:solidFill>
-                  <a:srgbClr val="DDE2EC"/>
-                </a:solidFill>
-                <a:latin typeface="Calibri" pitchFamily="34" charset="0"/>
-                <a:ea typeface="Calibri" pitchFamily="34" charset="-122"/>
-                <a:cs typeface="Calibri" pitchFamily="34" charset="-120"/>
-              </a:rPr>
-              <a:t>Relevance filtering on YouTube (Official Artist Channel, fuzzy match)</a:t>
-            </a:r>
-            <a:endParaRPr lang="en-US" sz="1400" dirty="0"/>
-          </a:p>
-          <a:p>
-            <a:pPr marL="342900" indent="-342900">
-              <a:spcAft>
-                <a:spcPts val="1000"/>
-              </a:spcAft>
-              <a:buSzPct val="100000"/>
-              <a:buChar char="•"/>
-            </a:pPr>
-            <a:r>
-              <a:rPr lang="en-US" sz="1400" dirty="0">
-                <a:solidFill>
-                  <a:srgbClr val="DDE2EC"/>
-                </a:solidFill>
-                <a:latin typeface="Calibri" pitchFamily="34" charset="0"/>
-                <a:ea typeface="Calibri" pitchFamily="34" charset="-122"/>
-                <a:cs typeface="Calibri" pitchFamily="34" charset="-120"/>
-              </a:rPr>
-              <a:t>ISRC source pluggable: Spotify needs Extended Quota Mode (2026 dev-mode) → used free MusicBrainz</a:t>
-            </a:r>
-            <a:endParaRPr lang="en-US" sz="1400" dirty="0"/>
-          </a:p>
-          <a:p>
-            <a:pPr marL="342900" indent="-342900">
-              <a:spcAft>
-                <a:spcPts val="1000"/>
-              </a:spcAft>
-              <a:buSzPct val="100000"/>
-              <a:buChar char="•"/>
-            </a:pPr>
-            <a:r>
-              <a:rPr lang="en-US" sz="1400" dirty="0">
-                <a:solidFill>
-                  <a:srgbClr val="DDE2EC"/>
-                </a:solidFill>
-                <a:latin typeface="Calibri" pitchFamily="34" charset="0"/>
-                <a:ea typeface="Calibri" pitchFamily="34" charset="-122"/>
-                <a:cs typeface="Calibri" pitchFamily="34" charset="-120"/>
-              </a:rPr>
-              <a:t>CI: run dbt tests on every PR</a:t>
-            </a:r>
-            <a:endParaRPr lang="en-US" sz="1400" dirty="0"/>
-          </a:p>
-        </p:txBody>
-      </p:sp>
-      <p:sp>
-        <p:nvSpPr>
-          <p:cNvPr id="13" name="Shape 9"/>
-          <p:cNvSpPr/>
-          <p:nvPr/>
-        </p:nvSpPr>
-        <p:spPr>
-          <a:xfrm>
-            <a:off x="640080" y="4572000"/>
-            <a:ext cx="10881360" cy="0"/>
-          </a:xfrm>
-          <a:prstGeom prst="line">
-            <a:avLst/>
-          </a:prstGeom>
-          <a:noFill/>
-          <a:ln w="12700">
-            <a:solidFill>
-              <a:srgbClr val="33304A"/>
-            </a:solidFill>
-            <a:prstDash val="solid"/>
-          </a:ln>
-        </p:spPr>
-      </p:sp>
-      <p:sp>
-        <p:nvSpPr>
-          <p:cNvPr id="14" name="Shape 10"/>
-          <p:cNvSpPr/>
-          <p:nvPr/>
-        </p:nvSpPr>
-        <p:spPr>
-          <a:xfrm>
-            <a:off x="640080" y="4983480"/>
-            <a:ext cx="640080" cy="640080"/>
-          </a:xfrm>
-          <a:prstGeom prst="ellipse">
-            <a:avLst/>
-          </a:prstGeom>
-          <a:solidFill>
-            <a:srgbClr val="E11D2A"/>
-          </a:solidFill>
-          <a:ln/>
-          <a:effectLst>
-            <a:outerShdw blurRad="101600" dist="38100" dir="5400000" algn="bl" rotWithShape="0">
-              <a:srgbClr val="000000">
-                <a:alpha val="12000"/>
-              </a:srgbClr>
-            </a:outerShdw>
-          </a:effectLst>
-        </p:spPr>
-      </p:sp>
-      <p:pic>
-        <p:nvPicPr>
-          <p:cNvPr id="15" name="Image 2" descr="preencoded.png"/>
-          <p:cNvPicPr>
-            <a:picLocks noChangeAspect="1"/>
-          </p:cNvPicPr>
-          <p:nvPr/>
-        </p:nvPicPr>
-        <p:blipFill>
-          <a:blip r:embed="rId5"/>
-          <a:stretch>
-            <a:fillRect/>
-          </a:stretch>
-        </p:blipFill>
-        <p:spPr>
-          <a:xfrm>
-            <a:off x="806501" y="5149901"/>
-            <a:ext cx="307238" cy="307238"/>
-          </a:xfrm>
-          <a:prstGeom prst="rect">
-            <a:avLst/>
-          </a:prstGeom>
-        </p:spPr>
-      </p:pic>
-      <p:sp>
-        <p:nvSpPr>
-          <p:cNvPr id="16" name="Text 11"/>
-          <p:cNvSpPr/>
-          <p:nvPr/>
-        </p:nvSpPr>
-        <p:spPr>
-          <a:xfrm>
-            <a:off x="1463040" y="4983480"/>
-            <a:ext cx="10058400" cy="640080"/>
-          </a:xfrm>
-          <a:prstGeom prst="rect">
-            <a:avLst/>
-          </a:prstGeom>
-          <a:noFill/>
-          <a:ln/>
-        </p:spPr>
-        <p:txBody>
-          <a:bodyPr wrap="square" lIns="0" tIns="0" rIns="0" bIns="0" rtlCol="0" anchor="ctr"/>
-          <a:lstStyle/>
-          <a:p>
-            <a:pPr marL="0" indent="0">
-              <a:buNone/>
-            </a:pPr>
-            <a:r>
-              <a:rPr lang="en-US" sz="1500" b="1" dirty="0">
-                <a:solidFill>
-                  <a:srgbClr val="FFFFFF"/>
-                </a:solidFill>
-                <a:latin typeface="Calibri" pitchFamily="34" charset="0"/>
-                <a:ea typeface="Calibri" pitchFamily="34" charset="-122"/>
-                <a:cs typeface="Calibri" pitchFamily="34" charset="-120"/>
-              </a:rPr>
-              <a:t>Thank you  ·  </a:t>
-            </a:r>
             <a:r>
               <a:rPr lang="en-US" sz="1500" dirty="0">
                 <a:solidFill>
@@ -2417,7 +2672,6 @@
         <a:solidFill>
           <a:srgbClr val="FFFFFF"/>
         </a:solidFill>
-        <a:effectLst/>
       </p:bgPr>
     </p:bg>
     <p:spTree>
@@ -2455,7 +2709,7 @@
           <a:bodyPr wrap="square" rtlCol="0" anchor="ctr"/>
           <a:lstStyle/>
           <a:p>
-            <a:pPr marL="0" indent="0" algn="l">
+            <a:pPr algn="l" indent="0" marL="0">
               <a:buNone/>
             </a:pPr>
             <a:r>
@@ -2494,7 +2748,7 @@
           <a:bodyPr wrap="square" lIns="0" tIns="0" rIns="0" bIns="0" rtlCol="0" anchor="ctr"/>
           <a:lstStyle/>
           <a:p>
-            <a:pPr marL="0" indent="0">
+            <a:pPr indent="0" marL="0">
               <a:buNone/>
             </a:pPr>
             <a:r>
@@ -2533,7 +2787,7 @@
           <a:bodyPr wrap="square" lIns="0" tIns="0" rIns="0" bIns="0" rtlCol="0" anchor="ctr"/>
           <a:lstStyle/>
           <a:p>
-            <a:pPr marL="0" indent="0">
+            <a:pPr indent="0" marL="0">
               <a:buNone/>
             </a:pPr>
             <a:r>
@@ -2572,7 +2826,7 @@
           </a:solidFill>
           <a:ln/>
           <a:effectLst>
-            <a:outerShdw blurRad="101600" dist="38100" dir="5400000" algn="bl" rotWithShape="0">
+            <a:outerShdw sx="100000" sy="100000" kx="0" ky="0" algn="bl" rotWithShape="0" blurRad="101600" dist="38100" dir="5400000">
               <a:srgbClr val="000000">
                 <a:alpha val="12000"/>
               </a:srgbClr>
@@ -2599,7 +2853,7 @@
           </a:solidFill>
           <a:ln/>
           <a:effectLst>
-            <a:outerShdw blurRad="101600" dist="38100" dir="5400000" algn="bl" rotWithShape="0">
+            <a:outerShdw sx="100000" sy="100000" kx="0" ky="0" algn="bl" rotWithShape="0" blurRad="101600" dist="38100" dir="5400000">
               <a:srgbClr val="000000">
                 <a:alpha val="12000"/>
               </a:srgbClr>
@@ -2609,14 +2863,14 @@
       </p:sp>
       <p:pic>
         <p:nvPicPr>
-          <p:cNvPr id="7" name="Image 0" descr="preencoded.png"/>
+          <p:cNvPr id="7" name="Image 0" descr="preencoded.png">    </p:cNvPr>
           <p:cNvPicPr>
             <a:picLocks noChangeAspect="1"/>
           </p:cNvPicPr>
           <p:nvPr/>
         </p:nvPicPr>
         <p:blipFill>
-          <a:blip r:embed="rId3"/>
+          <a:blip r:embed="rId1"/>
           <a:stretch>
             <a:fillRect/>
           </a:stretch>
@@ -2652,7 +2906,7 @@
           <a:bodyPr wrap="square" lIns="0" tIns="0" rIns="0" bIns="0" rtlCol="0" anchor="ctr"/>
           <a:lstStyle/>
           <a:p>
-            <a:pPr marL="0" indent="0">
+            <a:pPr indent="0" marL="0">
               <a:buNone/>
             </a:pPr>
             <a:r>
@@ -2691,7 +2945,7 @@
           <a:bodyPr wrap="square" lIns="0" tIns="0" rIns="0" bIns="0" rtlCol="0" anchor="ctr"/>
           <a:lstStyle/>
           <a:p>
-            <a:pPr marL="0" indent="0">
+            <a:pPr indent="0" marL="0">
               <a:lnSpc>
                 <a:spcPct val="110000"/>
               </a:lnSpc>
@@ -2733,7 +2987,7 @@
           <a:bodyPr wrap="square" lIns="0" tIns="0" rIns="0" bIns="0" rtlCol="0" anchor="ctr"/>
           <a:lstStyle/>
           <a:p>
-            <a:pPr marL="0" indent="0">
+            <a:pPr indent="0" marL="0">
               <a:buNone/>
             </a:pPr>
             <a:r>
@@ -2747,6 +3001,9 @@
               </a:rPr>
               <a:t>OUTPUT  </a:t>
             </a:r>
+            <a:pPr indent="0" marL="0">
+              <a:buNone/>
+            </a:pPr>
             <a:r>
               <a:rPr lang="en-US" sz="1250" b="1" dirty="0">
                 <a:solidFill>
@@ -2783,7 +3040,7 @@
           </a:solidFill>
           <a:ln/>
           <a:effectLst>
-            <a:outerShdw blurRad="101600" dist="38100" dir="5400000" algn="bl" rotWithShape="0">
+            <a:outerShdw sx="100000" sy="100000" kx="0" ky="0" algn="bl" rotWithShape="0" blurRad="101600" dist="38100" dir="5400000">
               <a:srgbClr val="000000">
                 <a:alpha val="12000"/>
               </a:srgbClr>
@@ -2810,7 +3067,7 @@
           </a:solidFill>
           <a:ln/>
           <a:effectLst>
-            <a:outerShdw blurRad="101600" dist="38100" dir="5400000" algn="bl" rotWithShape="0">
+            <a:outerShdw sx="100000" sy="100000" kx="0" ky="0" algn="bl" rotWithShape="0" blurRad="101600" dist="38100" dir="5400000">
               <a:srgbClr val="000000">
                 <a:alpha val="12000"/>
               </a:srgbClr>
@@ -2820,14 +3077,14 @@
       </p:sp>
       <p:pic>
         <p:nvPicPr>
-          <p:cNvPr id="13" name="Image 1" descr="preencoded.png"/>
+          <p:cNvPr id="13" name="Image 1" descr="preencoded.png">    </p:cNvPr>
           <p:cNvPicPr>
             <a:picLocks noChangeAspect="1"/>
           </p:cNvPicPr>
           <p:nvPr/>
         </p:nvPicPr>
         <p:blipFill>
-          <a:blip r:embed="rId4"/>
+          <a:blip r:embed="rId2"/>
           <a:stretch>
             <a:fillRect/>
           </a:stretch>
@@ -2863,7 +3120,7 @@
           <a:bodyPr wrap="square" lIns="0" tIns="0" rIns="0" bIns="0" rtlCol="0" anchor="ctr"/>
           <a:lstStyle/>
           <a:p>
-            <a:pPr marL="0" indent="0">
+            <a:pPr indent="0" marL="0">
               <a:buNone/>
             </a:pPr>
             <a:r>
@@ -2902,7 +3159,7 @@
           <a:bodyPr wrap="square" lIns="0" tIns="0" rIns="0" bIns="0" rtlCol="0" anchor="ctr"/>
           <a:lstStyle/>
           <a:p>
-            <a:pPr marL="0" indent="0">
+            <a:pPr indent="0" marL="0">
               <a:lnSpc>
                 <a:spcPct val="110000"/>
               </a:lnSpc>
@@ -2944,7 +3201,7 @@
           <a:bodyPr wrap="square" lIns="0" tIns="0" rIns="0" bIns="0" rtlCol="0" anchor="ctr"/>
           <a:lstStyle/>
           <a:p>
-            <a:pPr marL="0" indent="0">
+            <a:pPr indent="0" marL="0">
               <a:buNone/>
             </a:pPr>
             <a:r>
@@ -2958,6 +3215,9 @@
               </a:rPr>
               <a:t>OUTPUT  </a:t>
             </a:r>
+            <a:pPr indent="0" marL="0">
+              <a:buNone/>
+            </a:pPr>
             <a:r>
               <a:rPr lang="en-US" sz="1250" b="1" dirty="0">
                 <a:solidFill>
@@ -2994,7 +3254,7 @@
           <a:bodyPr wrap="square" lIns="0" tIns="0" rIns="0" bIns="0" rtlCol="0" anchor="ctr"/>
           <a:lstStyle/>
           <a:p>
-            <a:pPr marL="0" indent="0" algn="ctr">
+            <a:pPr algn="ctr" indent="0" marL="0">
               <a:buNone/>
             </a:pPr>
             <a:r>
@@ -3028,7 +3288,6 @@
         <a:solidFill>
           <a:srgbClr val="FFFFFF"/>
         </a:solidFill>
-        <a:effectLst/>
       </p:bgPr>
     </p:bg>
     <p:spTree>
@@ -3066,7 +3325,7 @@
           <a:bodyPr wrap="square" rtlCol="0" anchor="ctr"/>
           <a:lstStyle/>
           <a:p>
-            <a:pPr marL="0" indent="0" algn="l">
+            <a:pPr algn="l" indent="0" marL="0">
               <a:buNone/>
             </a:pPr>
             <a:r>
@@ -3105,7 +3364,7 @@
           <a:bodyPr wrap="square" lIns="0" tIns="0" rIns="0" bIns="0" rtlCol="0" anchor="ctr"/>
           <a:lstStyle/>
           <a:p>
-            <a:pPr marL="0" indent="0">
+            <a:pPr indent="0" marL="0">
               <a:buNone/>
             </a:pPr>
             <a:r>
@@ -3144,7 +3403,7 @@
           <a:bodyPr wrap="square" lIns="0" tIns="0" rIns="0" bIns="0" rtlCol="0" anchor="ctr"/>
           <a:lstStyle/>
           <a:p>
-            <a:pPr marL="0" indent="0">
+            <a:pPr indent="0" marL="0">
               <a:buNone/>
             </a:pPr>
             <a:r>
@@ -3183,7 +3442,7 @@
           </a:solidFill>
           <a:ln/>
           <a:effectLst>
-            <a:outerShdw blurRad="101600" dist="38100" dir="5400000" algn="bl" rotWithShape="0">
+            <a:outerShdw sx="100000" sy="100000" kx="0" ky="0" algn="bl" rotWithShape="0" blurRad="101600" dist="38100" dir="5400000">
               <a:srgbClr val="000000">
                 <a:alpha val="12000"/>
               </a:srgbClr>
@@ -3210,7 +3469,7 @@
           </a:solidFill>
           <a:ln/>
           <a:effectLst>
-            <a:outerShdw blurRad="101600" dist="38100" dir="5400000" algn="bl" rotWithShape="0">
+            <a:outerShdw sx="100000" sy="100000" kx="0" ky="0" algn="bl" rotWithShape="0" blurRad="101600" dist="38100" dir="5400000">
               <a:srgbClr val="000000">
                 <a:alpha val="12000"/>
               </a:srgbClr>
@@ -3220,7 +3479,192 @@
       </p:sp>
       <p:pic>
         <p:nvPicPr>
-          <p:cNvPr id="7" name="Image 0" descr="preencoded.png"/>
+          <p:cNvPr id="7" name="Image 0" descr="preencoded.png">    </p:cNvPr>
+          <p:cNvPicPr>
+            <a:picLocks noChangeAspect="1"/>
+          </p:cNvPicPr>
+          <p:nvPr/>
+        </p:nvPicPr>
+        <p:blipFill>
+          <a:blip r:embed="rId1"/>
+          <a:stretch>
+            <a:fillRect/>
+          </a:stretch>
+        </p:blipFill>
+        <p:spPr>
+          <a:xfrm>
+            <a:off x="1691640" y="2523744"/>
+            <a:ext cx="438912" cy="438912"/>
+          </a:xfrm>
+          <a:prstGeom prst="rect">
+            <a:avLst/>
+          </a:prstGeom>
+        </p:spPr>
+      </p:pic>
+      <p:sp>
+        <p:nvSpPr>
+          <p:cNvPr id="8" name="Text 5"/>
+          <p:cNvSpPr/>
+          <p:nvPr/>
+        </p:nvSpPr>
+        <p:spPr>
+          <a:xfrm>
+            <a:off x="640080" y="3337560"/>
+            <a:ext cx="2542032" cy="457200"/>
+          </a:xfrm>
+          <a:prstGeom prst="rect">
+            <a:avLst/>
+          </a:prstGeom>
+          <a:noFill/>
+          <a:ln/>
+        </p:spPr>
+        <p:txBody>
+          <a:bodyPr wrap="square" lIns="0" tIns="0" rIns="0" bIns="0" rtlCol="0" anchor="ctr"/>
+          <a:lstStyle/>
+          <a:p>
+            <a:pPr algn="ctr" indent="0" marL="0">
+              <a:buNone/>
+            </a:pPr>
+            <a:r>
+              <a:rPr lang="en-US" sz="1700" b="1" dirty="0">
+                <a:solidFill>
+                  <a:srgbClr val="1F2430"/>
+                </a:solidFill>
+                <a:latin typeface="Cambria" pitchFamily="34" charset="0"/>
+                <a:ea typeface="Cambria" pitchFamily="34" charset="-122"/>
+                <a:cs typeface="Cambria" pitchFamily="34" charset="-120"/>
+              </a:rPr>
+              <a:t>EXTRACT</a:t>
+            </a:r>
+            <a:endParaRPr lang="en-US" sz="1700" dirty="0"/>
+          </a:p>
+        </p:txBody>
+      </p:sp>
+      <p:sp>
+        <p:nvSpPr>
+          <p:cNvPr id="9" name="Text 6"/>
+          <p:cNvSpPr/>
+          <p:nvPr/>
+        </p:nvSpPr>
+        <p:spPr>
+          <a:xfrm>
+            <a:off x="868680" y="3794760"/>
+            <a:ext cx="2084832" cy="1005840"/>
+          </a:xfrm>
+          <a:prstGeom prst="rect">
+            <a:avLst/>
+          </a:prstGeom>
+          <a:noFill/>
+          <a:ln/>
+        </p:spPr>
+        <p:txBody>
+          <a:bodyPr wrap="square" lIns="0" tIns="0" rIns="0" bIns="0" rtlCol="0" anchor="ctr"/>
+          <a:lstStyle/>
+          <a:p>
+            <a:pPr algn="ctr" indent="0" marL="0">
+              <a:lnSpc>
+                <a:spcPct val="105000"/>
+              </a:lnSpc>
+              <a:buNone/>
+            </a:pPr>
+            <a:r>
+              <a:rPr lang="en-US" sz="1250" dirty="0">
+                <a:solidFill>
+                  <a:srgbClr val="44505F"/>
+                </a:solidFill>
+                <a:latin typeface="Calibri" pitchFamily="34" charset="0"/>
+                <a:ea typeface="Calibri" pitchFamily="34" charset="-122"/>
+                <a:cs typeface="Calibri" pitchFamily="34" charset="-120"/>
+              </a:rPr>
+              <a:t>Python jobs pull catalog, ISRCs (Spotify → MusicBrainz fallback) &amp; YouTube videos. Retries, backoff, quota guard.</a:t>
+            </a:r>
+            <a:endParaRPr lang="en-US" sz="1250" dirty="0"/>
+          </a:p>
+        </p:txBody>
+      </p:sp>
+      <p:pic>
+        <p:nvPicPr>
+          <p:cNvPr id="10" name="Image 1" descr="preencoded.png">    </p:cNvPr>
+          <p:cNvPicPr>
+            <a:picLocks noChangeAspect="1"/>
+          </p:cNvPicPr>
+          <p:nvPr/>
+        </p:nvPicPr>
+        <p:blipFill>
+          <a:blip r:embed="rId2"/>
+          <a:stretch>
+            <a:fillRect/>
+          </a:stretch>
+        </p:blipFill>
+        <p:spPr>
+          <a:xfrm>
+            <a:off x="3172968" y="2606040"/>
+            <a:ext cx="310896" cy="310896"/>
+          </a:xfrm>
+          <a:prstGeom prst="rect">
+            <a:avLst/>
+          </a:prstGeom>
+        </p:spPr>
+      </p:pic>
+      <p:sp>
+        <p:nvSpPr>
+          <p:cNvPr id="11" name="Shape 7"/>
+          <p:cNvSpPr/>
+          <p:nvPr/>
+        </p:nvSpPr>
+        <p:spPr>
+          <a:xfrm>
+            <a:off x="3474720" y="1965960"/>
+            <a:ext cx="2542032" cy="2926080"/>
+          </a:xfrm>
+          <a:prstGeom prst="roundRect">
+            <a:avLst>
+              <a:gd name="adj" fmla="val 3597"/>
+            </a:avLst>
+          </a:prstGeom>
+          <a:solidFill>
+            <a:srgbClr val="F4F6F8"/>
+          </a:solidFill>
+          <a:ln/>
+          <a:effectLst>
+            <a:outerShdw sx="100000" sy="100000" kx="0" ky="0" algn="bl" rotWithShape="0" blurRad="101600" dist="38100" dir="5400000">
+              <a:srgbClr val="000000">
+                <a:alpha val="12000"/>
+              </a:srgbClr>
+            </a:outerShdw>
+          </a:effectLst>
+        </p:spPr>
+      </p:sp>
+      <p:sp>
+        <p:nvSpPr>
+          <p:cNvPr id="12" name="Shape 8"/>
+          <p:cNvSpPr/>
+          <p:nvPr/>
+        </p:nvSpPr>
+        <p:spPr>
+          <a:xfrm>
+            <a:off x="4288536" y="2286000"/>
+            <a:ext cx="914400" cy="914400"/>
+          </a:xfrm>
+          <a:prstGeom prst="ellipse">
+            <a:avLst/>
+          </a:prstGeom>
+          <a:solidFill>
+            <a:srgbClr val="1F2430"/>
+          </a:solidFill>
+          <a:ln/>
+          <a:effectLst>
+            <a:outerShdw sx="100000" sy="100000" kx="0" ky="0" algn="bl" rotWithShape="0" blurRad="101600" dist="38100" dir="5400000">
+              <a:srgbClr val="000000">
+                <a:alpha val="12000"/>
+              </a:srgbClr>
+            </a:outerShdw>
+          </a:effectLst>
+        </p:spPr>
+      </p:sp>
+      <p:pic>
+        <p:nvPicPr>
+          <p:cNvPr id="13" name="Image 2" descr="preencoded.png">    </p:cNvPr>
           <p:cNvPicPr>
             <a:picLocks noChangeAspect="1"/>
           </p:cNvPicPr>
@@ -3234,7 +3678,7 @@
         </p:blipFill>
         <p:spPr>
           <a:xfrm>
-            <a:off x="1691640" y="2523744"/>
+            <a:off x="4526280" y="2523744"/>
             <a:ext cx="438912" cy="438912"/>
           </a:xfrm>
           <a:prstGeom prst="rect">
@@ -3244,13 +3688,13 @@
       </p:pic>
       <p:sp>
         <p:nvSpPr>
-          <p:cNvPr id="8" name="Text 5"/>
-          <p:cNvSpPr/>
-          <p:nvPr/>
-        </p:nvSpPr>
-        <p:spPr>
-          <a:xfrm>
-            <a:off x="640080" y="3337560"/>
+          <p:cNvPr id="14" name="Text 9"/>
+          <p:cNvSpPr/>
+          <p:nvPr/>
+        </p:nvSpPr>
+        <p:spPr>
+          <a:xfrm>
+            <a:off x="3474720" y="3337560"/>
             <a:ext cx="2542032" cy="457200"/>
           </a:xfrm>
           <a:prstGeom prst="rect">
@@ -3263,7 +3707,7 @@
           <a:bodyPr wrap="square" lIns="0" tIns="0" rIns="0" bIns="0" rtlCol="0" anchor="ctr"/>
           <a:lstStyle/>
           <a:p>
-            <a:pPr marL="0" indent="0" algn="ctr">
+            <a:pPr algn="ctr" indent="0" marL="0">
               <a:buNone/>
             </a:pPr>
             <a:r>
@@ -3275,7 +3719,7 @@
                 <a:ea typeface="Cambria" pitchFamily="34" charset="-122"/>
                 <a:cs typeface="Cambria" pitchFamily="34" charset="-120"/>
               </a:rPr>
-              <a:t>EXTRACT</a:t>
+              <a:t>LOAD → RAW</a:t>
             </a:r>
             <a:endParaRPr lang="en-US" sz="1700" dirty="0"/>
           </a:p>
@@ -3283,13 +3727,13 @@
       </p:sp>
       <p:sp>
         <p:nvSpPr>
-          <p:cNvPr id="9" name="Text 6"/>
-          <p:cNvSpPr/>
-          <p:nvPr/>
-        </p:nvSpPr>
-        <p:spPr>
-          <a:xfrm>
-            <a:off x="868680" y="3794760"/>
+          <p:cNvPr id="15" name="Text 10"/>
+          <p:cNvSpPr/>
+          <p:nvPr/>
+        </p:nvSpPr>
+        <p:spPr>
+          <a:xfrm>
+            <a:off x="3703320" y="3794760"/>
             <a:ext cx="2084832" cy="1005840"/>
           </a:xfrm>
           <a:prstGeom prst="rect">
@@ -3302,7 +3746,7 @@
           <a:bodyPr wrap="square" lIns="0" tIns="0" rIns="0" bIns="0" rtlCol="0" anchor="ctr"/>
           <a:lstStyle/>
           <a:p>
-            <a:pPr marL="0" indent="0" algn="ctr">
+            <a:pPr algn="ctr" indent="0" marL="0">
               <a:lnSpc>
                 <a:spcPct val="105000"/>
               </a:lnSpc>
@@ -3317,7 +3761,7 @@
                 <a:ea typeface="Calibri" pitchFamily="34" charset="-122"/>
                 <a:cs typeface="Calibri" pitchFamily="34" charset="-120"/>
               </a:rPr>
-              <a:t>Python jobs pull catalog, ISRCs (Spotify → MusicBrainz fallback) &amp; YouTube videos. Retries, backoff, quota guard.</a:t>
+              <a:t>Immutable landing zone with ingest metadata + load-audit for lineage.</a:t>
             </a:r>
             <a:endParaRPr lang="en-US" sz="1250" dirty="0"/>
           </a:p>
@@ -3325,7 +3769,7 @@
       </p:sp>
       <p:pic>
         <p:nvPicPr>
-          <p:cNvPr id="10" name="Image 1" descr="preencoded.png"/>
+          <p:cNvPr id="16" name="Image 3" descr="preencoded.png">    </p:cNvPr>
           <p:cNvPicPr>
             <a:picLocks noChangeAspect="1"/>
           </p:cNvPicPr>
@@ -3339,7 +3783,7 @@
         </p:blipFill>
         <p:spPr>
           <a:xfrm>
-            <a:off x="3172968" y="2606040"/>
+            <a:off x="6007608" y="2606040"/>
             <a:ext cx="310896" cy="310896"/>
           </a:xfrm>
           <a:prstGeom prst="rect">
@@ -3349,13 +3793,13 @@
       </p:pic>
       <p:sp>
         <p:nvSpPr>
-          <p:cNvPr id="11" name="Shape 7"/>
-          <p:cNvSpPr/>
-          <p:nvPr/>
-        </p:nvSpPr>
-        <p:spPr>
-          <a:xfrm>
-            <a:off x="3474720" y="1965960"/>
+          <p:cNvPr id="17" name="Shape 11"/>
+          <p:cNvSpPr/>
+          <p:nvPr/>
+        </p:nvSpPr>
+        <p:spPr>
+          <a:xfrm>
+            <a:off x="6309360" y="1965960"/>
             <a:ext cx="2542032" cy="2926080"/>
           </a:xfrm>
           <a:prstGeom prst="roundRect">
@@ -3368,7 +3812,7 @@
           </a:solidFill>
           <a:ln/>
           <a:effectLst>
-            <a:outerShdw blurRad="101600" dist="38100" dir="5400000" algn="bl" rotWithShape="0">
+            <a:outerShdw sx="100000" sy="100000" kx="0" ky="0" algn="bl" rotWithShape="0" blurRad="101600" dist="38100" dir="5400000">
               <a:srgbClr val="000000">
                 <a:alpha val="12000"/>
               </a:srgbClr>
@@ -3378,24 +3822,24 @@
       </p:sp>
       <p:sp>
         <p:nvSpPr>
-          <p:cNvPr id="12" name="Shape 8"/>
-          <p:cNvSpPr/>
-          <p:nvPr/>
-        </p:nvSpPr>
-        <p:spPr>
-          <a:xfrm>
-            <a:off x="4288536" y="2286000"/>
+          <p:cNvPr id="18" name="Shape 12"/>
+          <p:cNvSpPr/>
+          <p:nvPr/>
+        </p:nvSpPr>
+        <p:spPr>
+          <a:xfrm>
+            <a:off x="7123176" y="2286000"/>
             <a:ext cx="914400" cy="914400"/>
           </a:xfrm>
           <a:prstGeom prst="ellipse">
             <a:avLst/>
           </a:prstGeom>
           <a:solidFill>
-            <a:srgbClr val="1F2430"/>
+            <a:srgbClr val="12B5A5"/>
           </a:solidFill>
           <a:ln/>
           <a:effectLst>
-            <a:outerShdw blurRad="101600" dist="38100" dir="5400000" algn="bl" rotWithShape="0">
+            <a:outerShdw sx="100000" sy="100000" kx="0" ky="0" algn="bl" rotWithShape="0" blurRad="101600" dist="38100" dir="5400000">
               <a:srgbClr val="000000">
                 <a:alpha val="12000"/>
               </a:srgbClr>
@@ -3405,7 +3849,7 @@
       </p:sp>
       <p:pic>
         <p:nvPicPr>
-          <p:cNvPr id="13" name="Image 2" descr="preencoded.png"/>
+          <p:cNvPr id="19" name="Image 4" descr="preencoded.png">    </p:cNvPr>
           <p:cNvPicPr>
             <a:picLocks noChangeAspect="1"/>
           </p:cNvPicPr>
@@ -3419,7 +3863,7 @@
         </p:blipFill>
         <p:spPr>
           <a:xfrm>
-            <a:off x="4526280" y="2523744"/>
+            <a:off x="7360920" y="2523744"/>
             <a:ext cx="438912" cy="438912"/>
           </a:xfrm>
           <a:prstGeom prst="rect">
@@ -3429,13 +3873,13 @@
       </p:pic>
       <p:sp>
         <p:nvSpPr>
-          <p:cNvPr id="14" name="Text 9"/>
-          <p:cNvSpPr/>
-          <p:nvPr/>
-        </p:nvSpPr>
-        <p:spPr>
-          <a:xfrm>
-            <a:off x="3474720" y="3337560"/>
+          <p:cNvPr id="20" name="Text 13"/>
+          <p:cNvSpPr/>
+          <p:nvPr/>
+        </p:nvSpPr>
+        <p:spPr>
+          <a:xfrm>
+            <a:off x="6309360" y="3337560"/>
             <a:ext cx="2542032" cy="457200"/>
           </a:xfrm>
           <a:prstGeom prst="rect">
@@ -3448,7 +3892,7 @@
           <a:bodyPr wrap="square" lIns="0" tIns="0" rIns="0" bIns="0" rtlCol="0" anchor="ctr"/>
           <a:lstStyle/>
           <a:p>
-            <a:pPr marL="0" indent="0" algn="ctr">
+            <a:pPr algn="ctr" indent="0" marL="0">
               <a:buNone/>
             </a:pPr>
             <a:r>
@@ -3460,7 +3904,7 @@
                 <a:ea typeface="Cambria" pitchFamily="34" charset="-122"/>
                 <a:cs typeface="Cambria" pitchFamily="34" charset="-120"/>
               </a:rPr>
-              <a:t>LOAD → RAW</a:t>
+              <a:t>TRANSFORM (dbt)</a:t>
             </a:r>
             <a:endParaRPr lang="en-US" sz="1700" dirty="0"/>
           </a:p>
@@ -3468,13 +3912,13 @@
       </p:sp>
       <p:sp>
         <p:nvSpPr>
-          <p:cNvPr id="15" name="Text 10"/>
-          <p:cNvSpPr/>
-          <p:nvPr/>
-        </p:nvSpPr>
-        <p:spPr>
-          <a:xfrm>
-            <a:off x="3703320" y="3794760"/>
+          <p:cNvPr id="21" name="Text 14"/>
+          <p:cNvSpPr/>
+          <p:nvPr/>
+        </p:nvSpPr>
+        <p:spPr>
+          <a:xfrm>
+            <a:off x="6537960" y="3794760"/>
             <a:ext cx="2084832" cy="1005840"/>
           </a:xfrm>
           <a:prstGeom prst="rect">
@@ -3487,7 +3931,7 @@
           <a:bodyPr wrap="square" lIns="0" tIns="0" rIns="0" bIns="0" rtlCol="0" anchor="ctr"/>
           <a:lstStyle/>
           <a:p>
-            <a:pPr marL="0" indent="0" algn="ctr">
+            <a:pPr algn="ctr" indent="0" marL="0">
               <a:lnSpc>
                 <a:spcPct val="105000"/>
               </a:lnSpc>
@@ -3502,7 +3946,7 @@
                 <a:ea typeface="Calibri" pitchFamily="34" charset="-122"/>
                 <a:cs typeface="Calibri" pitchFamily="34" charset="-120"/>
               </a:rPr>
-              <a:t>Immutable landing zone with ingest metadata + load-audit for lineage.</a:t>
+              <a:t>staging: clean, standardize, dedup, validate.  marts: dim + facts + answers.</a:t>
             </a:r>
             <a:endParaRPr lang="en-US" sz="1250" dirty="0"/>
           </a:p>
@@ -3510,87 +3954,7 @@
       </p:sp>
       <p:pic>
         <p:nvPicPr>
-          <p:cNvPr id="16" name="Image 3" descr="preencoded.png"/>
-          <p:cNvPicPr>
-            <a:picLocks noChangeAspect="1"/>
-          </p:cNvPicPr>
-          <p:nvPr/>
-        </p:nvPicPr>
-        <p:blipFill>
-          <a:blip r:embed="rId4"/>
-          <a:stretch>
-            <a:fillRect/>
-          </a:stretch>
-        </p:blipFill>
-        <p:spPr>
-          <a:xfrm>
-            <a:off x="6007608" y="2606040"/>
-            <a:ext cx="310896" cy="310896"/>
-          </a:xfrm>
-          <a:prstGeom prst="rect">
-            <a:avLst/>
-          </a:prstGeom>
-        </p:spPr>
-      </p:pic>
-      <p:sp>
-        <p:nvSpPr>
-          <p:cNvPr id="17" name="Shape 11"/>
-          <p:cNvSpPr/>
-          <p:nvPr/>
-        </p:nvSpPr>
-        <p:spPr>
-          <a:xfrm>
-            <a:off x="6309360" y="1965960"/>
-            <a:ext cx="2542032" cy="2926080"/>
-          </a:xfrm>
-          <a:prstGeom prst="roundRect">
-            <a:avLst>
-              <a:gd name="adj" fmla="val 3597"/>
-            </a:avLst>
-          </a:prstGeom>
-          <a:solidFill>
-            <a:srgbClr val="F4F6F8"/>
-          </a:solidFill>
-          <a:ln/>
-          <a:effectLst>
-            <a:outerShdw blurRad="101600" dist="38100" dir="5400000" algn="bl" rotWithShape="0">
-              <a:srgbClr val="000000">
-                <a:alpha val="12000"/>
-              </a:srgbClr>
-            </a:outerShdw>
-          </a:effectLst>
-        </p:spPr>
-      </p:sp>
-      <p:sp>
-        <p:nvSpPr>
-          <p:cNvPr id="18" name="Shape 12"/>
-          <p:cNvSpPr/>
-          <p:nvPr/>
-        </p:nvSpPr>
-        <p:spPr>
-          <a:xfrm>
-            <a:off x="7123176" y="2286000"/>
-            <a:ext cx="914400" cy="914400"/>
-          </a:xfrm>
-          <a:prstGeom prst="ellipse">
-            <a:avLst/>
-          </a:prstGeom>
-          <a:solidFill>
-            <a:srgbClr val="12B5A5"/>
-          </a:solidFill>
-          <a:ln/>
-          <a:effectLst>
-            <a:outerShdw blurRad="101600" dist="38100" dir="5400000" algn="bl" rotWithShape="0">
-              <a:srgbClr val="000000">
-                <a:alpha val="12000"/>
-              </a:srgbClr>
-            </a:outerShdw>
-          </a:effectLst>
-        </p:spPr>
-      </p:sp>
-      <p:pic>
-        <p:nvPicPr>
-          <p:cNvPr id="19" name="Image 4" descr="preencoded.png"/>
+          <p:cNvPr id="22" name="Image 5" descr="preencoded.png">    </p:cNvPr>
           <p:cNvPicPr>
             <a:picLocks noChangeAspect="1"/>
           </p:cNvPicPr>
@@ -3604,111 +3968,6 @@
         </p:blipFill>
         <p:spPr>
           <a:xfrm>
-            <a:off x="7360920" y="2523744"/>
-            <a:ext cx="438912" cy="438912"/>
-          </a:xfrm>
-          <a:prstGeom prst="rect">
-            <a:avLst/>
-          </a:prstGeom>
-        </p:spPr>
-      </p:pic>
-      <p:sp>
-        <p:nvSpPr>
-          <p:cNvPr id="20" name="Text 13"/>
-          <p:cNvSpPr/>
-          <p:nvPr/>
-        </p:nvSpPr>
-        <p:spPr>
-          <a:xfrm>
-            <a:off x="6309360" y="3337560"/>
-            <a:ext cx="2542032" cy="457200"/>
-          </a:xfrm>
-          <a:prstGeom prst="rect">
-            <a:avLst/>
-          </a:prstGeom>
-          <a:noFill/>
-          <a:ln/>
-        </p:spPr>
-        <p:txBody>
-          <a:bodyPr wrap="square" lIns="0" tIns="0" rIns="0" bIns="0" rtlCol="0" anchor="ctr"/>
-          <a:lstStyle/>
-          <a:p>
-            <a:pPr marL="0" indent="0" algn="ctr">
-              <a:buNone/>
-            </a:pPr>
-            <a:r>
-              <a:rPr lang="en-US" sz="1700" b="1" dirty="0">
-                <a:solidFill>
-                  <a:srgbClr val="1F2430"/>
-                </a:solidFill>
-                <a:latin typeface="Cambria" pitchFamily="34" charset="0"/>
-                <a:ea typeface="Cambria" pitchFamily="34" charset="-122"/>
-                <a:cs typeface="Cambria" pitchFamily="34" charset="-120"/>
-              </a:rPr>
-              <a:t>TRANSFORM (dbt)</a:t>
-            </a:r>
-            <a:endParaRPr lang="en-US" sz="1700" dirty="0"/>
-          </a:p>
-        </p:txBody>
-      </p:sp>
-      <p:sp>
-        <p:nvSpPr>
-          <p:cNvPr id="21" name="Text 14"/>
-          <p:cNvSpPr/>
-          <p:nvPr/>
-        </p:nvSpPr>
-        <p:spPr>
-          <a:xfrm>
-            <a:off x="6537960" y="3794760"/>
-            <a:ext cx="2084832" cy="1005840"/>
-          </a:xfrm>
-          <a:prstGeom prst="rect">
-            <a:avLst/>
-          </a:prstGeom>
-          <a:noFill/>
-          <a:ln/>
-        </p:spPr>
-        <p:txBody>
-          <a:bodyPr wrap="square" lIns="0" tIns="0" rIns="0" bIns="0" rtlCol="0" anchor="ctr"/>
-          <a:lstStyle/>
-          <a:p>
-            <a:pPr marL="0" indent="0" algn="ctr">
-              <a:lnSpc>
-                <a:spcPct val="105000"/>
-              </a:lnSpc>
-              <a:buNone/>
-            </a:pPr>
-            <a:r>
-              <a:rPr lang="en-US" sz="1250" dirty="0">
-                <a:solidFill>
-                  <a:srgbClr val="44505F"/>
-                </a:solidFill>
-                <a:latin typeface="Calibri" pitchFamily="34" charset="0"/>
-                <a:ea typeface="Calibri" pitchFamily="34" charset="-122"/>
-                <a:cs typeface="Calibri" pitchFamily="34" charset="-120"/>
-              </a:rPr>
-              <a:t>staging: clean, standardize, dedup, validate.  marts: dim + facts + answers.</a:t>
-            </a:r>
-            <a:endParaRPr lang="en-US" sz="1250" dirty="0"/>
-          </a:p>
-        </p:txBody>
-      </p:sp>
-      <p:pic>
-        <p:nvPicPr>
-          <p:cNvPr id="22" name="Image 5" descr="preencoded.png"/>
-          <p:cNvPicPr>
-            <a:picLocks noChangeAspect="1"/>
-          </p:cNvPicPr>
-          <p:nvPr/>
-        </p:nvPicPr>
-        <p:blipFill>
-          <a:blip r:embed="rId4"/>
-          <a:stretch>
-            <a:fillRect/>
-          </a:stretch>
-        </p:blipFill>
-        <p:spPr>
-          <a:xfrm>
             <a:off x="8842248" y="2606040"/>
             <a:ext cx="310896" cy="310896"/>
           </a:xfrm>
@@ -3738,7 +3997,7 @@
           </a:solidFill>
           <a:ln/>
           <a:effectLst>
-            <a:outerShdw blurRad="101600" dist="38100" dir="5400000" algn="bl" rotWithShape="0">
+            <a:outerShdw sx="100000" sy="100000" kx="0" ky="0" algn="bl" rotWithShape="0" blurRad="101600" dist="38100" dir="5400000">
               <a:srgbClr val="000000">
                 <a:alpha val="12000"/>
               </a:srgbClr>
@@ -3765,7 +4024,7 @@
           </a:solidFill>
           <a:ln/>
           <a:effectLst>
-            <a:outerShdw blurRad="101600" dist="38100" dir="5400000" algn="bl" rotWithShape="0">
+            <a:outerShdw sx="100000" sy="100000" kx="0" ky="0" algn="bl" rotWithShape="0" blurRad="101600" dist="38100" dir="5400000">
               <a:srgbClr val="000000">
                 <a:alpha val="12000"/>
               </a:srgbClr>
@@ -3775,7 +4034,7 @@
       </p:sp>
       <p:pic>
         <p:nvPicPr>
-          <p:cNvPr id="25" name="Image 6" descr="preencoded.png"/>
+          <p:cNvPr id="25" name="Image 6" descr="preencoded.png">    </p:cNvPr>
           <p:cNvPicPr>
             <a:picLocks noChangeAspect="1"/>
           </p:cNvPicPr>
@@ -3818,7 +4077,7 @@
           <a:bodyPr wrap="square" lIns="0" tIns="0" rIns="0" bIns="0" rtlCol="0" anchor="ctr"/>
           <a:lstStyle/>
           <a:p>
-            <a:pPr marL="0" indent="0" algn="ctr">
+            <a:pPr algn="ctr" indent="0" marL="0">
               <a:buNone/>
             </a:pPr>
             <a:r>
@@ -3857,7 +4116,7 @@
           <a:bodyPr wrap="square" lIns="0" tIns="0" rIns="0" bIns="0" rtlCol="0" anchor="ctr"/>
           <a:lstStyle/>
           <a:p>
-            <a:pPr marL="0" indent="0" algn="ctr">
+            <a:pPr algn="ctr" indent="0" marL="0">
               <a:lnSpc>
                 <a:spcPct val="105000"/>
               </a:lnSpc>
@@ -3899,7 +4158,7 @@
           </a:solidFill>
           <a:ln/>
           <a:effectLst>
-            <a:outerShdw blurRad="101600" dist="38100" dir="5400000" algn="bl" rotWithShape="0">
+            <a:outerShdw sx="100000" sy="100000" kx="0" ky="0" algn="bl" rotWithShape="0" blurRad="101600" dist="38100" dir="5400000">
               <a:srgbClr val="000000">
                 <a:alpha val="12000"/>
               </a:srgbClr>
@@ -3926,7 +4185,7 @@
           </a:solidFill>
           <a:ln/>
           <a:effectLst>
-            <a:outerShdw blurRad="101600" dist="38100" dir="5400000" algn="bl" rotWithShape="0">
+            <a:outerShdw sx="100000" sy="100000" kx="0" ky="0" algn="bl" rotWithShape="0" blurRad="101600" dist="38100" dir="5400000">
               <a:srgbClr val="000000">
                 <a:alpha val="12000"/>
               </a:srgbClr>
@@ -3936,7 +4195,7 @@
       </p:sp>
       <p:pic>
         <p:nvPicPr>
-          <p:cNvPr id="30" name="Image 7" descr="preencoded.png"/>
+          <p:cNvPr id="30" name="Image 7" descr="preencoded.png">    </p:cNvPr>
           <p:cNvPicPr>
             <a:picLocks noChangeAspect="1"/>
           </p:cNvPicPr>
@@ -3979,7 +4238,7 @@
           <a:bodyPr wrap="square" lIns="0" tIns="0" rIns="0" bIns="0" rtlCol="0" anchor="ctr"/>
           <a:lstStyle/>
           <a:p>
-            <a:pPr marL="0" indent="0">
+            <a:pPr indent="0" marL="0">
               <a:buNone/>
             </a:pPr>
             <a:r>
@@ -3993,6 +4252,9 @@
               </a:rPr>
               <a:t>Orchestration — Apache Airflow:  </a:t>
             </a:r>
+            <a:pPr indent="0" marL="0">
+              <a:buNone/>
+            </a:pPr>
             <a:r>
               <a:rPr lang="en-US" sz="1350" dirty="0">
                 <a:solidFill>
@@ -4024,7 +4286,6 @@
         <a:solidFill>
           <a:srgbClr val="FFFFFF"/>
         </a:solidFill>
-        <a:effectLst/>
       </p:bgPr>
     </p:bg>
     <p:spTree>
@@ -4062,7 +4323,7 @@
           <a:bodyPr wrap="square" rtlCol="0" anchor="ctr"/>
           <a:lstStyle/>
           <a:p>
-            <a:pPr marL="0" indent="0" algn="l">
+            <a:pPr algn="l" indent="0" marL="0">
               <a:buNone/>
             </a:pPr>
             <a:r>
@@ -4101,7 +4362,7 @@
           <a:bodyPr wrap="square" lIns="0" tIns="0" rIns="0" bIns="0" rtlCol="0" anchor="ctr"/>
           <a:lstStyle/>
           <a:p>
-            <a:pPr marL="0" indent="0">
+            <a:pPr indent="0" marL="0">
               <a:buNone/>
             </a:pPr>
             <a:r>
@@ -4140,7 +4401,7 @@
           <a:bodyPr wrap="square" lIns="0" tIns="0" rIns="0" bIns="0" rtlCol="0" anchor="ctr"/>
           <a:lstStyle/>
           <a:p>
-            <a:pPr marL="0" indent="0">
+            <a:pPr indent="0" marL="0">
               <a:buNone/>
             </a:pPr>
             <a:r>
@@ -4179,7 +4440,7 @@
           </a:solidFill>
           <a:ln/>
           <a:effectLst>
-            <a:outerShdw blurRad="101600" dist="38100" dir="5400000" algn="bl" rotWithShape="0">
+            <a:outerShdw sx="100000" sy="100000" kx="0" ky="0" algn="bl" rotWithShape="0" blurRad="101600" dist="38100" dir="5400000">
               <a:srgbClr val="000000">
                 <a:alpha val="12000"/>
               </a:srgbClr>
@@ -4206,7 +4467,7 @@
           </a:solidFill>
           <a:ln/>
           <a:effectLst>
-            <a:outerShdw blurRad="101600" dist="38100" dir="5400000" algn="bl" rotWithShape="0">
+            <a:outerShdw sx="100000" sy="100000" kx="0" ky="0" algn="bl" rotWithShape="0" blurRad="101600" dist="38100" dir="5400000">
               <a:srgbClr val="000000">
                 <a:alpha val="12000"/>
               </a:srgbClr>
@@ -4216,7 +4477,329 @@
       </p:sp>
       <p:pic>
         <p:nvPicPr>
-          <p:cNvPr id="7" name="Image 0" descr="preencoded.png"/>
+          <p:cNvPr id="7" name="Image 0" descr="preencoded.png">    </p:cNvPr>
+          <p:cNvPicPr>
+            <a:picLocks noChangeAspect="1"/>
+          </p:cNvPicPr>
+          <p:nvPr/>
+        </p:nvPicPr>
+        <p:blipFill>
+          <a:blip r:embed="rId1"/>
+          <a:stretch>
+            <a:fillRect/>
+          </a:stretch>
+        </p:blipFill>
+        <p:spPr>
+          <a:xfrm>
+            <a:off x="1162202" y="2277770"/>
+            <a:ext cx="373075" cy="373075"/>
+          </a:xfrm>
+          <a:prstGeom prst="rect">
+            <a:avLst/>
+          </a:prstGeom>
+        </p:spPr>
+      </p:pic>
+      <p:sp>
+        <p:nvSpPr>
+          <p:cNvPr id="8" name="Text 5"/>
+          <p:cNvSpPr/>
+          <p:nvPr/>
+        </p:nvSpPr>
+        <p:spPr>
+          <a:xfrm>
+            <a:off x="1874520" y="2075688"/>
+            <a:ext cx="2148840" cy="777240"/>
+          </a:xfrm>
+          <a:prstGeom prst="rect">
+            <a:avLst/>
+          </a:prstGeom>
+          <a:noFill/>
+          <a:ln/>
+        </p:spPr>
+        <p:txBody>
+          <a:bodyPr wrap="square" lIns="0" tIns="0" rIns="0" bIns="0" rtlCol="0" anchor="ctr"/>
+          <a:lstStyle/>
+          <a:p>
+            <a:pPr indent="0" marL="0">
+              <a:buNone/>
+            </a:pPr>
+            <a:r>
+              <a:rPr lang="en-US" sz="1550" b="1" dirty="0">
+                <a:solidFill>
+                  <a:srgbClr val="1F2430"/>
+                </a:solidFill>
+                <a:latin typeface="Cambria" pitchFamily="34" charset="0"/>
+                <a:ea typeface="Cambria" pitchFamily="34" charset="-122"/>
+                <a:cs typeface="Cambria" pitchFamily="34" charset="-120"/>
+              </a:rPr>
+              <a:t>Python: spotipy · MusicBrainz · YouTube</a:t>
+            </a:r>
+            <a:endParaRPr lang="en-US" sz="1550" dirty="0"/>
+          </a:p>
+        </p:txBody>
+      </p:sp>
+      <p:sp>
+        <p:nvSpPr>
+          <p:cNvPr id="9" name="Text 6"/>
+          <p:cNvSpPr/>
+          <p:nvPr/>
+        </p:nvSpPr>
+        <p:spPr>
+          <a:xfrm>
+            <a:off x="960120" y="2926080"/>
+            <a:ext cx="2926080" cy="640080"/>
+          </a:xfrm>
+          <a:prstGeom prst="rect">
+            <a:avLst/>
+          </a:prstGeom>
+          <a:noFill/>
+          <a:ln/>
+        </p:spPr>
+        <p:txBody>
+          <a:bodyPr wrap="square" lIns="0" tIns="0" rIns="0" bIns="0" rtlCol="0" anchor="ctr"/>
+          <a:lstStyle/>
+          <a:p>
+            <a:pPr indent="0" marL="0">
+              <a:lnSpc>
+                <a:spcPct val="105000"/>
+              </a:lnSpc>
+              <a:buNone/>
+            </a:pPr>
+            <a:r>
+              <a:rPr lang="en-US" sz="1250" dirty="0">
+                <a:solidFill>
+                  <a:srgbClr val="44505F"/>
+                </a:solidFill>
+                <a:latin typeface="Calibri" pitchFamily="34" charset="0"/>
+                <a:ea typeface="Calibri" pitchFamily="34" charset="-122"/>
+                <a:cs typeface="Calibri" pitchFamily="34" charset="-120"/>
+              </a:rPr>
+              <a:t>Pluggable ISRC source (Spotify or free MusicBrainz); tenacity retries.</a:t>
+            </a:r>
+            <a:endParaRPr lang="en-US" sz="1250" dirty="0"/>
+          </a:p>
+        </p:txBody>
+      </p:sp>
+      <p:sp>
+        <p:nvSpPr>
+          <p:cNvPr id="10" name="Shape 7"/>
+          <p:cNvSpPr/>
+          <p:nvPr/>
+        </p:nvSpPr>
+        <p:spPr>
+          <a:xfrm>
+            <a:off x="4343400" y="1783080"/>
+            <a:ext cx="3474720" cy="1828800"/>
+          </a:xfrm>
+          <a:prstGeom prst="roundRect">
+            <a:avLst>
+              <a:gd name="adj" fmla="val 5000"/>
+            </a:avLst>
+          </a:prstGeom>
+          <a:solidFill>
+            <a:srgbClr val="F4F6F8"/>
+          </a:solidFill>
+          <a:ln/>
+          <a:effectLst>
+            <a:outerShdw sx="100000" sy="100000" kx="0" ky="0" algn="bl" rotWithShape="0" blurRad="101600" dist="38100" dir="5400000">
+              <a:srgbClr val="000000">
+                <a:alpha val="12000"/>
+              </a:srgbClr>
+            </a:outerShdw>
+          </a:effectLst>
+        </p:spPr>
+      </p:sp>
+      <p:sp>
+        <p:nvSpPr>
+          <p:cNvPr id="11" name="Shape 8"/>
+          <p:cNvSpPr/>
+          <p:nvPr/>
+        </p:nvSpPr>
+        <p:spPr>
+          <a:xfrm>
+            <a:off x="4663440" y="2075688"/>
+            <a:ext cx="777240" cy="777240"/>
+          </a:xfrm>
+          <a:prstGeom prst="ellipse">
+            <a:avLst/>
+          </a:prstGeom>
+          <a:solidFill>
+            <a:srgbClr val="12B5A5"/>
+          </a:solidFill>
+          <a:ln/>
+          <a:effectLst>
+            <a:outerShdw sx="100000" sy="100000" kx="0" ky="0" algn="bl" rotWithShape="0" blurRad="101600" dist="38100" dir="5400000">
+              <a:srgbClr val="000000">
+                <a:alpha val="12000"/>
+              </a:srgbClr>
+            </a:outerShdw>
+          </a:effectLst>
+        </p:spPr>
+      </p:sp>
+      <p:pic>
+        <p:nvPicPr>
+          <p:cNvPr id="12" name="Image 1" descr="preencoded.png">    </p:cNvPr>
+          <p:cNvPicPr>
+            <a:picLocks noChangeAspect="1"/>
+          </p:cNvPicPr>
+          <p:nvPr/>
+        </p:nvPicPr>
+        <p:blipFill>
+          <a:blip r:embed="rId2"/>
+          <a:stretch>
+            <a:fillRect/>
+          </a:stretch>
+        </p:blipFill>
+        <p:spPr>
+          <a:xfrm>
+            <a:off x="4865522" y="2277770"/>
+            <a:ext cx="373075" cy="373075"/>
+          </a:xfrm>
+          <a:prstGeom prst="rect">
+            <a:avLst/>
+          </a:prstGeom>
+        </p:spPr>
+      </p:pic>
+      <p:sp>
+        <p:nvSpPr>
+          <p:cNvPr id="13" name="Text 9"/>
+          <p:cNvSpPr/>
+          <p:nvPr/>
+        </p:nvSpPr>
+        <p:spPr>
+          <a:xfrm>
+            <a:off x="5577840" y="2075688"/>
+            <a:ext cx="2148840" cy="777240"/>
+          </a:xfrm>
+          <a:prstGeom prst="rect">
+            <a:avLst/>
+          </a:prstGeom>
+          <a:noFill/>
+          <a:ln/>
+        </p:spPr>
+        <p:txBody>
+          <a:bodyPr wrap="square" lIns="0" tIns="0" rIns="0" bIns="0" rtlCol="0" anchor="ctr"/>
+          <a:lstStyle/>
+          <a:p>
+            <a:pPr indent="0" marL="0">
+              <a:buNone/>
+            </a:pPr>
+            <a:r>
+              <a:rPr lang="en-US" sz="1550" b="1" dirty="0">
+                <a:solidFill>
+                  <a:srgbClr val="1F2430"/>
+                </a:solidFill>
+                <a:latin typeface="Cambria" pitchFamily="34" charset="0"/>
+                <a:ea typeface="Cambria" pitchFamily="34" charset="-122"/>
+                <a:cs typeface="Cambria" pitchFamily="34" charset="-120"/>
+              </a:rPr>
+              <a:t>dbt</a:t>
+            </a:r>
+            <a:endParaRPr lang="en-US" sz="1550" dirty="0"/>
+          </a:p>
+        </p:txBody>
+      </p:sp>
+      <p:sp>
+        <p:nvSpPr>
+          <p:cNvPr id="14" name="Text 10"/>
+          <p:cNvSpPr/>
+          <p:nvPr/>
+        </p:nvSpPr>
+        <p:spPr>
+          <a:xfrm>
+            <a:off x="4663440" y="2926080"/>
+            <a:ext cx="2926080" cy="640080"/>
+          </a:xfrm>
+          <a:prstGeom prst="rect">
+            <a:avLst/>
+          </a:prstGeom>
+          <a:noFill/>
+          <a:ln/>
+        </p:spPr>
+        <p:txBody>
+          <a:bodyPr wrap="square" lIns="0" tIns="0" rIns="0" bIns="0" rtlCol="0" anchor="ctr"/>
+          <a:lstStyle/>
+          <a:p>
+            <a:pPr indent="0" marL="0">
+              <a:lnSpc>
+                <a:spcPct val="105000"/>
+              </a:lnSpc>
+              <a:buNone/>
+            </a:pPr>
+            <a:r>
+              <a:rPr lang="en-US" sz="1250" dirty="0">
+                <a:solidFill>
+                  <a:srgbClr val="44505F"/>
+                </a:solidFill>
+                <a:latin typeface="Calibri" pitchFamily="34" charset="0"/>
+                <a:ea typeface="Calibri" pitchFamily="34" charset="-122"/>
+                <a:cs typeface="Calibri" pitchFamily="34" charset="-120"/>
+              </a:rPr>
+              <a:t>SQL-first, versioned, tested transforms. Lineage + docs for free.</a:t>
+            </a:r>
+            <a:endParaRPr lang="en-US" sz="1250" dirty="0"/>
+          </a:p>
+        </p:txBody>
+      </p:sp>
+      <p:sp>
+        <p:nvSpPr>
+          <p:cNvPr id="15" name="Shape 11"/>
+          <p:cNvSpPr/>
+          <p:nvPr/>
+        </p:nvSpPr>
+        <p:spPr>
+          <a:xfrm>
+            <a:off x="8046720" y="1783080"/>
+            <a:ext cx="3474720" cy="1828800"/>
+          </a:xfrm>
+          <a:prstGeom prst="roundRect">
+            <a:avLst>
+              <a:gd name="adj" fmla="val 5000"/>
+            </a:avLst>
+          </a:prstGeom>
+          <a:solidFill>
+            <a:srgbClr val="F4F6F8"/>
+          </a:solidFill>
+          <a:ln/>
+          <a:effectLst>
+            <a:outerShdw sx="100000" sy="100000" kx="0" ky="0" algn="bl" rotWithShape="0" blurRad="101600" dist="38100" dir="5400000">
+              <a:srgbClr val="000000">
+                <a:alpha val="12000"/>
+              </a:srgbClr>
+            </a:outerShdw>
+          </a:effectLst>
+        </p:spPr>
+      </p:sp>
+      <p:sp>
+        <p:nvSpPr>
+          <p:cNvPr id="16" name="Shape 12"/>
+          <p:cNvSpPr/>
+          <p:nvPr/>
+        </p:nvSpPr>
+        <p:spPr>
+          <a:xfrm>
+            <a:off x="8366760" y="2075688"/>
+            <a:ext cx="777240" cy="777240"/>
+          </a:xfrm>
+          <a:prstGeom prst="ellipse">
+            <a:avLst/>
+          </a:prstGeom>
+          <a:solidFill>
+            <a:srgbClr val="3B82F6"/>
+          </a:solidFill>
+          <a:ln/>
+          <a:effectLst>
+            <a:outerShdw sx="100000" sy="100000" kx="0" ky="0" algn="bl" rotWithShape="0" blurRad="101600" dist="38100" dir="5400000">
+              <a:srgbClr val="000000">
+                <a:alpha val="12000"/>
+              </a:srgbClr>
+            </a:outerShdw>
+          </a:effectLst>
+        </p:spPr>
+      </p:sp>
+      <p:pic>
+        <p:nvPicPr>
+          <p:cNvPr id="17" name="Image 2" descr="preencoded.png">    </p:cNvPr>
           <p:cNvPicPr>
             <a:picLocks noChangeAspect="1"/>
           </p:cNvPicPr>
@@ -4230,7 +4813,7 @@
         </p:blipFill>
         <p:spPr>
           <a:xfrm>
-            <a:off x="1162202" y="2277770"/>
+            <a:off x="8568842" y="2277770"/>
             <a:ext cx="373075" cy="373075"/>
           </a:xfrm>
           <a:prstGeom prst="rect">
@@ -4240,13 +4823,13 @@
       </p:pic>
       <p:sp>
         <p:nvSpPr>
-          <p:cNvPr id="8" name="Text 5"/>
-          <p:cNvSpPr/>
-          <p:nvPr/>
-        </p:nvSpPr>
-        <p:spPr>
-          <a:xfrm>
-            <a:off x="1874520" y="2075688"/>
+          <p:cNvPr id="18" name="Text 13"/>
+          <p:cNvSpPr/>
+          <p:nvPr/>
+        </p:nvSpPr>
+        <p:spPr>
+          <a:xfrm>
+            <a:off x="9281160" y="2075688"/>
             <a:ext cx="2148840" cy="777240"/>
           </a:xfrm>
           <a:prstGeom prst="rect">
@@ -4259,7 +4842,7 @@
           <a:bodyPr wrap="square" lIns="0" tIns="0" rIns="0" bIns="0" rtlCol="0" anchor="ctr"/>
           <a:lstStyle/>
           <a:p>
-            <a:pPr marL="0" indent="0">
+            <a:pPr indent="0" marL="0">
               <a:buNone/>
             </a:pPr>
             <a:r>
@@ -4271,7 +4854,7 @@
                 <a:ea typeface="Cambria" pitchFamily="34" charset="-122"/>
                 <a:cs typeface="Cambria" pitchFamily="34" charset="-120"/>
               </a:rPr>
-              <a:t>Python: spotipy · MusicBrainz · YouTube</a:t>
+              <a:t>PostgreSQL (medallion)</a:t>
             </a:r>
             <a:endParaRPr lang="en-US" sz="1550" dirty="0"/>
           </a:p>
@@ -4279,13 +4862,13 @@
       </p:sp>
       <p:sp>
         <p:nvSpPr>
-          <p:cNvPr id="9" name="Text 6"/>
-          <p:cNvSpPr/>
-          <p:nvPr/>
-        </p:nvSpPr>
-        <p:spPr>
-          <a:xfrm>
-            <a:off x="960120" y="2926080"/>
+          <p:cNvPr id="19" name="Text 14"/>
+          <p:cNvSpPr/>
+          <p:nvPr/>
+        </p:nvSpPr>
+        <p:spPr>
+          <a:xfrm>
+            <a:off x="8366760" y="2926080"/>
             <a:ext cx="2926080" cy="640080"/>
           </a:xfrm>
           <a:prstGeom prst="rect">
@@ -4298,7 +4881,7 @@
           <a:bodyPr wrap="square" lIns="0" tIns="0" rIns="0" bIns="0" rtlCol="0" anchor="ctr"/>
           <a:lstStyle/>
           <a:p>
-            <a:pPr marL="0" indent="0">
+            <a:pPr indent="0" marL="0">
               <a:lnSpc>
                 <a:spcPct val="105000"/>
               </a:lnSpc>
@@ -4313,7 +4896,7 @@
                 <a:ea typeface="Calibri" pitchFamily="34" charset="-122"/>
                 <a:cs typeface="Calibri" pitchFamily="34" charset="-120"/>
               </a:rPr>
-              <a:t>Pluggable ISRC source (Spotify or free MusicBrainz); tenacity retries.</a:t>
+              <a:t>raw / staging / marts schemas. ANSI-SQL = lift-and-shift to cloud.</a:t>
             </a:r>
             <a:endParaRPr lang="en-US" sz="1250" dirty="0"/>
           </a:p>
@@ -4321,13 +4904,13 @@
       </p:sp>
       <p:sp>
         <p:nvSpPr>
-          <p:cNvPr id="10" name="Shape 7"/>
-          <p:cNvSpPr/>
-          <p:nvPr/>
-        </p:nvSpPr>
-        <p:spPr>
-          <a:xfrm>
-            <a:off x="4343400" y="1783080"/>
+          <p:cNvPr id="20" name="Shape 15"/>
+          <p:cNvSpPr/>
+          <p:nvPr/>
+        </p:nvSpPr>
+        <p:spPr>
+          <a:xfrm>
+            <a:off x="640080" y="3840480"/>
             <a:ext cx="3474720" cy="1828800"/>
           </a:xfrm>
           <a:prstGeom prst="roundRect">
@@ -4340,7 +4923,7 @@
           </a:solidFill>
           <a:ln/>
           <a:effectLst>
-            <a:outerShdw blurRad="101600" dist="38100" dir="5400000" algn="bl" rotWithShape="0">
+            <a:outerShdw sx="100000" sy="100000" kx="0" ky="0" algn="bl" rotWithShape="0" blurRad="101600" dist="38100" dir="5400000">
               <a:srgbClr val="000000">
                 <a:alpha val="12000"/>
               </a:srgbClr>
@@ -4350,24 +4933,24 @@
       </p:sp>
       <p:sp>
         <p:nvSpPr>
-          <p:cNvPr id="11" name="Shape 8"/>
-          <p:cNvSpPr/>
-          <p:nvPr/>
-        </p:nvSpPr>
-        <p:spPr>
-          <a:xfrm>
-            <a:off x="4663440" y="2075688"/>
+          <p:cNvPr id="21" name="Shape 16"/>
+          <p:cNvSpPr/>
+          <p:nvPr/>
+        </p:nvSpPr>
+        <p:spPr>
+          <a:xfrm>
+            <a:off x="960120" y="4133088"/>
             <a:ext cx="777240" cy="777240"/>
           </a:xfrm>
           <a:prstGeom prst="ellipse">
             <a:avLst/>
           </a:prstGeom>
           <a:solidFill>
-            <a:srgbClr val="12B5A5"/>
+            <a:srgbClr val="8B5CF6"/>
           </a:solidFill>
           <a:ln/>
           <a:effectLst>
-            <a:outerShdw blurRad="101600" dist="38100" dir="5400000" algn="bl" rotWithShape="0">
+            <a:outerShdw sx="100000" sy="100000" kx="0" ky="0" algn="bl" rotWithShape="0" blurRad="101600" dist="38100" dir="5400000">
               <a:srgbClr val="000000">
                 <a:alpha val="12000"/>
               </a:srgbClr>
@@ -4377,7 +4960,7 @@
       </p:sp>
       <p:pic>
         <p:nvPicPr>
-          <p:cNvPr id="12" name="Image 1" descr="preencoded.png"/>
+          <p:cNvPr id="22" name="Image 3" descr="preencoded.png">    </p:cNvPr>
           <p:cNvPicPr>
             <a:picLocks noChangeAspect="1"/>
           </p:cNvPicPr>
@@ -4391,7 +4974,7 @@
         </p:blipFill>
         <p:spPr>
           <a:xfrm>
-            <a:off x="4865522" y="2277770"/>
+            <a:off x="1162202" y="4335170"/>
             <a:ext cx="373075" cy="373075"/>
           </a:xfrm>
           <a:prstGeom prst="rect">
@@ -4401,13 +4984,13 @@
       </p:pic>
       <p:sp>
         <p:nvSpPr>
-          <p:cNvPr id="13" name="Text 9"/>
-          <p:cNvSpPr/>
-          <p:nvPr/>
-        </p:nvSpPr>
-        <p:spPr>
-          <a:xfrm>
-            <a:off x="5577840" y="2075688"/>
+          <p:cNvPr id="23" name="Text 17"/>
+          <p:cNvSpPr/>
+          <p:nvPr/>
+        </p:nvSpPr>
+        <p:spPr>
+          <a:xfrm>
+            <a:off x="1874520" y="4133088"/>
             <a:ext cx="2148840" cy="777240"/>
           </a:xfrm>
           <a:prstGeom prst="rect">
@@ -4420,7 +5003,7 @@
           <a:bodyPr wrap="square" lIns="0" tIns="0" rIns="0" bIns="0" rtlCol="0" anchor="ctr"/>
           <a:lstStyle/>
           <a:p>
-            <a:pPr marL="0" indent="0">
+            <a:pPr indent="0" marL="0">
               <a:buNone/>
             </a:pPr>
             <a:r>
@@ -4432,7 +5015,7 @@
                 <a:ea typeface="Cambria" pitchFamily="34" charset="-122"/>
                 <a:cs typeface="Cambria" pitchFamily="34" charset="-120"/>
               </a:rPr>
-              <a:t>dbt</a:t>
+              <a:t>Apache Airflow</a:t>
             </a:r>
             <a:endParaRPr lang="en-US" sz="1550" dirty="0"/>
           </a:p>
@@ -4440,13 +5023,13 @@
       </p:sp>
       <p:sp>
         <p:nvSpPr>
-          <p:cNvPr id="14" name="Text 10"/>
-          <p:cNvSpPr/>
-          <p:nvPr/>
-        </p:nvSpPr>
-        <p:spPr>
-          <a:xfrm>
-            <a:off x="4663440" y="2926080"/>
+          <p:cNvPr id="24" name="Text 18"/>
+          <p:cNvSpPr/>
+          <p:nvPr/>
+        </p:nvSpPr>
+        <p:spPr>
+          <a:xfrm>
+            <a:off x="960120" y="4983480"/>
             <a:ext cx="2926080" cy="640080"/>
           </a:xfrm>
           <a:prstGeom prst="rect">
@@ -4459,7 +5042,7 @@
           <a:bodyPr wrap="square" lIns="0" tIns="0" rIns="0" bIns="0" rtlCol="0" anchor="ctr"/>
           <a:lstStyle/>
           <a:p>
-            <a:pPr marL="0" indent="0">
+            <a:pPr indent="0" marL="0">
               <a:lnSpc>
                 <a:spcPct val="105000"/>
               </a:lnSpc>
@@ -4474,7 +5057,7 @@
                 <a:ea typeface="Calibri" pitchFamily="34" charset="-122"/>
                 <a:cs typeface="Calibri" pitchFamily="34" charset="-120"/>
               </a:rPr>
-              <a:t>SQL-first, versioned, tested transforms. Lineage + docs for free.</a:t>
+              <a:t>Scheduling, retries, observability; orchestration ≠ execution.</a:t>
             </a:r>
             <a:endParaRPr lang="en-US" sz="1250" dirty="0"/>
           </a:p>
@@ -4482,13 +5065,13 @@
       </p:sp>
       <p:sp>
         <p:nvSpPr>
-          <p:cNvPr id="15" name="Shape 11"/>
-          <p:cNvSpPr/>
-          <p:nvPr/>
-        </p:nvSpPr>
-        <p:spPr>
-          <a:xfrm>
-            <a:off x="8046720" y="1783080"/>
+          <p:cNvPr id="25" name="Shape 19"/>
+          <p:cNvSpPr/>
+          <p:nvPr/>
+        </p:nvSpPr>
+        <p:spPr>
+          <a:xfrm>
+            <a:off x="4343400" y="3840480"/>
             <a:ext cx="3474720" cy="1828800"/>
           </a:xfrm>
           <a:prstGeom prst="roundRect">
@@ -4501,7 +5084,7 @@
           </a:solidFill>
           <a:ln/>
           <a:effectLst>
-            <a:outerShdw blurRad="101600" dist="38100" dir="5400000" algn="bl" rotWithShape="0">
+            <a:outerShdw sx="100000" sy="100000" kx="0" ky="0" algn="bl" rotWithShape="0" blurRad="101600" dist="38100" dir="5400000">
               <a:srgbClr val="000000">
                 <a:alpha val="12000"/>
               </a:srgbClr>
@@ -4511,24 +5094,24 @@
       </p:sp>
       <p:sp>
         <p:nvSpPr>
-          <p:cNvPr id="16" name="Shape 12"/>
-          <p:cNvSpPr/>
-          <p:nvPr/>
-        </p:nvSpPr>
-        <p:spPr>
-          <a:xfrm>
-            <a:off x="8366760" y="2075688"/>
+          <p:cNvPr id="26" name="Shape 20"/>
+          <p:cNvSpPr/>
+          <p:nvPr/>
+        </p:nvSpPr>
+        <p:spPr>
+          <a:xfrm>
+            <a:off x="4663440" y="4133088"/>
             <a:ext cx="777240" cy="777240"/>
           </a:xfrm>
           <a:prstGeom prst="ellipse">
             <a:avLst/>
           </a:prstGeom>
           <a:solidFill>
-            <a:srgbClr val="3B82F6"/>
+            <a:srgbClr val="F59E0B"/>
           </a:solidFill>
           <a:ln/>
           <a:effectLst>
-            <a:outerShdw blurRad="101600" dist="38100" dir="5400000" algn="bl" rotWithShape="0">
+            <a:outerShdw sx="100000" sy="100000" kx="0" ky="0" algn="bl" rotWithShape="0" blurRad="101600" dist="38100" dir="5400000">
               <a:srgbClr val="000000">
                 <a:alpha val="12000"/>
               </a:srgbClr>
@@ -4538,7 +5121,7 @@
       </p:sp>
       <p:pic>
         <p:nvPicPr>
-          <p:cNvPr id="17" name="Image 2" descr="preencoded.png"/>
+          <p:cNvPr id="27" name="Image 4" descr="preencoded.png">    </p:cNvPr>
           <p:cNvPicPr>
             <a:picLocks noChangeAspect="1"/>
           </p:cNvPicPr>
@@ -4552,7 +5135,7 @@
         </p:blipFill>
         <p:spPr>
           <a:xfrm>
-            <a:off x="8568842" y="2277770"/>
+            <a:off x="4865522" y="4335170"/>
             <a:ext cx="373075" cy="373075"/>
           </a:xfrm>
           <a:prstGeom prst="rect">
@@ -4562,13 +5145,13 @@
       </p:pic>
       <p:sp>
         <p:nvSpPr>
-          <p:cNvPr id="18" name="Text 13"/>
-          <p:cNvSpPr/>
-          <p:nvPr/>
-        </p:nvSpPr>
-        <p:spPr>
-          <a:xfrm>
-            <a:off x="9281160" y="2075688"/>
+          <p:cNvPr id="28" name="Text 21"/>
+          <p:cNvSpPr/>
+          <p:nvPr/>
+        </p:nvSpPr>
+        <p:spPr>
+          <a:xfrm>
+            <a:off x="5577840" y="4133088"/>
             <a:ext cx="2148840" cy="777240"/>
           </a:xfrm>
           <a:prstGeom prst="rect">
@@ -4581,7 +5164,7 @@
           <a:bodyPr wrap="square" lIns="0" tIns="0" rIns="0" bIns="0" rtlCol="0" anchor="ctr"/>
           <a:lstStyle/>
           <a:p>
-            <a:pPr marL="0" indent="0">
+            <a:pPr indent="0" marL="0">
               <a:buNone/>
             </a:pPr>
             <a:r>
@@ -4593,7 +5176,7 @@
                 <a:ea typeface="Cambria" pitchFamily="34" charset="-122"/>
                 <a:cs typeface="Cambria" pitchFamily="34" charset="-120"/>
               </a:rPr>
-              <a:t>PostgreSQL (medallion)</a:t>
+              <a:t>dbt tests</a:t>
             </a:r>
             <a:endParaRPr lang="en-US" sz="1550" dirty="0"/>
           </a:p>
@@ -4601,13 +5184,13 @@
       </p:sp>
       <p:sp>
         <p:nvSpPr>
-          <p:cNvPr id="19" name="Text 14"/>
-          <p:cNvSpPr/>
-          <p:nvPr/>
-        </p:nvSpPr>
-        <p:spPr>
-          <a:xfrm>
-            <a:off x="8366760" y="2926080"/>
+          <p:cNvPr id="29" name="Text 22"/>
+          <p:cNvSpPr/>
+          <p:nvPr/>
+        </p:nvSpPr>
+        <p:spPr>
+          <a:xfrm>
+            <a:off x="4663440" y="4983480"/>
             <a:ext cx="2926080" cy="640080"/>
           </a:xfrm>
           <a:prstGeom prst="rect">
@@ -4620,7 +5203,7 @@
           <a:bodyPr wrap="square" lIns="0" tIns="0" rIns="0" bIns="0" rtlCol="0" anchor="ctr"/>
           <a:lstStyle/>
           <a:p>
-            <a:pPr marL="0" indent="0">
+            <a:pPr indent="0" marL="0">
               <a:lnSpc>
                 <a:spcPct val="105000"/>
               </a:lnSpc>
@@ -4635,7 +5218,7 @@
                 <a:ea typeface="Calibri" pitchFamily="34" charset="-122"/>
                 <a:cs typeface="Calibri" pitchFamily="34" charset="-120"/>
               </a:rPr>
-              <a:t>raw / staging / marts schemas. ANSI-SQL = lift-and-shift to cloud.</a:t>
+              <a:t>Uniqueness, not-null, relationships, format &amp; range checks.</a:t>
             </a:r>
             <a:endParaRPr lang="en-US" sz="1250" dirty="0"/>
           </a:p>
@@ -4643,13 +5226,13 @@
       </p:sp>
       <p:sp>
         <p:nvSpPr>
-          <p:cNvPr id="20" name="Shape 15"/>
-          <p:cNvSpPr/>
-          <p:nvPr/>
-        </p:nvSpPr>
-        <p:spPr>
-          <a:xfrm>
-            <a:off x="640080" y="3840480"/>
+          <p:cNvPr id="30" name="Shape 23"/>
+          <p:cNvSpPr/>
+          <p:nvPr/>
+        </p:nvSpPr>
+        <p:spPr>
+          <a:xfrm>
+            <a:off x="8046720" y="3840480"/>
             <a:ext cx="3474720" cy="1828800"/>
           </a:xfrm>
           <a:prstGeom prst="roundRect">
@@ -4662,7 +5245,7 @@
           </a:solidFill>
           <a:ln/>
           <a:effectLst>
-            <a:outerShdw blurRad="101600" dist="38100" dir="5400000" algn="bl" rotWithShape="0">
+            <a:outerShdw sx="100000" sy="100000" kx="0" ky="0" algn="bl" rotWithShape="0" blurRad="101600" dist="38100" dir="5400000">
               <a:srgbClr val="000000">
                 <a:alpha val="12000"/>
               </a:srgbClr>
@@ -4672,24 +5255,24 @@
       </p:sp>
       <p:sp>
         <p:nvSpPr>
-          <p:cNvPr id="21" name="Shape 16"/>
-          <p:cNvSpPr/>
-          <p:nvPr/>
-        </p:nvSpPr>
-        <p:spPr>
-          <a:xfrm>
-            <a:off x="960120" y="4133088"/>
+          <p:cNvPr id="31" name="Shape 24"/>
+          <p:cNvSpPr/>
+          <p:nvPr/>
+        </p:nvSpPr>
+        <p:spPr>
+          <a:xfrm>
+            <a:off x="8366760" y="4133088"/>
             <a:ext cx="777240" cy="777240"/>
           </a:xfrm>
           <a:prstGeom prst="ellipse">
             <a:avLst/>
           </a:prstGeom>
           <a:solidFill>
-            <a:srgbClr val="8B5CF6"/>
+            <a:srgbClr val="1F2430"/>
           </a:solidFill>
           <a:ln/>
           <a:effectLst>
-            <a:outerShdw blurRad="101600" dist="38100" dir="5400000" algn="bl" rotWithShape="0">
+            <a:outerShdw sx="100000" sy="100000" kx="0" ky="0" algn="bl" rotWithShape="0" blurRad="101600" dist="38100" dir="5400000">
               <a:srgbClr val="000000">
                 <a:alpha val="12000"/>
               </a:srgbClr>
@@ -4699,7 +5282,7 @@
       </p:sp>
       <p:pic>
         <p:nvPicPr>
-          <p:cNvPr id="22" name="Image 3" descr="preencoded.png"/>
+          <p:cNvPr id="32" name="Image 5" descr="preencoded.png">    </p:cNvPr>
           <p:cNvPicPr>
             <a:picLocks noChangeAspect="1"/>
           </p:cNvPicPr>
@@ -4713,7 +5296,7 @@
         </p:blipFill>
         <p:spPr>
           <a:xfrm>
-            <a:off x="1162202" y="4335170"/>
+            <a:off x="8568842" y="4335170"/>
             <a:ext cx="373075" cy="373075"/>
           </a:xfrm>
           <a:prstGeom prst="rect">
@@ -4723,13 +5306,13 @@
       </p:pic>
       <p:sp>
         <p:nvSpPr>
-          <p:cNvPr id="23" name="Text 17"/>
-          <p:cNvSpPr/>
-          <p:nvPr/>
-        </p:nvSpPr>
-        <p:spPr>
-          <a:xfrm>
-            <a:off x="1874520" y="4133088"/>
+          <p:cNvPr id="33" name="Text 25"/>
+          <p:cNvSpPr/>
+          <p:nvPr/>
+        </p:nvSpPr>
+        <p:spPr>
+          <a:xfrm>
+            <a:off x="9281160" y="4133088"/>
             <a:ext cx="2148840" cy="777240"/>
           </a:xfrm>
           <a:prstGeom prst="rect">
@@ -4742,7 +5325,7 @@
           <a:bodyPr wrap="square" lIns="0" tIns="0" rIns="0" bIns="0" rtlCol="0" anchor="ctr"/>
           <a:lstStyle/>
           <a:p>
-            <a:pPr marL="0" indent="0">
+            <a:pPr indent="0" marL="0">
               <a:buNone/>
             </a:pPr>
             <a:r>
@@ -4754,7 +5337,7 @@
                 <a:ea typeface="Cambria" pitchFamily="34" charset="-122"/>
                 <a:cs typeface="Cambria" pitchFamily="34" charset="-120"/>
               </a:rPr>
-              <a:t>Apache Airflow</a:t>
+              <a:t>Docker Compose</a:t>
             </a:r>
             <a:endParaRPr lang="en-US" sz="1550" dirty="0"/>
           </a:p>
@@ -4762,13 +5345,13 @@
       </p:sp>
       <p:sp>
         <p:nvSpPr>
-          <p:cNvPr id="24" name="Text 18"/>
-          <p:cNvSpPr/>
-          <p:nvPr/>
-        </p:nvSpPr>
-        <p:spPr>
-          <a:xfrm>
-            <a:off x="960120" y="4983480"/>
+          <p:cNvPr id="34" name="Text 26"/>
+          <p:cNvSpPr/>
+          <p:nvPr/>
+        </p:nvSpPr>
+        <p:spPr>
+          <a:xfrm>
+            <a:off x="8366760" y="4983480"/>
             <a:ext cx="2926080" cy="640080"/>
           </a:xfrm>
           <a:prstGeom prst="rect">
@@ -4781,329 +5364,7 @@
           <a:bodyPr wrap="square" lIns="0" tIns="0" rIns="0" bIns="0" rtlCol="0" anchor="ctr"/>
           <a:lstStyle/>
           <a:p>
-            <a:pPr marL="0" indent="0">
-              <a:lnSpc>
-                <a:spcPct val="105000"/>
-              </a:lnSpc>
-              <a:buNone/>
-            </a:pPr>
-            <a:r>
-              <a:rPr lang="en-US" sz="1250" dirty="0">
-                <a:solidFill>
-                  <a:srgbClr val="44505F"/>
-                </a:solidFill>
-                <a:latin typeface="Calibri" pitchFamily="34" charset="0"/>
-                <a:ea typeface="Calibri" pitchFamily="34" charset="-122"/>
-                <a:cs typeface="Calibri" pitchFamily="34" charset="-120"/>
-              </a:rPr>
-              <a:t>Scheduling, retries, observability; orchestration ≠ execution.</a:t>
-            </a:r>
-            <a:endParaRPr lang="en-US" sz="1250" dirty="0"/>
-          </a:p>
-        </p:txBody>
-      </p:sp>
-      <p:sp>
-        <p:nvSpPr>
-          <p:cNvPr id="25" name="Shape 19"/>
-          <p:cNvSpPr/>
-          <p:nvPr/>
-        </p:nvSpPr>
-        <p:spPr>
-          <a:xfrm>
-            <a:off x="4343400" y="3840480"/>
-            <a:ext cx="3474720" cy="1828800"/>
-          </a:xfrm>
-          <a:prstGeom prst="roundRect">
-            <a:avLst>
-              <a:gd name="adj" fmla="val 5000"/>
-            </a:avLst>
-          </a:prstGeom>
-          <a:solidFill>
-            <a:srgbClr val="F4F6F8"/>
-          </a:solidFill>
-          <a:ln/>
-          <a:effectLst>
-            <a:outerShdw blurRad="101600" dist="38100" dir="5400000" algn="bl" rotWithShape="0">
-              <a:srgbClr val="000000">
-                <a:alpha val="12000"/>
-              </a:srgbClr>
-            </a:outerShdw>
-          </a:effectLst>
-        </p:spPr>
-      </p:sp>
-      <p:sp>
-        <p:nvSpPr>
-          <p:cNvPr id="26" name="Shape 20"/>
-          <p:cNvSpPr/>
-          <p:nvPr/>
-        </p:nvSpPr>
-        <p:spPr>
-          <a:xfrm>
-            <a:off x="4663440" y="4133088"/>
-            <a:ext cx="777240" cy="777240"/>
-          </a:xfrm>
-          <a:prstGeom prst="ellipse">
-            <a:avLst/>
-          </a:prstGeom>
-          <a:solidFill>
-            <a:srgbClr val="F59E0B"/>
-          </a:solidFill>
-          <a:ln/>
-          <a:effectLst>
-            <a:outerShdw blurRad="101600" dist="38100" dir="5400000" algn="bl" rotWithShape="0">
-              <a:srgbClr val="000000">
-                <a:alpha val="12000"/>
-              </a:srgbClr>
-            </a:outerShdw>
-          </a:effectLst>
-        </p:spPr>
-      </p:sp>
-      <p:pic>
-        <p:nvPicPr>
-          <p:cNvPr id="27" name="Image 4" descr="preencoded.png"/>
-          <p:cNvPicPr>
-            <a:picLocks noChangeAspect="1"/>
-          </p:cNvPicPr>
-          <p:nvPr/>
-        </p:nvPicPr>
-        <p:blipFill>
-          <a:blip r:embed="rId7"/>
-          <a:stretch>
-            <a:fillRect/>
-          </a:stretch>
-        </p:blipFill>
-        <p:spPr>
-          <a:xfrm>
-            <a:off x="4865522" y="4335170"/>
-            <a:ext cx="373075" cy="373075"/>
-          </a:xfrm>
-          <a:prstGeom prst="rect">
-            <a:avLst/>
-          </a:prstGeom>
-        </p:spPr>
-      </p:pic>
-      <p:sp>
-        <p:nvSpPr>
-          <p:cNvPr id="28" name="Text 21"/>
-          <p:cNvSpPr/>
-          <p:nvPr/>
-        </p:nvSpPr>
-        <p:spPr>
-          <a:xfrm>
-            <a:off x="5577840" y="4133088"/>
-            <a:ext cx="2148840" cy="777240"/>
-          </a:xfrm>
-          <a:prstGeom prst="rect">
-            <a:avLst/>
-          </a:prstGeom>
-          <a:noFill/>
-          <a:ln/>
-        </p:spPr>
-        <p:txBody>
-          <a:bodyPr wrap="square" lIns="0" tIns="0" rIns="0" bIns="0" rtlCol="0" anchor="ctr"/>
-          <a:lstStyle/>
-          <a:p>
-            <a:pPr marL="0" indent="0">
-              <a:buNone/>
-            </a:pPr>
-            <a:r>
-              <a:rPr lang="en-US" sz="1550" b="1" dirty="0">
-                <a:solidFill>
-                  <a:srgbClr val="1F2430"/>
-                </a:solidFill>
-                <a:latin typeface="Cambria" pitchFamily="34" charset="0"/>
-                <a:ea typeface="Cambria" pitchFamily="34" charset="-122"/>
-                <a:cs typeface="Cambria" pitchFamily="34" charset="-120"/>
-              </a:rPr>
-              <a:t>dbt tests</a:t>
-            </a:r>
-            <a:endParaRPr lang="en-US" sz="1550" dirty="0"/>
-          </a:p>
-        </p:txBody>
-      </p:sp>
-      <p:sp>
-        <p:nvSpPr>
-          <p:cNvPr id="29" name="Text 22"/>
-          <p:cNvSpPr/>
-          <p:nvPr/>
-        </p:nvSpPr>
-        <p:spPr>
-          <a:xfrm>
-            <a:off x="4663440" y="4983480"/>
-            <a:ext cx="2926080" cy="640080"/>
-          </a:xfrm>
-          <a:prstGeom prst="rect">
-            <a:avLst/>
-          </a:prstGeom>
-          <a:noFill/>
-          <a:ln/>
-        </p:spPr>
-        <p:txBody>
-          <a:bodyPr wrap="square" lIns="0" tIns="0" rIns="0" bIns="0" rtlCol="0" anchor="ctr"/>
-          <a:lstStyle/>
-          <a:p>
-            <a:pPr marL="0" indent="0">
-              <a:lnSpc>
-                <a:spcPct val="105000"/>
-              </a:lnSpc>
-              <a:buNone/>
-            </a:pPr>
-            <a:r>
-              <a:rPr lang="en-US" sz="1250" dirty="0">
-                <a:solidFill>
-                  <a:srgbClr val="44505F"/>
-                </a:solidFill>
-                <a:latin typeface="Calibri" pitchFamily="34" charset="0"/>
-                <a:ea typeface="Calibri" pitchFamily="34" charset="-122"/>
-                <a:cs typeface="Calibri" pitchFamily="34" charset="-120"/>
-              </a:rPr>
-              <a:t>Uniqueness, not-null, relationships, format &amp; range checks.</a:t>
-            </a:r>
-            <a:endParaRPr lang="en-US" sz="1250" dirty="0"/>
-          </a:p>
-        </p:txBody>
-      </p:sp>
-      <p:sp>
-        <p:nvSpPr>
-          <p:cNvPr id="30" name="Shape 23"/>
-          <p:cNvSpPr/>
-          <p:nvPr/>
-        </p:nvSpPr>
-        <p:spPr>
-          <a:xfrm>
-            <a:off x="8046720" y="3840480"/>
-            <a:ext cx="3474720" cy="1828800"/>
-          </a:xfrm>
-          <a:prstGeom prst="roundRect">
-            <a:avLst>
-              <a:gd name="adj" fmla="val 5000"/>
-            </a:avLst>
-          </a:prstGeom>
-          <a:solidFill>
-            <a:srgbClr val="F4F6F8"/>
-          </a:solidFill>
-          <a:ln/>
-          <a:effectLst>
-            <a:outerShdw blurRad="101600" dist="38100" dir="5400000" algn="bl" rotWithShape="0">
-              <a:srgbClr val="000000">
-                <a:alpha val="12000"/>
-              </a:srgbClr>
-            </a:outerShdw>
-          </a:effectLst>
-        </p:spPr>
-      </p:sp>
-      <p:sp>
-        <p:nvSpPr>
-          <p:cNvPr id="31" name="Shape 24"/>
-          <p:cNvSpPr/>
-          <p:nvPr/>
-        </p:nvSpPr>
-        <p:spPr>
-          <a:xfrm>
-            <a:off x="8366760" y="4133088"/>
-            <a:ext cx="777240" cy="777240"/>
-          </a:xfrm>
-          <a:prstGeom prst="ellipse">
-            <a:avLst/>
-          </a:prstGeom>
-          <a:solidFill>
-            <a:srgbClr val="1F2430"/>
-          </a:solidFill>
-          <a:ln/>
-          <a:effectLst>
-            <a:outerShdw blurRad="101600" dist="38100" dir="5400000" algn="bl" rotWithShape="0">
-              <a:srgbClr val="000000">
-                <a:alpha val="12000"/>
-              </a:srgbClr>
-            </a:outerShdw>
-          </a:effectLst>
-        </p:spPr>
-      </p:sp>
-      <p:pic>
-        <p:nvPicPr>
-          <p:cNvPr id="32" name="Image 5" descr="preencoded.png"/>
-          <p:cNvPicPr>
-            <a:picLocks noChangeAspect="1"/>
-          </p:cNvPicPr>
-          <p:nvPr/>
-        </p:nvPicPr>
-        <p:blipFill>
-          <a:blip r:embed="rId8"/>
-          <a:stretch>
-            <a:fillRect/>
-          </a:stretch>
-        </p:blipFill>
-        <p:spPr>
-          <a:xfrm>
-            <a:off x="8568842" y="4335170"/>
-            <a:ext cx="373075" cy="373075"/>
-          </a:xfrm>
-          <a:prstGeom prst="rect">
-            <a:avLst/>
-          </a:prstGeom>
-        </p:spPr>
-      </p:pic>
-      <p:sp>
-        <p:nvSpPr>
-          <p:cNvPr id="33" name="Text 25"/>
-          <p:cNvSpPr/>
-          <p:nvPr/>
-        </p:nvSpPr>
-        <p:spPr>
-          <a:xfrm>
-            <a:off x="9281160" y="4133088"/>
-            <a:ext cx="2148840" cy="777240"/>
-          </a:xfrm>
-          <a:prstGeom prst="rect">
-            <a:avLst/>
-          </a:prstGeom>
-          <a:noFill/>
-          <a:ln/>
-        </p:spPr>
-        <p:txBody>
-          <a:bodyPr wrap="square" lIns="0" tIns="0" rIns="0" bIns="0" rtlCol="0" anchor="ctr"/>
-          <a:lstStyle/>
-          <a:p>
-            <a:pPr marL="0" indent="0">
-              <a:buNone/>
-            </a:pPr>
-            <a:r>
-              <a:rPr lang="en-US" sz="1550" b="1" dirty="0">
-                <a:solidFill>
-                  <a:srgbClr val="1F2430"/>
-                </a:solidFill>
-                <a:latin typeface="Cambria" pitchFamily="34" charset="0"/>
-                <a:ea typeface="Cambria" pitchFamily="34" charset="-122"/>
-                <a:cs typeface="Cambria" pitchFamily="34" charset="-120"/>
-              </a:rPr>
-              <a:t>Docker Compose</a:t>
-            </a:r>
-            <a:endParaRPr lang="en-US" sz="1550" dirty="0"/>
-          </a:p>
-        </p:txBody>
-      </p:sp>
-      <p:sp>
-        <p:nvSpPr>
-          <p:cNvPr id="34" name="Text 26"/>
-          <p:cNvSpPr/>
-          <p:nvPr/>
-        </p:nvSpPr>
-        <p:spPr>
-          <a:xfrm>
-            <a:off x="8366760" y="4983480"/>
-            <a:ext cx="2926080" cy="640080"/>
-          </a:xfrm>
-          <a:prstGeom prst="rect">
-            <a:avLst/>
-          </a:prstGeom>
-          <a:noFill/>
-          <a:ln/>
-        </p:spPr>
-        <p:txBody>
-          <a:bodyPr wrap="square" lIns="0" tIns="0" rIns="0" bIns="0" rtlCol="0" anchor="ctr"/>
-          <a:lstStyle/>
-          <a:p>
-            <a:pPr marL="0" indent="0">
+            <a:pPr indent="0" marL="0">
               <a:lnSpc>
                 <a:spcPct val="105000"/>
               </a:lnSpc>
@@ -5140,7 +5401,6 @@
         <a:solidFill>
           <a:srgbClr val="FFFFFF"/>
         </a:solidFill>
-        <a:effectLst/>
       </p:bgPr>
     </p:bg>
     <p:spTree>
@@ -5178,7 +5438,7 @@
           <a:bodyPr wrap="square" rtlCol="0" anchor="ctr"/>
           <a:lstStyle/>
           <a:p>
-            <a:pPr marL="0" indent="0" algn="l">
+            <a:pPr algn="l" indent="0" marL="0">
               <a:buNone/>
             </a:pPr>
             <a:r>
@@ -5217,7 +5477,7 @@
           <a:bodyPr wrap="square" lIns="0" tIns="0" rIns="0" bIns="0" rtlCol="0" anchor="ctr"/>
           <a:lstStyle/>
           <a:p>
-            <a:pPr marL="0" indent="0">
+            <a:pPr indent="0" marL="0">
               <a:buNone/>
             </a:pPr>
             <a:r>
@@ -5256,7 +5516,7 @@
           <a:bodyPr wrap="square" lIns="0" tIns="0" rIns="0" bIns="0" rtlCol="0" anchor="ctr"/>
           <a:lstStyle/>
           <a:p>
-            <a:pPr marL="0" indent="0">
+            <a:pPr indent="0" marL="0">
               <a:buNone/>
             </a:pPr>
             <a:r>
@@ -5276,22 +5536,22 @@
       </p:sp>
       <p:pic>
         <p:nvPicPr>
-          <p:cNvPr id="5" name="Image 0" descr="../docs/erd.png"/>
+          <p:cNvPr id="5" name="Image 0" descr="../docs/erd.png">    </p:cNvPr>
           <p:cNvPicPr>
             <a:picLocks noChangeAspect="1"/>
           </p:cNvPicPr>
           <p:nvPr/>
         </p:nvPicPr>
         <p:blipFill>
-          <a:blip r:embed="rId3"/>
+          <a:blip r:embed="rId1"/>
           <a:stretch>
             <a:fillRect/>
           </a:stretch>
         </p:blipFill>
         <p:spPr>
           <a:xfrm>
-            <a:off x="548641" y="1627632"/>
-            <a:ext cx="3053542" cy="4864608"/>
+            <a:off x="548640" y="1371600"/>
+            <a:ext cx="2236013" cy="5120640"/>
           </a:xfrm>
           <a:prstGeom prst="rect">
             <a:avLst/>
@@ -5339,7 +5599,7 @@
           <a:bodyPr wrap="square" lIns="0" tIns="0" rIns="0" bIns="0" rtlCol="0" anchor="ctr"/>
           <a:lstStyle/>
           <a:p>
-            <a:pPr marL="0" indent="0">
+            <a:pPr indent="0" marL="0">
               <a:buNone/>
             </a:pPr>
             <a:r>
@@ -5353,6 +5613,9 @@
               </a:rPr>
               <a:t>dim_song  </a:t>
             </a:r>
+            <a:pPr indent="0" marL="0">
+              <a:buNone/>
+            </a:pPr>
             <a:r>
               <a:rPr lang="en-US" sz="1450" dirty="0">
                 <a:solidFill>
@@ -5409,7 +5672,7 @@
           <a:bodyPr wrap="square" lIns="0" tIns="0" rIns="0" bIns="0" rtlCol="0" anchor="ctr"/>
           <a:lstStyle/>
           <a:p>
-            <a:pPr marL="0" indent="0">
+            <a:pPr indent="0" marL="0">
               <a:buNone/>
             </a:pPr>
             <a:r>
@@ -5423,6 +5686,9 @@
               </a:rPr>
               <a:t>fct_spotify_tracks  </a:t>
             </a:r>
+            <a:pPr indent="0" marL="0">
+              <a:buNone/>
+            </a:pPr>
             <a:r>
               <a:rPr lang="en-US" sz="1450" dirty="0">
                 <a:solidFill>
@@ -5479,7 +5745,7 @@
           <a:bodyPr wrap="square" lIns="0" tIns="0" rIns="0" bIns="0" rtlCol="0" anchor="ctr"/>
           <a:lstStyle/>
           <a:p>
-            <a:pPr marL="0" indent="0">
+            <a:pPr indent="0" marL="0">
               <a:buNone/>
             </a:pPr>
             <a:r>
@@ -5493,6 +5759,9 @@
               </a:rPr>
               <a:t>fct_youtube_videos  </a:t>
             </a:r>
+            <a:pPr indent="0" marL="0">
+              <a:buNone/>
+            </a:pPr>
             <a:r>
               <a:rPr lang="en-US" sz="1450" dirty="0">
                 <a:solidFill>
@@ -5549,7 +5818,7 @@
           <a:bodyPr wrap="square" lIns="0" tIns="0" rIns="0" bIns="0" rtlCol="0" anchor="ctr"/>
           <a:lstStyle/>
           <a:p>
-            <a:pPr marL="0" indent="0">
+            <a:pPr indent="0" marL="0">
               <a:buNone/>
             </a:pPr>
             <a:r>
@@ -5563,6 +5832,9 @@
               </a:rPr>
               <a:t>mart_song_*_counts  </a:t>
             </a:r>
+            <a:pPr indent="0" marL="0">
+              <a:buNone/>
+            </a:pPr>
             <a:r>
               <a:rPr lang="en-US" sz="1450" dirty="0">
                 <a:solidFill>
@@ -5619,7 +5891,7 @@
           <a:bodyPr wrap="square" lIns="0" tIns="0" rIns="0" bIns="0" rtlCol="0" anchor="ctr"/>
           <a:lstStyle/>
           <a:p>
-            <a:pPr marL="0" indent="0">
+            <a:pPr indent="0" marL="0">
               <a:buNone/>
             </a:pPr>
             <a:r>
@@ -5633,6 +5905,9 @@
               </a:rPr>
               <a:t>mart_song_overview  </a:t>
             </a:r>
+            <a:pPr indent="0" marL="0">
+              <a:buNone/>
+            </a:pPr>
             <a:r>
               <a:rPr lang="en-US" sz="1450" dirty="0">
                 <a:solidFill>
@@ -5669,7 +5944,7 @@
           <a:bodyPr wrap="square" lIns="0" tIns="0" rIns="0" bIns="0" rtlCol="0" anchor="ctr"/>
           <a:lstStyle/>
           <a:p>
-            <a:pPr marL="0" indent="0">
+            <a:pPr indent="0" marL="0">
               <a:buNone/>
             </a:pPr>
             <a:r>
@@ -5703,7 +5978,6 @@
         <a:solidFill>
           <a:srgbClr val="FFFFFF"/>
         </a:solidFill>
-        <a:effectLst/>
       </p:bgPr>
     </p:bg>
     <p:spTree>
@@ -5741,7 +6015,7 @@
           <a:bodyPr wrap="square" rtlCol="0" anchor="ctr"/>
           <a:lstStyle/>
           <a:p>
-            <a:pPr marL="0" indent="0" algn="l">
+            <a:pPr algn="l" indent="0" marL="0">
               <a:buNone/>
             </a:pPr>
             <a:r>
@@ -5780,7 +6054,7 @@
           <a:bodyPr wrap="square" lIns="0" tIns="0" rIns="0" bIns="0" rtlCol="0" anchor="ctr"/>
           <a:lstStyle/>
           <a:p>
-            <a:pPr marL="0" indent="0">
+            <a:pPr indent="0" marL="0">
               <a:buNone/>
             </a:pPr>
             <a:r>
@@ -5819,7 +6093,7 @@
           <a:bodyPr wrap="square" lIns="0" tIns="0" rIns="0" bIns="0" rtlCol="0" anchor="ctr"/>
           <a:lstStyle/>
           <a:p>
-            <a:pPr marL="0" indent="0">
+            <a:pPr indent="0" marL="0">
               <a:buNone/>
             </a:pPr>
             <a:r>
@@ -5878,7 +6152,7 @@
           </a:solidFill>
           <a:ln/>
           <a:effectLst>
-            <a:outerShdw blurRad="101600" dist="38100" dir="5400000" algn="bl" rotWithShape="0">
+            <a:outerShdw sx="100000" sy="100000" kx="0" ky="0" algn="bl" rotWithShape="0" blurRad="101600" dist="38100" dir="5400000">
               <a:srgbClr val="000000">
                 <a:alpha val="12000"/>
               </a:srgbClr>
@@ -5888,7 +6162,315 @@
       </p:sp>
       <p:pic>
         <p:nvPicPr>
-          <p:cNvPr id="7" name="Image 0" descr="preencoded.png"/>
+          <p:cNvPr id="7" name="Image 0" descr="preencoded.png">    </p:cNvPr>
+          <p:cNvPicPr>
+            <a:picLocks noChangeAspect="1"/>
+          </p:cNvPicPr>
+          <p:nvPr/>
+        </p:nvPicPr>
+        <p:blipFill>
+          <a:blip r:embed="rId1"/>
+          <a:stretch>
+            <a:fillRect/>
+          </a:stretch>
+        </p:blipFill>
+        <p:spPr>
+          <a:xfrm>
+            <a:off x="1080821" y="2196389"/>
+            <a:ext cx="307238" cy="307238"/>
+          </a:xfrm>
+          <a:prstGeom prst="rect">
+            <a:avLst/>
+          </a:prstGeom>
+        </p:spPr>
+      </p:pic>
+      <p:sp>
+        <p:nvSpPr>
+          <p:cNvPr id="8" name="Text 5"/>
+          <p:cNvSpPr/>
+          <p:nvPr/>
+        </p:nvSpPr>
+        <p:spPr>
+          <a:xfrm>
+            <a:off x="1737360" y="1901952"/>
+            <a:ext cx="4023360" cy="411480"/>
+          </a:xfrm>
+          <a:prstGeom prst="rect">
+            <a:avLst/>
+          </a:prstGeom>
+          <a:noFill/>
+          <a:ln/>
+        </p:spPr>
+        <p:txBody>
+          <a:bodyPr wrap="square" lIns="0" tIns="0" rIns="0" bIns="0" rtlCol="0" anchor="ctr"/>
+          <a:lstStyle/>
+          <a:p>
+            <a:pPr indent="0" marL="0">
+              <a:buNone/>
+            </a:pPr>
+            <a:r>
+              <a:rPr lang="en-US" sz="1500" b="1" dirty="0">
+                <a:solidFill>
+                  <a:srgbClr val="1F2430"/>
+                </a:solidFill>
+                <a:latin typeface="Cambria" pitchFamily="34" charset="0"/>
+                <a:ea typeface="Cambria" pitchFamily="34" charset="-122"/>
+                <a:cs typeface="Cambria" pitchFamily="34" charset="-120"/>
+              </a:rPr>
+              <a:t>Uniqueness &amp; not-null</a:t>
+            </a:r>
+            <a:endParaRPr lang="en-US" sz="1500" dirty="0"/>
+          </a:p>
+        </p:txBody>
+      </p:sp>
+      <p:sp>
+        <p:nvSpPr>
+          <p:cNvPr id="9" name="Text 6"/>
+          <p:cNvSpPr/>
+          <p:nvPr/>
+        </p:nvSpPr>
+        <p:spPr>
+          <a:xfrm>
+            <a:off x="1737360" y="2286000"/>
+            <a:ext cx="4069080" cy="640080"/>
+          </a:xfrm>
+          <a:prstGeom prst="rect">
+            <a:avLst/>
+          </a:prstGeom>
+          <a:noFill/>
+          <a:ln/>
+        </p:spPr>
+        <p:txBody>
+          <a:bodyPr wrap="square" lIns="0" tIns="0" rIns="0" bIns="0" rtlCol="0" anchor="ctr"/>
+          <a:lstStyle/>
+          <a:p>
+            <a:pPr indent="0" marL="0">
+              <a:lnSpc>
+                <a:spcPct val="100000"/>
+              </a:lnSpc>
+              <a:buNone/>
+            </a:pPr>
+            <a:r>
+              <a:rPr lang="en-US" sz="1200" dirty="0">
+                <a:solidFill>
+                  <a:srgbClr val="44505F"/>
+                </a:solidFill>
+                <a:latin typeface="Calibri" pitchFamily="34" charset="0"/>
+                <a:ea typeface="Calibri" pitchFamily="34" charset="-122"/>
+                <a:cs typeface="Calibri" pitchFamily="34" charset="-120"/>
+              </a:rPr>
+              <a:t>On every primary key (song_id, track_id, video_id) — catches dupes &amp; missing keys.</a:t>
+            </a:r>
+            <a:endParaRPr lang="en-US" sz="1200" dirty="0"/>
+          </a:p>
+        </p:txBody>
+      </p:sp>
+      <p:sp>
+        <p:nvSpPr>
+          <p:cNvPr id="10" name="Shape 7"/>
+          <p:cNvSpPr/>
+          <p:nvPr/>
+        </p:nvSpPr>
+        <p:spPr>
+          <a:xfrm>
+            <a:off x="6172200" y="1737360"/>
+            <a:ext cx="5303520" cy="1234440"/>
+          </a:xfrm>
+          <a:prstGeom prst="roundRect">
+            <a:avLst>
+              <a:gd name="adj" fmla="val 5926"/>
+            </a:avLst>
+          </a:prstGeom>
+          <a:solidFill>
+            <a:srgbClr val="F4F6F8"/>
+          </a:solidFill>
+          <a:ln/>
+        </p:spPr>
+      </p:sp>
+      <p:sp>
+        <p:nvSpPr>
+          <p:cNvPr id="11" name="Shape 8"/>
+          <p:cNvSpPr/>
+          <p:nvPr/>
+        </p:nvSpPr>
+        <p:spPr>
+          <a:xfrm>
+            <a:off x="6446520" y="2029968"/>
+            <a:ext cx="640080" cy="640080"/>
+          </a:xfrm>
+          <a:prstGeom prst="ellipse">
+            <a:avLst/>
+          </a:prstGeom>
+          <a:solidFill>
+            <a:srgbClr val="12B5A5"/>
+          </a:solidFill>
+          <a:ln/>
+          <a:effectLst>
+            <a:outerShdw sx="100000" sy="100000" kx="0" ky="0" algn="bl" rotWithShape="0" blurRad="101600" dist="38100" dir="5400000">
+              <a:srgbClr val="000000">
+                <a:alpha val="12000"/>
+              </a:srgbClr>
+            </a:outerShdw>
+          </a:effectLst>
+        </p:spPr>
+      </p:sp>
+      <p:pic>
+        <p:nvPicPr>
+          <p:cNvPr id="12" name="Image 1" descr="preencoded.png">    </p:cNvPr>
+          <p:cNvPicPr>
+            <a:picLocks noChangeAspect="1"/>
+          </p:cNvPicPr>
+          <p:nvPr/>
+        </p:nvPicPr>
+        <p:blipFill>
+          <a:blip r:embed="rId2"/>
+          <a:stretch>
+            <a:fillRect/>
+          </a:stretch>
+        </p:blipFill>
+        <p:spPr>
+          <a:xfrm>
+            <a:off x="6612941" y="2196389"/>
+            <a:ext cx="307238" cy="307238"/>
+          </a:xfrm>
+          <a:prstGeom prst="rect">
+            <a:avLst/>
+          </a:prstGeom>
+        </p:spPr>
+      </p:pic>
+      <p:sp>
+        <p:nvSpPr>
+          <p:cNvPr id="13" name="Text 9"/>
+          <p:cNvSpPr/>
+          <p:nvPr/>
+        </p:nvSpPr>
+        <p:spPr>
+          <a:xfrm>
+            <a:off x="7269480" y="1901952"/>
+            <a:ext cx="4023360" cy="411480"/>
+          </a:xfrm>
+          <a:prstGeom prst="rect">
+            <a:avLst/>
+          </a:prstGeom>
+          <a:noFill/>
+          <a:ln/>
+        </p:spPr>
+        <p:txBody>
+          <a:bodyPr wrap="square" lIns="0" tIns="0" rIns="0" bIns="0" rtlCol="0" anchor="ctr"/>
+          <a:lstStyle/>
+          <a:p>
+            <a:pPr indent="0" marL="0">
+              <a:buNone/>
+            </a:pPr>
+            <a:r>
+              <a:rPr lang="en-US" sz="1500" b="1" dirty="0">
+                <a:solidFill>
+                  <a:srgbClr val="1F2430"/>
+                </a:solidFill>
+                <a:latin typeface="Cambria" pitchFamily="34" charset="0"/>
+                <a:ea typeface="Cambria" pitchFamily="34" charset="-122"/>
+                <a:cs typeface="Cambria" pitchFamily="34" charset="-120"/>
+              </a:rPr>
+              <a:t>Referential integrity</a:t>
+            </a:r>
+            <a:endParaRPr lang="en-US" sz="1500" dirty="0"/>
+          </a:p>
+        </p:txBody>
+      </p:sp>
+      <p:sp>
+        <p:nvSpPr>
+          <p:cNvPr id="14" name="Text 10"/>
+          <p:cNvSpPr/>
+          <p:nvPr/>
+        </p:nvSpPr>
+        <p:spPr>
+          <a:xfrm>
+            <a:off x="7269480" y="2286000"/>
+            <a:ext cx="4069080" cy="640080"/>
+          </a:xfrm>
+          <a:prstGeom prst="rect">
+            <a:avLst/>
+          </a:prstGeom>
+          <a:noFill/>
+          <a:ln/>
+        </p:spPr>
+        <p:txBody>
+          <a:bodyPr wrap="square" lIns="0" tIns="0" rIns="0" bIns="0" rtlCol="0" anchor="ctr"/>
+          <a:lstStyle/>
+          <a:p>
+            <a:pPr indent="0" marL="0">
+              <a:lnSpc>
+                <a:spcPct val="100000"/>
+              </a:lnSpc>
+              <a:buNone/>
+            </a:pPr>
+            <a:r>
+              <a:rPr lang="en-US" sz="1200" dirty="0">
+                <a:solidFill>
+                  <a:srgbClr val="44505F"/>
+                </a:solidFill>
+                <a:latin typeface="Calibri" pitchFamily="34" charset="0"/>
+                <a:ea typeface="Calibri" pitchFamily="34" charset="-122"/>
+                <a:cs typeface="Calibri" pitchFamily="34" charset="-120"/>
+              </a:rPr>
+              <a:t>relationships tests ensure every fact row maps to a real dim_song.</a:t>
+            </a:r>
+            <a:endParaRPr lang="en-US" sz="1200" dirty="0"/>
+          </a:p>
+        </p:txBody>
+      </p:sp>
+      <p:sp>
+        <p:nvSpPr>
+          <p:cNvPr id="15" name="Shape 11"/>
+          <p:cNvSpPr/>
+          <p:nvPr/>
+        </p:nvSpPr>
+        <p:spPr>
+          <a:xfrm>
+            <a:off x="640080" y="3154680"/>
+            <a:ext cx="5303520" cy="1234440"/>
+          </a:xfrm>
+          <a:prstGeom prst="roundRect">
+            <a:avLst>
+              <a:gd name="adj" fmla="val 5926"/>
+            </a:avLst>
+          </a:prstGeom>
+          <a:solidFill>
+            <a:srgbClr val="F4F6F8"/>
+          </a:solidFill>
+          <a:ln/>
+        </p:spPr>
+      </p:sp>
+      <p:sp>
+        <p:nvSpPr>
+          <p:cNvPr id="16" name="Shape 12"/>
+          <p:cNvSpPr/>
+          <p:nvPr/>
+        </p:nvSpPr>
+        <p:spPr>
+          <a:xfrm>
+            <a:off x="914400" y="3447288"/>
+            <a:ext cx="640080" cy="640080"/>
+          </a:xfrm>
+          <a:prstGeom prst="ellipse">
+            <a:avLst/>
+          </a:prstGeom>
+          <a:solidFill>
+            <a:srgbClr val="12B5A5"/>
+          </a:solidFill>
+          <a:ln/>
+          <a:effectLst>
+            <a:outerShdw sx="100000" sy="100000" kx="0" ky="0" algn="bl" rotWithShape="0" blurRad="101600" dist="38100" dir="5400000">
+              <a:srgbClr val="000000">
+                <a:alpha val="12000"/>
+              </a:srgbClr>
+            </a:outerShdw>
+          </a:effectLst>
+        </p:spPr>
+      </p:sp>
+      <p:pic>
+        <p:nvPicPr>
+          <p:cNvPr id="17" name="Image 2" descr="preencoded.png">    </p:cNvPr>
           <p:cNvPicPr>
             <a:picLocks noChangeAspect="1"/>
           </p:cNvPicPr>
@@ -5902,7 +6484,7 @@
         </p:blipFill>
         <p:spPr>
           <a:xfrm>
-            <a:off x="1080821" y="2196389"/>
+            <a:off x="1080821" y="3613709"/>
             <a:ext cx="307238" cy="307238"/>
           </a:xfrm>
           <a:prstGeom prst="rect">
@@ -5912,13 +6494,13 @@
       </p:pic>
       <p:sp>
         <p:nvSpPr>
-          <p:cNvPr id="8" name="Text 5"/>
-          <p:cNvSpPr/>
-          <p:nvPr/>
-        </p:nvSpPr>
-        <p:spPr>
-          <a:xfrm>
-            <a:off x="1737360" y="1901952"/>
+          <p:cNvPr id="18" name="Text 13"/>
+          <p:cNvSpPr/>
+          <p:nvPr/>
+        </p:nvSpPr>
+        <p:spPr>
+          <a:xfrm>
+            <a:off x="1737360" y="3319272"/>
             <a:ext cx="4023360" cy="411480"/>
           </a:xfrm>
           <a:prstGeom prst="rect">
@@ -5931,7 +6513,7 @@
           <a:bodyPr wrap="square" lIns="0" tIns="0" rIns="0" bIns="0" rtlCol="0" anchor="ctr"/>
           <a:lstStyle/>
           <a:p>
-            <a:pPr marL="0" indent="0">
+            <a:pPr indent="0" marL="0">
               <a:buNone/>
             </a:pPr>
             <a:r>
@@ -5943,7 +6525,7 @@
                 <a:ea typeface="Cambria" pitchFamily="34" charset="-122"/>
                 <a:cs typeface="Cambria" pitchFamily="34" charset="-120"/>
               </a:rPr>
-              <a:t>Uniqueness &amp; not-null</a:t>
+              <a:t>Format validation</a:t>
             </a:r>
             <a:endParaRPr lang="en-US" sz="1500" dirty="0"/>
           </a:p>
@@ -5951,13 +6533,13 @@
       </p:sp>
       <p:sp>
         <p:nvSpPr>
-          <p:cNvPr id="9" name="Text 6"/>
-          <p:cNvSpPr/>
-          <p:nvPr/>
-        </p:nvSpPr>
-        <p:spPr>
-          <a:xfrm>
-            <a:off x="1737360" y="2286000"/>
+          <p:cNvPr id="19" name="Text 14"/>
+          <p:cNvSpPr/>
+          <p:nvPr/>
+        </p:nvSpPr>
+        <p:spPr>
+          <a:xfrm>
+            <a:off x="1737360" y="3703320"/>
             <a:ext cx="4069080" cy="640080"/>
           </a:xfrm>
           <a:prstGeom prst="rect">
@@ -5970,7 +6552,7 @@
           <a:bodyPr wrap="square" lIns="0" tIns="0" rIns="0" bIns="0" rtlCol="0" anchor="ctr"/>
           <a:lstStyle/>
           <a:p>
-            <a:pPr marL="0" indent="0">
+            <a:pPr indent="0" marL="0">
               <a:lnSpc>
                 <a:spcPct val="100000"/>
               </a:lnSpc>
@@ -5985,7 +6567,7 @@
                 <a:ea typeface="Calibri" pitchFamily="34" charset="-122"/>
                 <a:cs typeface="Calibri" pitchFamily="34" charset="-120"/>
               </a:rPr>
-              <a:t>On every primary key (song_id, track_id, video_id) — catches dupes &amp; missing keys.</a:t>
+              <a:t>ISRC must match CC-XXX-YY-NNNNN; malformed-but-present values flagged as anomalies.</a:t>
             </a:r>
             <a:endParaRPr lang="en-US" sz="1200" dirty="0"/>
           </a:p>
@@ -5993,13 +6575,13 @@
       </p:sp>
       <p:sp>
         <p:nvSpPr>
-          <p:cNvPr id="10" name="Shape 7"/>
-          <p:cNvSpPr/>
-          <p:nvPr/>
-        </p:nvSpPr>
-        <p:spPr>
-          <a:xfrm>
-            <a:off x="6172200" y="1737360"/>
+          <p:cNvPr id="20" name="Shape 15"/>
+          <p:cNvSpPr/>
+          <p:nvPr/>
+        </p:nvSpPr>
+        <p:spPr>
+          <a:xfrm>
+            <a:off x="6172200" y="3154680"/>
             <a:ext cx="5303520" cy="1234440"/>
           </a:xfrm>
           <a:prstGeom prst="roundRect">
@@ -6015,13 +6597,13 @@
       </p:sp>
       <p:sp>
         <p:nvSpPr>
-          <p:cNvPr id="11" name="Shape 8"/>
-          <p:cNvSpPr/>
-          <p:nvPr/>
-        </p:nvSpPr>
-        <p:spPr>
-          <a:xfrm>
-            <a:off x="6446520" y="2029968"/>
+          <p:cNvPr id="21" name="Shape 16"/>
+          <p:cNvSpPr/>
+          <p:nvPr/>
+        </p:nvSpPr>
+        <p:spPr>
+          <a:xfrm>
+            <a:off x="6446520" y="3447288"/>
             <a:ext cx="640080" cy="640080"/>
           </a:xfrm>
           <a:prstGeom prst="ellipse">
@@ -6032,7 +6614,7 @@
           </a:solidFill>
           <a:ln/>
           <a:effectLst>
-            <a:outerShdw blurRad="101600" dist="38100" dir="5400000" algn="bl" rotWithShape="0">
+            <a:outerShdw sx="100000" sy="100000" kx="0" ky="0" algn="bl" rotWithShape="0" blurRad="101600" dist="38100" dir="5400000">
               <a:srgbClr val="000000">
                 <a:alpha val="12000"/>
               </a:srgbClr>
@@ -6042,21 +6624,21 @@
       </p:sp>
       <p:pic>
         <p:nvPicPr>
-          <p:cNvPr id="12" name="Image 1" descr="preencoded.png"/>
+          <p:cNvPr id="22" name="Image 3" descr="preencoded.png">    </p:cNvPr>
           <p:cNvPicPr>
             <a:picLocks noChangeAspect="1"/>
           </p:cNvPicPr>
           <p:nvPr/>
         </p:nvPicPr>
         <p:blipFill>
-          <a:blip r:embed="rId3"/>
+          <a:blip r:embed="rId4"/>
           <a:stretch>
             <a:fillRect/>
           </a:stretch>
         </p:blipFill>
         <p:spPr>
           <a:xfrm>
-            <a:off x="6612941" y="2196389"/>
+            <a:off x="6612941" y="3613709"/>
             <a:ext cx="307238" cy="307238"/>
           </a:xfrm>
           <a:prstGeom prst="rect">
@@ -6066,13 +6648,13 @@
       </p:pic>
       <p:sp>
         <p:nvSpPr>
-          <p:cNvPr id="13" name="Text 9"/>
-          <p:cNvSpPr/>
-          <p:nvPr/>
-        </p:nvSpPr>
-        <p:spPr>
-          <a:xfrm>
-            <a:off x="7269480" y="1901952"/>
+          <p:cNvPr id="23" name="Text 17"/>
+          <p:cNvSpPr/>
+          <p:nvPr/>
+        </p:nvSpPr>
+        <p:spPr>
+          <a:xfrm>
+            <a:off x="7269480" y="3319272"/>
             <a:ext cx="4023360" cy="411480"/>
           </a:xfrm>
           <a:prstGeom prst="rect">
@@ -6085,7 +6667,7 @@
           <a:bodyPr wrap="square" lIns="0" tIns="0" rIns="0" bIns="0" rtlCol="0" anchor="ctr"/>
           <a:lstStyle/>
           <a:p>
-            <a:pPr marL="0" indent="0">
+            <a:pPr indent="0" marL="0">
               <a:buNone/>
             </a:pPr>
             <a:r>
@@ -6097,7 +6679,7 @@
                 <a:ea typeface="Cambria" pitchFamily="34" charset="-122"/>
                 <a:cs typeface="Cambria" pitchFamily="34" charset="-120"/>
               </a:rPr>
-              <a:t>Referential integrity</a:t>
+              <a:t>Deduplication</a:t>
             </a:r>
             <a:endParaRPr lang="en-US" sz="1500" dirty="0"/>
           </a:p>
@@ -6105,13 +6687,13 @@
       </p:sp>
       <p:sp>
         <p:nvSpPr>
-          <p:cNvPr id="14" name="Text 10"/>
-          <p:cNvSpPr/>
-          <p:nvPr/>
-        </p:nvSpPr>
-        <p:spPr>
-          <a:xfrm>
-            <a:off x="7269480" y="2286000"/>
+          <p:cNvPr id="24" name="Text 18"/>
+          <p:cNvSpPr/>
+          <p:nvPr/>
+        </p:nvSpPr>
+        <p:spPr>
+          <a:xfrm>
+            <a:off x="7269480" y="3703320"/>
             <a:ext cx="4069080" cy="640080"/>
           </a:xfrm>
           <a:prstGeom prst="rect">
@@ -6124,7 +6706,7 @@
           <a:bodyPr wrap="square" lIns="0" tIns="0" rIns="0" bIns="0" rtlCol="0" anchor="ctr"/>
           <a:lstStyle/>
           <a:p>
-            <a:pPr marL="0" indent="0">
+            <a:pPr indent="0" marL="0">
               <a:lnSpc>
                 <a:spcPct val="100000"/>
               </a:lnSpc>
@@ -6139,7 +6721,7 @@
                 <a:ea typeface="Calibri" pitchFamily="34" charset="-122"/>
                 <a:cs typeface="Calibri" pitchFamily="34" charset="-120"/>
               </a:rPr>
-              <a:t>relationships tests ensure every fact row maps to a real dim_song.</a:t>
+              <a:t>row_number() windows keep the latest row per natural key in staging.</a:t>
             </a:r>
             <a:endParaRPr lang="en-US" sz="1200" dirty="0"/>
           </a:p>
@@ -6147,13 +6729,13 @@
       </p:sp>
       <p:sp>
         <p:nvSpPr>
-          <p:cNvPr id="15" name="Shape 11"/>
-          <p:cNvSpPr/>
-          <p:nvPr/>
-        </p:nvSpPr>
-        <p:spPr>
-          <a:xfrm>
-            <a:off x="640080" y="3154680"/>
+          <p:cNvPr id="25" name="Shape 19"/>
+          <p:cNvSpPr/>
+          <p:nvPr/>
+        </p:nvSpPr>
+        <p:spPr>
+          <a:xfrm>
+            <a:off x="640080" y="4572000"/>
             <a:ext cx="5303520" cy="1234440"/>
           </a:xfrm>
           <a:prstGeom prst="roundRect">
@@ -6169,13 +6751,13 @@
       </p:sp>
       <p:sp>
         <p:nvSpPr>
-          <p:cNvPr id="16" name="Shape 12"/>
-          <p:cNvSpPr/>
-          <p:nvPr/>
-        </p:nvSpPr>
-        <p:spPr>
-          <a:xfrm>
-            <a:off x="914400" y="3447288"/>
+          <p:cNvPr id="26" name="Shape 20"/>
+          <p:cNvSpPr/>
+          <p:nvPr/>
+        </p:nvSpPr>
+        <p:spPr>
+          <a:xfrm>
+            <a:off x="914400" y="4864608"/>
             <a:ext cx="640080" cy="640080"/>
           </a:xfrm>
           <a:prstGeom prst="ellipse">
@@ -6186,7 +6768,7 @@
           </a:solidFill>
           <a:ln/>
           <a:effectLst>
-            <a:outerShdw blurRad="101600" dist="38100" dir="5400000" algn="bl" rotWithShape="0">
+            <a:outerShdw sx="100000" sy="100000" kx="0" ky="0" algn="bl" rotWithShape="0" blurRad="101600" dist="38100" dir="5400000">
               <a:srgbClr val="000000">
                 <a:alpha val="12000"/>
               </a:srgbClr>
@@ -6196,21 +6778,21 @@
       </p:sp>
       <p:pic>
         <p:nvPicPr>
-          <p:cNvPr id="17" name="Image 2" descr="preencoded.png"/>
+          <p:cNvPr id="27" name="Image 4" descr="preencoded.png">    </p:cNvPr>
           <p:cNvPicPr>
             <a:picLocks noChangeAspect="1"/>
           </p:cNvPicPr>
           <p:nvPr/>
         </p:nvPicPr>
         <p:blipFill>
-          <a:blip r:embed="rId3"/>
+          <a:blip r:embed="rId5"/>
           <a:stretch>
             <a:fillRect/>
           </a:stretch>
         </p:blipFill>
         <p:spPr>
           <a:xfrm>
-            <a:off x="1080821" y="3613709"/>
+            <a:off x="1080821" y="5031029"/>
             <a:ext cx="307238" cy="307238"/>
           </a:xfrm>
           <a:prstGeom prst="rect">
@@ -6220,13 +6802,13 @@
       </p:pic>
       <p:sp>
         <p:nvSpPr>
-          <p:cNvPr id="18" name="Text 13"/>
-          <p:cNvSpPr/>
-          <p:nvPr/>
-        </p:nvSpPr>
-        <p:spPr>
-          <a:xfrm>
-            <a:off x="1737360" y="3319272"/>
+          <p:cNvPr id="28" name="Text 21"/>
+          <p:cNvSpPr/>
+          <p:nvPr/>
+        </p:nvSpPr>
+        <p:spPr>
+          <a:xfrm>
+            <a:off x="1737360" y="4736592"/>
             <a:ext cx="4023360" cy="411480"/>
           </a:xfrm>
           <a:prstGeom prst="rect">
@@ -6239,7 +6821,7 @@
           <a:bodyPr wrap="square" lIns="0" tIns="0" rIns="0" bIns="0" rtlCol="0" anchor="ctr"/>
           <a:lstStyle/>
           <a:p>
-            <a:pPr marL="0" indent="0">
+            <a:pPr indent="0" marL="0">
               <a:buNone/>
             </a:pPr>
             <a:r>
@@ -6251,7 +6833,7 @@
                 <a:ea typeface="Cambria" pitchFamily="34" charset="-122"/>
                 <a:cs typeface="Cambria" pitchFamily="34" charset="-120"/>
               </a:rPr>
-              <a:t>Format validation</a:t>
+              <a:t>Missing-data handling</a:t>
             </a:r>
             <a:endParaRPr lang="en-US" sz="1500" dirty="0"/>
           </a:p>
@@ -6259,13 +6841,13 @@
       </p:sp>
       <p:sp>
         <p:nvSpPr>
-          <p:cNvPr id="19" name="Text 14"/>
-          <p:cNvSpPr/>
-          <p:nvPr/>
-        </p:nvSpPr>
-        <p:spPr>
-          <a:xfrm>
-            <a:off x="1737360" y="3703320"/>
+          <p:cNvPr id="29" name="Text 22"/>
+          <p:cNvSpPr/>
+          <p:nvPr/>
+        </p:nvSpPr>
+        <p:spPr>
+          <a:xfrm>
+            <a:off x="1737360" y="5120640"/>
             <a:ext cx="4069080" cy="640080"/>
           </a:xfrm>
           <a:prstGeom prst="rect">
@@ -6278,7 +6860,7 @@
           <a:bodyPr wrap="square" lIns="0" tIns="0" rIns="0" bIns="0" rtlCol="0" anchor="ctr"/>
           <a:lstStyle/>
           <a:p>
-            <a:pPr marL="0" indent="0">
+            <a:pPr indent="0" marL="0">
               <a:lnSpc>
                 <a:spcPct val="100000"/>
               </a:lnSpc>
@@ -6293,7 +6875,7 @@
                 <a:ea typeface="Calibri" pitchFamily="34" charset="-122"/>
                 <a:cs typeface="Calibri" pitchFamily="34" charset="-120"/>
               </a:rPr>
-              <a:t>ISRC must match CC-XXX-YY-NNNNN; malformed-but-present values flagged as anomalies.</a:t>
+              <a:t>LEFT JOINs keep zero-match songs (count = 0) instead of dropping them.</a:t>
             </a:r>
             <a:endParaRPr lang="en-US" sz="1200" dirty="0"/>
           </a:p>
@@ -6301,13 +6883,13 @@
       </p:sp>
       <p:sp>
         <p:nvSpPr>
-          <p:cNvPr id="20" name="Shape 15"/>
-          <p:cNvSpPr/>
-          <p:nvPr/>
-        </p:nvSpPr>
-        <p:spPr>
-          <a:xfrm>
-            <a:off x="6172200" y="3154680"/>
+          <p:cNvPr id="30" name="Shape 23"/>
+          <p:cNvSpPr/>
+          <p:nvPr/>
+        </p:nvSpPr>
+        <p:spPr>
+          <a:xfrm>
+            <a:off x="6172200" y="4572000"/>
             <a:ext cx="5303520" cy="1234440"/>
           </a:xfrm>
           <a:prstGeom prst="roundRect">
@@ -6323,13 +6905,13 @@
       </p:sp>
       <p:sp>
         <p:nvSpPr>
-          <p:cNvPr id="21" name="Shape 16"/>
-          <p:cNvSpPr/>
-          <p:nvPr/>
-        </p:nvSpPr>
-        <p:spPr>
-          <a:xfrm>
-            <a:off x="6446520" y="3447288"/>
+          <p:cNvPr id="31" name="Shape 24"/>
+          <p:cNvSpPr/>
+          <p:nvPr/>
+        </p:nvSpPr>
+        <p:spPr>
+          <a:xfrm>
+            <a:off x="6446520" y="4864608"/>
             <a:ext cx="640080" cy="640080"/>
           </a:xfrm>
           <a:prstGeom prst="ellipse">
@@ -6340,7 +6922,7 @@
           </a:solidFill>
           <a:ln/>
           <a:effectLst>
-            <a:outerShdw blurRad="101600" dist="38100" dir="5400000" algn="bl" rotWithShape="0">
+            <a:outerShdw sx="100000" sy="100000" kx="0" ky="0" algn="bl" rotWithShape="0" blurRad="101600" dist="38100" dir="5400000">
               <a:srgbClr val="000000">
                 <a:alpha val="12000"/>
               </a:srgbClr>
@@ -6350,21 +6932,21 @@
       </p:sp>
       <p:pic>
         <p:nvPicPr>
-          <p:cNvPr id="22" name="Image 3" descr="preencoded.png"/>
+          <p:cNvPr id="32" name="Image 5" descr="preencoded.png">    </p:cNvPr>
           <p:cNvPicPr>
             <a:picLocks noChangeAspect="1"/>
           </p:cNvPicPr>
           <p:nvPr/>
         </p:nvPicPr>
         <p:blipFill>
-          <a:blip r:embed="rId3"/>
+          <a:blip r:embed="rId6"/>
           <a:stretch>
             <a:fillRect/>
           </a:stretch>
         </p:blipFill>
         <p:spPr>
           <a:xfrm>
-            <a:off x="6612941" y="3613709"/>
+            <a:off x="6612941" y="5031029"/>
             <a:ext cx="307238" cy="307238"/>
           </a:xfrm>
           <a:prstGeom prst="rect">
@@ -6374,13 +6956,13 @@
       </p:pic>
       <p:sp>
         <p:nvSpPr>
-          <p:cNvPr id="23" name="Text 17"/>
-          <p:cNvSpPr/>
-          <p:nvPr/>
-        </p:nvSpPr>
-        <p:spPr>
-          <a:xfrm>
-            <a:off x="7269480" y="3319272"/>
+          <p:cNvPr id="33" name="Text 25"/>
+          <p:cNvSpPr/>
+          <p:nvPr/>
+        </p:nvSpPr>
+        <p:spPr>
+          <a:xfrm>
+            <a:off x="7269480" y="4736592"/>
             <a:ext cx="4023360" cy="411480"/>
           </a:xfrm>
           <a:prstGeom prst="rect">
@@ -6393,7 +6975,7 @@
           <a:bodyPr wrap="square" lIns="0" tIns="0" rIns="0" bIns="0" rtlCol="0" anchor="ctr"/>
           <a:lstStyle/>
           <a:p>
-            <a:pPr marL="0" indent="0">
+            <a:pPr indent="0" marL="0">
               <a:buNone/>
             </a:pPr>
             <a:r>
@@ -6405,7 +6987,7 @@
                 <a:ea typeface="Cambria" pitchFamily="34" charset="-122"/>
                 <a:cs typeface="Cambria" pitchFamily="34" charset="-120"/>
               </a:rPr>
-              <a:t>Deduplication</a:t>
+              <a:t>Corruption / anomaly</a:t>
             </a:r>
             <a:endParaRPr lang="en-US" sz="1500" dirty="0"/>
           </a:p>
@@ -6413,13 +6995,13 @@
       </p:sp>
       <p:sp>
         <p:nvSpPr>
-          <p:cNvPr id="24" name="Text 18"/>
-          <p:cNvSpPr/>
-          <p:nvPr/>
-        </p:nvSpPr>
-        <p:spPr>
-          <a:xfrm>
-            <a:off x="7269480" y="3703320"/>
+          <p:cNvPr id="34" name="Text 26"/>
+          <p:cNvSpPr/>
+          <p:nvPr/>
+        </p:nvSpPr>
+        <p:spPr>
+          <a:xfrm>
+            <a:off x="7269480" y="5120640"/>
             <a:ext cx="4069080" cy="640080"/>
           </a:xfrm>
           <a:prstGeom prst="rect">
@@ -6432,315 +7014,7 @@
           <a:bodyPr wrap="square" lIns="0" tIns="0" rIns="0" bIns="0" rtlCol="0" anchor="ctr"/>
           <a:lstStyle/>
           <a:p>
-            <a:pPr marL="0" indent="0">
-              <a:lnSpc>
-                <a:spcPct val="100000"/>
-              </a:lnSpc>
-              <a:buNone/>
-            </a:pPr>
-            <a:r>
-              <a:rPr lang="en-US" sz="1200" dirty="0">
-                <a:solidFill>
-                  <a:srgbClr val="44505F"/>
-                </a:solidFill>
-                <a:latin typeface="Calibri" pitchFamily="34" charset="0"/>
-                <a:ea typeface="Calibri" pitchFamily="34" charset="-122"/>
-                <a:cs typeface="Calibri" pitchFamily="34" charset="-120"/>
-              </a:rPr>
-              <a:t>row_number() windows keep the latest row per natural key in staging.</a:t>
-            </a:r>
-            <a:endParaRPr lang="en-US" sz="1200" dirty="0"/>
-          </a:p>
-        </p:txBody>
-      </p:sp>
-      <p:sp>
-        <p:nvSpPr>
-          <p:cNvPr id="25" name="Shape 19"/>
-          <p:cNvSpPr/>
-          <p:nvPr/>
-        </p:nvSpPr>
-        <p:spPr>
-          <a:xfrm>
-            <a:off x="640080" y="4572000"/>
-            <a:ext cx="5303520" cy="1234440"/>
-          </a:xfrm>
-          <a:prstGeom prst="roundRect">
-            <a:avLst>
-              <a:gd name="adj" fmla="val 5926"/>
-            </a:avLst>
-          </a:prstGeom>
-          <a:solidFill>
-            <a:srgbClr val="F4F6F8"/>
-          </a:solidFill>
-          <a:ln/>
-        </p:spPr>
-      </p:sp>
-      <p:sp>
-        <p:nvSpPr>
-          <p:cNvPr id="26" name="Shape 20"/>
-          <p:cNvSpPr/>
-          <p:nvPr/>
-        </p:nvSpPr>
-        <p:spPr>
-          <a:xfrm>
-            <a:off x="914400" y="4864608"/>
-            <a:ext cx="640080" cy="640080"/>
-          </a:xfrm>
-          <a:prstGeom prst="ellipse">
-            <a:avLst/>
-          </a:prstGeom>
-          <a:solidFill>
-            <a:srgbClr val="12B5A5"/>
-          </a:solidFill>
-          <a:ln/>
-          <a:effectLst>
-            <a:outerShdw blurRad="101600" dist="38100" dir="5400000" algn="bl" rotWithShape="0">
-              <a:srgbClr val="000000">
-                <a:alpha val="12000"/>
-              </a:srgbClr>
-            </a:outerShdw>
-          </a:effectLst>
-        </p:spPr>
-      </p:sp>
-      <p:pic>
-        <p:nvPicPr>
-          <p:cNvPr id="27" name="Image 4" descr="preencoded.png"/>
-          <p:cNvPicPr>
-            <a:picLocks noChangeAspect="1"/>
-          </p:cNvPicPr>
-          <p:nvPr/>
-        </p:nvPicPr>
-        <p:blipFill>
-          <a:blip r:embed="rId3"/>
-          <a:stretch>
-            <a:fillRect/>
-          </a:stretch>
-        </p:blipFill>
-        <p:spPr>
-          <a:xfrm>
-            <a:off x="1080821" y="5031029"/>
-            <a:ext cx="307238" cy="307238"/>
-          </a:xfrm>
-          <a:prstGeom prst="rect">
-            <a:avLst/>
-          </a:prstGeom>
-        </p:spPr>
-      </p:pic>
-      <p:sp>
-        <p:nvSpPr>
-          <p:cNvPr id="28" name="Text 21"/>
-          <p:cNvSpPr/>
-          <p:nvPr/>
-        </p:nvSpPr>
-        <p:spPr>
-          <a:xfrm>
-            <a:off x="1737360" y="4736592"/>
-            <a:ext cx="4023360" cy="411480"/>
-          </a:xfrm>
-          <a:prstGeom prst="rect">
-            <a:avLst/>
-          </a:prstGeom>
-          <a:noFill/>
-          <a:ln/>
-        </p:spPr>
-        <p:txBody>
-          <a:bodyPr wrap="square" lIns="0" tIns="0" rIns="0" bIns="0" rtlCol="0" anchor="ctr"/>
-          <a:lstStyle/>
-          <a:p>
-            <a:pPr marL="0" indent="0">
-              <a:buNone/>
-            </a:pPr>
-            <a:r>
-              <a:rPr lang="en-US" sz="1500" b="1" dirty="0">
-                <a:solidFill>
-                  <a:srgbClr val="1F2430"/>
-                </a:solidFill>
-                <a:latin typeface="Cambria" pitchFamily="34" charset="0"/>
-                <a:ea typeface="Cambria" pitchFamily="34" charset="-122"/>
-                <a:cs typeface="Cambria" pitchFamily="34" charset="-120"/>
-              </a:rPr>
-              <a:t>Missing-data handling</a:t>
-            </a:r>
-            <a:endParaRPr lang="en-US" sz="1500" dirty="0"/>
-          </a:p>
-        </p:txBody>
-      </p:sp>
-      <p:sp>
-        <p:nvSpPr>
-          <p:cNvPr id="29" name="Text 22"/>
-          <p:cNvSpPr/>
-          <p:nvPr/>
-        </p:nvSpPr>
-        <p:spPr>
-          <a:xfrm>
-            <a:off x="1737360" y="5120640"/>
-            <a:ext cx="4069080" cy="640080"/>
-          </a:xfrm>
-          <a:prstGeom prst="rect">
-            <a:avLst/>
-          </a:prstGeom>
-          <a:noFill/>
-          <a:ln/>
-        </p:spPr>
-        <p:txBody>
-          <a:bodyPr wrap="square" lIns="0" tIns="0" rIns="0" bIns="0" rtlCol="0" anchor="ctr"/>
-          <a:lstStyle/>
-          <a:p>
-            <a:pPr marL="0" indent="0">
-              <a:lnSpc>
-                <a:spcPct val="100000"/>
-              </a:lnSpc>
-              <a:buNone/>
-            </a:pPr>
-            <a:r>
-              <a:rPr lang="en-US" sz="1200" dirty="0">
-                <a:solidFill>
-                  <a:srgbClr val="44505F"/>
-                </a:solidFill>
-                <a:latin typeface="Calibri" pitchFamily="34" charset="0"/>
-                <a:ea typeface="Calibri" pitchFamily="34" charset="-122"/>
-                <a:cs typeface="Calibri" pitchFamily="34" charset="-120"/>
-              </a:rPr>
-              <a:t>LEFT JOINs keep zero-match songs (count = 0) instead of dropping them.</a:t>
-            </a:r>
-            <a:endParaRPr lang="en-US" sz="1200" dirty="0"/>
-          </a:p>
-        </p:txBody>
-      </p:sp>
-      <p:sp>
-        <p:nvSpPr>
-          <p:cNvPr id="30" name="Shape 23"/>
-          <p:cNvSpPr/>
-          <p:nvPr/>
-        </p:nvSpPr>
-        <p:spPr>
-          <a:xfrm>
-            <a:off x="6172200" y="4572000"/>
-            <a:ext cx="5303520" cy="1234440"/>
-          </a:xfrm>
-          <a:prstGeom prst="roundRect">
-            <a:avLst>
-              <a:gd name="adj" fmla="val 5926"/>
-            </a:avLst>
-          </a:prstGeom>
-          <a:solidFill>
-            <a:srgbClr val="F4F6F8"/>
-          </a:solidFill>
-          <a:ln/>
-        </p:spPr>
-      </p:sp>
-      <p:sp>
-        <p:nvSpPr>
-          <p:cNvPr id="31" name="Shape 24"/>
-          <p:cNvSpPr/>
-          <p:nvPr/>
-        </p:nvSpPr>
-        <p:spPr>
-          <a:xfrm>
-            <a:off x="6446520" y="4864608"/>
-            <a:ext cx="640080" cy="640080"/>
-          </a:xfrm>
-          <a:prstGeom prst="ellipse">
-            <a:avLst/>
-          </a:prstGeom>
-          <a:solidFill>
-            <a:srgbClr val="12B5A5"/>
-          </a:solidFill>
-          <a:ln/>
-          <a:effectLst>
-            <a:outerShdw blurRad="101600" dist="38100" dir="5400000" algn="bl" rotWithShape="0">
-              <a:srgbClr val="000000">
-                <a:alpha val="12000"/>
-              </a:srgbClr>
-            </a:outerShdw>
-          </a:effectLst>
-        </p:spPr>
-      </p:sp>
-      <p:pic>
-        <p:nvPicPr>
-          <p:cNvPr id="32" name="Image 5" descr="preencoded.png"/>
-          <p:cNvPicPr>
-            <a:picLocks noChangeAspect="1"/>
-          </p:cNvPicPr>
-          <p:nvPr/>
-        </p:nvPicPr>
-        <p:blipFill>
-          <a:blip r:embed="rId3"/>
-          <a:stretch>
-            <a:fillRect/>
-          </a:stretch>
-        </p:blipFill>
-        <p:spPr>
-          <a:xfrm>
-            <a:off x="6612941" y="5031029"/>
-            <a:ext cx="307238" cy="307238"/>
-          </a:xfrm>
-          <a:prstGeom prst="rect">
-            <a:avLst/>
-          </a:prstGeom>
-        </p:spPr>
-      </p:pic>
-      <p:sp>
-        <p:nvSpPr>
-          <p:cNvPr id="33" name="Text 25"/>
-          <p:cNvSpPr/>
-          <p:nvPr/>
-        </p:nvSpPr>
-        <p:spPr>
-          <a:xfrm>
-            <a:off x="7269480" y="4736592"/>
-            <a:ext cx="4023360" cy="411480"/>
-          </a:xfrm>
-          <a:prstGeom prst="rect">
-            <a:avLst/>
-          </a:prstGeom>
-          <a:noFill/>
-          <a:ln/>
-        </p:spPr>
-        <p:txBody>
-          <a:bodyPr wrap="square" lIns="0" tIns="0" rIns="0" bIns="0" rtlCol="0" anchor="ctr"/>
-          <a:lstStyle/>
-          <a:p>
-            <a:pPr marL="0" indent="0">
-              <a:buNone/>
-            </a:pPr>
-            <a:r>
-              <a:rPr lang="en-US" sz="1500" b="1" dirty="0">
-                <a:solidFill>
-                  <a:srgbClr val="1F2430"/>
-                </a:solidFill>
-                <a:latin typeface="Cambria" pitchFamily="34" charset="0"/>
-                <a:ea typeface="Cambria" pitchFamily="34" charset="-122"/>
-                <a:cs typeface="Cambria" pitchFamily="34" charset="-120"/>
-              </a:rPr>
-              <a:t>Corruption / anomaly</a:t>
-            </a:r>
-            <a:endParaRPr lang="en-US" sz="1500" dirty="0"/>
-          </a:p>
-        </p:txBody>
-      </p:sp>
-      <p:sp>
-        <p:nvSpPr>
-          <p:cNvPr id="34" name="Text 26"/>
-          <p:cNvSpPr/>
-          <p:nvPr/>
-        </p:nvSpPr>
-        <p:spPr>
-          <a:xfrm>
-            <a:off x="7269480" y="5120640"/>
-            <a:ext cx="4069080" cy="640080"/>
-          </a:xfrm>
-          <a:prstGeom prst="rect">
-            <a:avLst/>
-          </a:prstGeom>
-          <a:noFill/>
-          <a:ln/>
-        </p:spPr>
-        <p:txBody>
-          <a:bodyPr wrap="square" lIns="0" tIns="0" rIns="0" bIns="0" rtlCol="0" anchor="ctr"/>
-          <a:lstStyle/>
-          <a:p>
-            <a:pPr marL="0" indent="0">
+            <a:pPr indent="0" marL="0">
               <a:lnSpc>
                 <a:spcPct val="100000"/>
               </a:lnSpc>
@@ -6777,7 +7051,6 @@
         <a:solidFill>
           <a:srgbClr val="FFFFFF"/>
         </a:solidFill>
-        <a:effectLst/>
       </p:bgPr>
     </p:bg>
     <p:spTree>
@@ -6815,7 +7088,7 @@
           <a:bodyPr wrap="square" rtlCol="0" anchor="ctr"/>
           <a:lstStyle/>
           <a:p>
-            <a:pPr marL="0" indent="0" algn="l">
+            <a:pPr algn="l" indent="0" marL="0">
               <a:buNone/>
             </a:pPr>
             <a:r>
@@ -6854,7 +7127,7 @@
           <a:bodyPr wrap="square" lIns="0" tIns="0" rIns="0" bIns="0" rtlCol="0" anchor="ctr"/>
           <a:lstStyle/>
           <a:p>
-            <a:pPr marL="0" indent="0">
+            <a:pPr indent="0" marL="0">
               <a:buNone/>
             </a:pPr>
             <a:r>
@@ -6893,7 +7166,7 @@
           <a:bodyPr wrap="square" lIns="0" tIns="0" rIns="0" bIns="0" rtlCol="0" anchor="ctr"/>
           <a:lstStyle/>
           <a:p>
-            <a:pPr marL="0" indent="0">
+            <a:pPr indent="0" marL="0">
               <a:buNone/>
             </a:pPr>
             <a:r>
@@ -6932,7 +7205,7 @@
           </a:solidFill>
           <a:ln/>
           <a:effectLst>
-            <a:outerShdw blurRad="101600" dist="38100" dir="5400000" algn="bl" rotWithShape="0">
+            <a:outerShdw sx="100000" sy="100000" kx="0" ky="0" algn="bl" rotWithShape="0" blurRad="101600" dist="38100" dir="5400000">
               <a:srgbClr val="000000">
                 <a:alpha val="12000"/>
               </a:srgbClr>
@@ -6959,7 +7232,7 @@
           </a:solidFill>
           <a:ln/>
           <a:effectLst>
-            <a:outerShdw blurRad="101600" dist="38100" dir="5400000" algn="bl" rotWithShape="0">
+            <a:outerShdw sx="100000" sy="100000" kx="0" ky="0" algn="bl" rotWithShape="0" blurRad="101600" dist="38100" dir="5400000">
               <a:srgbClr val="000000">
                 <a:alpha val="12000"/>
               </a:srgbClr>
@@ -6969,14 +7242,14 @@
       </p:sp>
       <p:pic>
         <p:nvPicPr>
-          <p:cNvPr id="7" name="Image 0" descr="preencoded.png"/>
+          <p:cNvPr id="7" name="Image 0" descr="preencoded.png">    </p:cNvPr>
           <p:cNvPicPr>
             <a:picLocks noChangeAspect="1"/>
           </p:cNvPicPr>
           <p:nvPr/>
         </p:nvPicPr>
         <p:blipFill>
-          <a:blip r:embed="rId3"/>
+          <a:blip r:embed="rId1"/>
           <a:stretch>
             <a:fillRect/>
           </a:stretch>
@@ -7012,7 +7285,7 @@
           <a:bodyPr wrap="square" lIns="0" tIns="0" rIns="0" bIns="0" rtlCol="0" anchor="ctr"/>
           <a:lstStyle/>
           <a:p>
-            <a:pPr marL="0" indent="0">
+            <a:pPr indent="0" marL="0">
               <a:buNone/>
             </a:pPr>
             <a:r>
@@ -7157,7 +7430,7 @@
           </a:solidFill>
           <a:ln/>
           <a:effectLst>
-            <a:outerShdw blurRad="101600" dist="38100" dir="5400000" algn="bl" rotWithShape="0">
+            <a:outerShdw sx="100000" sy="100000" kx="0" ky="0" algn="bl" rotWithShape="0" blurRad="101600" dist="38100" dir="5400000">
               <a:srgbClr val="000000">
                 <a:alpha val="12000"/>
               </a:srgbClr>
@@ -7184,7 +7457,7 @@
           </a:solidFill>
           <a:ln/>
           <a:effectLst>
-            <a:outerShdw blurRad="101600" dist="38100" dir="5400000" algn="bl" rotWithShape="0">
+            <a:outerShdw sx="100000" sy="100000" kx="0" ky="0" algn="bl" rotWithShape="0" blurRad="101600" dist="38100" dir="5400000">
               <a:srgbClr val="000000">
                 <a:alpha val="12000"/>
               </a:srgbClr>
@@ -7194,14 +7467,14 @@
       </p:sp>
       <p:pic>
         <p:nvPicPr>
-          <p:cNvPr id="12" name="Image 1" descr="preencoded.png"/>
+          <p:cNvPr id="12" name="Image 1" descr="preencoded.png">    </p:cNvPr>
           <p:cNvPicPr>
             <a:picLocks noChangeAspect="1"/>
           </p:cNvPicPr>
           <p:nvPr/>
         </p:nvPicPr>
         <p:blipFill>
-          <a:blip r:embed="rId4"/>
+          <a:blip r:embed="rId2"/>
           <a:stretch>
             <a:fillRect/>
           </a:stretch>
@@ -7237,7 +7510,7 @@
           <a:bodyPr wrap="square" lIns="0" tIns="0" rIns="0" bIns="0" rtlCol="0" anchor="ctr"/>
           <a:lstStyle/>
           <a:p>
-            <a:pPr marL="0" indent="0">
+            <a:pPr indent="0" marL="0">
               <a:buNone/>
             </a:pPr>
             <a:r>
@@ -7377,7 +7650,6 @@
         <a:solidFill>
           <a:srgbClr val="FFFFFF"/>
         </a:solidFill>
-        <a:effectLst/>
       </p:bgPr>
     </p:bg>
     <p:spTree>
@@ -7415,7 +7687,7 @@
           <a:bodyPr wrap="square" rtlCol="0" anchor="ctr"/>
           <a:lstStyle/>
           <a:p>
-            <a:pPr marL="0" indent="0" algn="l">
+            <a:pPr algn="l" indent="0" marL="0">
               <a:buNone/>
             </a:pPr>
             <a:r>
@@ -7454,7 +7726,7 @@
           <a:bodyPr wrap="square" lIns="0" tIns="0" rIns="0" bIns="0" rtlCol="0" anchor="ctr"/>
           <a:lstStyle/>
           <a:p>
-            <a:pPr marL="0" indent="0">
+            <a:pPr indent="0" marL="0">
               <a:buNone/>
             </a:pPr>
             <a:r>
@@ -7493,7 +7765,7 @@
           <a:bodyPr wrap="square" lIns="0" tIns="0" rIns="0" bIns="0" rtlCol="0" anchor="ctr"/>
           <a:lstStyle/>
           <a:p>
-            <a:pPr marL="0" indent="0">
+            <a:pPr indent="0" marL="0">
               <a:buNone/>
             </a:pPr>
             <a:r>
@@ -7532,7 +7804,7 @@
           </a:solidFill>
           <a:ln/>
           <a:effectLst>
-            <a:outerShdw blurRad="101600" dist="38100" dir="5400000" algn="bl" rotWithShape="0">
+            <a:outerShdw sx="100000" sy="100000" kx="0" ky="0" algn="bl" rotWithShape="0" blurRad="101600" dist="38100" dir="5400000">
               <a:srgbClr val="000000">
                 <a:alpha val="12000"/>
               </a:srgbClr>
@@ -7559,7 +7831,7 @@
           </a:solidFill>
           <a:ln/>
           <a:effectLst>
-            <a:outerShdw blurRad="101600" dist="38100" dir="5400000" algn="bl" rotWithShape="0">
+            <a:outerShdw sx="100000" sy="100000" kx="0" ky="0" algn="bl" rotWithShape="0" blurRad="101600" dist="38100" dir="5400000">
               <a:srgbClr val="000000">
                 <a:alpha val="12000"/>
               </a:srgbClr>
@@ -7569,14 +7841,14 @@
       </p:sp>
       <p:pic>
         <p:nvPicPr>
-          <p:cNvPr id="7" name="Image 0" descr="preencoded.png"/>
+          <p:cNvPr id="7" name="Image 0" descr="preencoded.png">    </p:cNvPr>
           <p:cNvPicPr>
             <a:picLocks noChangeAspect="1"/>
           </p:cNvPicPr>
           <p:nvPr/>
         </p:nvPicPr>
         <p:blipFill>
-          <a:blip r:embed="rId3"/>
+          <a:blip r:embed="rId1"/>
           <a:stretch>
             <a:fillRect/>
           </a:stretch>
@@ -7612,7 +7884,7 @@
           <a:bodyPr wrap="square" lIns="0" tIns="0" rIns="0" bIns="0" rtlCol="0" anchor="ctr"/>
           <a:lstStyle/>
           <a:p>
-            <a:pPr marL="0" indent="0">
+            <a:pPr indent="0" marL="0">
               <a:buNone/>
             </a:pPr>
             <a:r>
@@ -7757,7 +8029,7 @@
           </a:solidFill>
           <a:ln/>
           <a:effectLst>
-            <a:outerShdw blurRad="101600" dist="38100" dir="5400000" algn="bl" rotWithShape="0">
+            <a:outerShdw sx="100000" sy="100000" kx="0" ky="0" algn="bl" rotWithShape="0" blurRad="101600" dist="38100" dir="5400000">
               <a:srgbClr val="000000">
                 <a:alpha val="12000"/>
               </a:srgbClr>
@@ -7784,7 +8056,7 @@
           </a:solidFill>
           <a:ln/>
           <a:effectLst>
-            <a:outerShdw blurRad="101600" dist="38100" dir="5400000" algn="bl" rotWithShape="0">
+            <a:outerShdw sx="100000" sy="100000" kx="0" ky="0" algn="bl" rotWithShape="0" blurRad="101600" dist="38100" dir="5400000">
               <a:srgbClr val="000000">
                 <a:alpha val="12000"/>
               </a:srgbClr>
@@ -7794,14 +8066,14 @@
       </p:sp>
       <p:pic>
         <p:nvPicPr>
-          <p:cNvPr id="12" name="Image 1" descr="preencoded.png"/>
+          <p:cNvPr id="12" name="Image 1" descr="preencoded.png">    </p:cNvPr>
           <p:cNvPicPr>
             <a:picLocks noChangeAspect="1"/>
           </p:cNvPicPr>
           <p:nvPr/>
         </p:nvPicPr>
         <p:blipFill>
-          <a:blip r:embed="rId4"/>
+          <a:blip r:embed="rId2"/>
           <a:stretch>
             <a:fillRect/>
           </a:stretch>
@@ -7837,7 +8109,7 @@
           <a:bodyPr wrap="square" lIns="0" tIns="0" rIns="0" bIns="0" rtlCol="0" anchor="ctr"/>
           <a:lstStyle/>
           <a:p>
-            <a:pPr marL="0" indent="0">
+            <a:pPr indent="0" marL="0">
               <a:buNone/>
             </a:pPr>
             <a:r>
@@ -7977,7 +8249,6 @@
         <a:solidFill>
           <a:srgbClr val="FFFFFF"/>
         </a:solidFill>
-        <a:effectLst/>
       </p:bgPr>
     </p:bg>
     <p:spTree>
@@ -8015,7 +8286,7 @@
           <a:bodyPr wrap="square" rtlCol="0" anchor="ctr"/>
           <a:lstStyle/>
           <a:p>
-            <a:pPr marL="0" indent="0" algn="l">
+            <a:pPr algn="l" indent="0" marL="0">
               <a:buNone/>
             </a:pPr>
             <a:r>
@@ -8054,7 +8325,7 @@
           <a:bodyPr wrap="square" lIns="0" tIns="0" rIns="0" bIns="0" rtlCol="0" anchor="ctr"/>
           <a:lstStyle/>
           <a:p>
-            <a:pPr marL="0" indent="0">
+            <a:pPr indent="0" marL="0">
               <a:buNone/>
             </a:pPr>
             <a:r>
@@ -8093,7 +8364,7 @@
           <a:bodyPr wrap="square" lIns="0" tIns="0" rIns="0" bIns="0" rtlCol="0" anchor="ctr"/>
           <a:lstStyle/>
           <a:p>
-            <a:pPr marL="0" indent="0">
+            <a:pPr indent="0" marL="0">
               <a:buNone/>
             </a:pPr>
             <a:r>
@@ -8105,7 +8376,7 @@
                 <a:ea typeface="Calibri" pitchFamily="34" charset="-122"/>
                 <a:cs typeface="Calibri" pitchFamily="34" charset="-120"/>
               </a:rPr>
-              <a:t>Real run on the provided catalog (698 songs; 30 processed this run)</a:t>
+              <a:t>Real run on the provided catalog (698 songs; ISRC via Spotify)</a:t>
             </a:r>
             <a:endParaRPr lang="en-US" sz="1400" dirty="0"/>
           </a:p>
@@ -8127,41 +8398,17 @@
         </p:nvGraphicFramePr>
         <p:xfrm>
           <a:off x="640080" y="1783080"/>
-          <a:ext cx="6858000" cy="3456432"/>
+          <a:ext cx="6858000" cy="914400"/>
         </p:xfrm>
         <a:graphic>
           <a:graphicData uri="http://schemas.openxmlformats.org/drawingml/2006/table">
             <a:tbl>
               <a:tblPr/>
               <a:tblGrid>
-                <a:gridCol w="3017520">
-                  <a:extLst>
-                    <a:ext uri="{9D8B030D-6E8A-4147-A177-3AD203B41FA5}">
-                      <a16:colId xmlns:a16="http://schemas.microsoft.com/office/drawing/2014/main" val="20000"/>
-                    </a:ext>
-                  </a:extLst>
-                </a:gridCol>
-                <a:gridCol w="1737360">
-                  <a:extLst>
-                    <a:ext uri="{9D8B030D-6E8A-4147-A177-3AD203B41FA5}">
-                      <a16:colId xmlns:a16="http://schemas.microsoft.com/office/drawing/2014/main" val="20001"/>
-                    </a:ext>
-                  </a:extLst>
-                </a:gridCol>
-                <a:gridCol w="1005840">
-                  <a:extLst>
-                    <a:ext uri="{9D8B030D-6E8A-4147-A177-3AD203B41FA5}">
-                      <a16:colId xmlns:a16="http://schemas.microsoft.com/office/drawing/2014/main" val="20002"/>
-                    </a:ext>
-                  </a:extLst>
-                </a:gridCol>
-                <a:gridCol w="1097280">
-                  <a:extLst>
-                    <a:ext uri="{9D8B030D-6E8A-4147-A177-3AD203B41FA5}">
-                      <a16:colId xmlns:a16="http://schemas.microsoft.com/office/drawing/2014/main" val="20003"/>
-                    </a:ext>
-                  </a:extLst>
-                </a:gridCol>
+                <a:gridCol w="3017520"/>
+                <a:gridCol w="1737360"/>
+                <a:gridCol w="1005840"/>
+                <a:gridCol w="1097280"/>
               </a:tblGrid>
               <a:tr h="384048">
                 <a:tc>
@@ -8169,7 +8416,7 @@
                     <a:bodyPr/>
                     <a:lstStyle/>
                     <a:p>
-                      <a:pPr marL="0" indent="0" algn="l">
+                      <a:pPr algn="l" indent="0" marL="0">
                         <a:buNone/>
                       </a:pPr>
                       <a:r>
@@ -8237,7 +8484,7 @@
                     <a:bodyPr/>
                     <a:lstStyle/>
                     <a:p>
-                      <a:pPr marL="0" indent="0" algn="l">
+                      <a:pPr algn="l" indent="0" marL="0">
                         <a:buNone/>
                       </a:pPr>
                       <a:r>
@@ -8305,7 +8552,7 @@
                     <a:bodyPr/>
                     <a:lstStyle/>
                     <a:p>
-                      <a:pPr marL="0" indent="0" algn="ctr">
+                      <a:pPr algn="ctr" indent="0" marL="0">
                         <a:buNone/>
                       </a:pPr>
                       <a:r>
@@ -8373,7 +8620,7 @@
                     <a:bodyPr/>
                     <a:lstStyle/>
                     <a:p>
-                      <a:pPr marL="0" indent="0" algn="ctr">
+                      <a:pPr algn="ctr" indent="0" marL="0">
                         <a:buNone/>
                       </a:pPr>
                       <a:r>
@@ -8436,11 +8683,6 @@
                     </a:solidFill>
                   </a:tcPr>
                 </a:tc>
-                <a:extLst>
-                  <a:ext uri="{0D108BD9-81ED-4DB2-BD59-A6C34878D82A}">
-                    <a16:rowId xmlns:a16="http://schemas.microsoft.com/office/drawing/2014/main" val="10000"/>
-                  </a:ext>
-                </a:extLst>
               </a:tr>
               <a:tr h="384048">
                 <a:tc>
@@ -8448,7 +8690,1103 @@
                     <a:bodyPr/>
                     <a:lstStyle/>
                     <a:p>
-                      <a:pPr marL="0" indent="0">
+                      <a:pPr indent="0" marL="0">
+                        <a:buNone/>
+                      </a:pPr>
+                      <a:r>
+                        <a:rPr lang="en-US" sz="1200" dirty="0">
+                          <a:solidFill>
+                            <a:srgbClr val="1F2430"/>
+                          </a:solidFill>
+                          <a:latin typeface="Calibri" pitchFamily="34" charset="0"/>
+                          <a:ea typeface="Calibri" pitchFamily="34" charset="-122"/>
+                          <a:cs typeface="Calibri" pitchFamily="34" charset="-120"/>
+                        </a:rPr>
+                        <a:t>Bahasa Cinta</a:t>
+                      </a:r>
+                      <a:endParaRPr lang="en-US" sz="1200" dirty="0">
+                        <a:latin typeface="Calibri" charset="0"/>
+                        <a:ea typeface="Calibri" charset="0"/>
+                        <a:cs typeface="Calibri" charset="0"/>
+                      </a:endParaRPr>
+                    </a:p>
+                  </a:txBody>
+                  <a:tcPr marL="38100" marR="38100" marT="38100" marB="38100" anchor="ctr">
+                    <a:lnL w="12700" cap="flat" cmpd="sng" algn="ctr">
+                      <a:solidFill>
+                        <a:srgbClr val="E2E6EC"/>
+                      </a:solidFill>
+                      <a:prstDash val="solid"/>
+                      <a:round/>
+                      <a:headEnd type="none" w="med" len="med"/>
+                      <a:tailEnd type="none" w="med" len="med"/>
+                    </a:lnL>
+                    <a:lnR w="12700" cap="flat" cmpd="sng" algn="ctr">
+                      <a:solidFill>
+                        <a:srgbClr val="E2E6EC"/>
+                      </a:solidFill>
+                      <a:prstDash val="solid"/>
+                      <a:round/>
+                      <a:headEnd type="none" w="med" len="med"/>
+                      <a:tailEnd type="none" w="med" len="med"/>
+                    </a:lnR>
+                    <a:lnT w="12700" cap="flat" cmpd="sng" algn="ctr">
+                      <a:solidFill>
+                        <a:srgbClr val="E2E6EC"/>
+                      </a:solidFill>
+                      <a:prstDash val="solid"/>
+                      <a:round/>
+                      <a:headEnd type="none" w="med" len="med"/>
+                      <a:tailEnd type="none" w="med" len="med"/>
+                    </a:lnT>
+                    <a:lnB w="12700" cap="flat" cmpd="sng" algn="ctr">
+                      <a:solidFill>
+                        <a:srgbClr val="E2E6EC"/>
+                      </a:solidFill>
+                      <a:prstDash val="solid"/>
+                      <a:round/>
+                      <a:headEnd type="none" w="med" len="med"/>
+                      <a:tailEnd type="none" w="med" len="med"/>
+                    </a:lnB>
+                    <a:solidFill>
+                      <a:srgbClr val="FFFFFF"/>
+                    </a:solidFill>
+                  </a:tcPr>
+                </a:tc>
+                <a:tc>
+                  <a:txBody>
+                    <a:bodyPr/>
+                    <a:lstStyle/>
+                    <a:p>
+                      <a:pPr indent="0" marL="0">
+                        <a:buNone/>
+                      </a:pPr>
+                      <a:r>
+                        <a:rPr lang="en-US" sz="1200" dirty="0">
+                          <a:solidFill>
+                            <a:srgbClr val="64748B"/>
+                          </a:solidFill>
+                          <a:latin typeface="Calibri" pitchFamily="34" charset="0"/>
+                          <a:ea typeface="Calibri" pitchFamily="34" charset="-122"/>
+                          <a:cs typeface="Calibri" pitchFamily="34" charset="-120"/>
+                        </a:rPr>
+                        <a:t>—</a:t>
+                      </a:r>
+                      <a:endParaRPr lang="en-US" sz="1200" dirty="0">
+                        <a:latin typeface="Calibri" charset="0"/>
+                        <a:ea typeface="Calibri" charset="0"/>
+                        <a:cs typeface="Calibri" charset="0"/>
+                      </a:endParaRPr>
+                    </a:p>
+                  </a:txBody>
+                  <a:tcPr marL="38100" marR="38100" marT="38100" marB="38100" anchor="ctr">
+                    <a:lnL w="12700" cap="flat" cmpd="sng" algn="ctr">
+                      <a:solidFill>
+                        <a:srgbClr val="E2E6EC"/>
+                      </a:solidFill>
+                      <a:prstDash val="solid"/>
+                      <a:round/>
+                      <a:headEnd type="none" w="med" len="med"/>
+                      <a:tailEnd type="none" w="med" len="med"/>
+                    </a:lnL>
+                    <a:lnR w="12700" cap="flat" cmpd="sng" algn="ctr">
+                      <a:solidFill>
+                        <a:srgbClr val="E2E6EC"/>
+                      </a:solidFill>
+                      <a:prstDash val="solid"/>
+                      <a:round/>
+                      <a:headEnd type="none" w="med" len="med"/>
+                      <a:tailEnd type="none" w="med" len="med"/>
+                    </a:lnR>
+                    <a:lnT w="12700" cap="flat" cmpd="sng" algn="ctr">
+                      <a:solidFill>
+                        <a:srgbClr val="E2E6EC"/>
+                      </a:solidFill>
+                      <a:prstDash val="solid"/>
+                      <a:round/>
+                      <a:headEnd type="none" w="med" len="med"/>
+                      <a:tailEnd type="none" w="med" len="med"/>
+                    </a:lnT>
+                    <a:lnB w="12700" cap="flat" cmpd="sng" algn="ctr">
+                      <a:solidFill>
+                        <a:srgbClr val="E2E6EC"/>
+                      </a:solidFill>
+                      <a:prstDash val="solid"/>
+                      <a:round/>
+                      <a:headEnd type="none" w="med" len="med"/>
+                      <a:tailEnd type="none" w="med" len="med"/>
+                    </a:lnB>
+                    <a:solidFill>
+                      <a:srgbClr val="FFFFFF"/>
+                    </a:solidFill>
+                  </a:tcPr>
+                </a:tc>
+                <a:tc>
+                  <a:txBody>
+                    <a:bodyPr/>
+                    <a:lstStyle/>
+                    <a:p>
+                      <a:pPr algn="ctr" indent="0" marL="0">
+                        <a:buNone/>
+                      </a:pPr>
+                      <a:r>
+                        <a:rPr lang="en-US" sz="1200" b="1" dirty="0">
+                          <a:solidFill>
+                            <a:srgbClr val="12B5A5"/>
+                          </a:solidFill>
+                          <a:latin typeface="Calibri" pitchFamily="34" charset="0"/>
+                          <a:ea typeface="Calibri" pitchFamily="34" charset="-122"/>
+                          <a:cs typeface="Calibri" pitchFamily="34" charset="-120"/>
+                        </a:rPr>
+                        <a:t>10</a:t>
+                      </a:r>
+                      <a:endParaRPr lang="en-US" sz="1200" dirty="0">
+                        <a:latin typeface="Calibri" charset="0"/>
+                        <a:ea typeface="Calibri" charset="0"/>
+                        <a:cs typeface="Calibri" charset="0"/>
+                      </a:endParaRPr>
+                    </a:p>
+                  </a:txBody>
+                  <a:tcPr marL="38100" marR="38100" marT="38100" marB="38100" anchor="ctr">
+                    <a:lnL w="12700" cap="flat" cmpd="sng" algn="ctr">
+                      <a:solidFill>
+                        <a:srgbClr val="E2E6EC"/>
+                      </a:solidFill>
+                      <a:prstDash val="solid"/>
+                      <a:round/>
+                      <a:headEnd type="none" w="med" len="med"/>
+                      <a:tailEnd type="none" w="med" len="med"/>
+                    </a:lnL>
+                    <a:lnR w="12700" cap="flat" cmpd="sng" algn="ctr">
+                      <a:solidFill>
+                        <a:srgbClr val="E2E6EC"/>
+                      </a:solidFill>
+                      <a:prstDash val="solid"/>
+                      <a:round/>
+                      <a:headEnd type="none" w="med" len="med"/>
+                      <a:tailEnd type="none" w="med" len="med"/>
+                    </a:lnR>
+                    <a:lnT w="12700" cap="flat" cmpd="sng" algn="ctr">
+                      <a:solidFill>
+                        <a:srgbClr val="E2E6EC"/>
+                      </a:solidFill>
+                      <a:prstDash val="solid"/>
+                      <a:round/>
+                      <a:headEnd type="none" w="med" len="med"/>
+                      <a:tailEnd type="none" w="med" len="med"/>
+                    </a:lnT>
+                    <a:lnB w="12700" cap="flat" cmpd="sng" algn="ctr">
+                      <a:solidFill>
+                        <a:srgbClr val="E2E6EC"/>
+                      </a:solidFill>
+                      <a:prstDash val="solid"/>
+                      <a:round/>
+                      <a:headEnd type="none" w="med" len="med"/>
+                      <a:tailEnd type="none" w="med" len="med"/>
+                    </a:lnB>
+                    <a:solidFill>
+                      <a:srgbClr val="FFFFFF"/>
+                    </a:solidFill>
+                  </a:tcPr>
+                </a:tc>
+                <a:tc>
+                  <a:txBody>
+                    <a:bodyPr/>
+                    <a:lstStyle/>
+                    <a:p>
+                      <a:pPr algn="ctr" indent="0" marL="0">
+                        <a:buNone/>
+                      </a:pPr>
+                      <a:r>
+                        <a:rPr lang="en-US" sz="1200" b="1" dirty="0">
+                          <a:solidFill>
+                            <a:srgbClr val="E11D2A"/>
+                          </a:solidFill>
+                          <a:latin typeface="Calibri" pitchFamily="34" charset="0"/>
+                          <a:ea typeface="Calibri" pitchFamily="34" charset="-122"/>
+                          <a:cs typeface="Calibri" pitchFamily="34" charset="-120"/>
+                        </a:rPr>
+                        <a:t>50</a:t>
+                      </a:r>
+                      <a:endParaRPr lang="en-US" sz="1200" dirty="0">
+                        <a:latin typeface="Calibri" charset="0"/>
+                        <a:ea typeface="Calibri" charset="0"/>
+                        <a:cs typeface="Calibri" charset="0"/>
+                      </a:endParaRPr>
+                    </a:p>
+                  </a:txBody>
+                  <a:tcPr marL="38100" marR="38100" marT="38100" marB="38100" anchor="ctr">
+                    <a:lnL w="12700" cap="flat" cmpd="sng" algn="ctr">
+                      <a:solidFill>
+                        <a:srgbClr val="E2E6EC"/>
+                      </a:solidFill>
+                      <a:prstDash val="solid"/>
+                      <a:round/>
+                      <a:headEnd type="none" w="med" len="med"/>
+                      <a:tailEnd type="none" w="med" len="med"/>
+                    </a:lnL>
+                    <a:lnR w="12700" cap="flat" cmpd="sng" algn="ctr">
+                      <a:solidFill>
+                        <a:srgbClr val="E2E6EC"/>
+                      </a:solidFill>
+                      <a:prstDash val="solid"/>
+                      <a:round/>
+                      <a:headEnd type="none" w="med" len="med"/>
+                      <a:tailEnd type="none" w="med" len="med"/>
+                    </a:lnR>
+                    <a:lnT w="12700" cap="flat" cmpd="sng" algn="ctr">
+                      <a:solidFill>
+                        <a:srgbClr val="E2E6EC"/>
+                      </a:solidFill>
+                      <a:prstDash val="solid"/>
+                      <a:round/>
+                      <a:headEnd type="none" w="med" len="med"/>
+                      <a:tailEnd type="none" w="med" len="med"/>
+                    </a:lnT>
+                    <a:lnB w="12700" cap="flat" cmpd="sng" algn="ctr">
+                      <a:solidFill>
+                        <a:srgbClr val="E2E6EC"/>
+                      </a:solidFill>
+                      <a:prstDash val="solid"/>
+                      <a:round/>
+                      <a:headEnd type="none" w="med" len="med"/>
+                      <a:tailEnd type="none" w="med" len="med"/>
+                    </a:lnB>
+                    <a:solidFill>
+                      <a:srgbClr val="FFFFFF"/>
+                    </a:solidFill>
+                  </a:tcPr>
+                </a:tc>
+              </a:tr>
+              <a:tr h="384048">
+                <a:tc>
+                  <a:txBody>
+                    <a:bodyPr/>
+                    <a:lstStyle/>
+                    <a:p>
+                      <a:pPr indent="0" marL="0">
+                        <a:buNone/>
+                      </a:pPr>
+                      <a:r>
+                        <a:rPr lang="en-US" sz="1200" dirty="0">
+                          <a:solidFill>
+                            <a:srgbClr val="1F2430"/>
+                          </a:solidFill>
+                          <a:latin typeface="Calibri" pitchFamily="34" charset="0"/>
+                          <a:ea typeface="Calibri" pitchFamily="34" charset="-122"/>
+                          <a:cs typeface="Calibri" pitchFamily="34" charset="-120"/>
+                        </a:rPr>
+                        <a:t>Rindu Mama</a:t>
+                      </a:r>
+                      <a:endParaRPr lang="en-US" sz="1200" dirty="0">
+                        <a:latin typeface="Calibri" charset="0"/>
+                        <a:ea typeface="Calibri" charset="0"/>
+                        <a:cs typeface="Calibri" charset="0"/>
+                      </a:endParaRPr>
+                    </a:p>
+                  </a:txBody>
+                  <a:tcPr marL="38100" marR="38100" marT="38100" marB="38100" anchor="ctr">
+                    <a:lnL w="12700" cap="flat" cmpd="sng" algn="ctr">
+                      <a:solidFill>
+                        <a:srgbClr val="E2E6EC"/>
+                      </a:solidFill>
+                      <a:prstDash val="solid"/>
+                      <a:round/>
+                      <a:headEnd type="none" w="med" len="med"/>
+                      <a:tailEnd type="none" w="med" len="med"/>
+                    </a:lnL>
+                    <a:lnR w="12700" cap="flat" cmpd="sng" algn="ctr">
+                      <a:solidFill>
+                        <a:srgbClr val="E2E6EC"/>
+                      </a:solidFill>
+                      <a:prstDash val="solid"/>
+                      <a:round/>
+                      <a:headEnd type="none" w="med" len="med"/>
+                      <a:tailEnd type="none" w="med" len="med"/>
+                    </a:lnR>
+                    <a:lnT w="12700" cap="flat" cmpd="sng" algn="ctr">
+                      <a:solidFill>
+                        <a:srgbClr val="E2E6EC"/>
+                      </a:solidFill>
+                      <a:prstDash val="solid"/>
+                      <a:round/>
+                      <a:headEnd type="none" w="med" len="med"/>
+                      <a:tailEnd type="none" w="med" len="med"/>
+                    </a:lnT>
+                    <a:lnB w="12700" cap="flat" cmpd="sng" algn="ctr">
+                      <a:solidFill>
+                        <a:srgbClr val="E2E6EC"/>
+                      </a:solidFill>
+                      <a:prstDash val="solid"/>
+                      <a:round/>
+                      <a:headEnd type="none" w="med" len="med"/>
+                      <a:tailEnd type="none" w="med" len="med"/>
+                    </a:lnB>
+                    <a:solidFill>
+                      <a:srgbClr val="F4F6F8"/>
+                    </a:solidFill>
+                  </a:tcPr>
+                </a:tc>
+                <a:tc>
+                  <a:txBody>
+                    <a:bodyPr/>
+                    <a:lstStyle/>
+                    <a:p>
+                      <a:pPr indent="0" marL="0">
+                        <a:buNone/>
+                      </a:pPr>
+                      <a:r>
+                        <a:rPr lang="en-US" sz="1200" dirty="0">
+                          <a:solidFill>
+                            <a:srgbClr val="64748B"/>
+                          </a:solidFill>
+                          <a:latin typeface="Calibri" pitchFamily="34" charset="0"/>
+                          <a:ea typeface="Calibri" pitchFamily="34" charset="-122"/>
+                          <a:cs typeface="Calibri" pitchFamily="34" charset="-120"/>
+                        </a:rPr>
+                        <a:t>—</a:t>
+                      </a:r>
+                      <a:endParaRPr lang="en-US" sz="1200" dirty="0">
+                        <a:latin typeface="Calibri" charset="0"/>
+                        <a:ea typeface="Calibri" charset="0"/>
+                        <a:cs typeface="Calibri" charset="0"/>
+                      </a:endParaRPr>
+                    </a:p>
+                  </a:txBody>
+                  <a:tcPr marL="38100" marR="38100" marT="38100" marB="38100" anchor="ctr">
+                    <a:lnL w="12700" cap="flat" cmpd="sng" algn="ctr">
+                      <a:solidFill>
+                        <a:srgbClr val="E2E6EC"/>
+                      </a:solidFill>
+                      <a:prstDash val="solid"/>
+                      <a:round/>
+                      <a:headEnd type="none" w="med" len="med"/>
+                      <a:tailEnd type="none" w="med" len="med"/>
+                    </a:lnL>
+                    <a:lnR w="12700" cap="flat" cmpd="sng" algn="ctr">
+                      <a:solidFill>
+                        <a:srgbClr val="E2E6EC"/>
+                      </a:solidFill>
+                      <a:prstDash val="solid"/>
+                      <a:round/>
+                      <a:headEnd type="none" w="med" len="med"/>
+                      <a:tailEnd type="none" w="med" len="med"/>
+                    </a:lnR>
+                    <a:lnT w="12700" cap="flat" cmpd="sng" algn="ctr">
+                      <a:solidFill>
+                        <a:srgbClr val="E2E6EC"/>
+                      </a:solidFill>
+                      <a:prstDash val="solid"/>
+                      <a:round/>
+                      <a:headEnd type="none" w="med" len="med"/>
+                      <a:tailEnd type="none" w="med" len="med"/>
+                    </a:lnT>
+                    <a:lnB w="12700" cap="flat" cmpd="sng" algn="ctr">
+                      <a:solidFill>
+                        <a:srgbClr val="E2E6EC"/>
+                      </a:solidFill>
+                      <a:prstDash val="solid"/>
+                      <a:round/>
+                      <a:headEnd type="none" w="med" len="med"/>
+                      <a:tailEnd type="none" w="med" len="med"/>
+                    </a:lnB>
+                    <a:solidFill>
+                      <a:srgbClr val="F4F6F8"/>
+                    </a:solidFill>
+                  </a:tcPr>
+                </a:tc>
+                <a:tc>
+                  <a:txBody>
+                    <a:bodyPr/>
+                    <a:lstStyle/>
+                    <a:p>
+                      <a:pPr algn="ctr" indent="0" marL="0">
+                        <a:buNone/>
+                      </a:pPr>
+                      <a:r>
+                        <a:rPr lang="en-US" sz="1200" b="1" dirty="0">
+                          <a:solidFill>
+                            <a:srgbClr val="12B5A5"/>
+                          </a:solidFill>
+                          <a:latin typeface="Calibri" pitchFamily="34" charset="0"/>
+                          <a:ea typeface="Calibri" pitchFamily="34" charset="-122"/>
+                          <a:cs typeface="Calibri" pitchFamily="34" charset="-120"/>
+                        </a:rPr>
+                        <a:t>10</a:t>
+                      </a:r>
+                      <a:endParaRPr lang="en-US" sz="1200" dirty="0">
+                        <a:latin typeface="Calibri" charset="0"/>
+                        <a:ea typeface="Calibri" charset="0"/>
+                        <a:cs typeface="Calibri" charset="0"/>
+                      </a:endParaRPr>
+                    </a:p>
+                  </a:txBody>
+                  <a:tcPr marL="38100" marR="38100" marT="38100" marB="38100" anchor="ctr">
+                    <a:lnL w="12700" cap="flat" cmpd="sng" algn="ctr">
+                      <a:solidFill>
+                        <a:srgbClr val="E2E6EC"/>
+                      </a:solidFill>
+                      <a:prstDash val="solid"/>
+                      <a:round/>
+                      <a:headEnd type="none" w="med" len="med"/>
+                      <a:tailEnd type="none" w="med" len="med"/>
+                    </a:lnL>
+                    <a:lnR w="12700" cap="flat" cmpd="sng" algn="ctr">
+                      <a:solidFill>
+                        <a:srgbClr val="E2E6EC"/>
+                      </a:solidFill>
+                      <a:prstDash val="solid"/>
+                      <a:round/>
+                      <a:headEnd type="none" w="med" len="med"/>
+                      <a:tailEnd type="none" w="med" len="med"/>
+                    </a:lnR>
+                    <a:lnT w="12700" cap="flat" cmpd="sng" algn="ctr">
+                      <a:solidFill>
+                        <a:srgbClr val="E2E6EC"/>
+                      </a:solidFill>
+                      <a:prstDash val="solid"/>
+                      <a:round/>
+                      <a:headEnd type="none" w="med" len="med"/>
+                      <a:tailEnd type="none" w="med" len="med"/>
+                    </a:lnT>
+                    <a:lnB w="12700" cap="flat" cmpd="sng" algn="ctr">
+                      <a:solidFill>
+                        <a:srgbClr val="E2E6EC"/>
+                      </a:solidFill>
+                      <a:prstDash val="solid"/>
+                      <a:round/>
+                      <a:headEnd type="none" w="med" len="med"/>
+                      <a:tailEnd type="none" w="med" len="med"/>
+                    </a:lnB>
+                    <a:solidFill>
+                      <a:srgbClr val="F4F6F8"/>
+                    </a:solidFill>
+                  </a:tcPr>
+                </a:tc>
+                <a:tc>
+                  <a:txBody>
+                    <a:bodyPr/>
+                    <a:lstStyle/>
+                    <a:p>
+                      <a:pPr algn="ctr" indent="0" marL="0">
+                        <a:buNone/>
+                      </a:pPr>
+                      <a:r>
+                        <a:rPr lang="en-US" sz="1200" b="1" dirty="0">
+                          <a:solidFill>
+                            <a:srgbClr val="E11D2A"/>
+                          </a:solidFill>
+                          <a:latin typeface="Calibri" pitchFamily="34" charset="0"/>
+                          <a:ea typeface="Calibri" pitchFamily="34" charset="-122"/>
+                          <a:cs typeface="Calibri" pitchFamily="34" charset="-120"/>
+                        </a:rPr>
+                        <a:t>50</a:t>
+                      </a:r>
+                      <a:endParaRPr lang="en-US" sz="1200" dirty="0">
+                        <a:latin typeface="Calibri" charset="0"/>
+                        <a:ea typeface="Calibri" charset="0"/>
+                        <a:cs typeface="Calibri" charset="0"/>
+                      </a:endParaRPr>
+                    </a:p>
+                  </a:txBody>
+                  <a:tcPr marL="38100" marR="38100" marT="38100" marB="38100" anchor="ctr">
+                    <a:lnL w="12700" cap="flat" cmpd="sng" algn="ctr">
+                      <a:solidFill>
+                        <a:srgbClr val="E2E6EC"/>
+                      </a:solidFill>
+                      <a:prstDash val="solid"/>
+                      <a:round/>
+                      <a:headEnd type="none" w="med" len="med"/>
+                      <a:tailEnd type="none" w="med" len="med"/>
+                    </a:lnL>
+                    <a:lnR w="12700" cap="flat" cmpd="sng" algn="ctr">
+                      <a:solidFill>
+                        <a:srgbClr val="E2E6EC"/>
+                      </a:solidFill>
+                      <a:prstDash val="solid"/>
+                      <a:round/>
+                      <a:headEnd type="none" w="med" len="med"/>
+                      <a:tailEnd type="none" w="med" len="med"/>
+                    </a:lnR>
+                    <a:lnT w="12700" cap="flat" cmpd="sng" algn="ctr">
+                      <a:solidFill>
+                        <a:srgbClr val="E2E6EC"/>
+                      </a:solidFill>
+                      <a:prstDash val="solid"/>
+                      <a:round/>
+                      <a:headEnd type="none" w="med" len="med"/>
+                      <a:tailEnd type="none" w="med" len="med"/>
+                    </a:lnT>
+                    <a:lnB w="12700" cap="flat" cmpd="sng" algn="ctr">
+                      <a:solidFill>
+                        <a:srgbClr val="E2E6EC"/>
+                      </a:solidFill>
+                      <a:prstDash val="solid"/>
+                      <a:round/>
+                      <a:headEnd type="none" w="med" len="med"/>
+                      <a:tailEnd type="none" w="med" len="med"/>
+                    </a:lnB>
+                    <a:solidFill>
+                      <a:srgbClr val="F4F6F8"/>
+                    </a:solidFill>
+                  </a:tcPr>
+                </a:tc>
+              </a:tr>
+              <a:tr h="384048">
+                <a:tc>
+                  <a:txBody>
+                    <a:bodyPr/>
+                    <a:lstStyle/>
+                    <a:p>
+                      <a:pPr indent="0" marL="0">
+                        <a:buNone/>
+                      </a:pPr>
+                      <a:r>
+                        <a:rPr lang="en-US" sz="1200" dirty="0">
+                          <a:solidFill>
+                            <a:srgbClr val="1F2430"/>
+                          </a:solidFill>
+                          <a:latin typeface="Calibri" pitchFamily="34" charset="0"/>
+                          <a:ea typeface="Calibri" pitchFamily="34" charset="-122"/>
+                          <a:cs typeface="Calibri" pitchFamily="34" charset="-120"/>
+                        </a:rPr>
+                        <a:t>The Guiding Lights</a:t>
+                      </a:r>
+                      <a:endParaRPr lang="en-US" sz="1200" dirty="0">
+                        <a:latin typeface="Calibri" charset="0"/>
+                        <a:ea typeface="Calibri" charset="0"/>
+                        <a:cs typeface="Calibri" charset="0"/>
+                      </a:endParaRPr>
+                    </a:p>
+                  </a:txBody>
+                  <a:tcPr marL="38100" marR="38100" marT="38100" marB="38100" anchor="ctr">
+                    <a:lnL w="12700" cap="flat" cmpd="sng" algn="ctr">
+                      <a:solidFill>
+                        <a:srgbClr val="E2E6EC"/>
+                      </a:solidFill>
+                      <a:prstDash val="solid"/>
+                      <a:round/>
+                      <a:headEnd type="none" w="med" len="med"/>
+                      <a:tailEnd type="none" w="med" len="med"/>
+                    </a:lnL>
+                    <a:lnR w="12700" cap="flat" cmpd="sng" algn="ctr">
+                      <a:solidFill>
+                        <a:srgbClr val="E2E6EC"/>
+                      </a:solidFill>
+                      <a:prstDash val="solid"/>
+                      <a:round/>
+                      <a:headEnd type="none" w="med" len="med"/>
+                      <a:tailEnd type="none" w="med" len="med"/>
+                    </a:lnR>
+                    <a:lnT w="12700" cap="flat" cmpd="sng" algn="ctr">
+                      <a:solidFill>
+                        <a:srgbClr val="E2E6EC"/>
+                      </a:solidFill>
+                      <a:prstDash val="solid"/>
+                      <a:round/>
+                      <a:headEnd type="none" w="med" len="med"/>
+                      <a:tailEnd type="none" w="med" len="med"/>
+                    </a:lnT>
+                    <a:lnB w="12700" cap="flat" cmpd="sng" algn="ctr">
+                      <a:solidFill>
+                        <a:srgbClr val="E2E6EC"/>
+                      </a:solidFill>
+                      <a:prstDash val="solid"/>
+                      <a:round/>
+                      <a:headEnd type="none" w="med" len="med"/>
+                      <a:tailEnd type="none" w="med" len="med"/>
+                    </a:lnB>
+                    <a:solidFill>
+                      <a:srgbClr val="FFFFFF"/>
+                    </a:solidFill>
+                  </a:tcPr>
+                </a:tc>
+                <a:tc>
+                  <a:txBody>
+                    <a:bodyPr/>
+                    <a:lstStyle/>
+                    <a:p>
+                      <a:pPr indent="0" marL="0">
+                        <a:buNone/>
+                      </a:pPr>
+                      <a:r>
+                        <a:rPr lang="en-US" sz="1200" dirty="0">
+                          <a:solidFill>
+                            <a:srgbClr val="64748B"/>
+                          </a:solidFill>
+                          <a:latin typeface="Calibri" pitchFamily="34" charset="0"/>
+                          <a:ea typeface="Calibri" pitchFamily="34" charset="-122"/>
+                          <a:cs typeface="Calibri" pitchFamily="34" charset="-120"/>
+                        </a:rPr>
+                        <a:t>—</a:t>
+                      </a:r>
+                      <a:endParaRPr lang="en-US" sz="1200" dirty="0">
+                        <a:latin typeface="Calibri" charset="0"/>
+                        <a:ea typeface="Calibri" charset="0"/>
+                        <a:cs typeface="Calibri" charset="0"/>
+                      </a:endParaRPr>
+                    </a:p>
+                  </a:txBody>
+                  <a:tcPr marL="38100" marR="38100" marT="38100" marB="38100" anchor="ctr">
+                    <a:lnL w="12700" cap="flat" cmpd="sng" algn="ctr">
+                      <a:solidFill>
+                        <a:srgbClr val="E2E6EC"/>
+                      </a:solidFill>
+                      <a:prstDash val="solid"/>
+                      <a:round/>
+                      <a:headEnd type="none" w="med" len="med"/>
+                      <a:tailEnd type="none" w="med" len="med"/>
+                    </a:lnL>
+                    <a:lnR w="12700" cap="flat" cmpd="sng" algn="ctr">
+                      <a:solidFill>
+                        <a:srgbClr val="E2E6EC"/>
+                      </a:solidFill>
+                      <a:prstDash val="solid"/>
+                      <a:round/>
+                      <a:headEnd type="none" w="med" len="med"/>
+                      <a:tailEnd type="none" w="med" len="med"/>
+                    </a:lnR>
+                    <a:lnT w="12700" cap="flat" cmpd="sng" algn="ctr">
+                      <a:solidFill>
+                        <a:srgbClr val="E2E6EC"/>
+                      </a:solidFill>
+                      <a:prstDash val="solid"/>
+                      <a:round/>
+                      <a:headEnd type="none" w="med" len="med"/>
+                      <a:tailEnd type="none" w="med" len="med"/>
+                    </a:lnT>
+                    <a:lnB w="12700" cap="flat" cmpd="sng" algn="ctr">
+                      <a:solidFill>
+                        <a:srgbClr val="E2E6EC"/>
+                      </a:solidFill>
+                      <a:prstDash val="solid"/>
+                      <a:round/>
+                      <a:headEnd type="none" w="med" len="med"/>
+                      <a:tailEnd type="none" w="med" len="med"/>
+                    </a:lnB>
+                    <a:solidFill>
+                      <a:srgbClr val="FFFFFF"/>
+                    </a:solidFill>
+                  </a:tcPr>
+                </a:tc>
+                <a:tc>
+                  <a:txBody>
+                    <a:bodyPr/>
+                    <a:lstStyle/>
+                    <a:p>
+                      <a:pPr algn="ctr" indent="0" marL="0">
+                        <a:buNone/>
+                      </a:pPr>
+                      <a:r>
+                        <a:rPr lang="en-US" sz="1200" b="1" dirty="0">
+                          <a:solidFill>
+                            <a:srgbClr val="12B5A5"/>
+                          </a:solidFill>
+                          <a:latin typeface="Calibri" pitchFamily="34" charset="0"/>
+                          <a:ea typeface="Calibri" pitchFamily="34" charset="-122"/>
+                          <a:cs typeface="Calibri" pitchFamily="34" charset="-120"/>
+                        </a:rPr>
+                        <a:t>10</a:t>
+                      </a:r>
+                      <a:endParaRPr lang="en-US" sz="1200" dirty="0">
+                        <a:latin typeface="Calibri" charset="0"/>
+                        <a:ea typeface="Calibri" charset="0"/>
+                        <a:cs typeface="Calibri" charset="0"/>
+                      </a:endParaRPr>
+                    </a:p>
+                  </a:txBody>
+                  <a:tcPr marL="38100" marR="38100" marT="38100" marB="38100" anchor="ctr">
+                    <a:lnL w="12700" cap="flat" cmpd="sng" algn="ctr">
+                      <a:solidFill>
+                        <a:srgbClr val="E2E6EC"/>
+                      </a:solidFill>
+                      <a:prstDash val="solid"/>
+                      <a:round/>
+                      <a:headEnd type="none" w="med" len="med"/>
+                      <a:tailEnd type="none" w="med" len="med"/>
+                    </a:lnL>
+                    <a:lnR w="12700" cap="flat" cmpd="sng" algn="ctr">
+                      <a:solidFill>
+                        <a:srgbClr val="E2E6EC"/>
+                      </a:solidFill>
+                      <a:prstDash val="solid"/>
+                      <a:round/>
+                      <a:headEnd type="none" w="med" len="med"/>
+                      <a:tailEnd type="none" w="med" len="med"/>
+                    </a:lnR>
+                    <a:lnT w="12700" cap="flat" cmpd="sng" algn="ctr">
+                      <a:solidFill>
+                        <a:srgbClr val="E2E6EC"/>
+                      </a:solidFill>
+                      <a:prstDash val="solid"/>
+                      <a:round/>
+                      <a:headEnd type="none" w="med" len="med"/>
+                      <a:tailEnd type="none" w="med" len="med"/>
+                    </a:lnT>
+                    <a:lnB w="12700" cap="flat" cmpd="sng" algn="ctr">
+                      <a:solidFill>
+                        <a:srgbClr val="E2E6EC"/>
+                      </a:solidFill>
+                      <a:prstDash val="solid"/>
+                      <a:round/>
+                      <a:headEnd type="none" w="med" len="med"/>
+                      <a:tailEnd type="none" w="med" len="med"/>
+                    </a:lnB>
+                    <a:solidFill>
+                      <a:srgbClr val="FFFFFF"/>
+                    </a:solidFill>
+                  </a:tcPr>
+                </a:tc>
+                <a:tc>
+                  <a:txBody>
+                    <a:bodyPr/>
+                    <a:lstStyle/>
+                    <a:p>
+                      <a:pPr algn="ctr" indent="0" marL="0">
+                        <a:buNone/>
+                      </a:pPr>
+                      <a:r>
+                        <a:rPr lang="en-US" sz="1200" b="1" dirty="0">
+                          <a:solidFill>
+                            <a:srgbClr val="E11D2A"/>
+                          </a:solidFill>
+                          <a:latin typeface="Calibri" pitchFamily="34" charset="0"/>
+                          <a:ea typeface="Calibri" pitchFamily="34" charset="-122"/>
+                          <a:cs typeface="Calibri" pitchFamily="34" charset="-120"/>
+                        </a:rPr>
+                        <a:t>50</a:t>
+                      </a:r>
+                      <a:endParaRPr lang="en-US" sz="1200" dirty="0">
+                        <a:latin typeface="Calibri" charset="0"/>
+                        <a:ea typeface="Calibri" charset="0"/>
+                        <a:cs typeface="Calibri" charset="0"/>
+                      </a:endParaRPr>
+                    </a:p>
+                  </a:txBody>
+                  <a:tcPr marL="38100" marR="38100" marT="38100" marB="38100" anchor="ctr">
+                    <a:lnL w="12700" cap="flat" cmpd="sng" algn="ctr">
+                      <a:solidFill>
+                        <a:srgbClr val="E2E6EC"/>
+                      </a:solidFill>
+                      <a:prstDash val="solid"/>
+                      <a:round/>
+                      <a:headEnd type="none" w="med" len="med"/>
+                      <a:tailEnd type="none" w="med" len="med"/>
+                    </a:lnL>
+                    <a:lnR w="12700" cap="flat" cmpd="sng" algn="ctr">
+                      <a:solidFill>
+                        <a:srgbClr val="E2E6EC"/>
+                      </a:solidFill>
+                      <a:prstDash val="solid"/>
+                      <a:round/>
+                      <a:headEnd type="none" w="med" len="med"/>
+                      <a:tailEnd type="none" w="med" len="med"/>
+                    </a:lnR>
+                    <a:lnT w="12700" cap="flat" cmpd="sng" algn="ctr">
+                      <a:solidFill>
+                        <a:srgbClr val="E2E6EC"/>
+                      </a:solidFill>
+                      <a:prstDash val="solid"/>
+                      <a:round/>
+                      <a:headEnd type="none" w="med" len="med"/>
+                      <a:tailEnd type="none" w="med" len="med"/>
+                    </a:lnT>
+                    <a:lnB w="12700" cap="flat" cmpd="sng" algn="ctr">
+                      <a:solidFill>
+                        <a:srgbClr val="E2E6EC"/>
+                      </a:solidFill>
+                      <a:prstDash val="solid"/>
+                      <a:round/>
+                      <a:headEnd type="none" w="med" len="med"/>
+                      <a:tailEnd type="none" w="med" len="med"/>
+                    </a:lnB>
+                    <a:solidFill>
+                      <a:srgbClr val="FFFFFF"/>
+                    </a:solidFill>
+                  </a:tcPr>
+                </a:tc>
+              </a:tr>
+              <a:tr h="384048">
+                <a:tc>
+                  <a:txBody>
+                    <a:bodyPr/>
+                    <a:lstStyle/>
+                    <a:p>
+                      <a:pPr indent="0" marL="0">
+                        <a:buNone/>
+                      </a:pPr>
+                      <a:r>
+                        <a:rPr lang="en-US" sz="1200" dirty="0">
+                          <a:solidFill>
+                            <a:srgbClr val="1F2430"/>
+                          </a:solidFill>
+                          <a:latin typeface="Calibri" pitchFamily="34" charset="0"/>
+                          <a:ea typeface="Calibri" pitchFamily="34" charset="-122"/>
+                          <a:cs typeface="Calibri" pitchFamily="34" charset="-120"/>
+                        </a:rPr>
+                        <a:t>Panggil Aku Sayang</a:t>
+                      </a:r>
+                      <a:endParaRPr lang="en-US" sz="1200" dirty="0">
+                        <a:latin typeface="Calibri" charset="0"/>
+                        <a:ea typeface="Calibri" charset="0"/>
+                        <a:cs typeface="Calibri" charset="0"/>
+                      </a:endParaRPr>
+                    </a:p>
+                  </a:txBody>
+                  <a:tcPr marL="38100" marR="38100" marT="38100" marB="38100" anchor="ctr">
+                    <a:lnL w="12700" cap="flat" cmpd="sng" algn="ctr">
+                      <a:solidFill>
+                        <a:srgbClr val="E2E6EC"/>
+                      </a:solidFill>
+                      <a:prstDash val="solid"/>
+                      <a:round/>
+                      <a:headEnd type="none" w="med" len="med"/>
+                      <a:tailEnd type="none" w="med" len="med"/>
+                    </a:lnL>
+                    <a:lnR w="12700" cap="flat" cmpd="sng" algn="ctr">
+                      <a:solidFill>
+                        <a:srgbClr val="E2E6EC"/>
+                      </a:solidFill>
+                      <a:prstDash val="solid"/>
+                      <a:round/>
+                      <a:headEnd type="none" w="med" len="med"/>
+                      <a:tailEnd type="none" w="med" len="med"/>
+                    </a:lnR>
+                    <a:lnT w="12700" cap="flat" cmpd="sng" algn="ctr">
+                      <a:solidFill>
+                        <a:srgbClr val="E2E6EC"/>
+                      </a:solidFill>
+                      <a:prstDash val="solid"/>
+                      <a:round/>
+                      <a:headEnd type="none" w="med" len="med"/>
+                      <a:tailEnd type="none" w="med" len="med"/>
+                    </a:lnT>
+                    <a:lnB w="12700" cap="flat" cmpd="sng" algn="ctr">
+                      <a:solidFill>
+                        <a:srgbClr val="E2E6EC"/>
+                      </a:solidFill>
+                      <a:prstDash val="solid"/>
+                      <a:round/>
+                      <a:headEnd type="none" w="med" len="med"/>
+                      <a:tailEnd type="none" w="med" len="med"/>
+                    </a:lnB>
+                    <a:solidFill>
+                      <a:srgbClr val="F4F6F8"/>
+                    </a:solidFill>
+                  </a:tcPr>
+                </a:tc>
+                <a:tc>
+                  <a:txBody>
+                    <a:bodyPr/>
+                    <a:lstStyle/>
+                    <a:p>
+                      <a:pPr indent="0" marL="0">
+                        <a:buNone/>
+                      </a:pPr>
+                      <a:r>
+                        <a:rPr lang="en-US" sz="1200" dirty="0">
+                          <a:solidFill>
+                            <a:srgbClr val="64748B"/>
+                          </a:solidFill>
+                          <a:latin typeface="Calibri" pitchFamily="34" charset="0"/>
+                          <a:ea typeface="Calibri" pitchFamily="34" charset="-122"/>
+                          <a:cs typeface="Calibri" pitchFamily="34" charset="-120"/>
+                        </a:rPr>
+                        <a:t>—</a:t>
+                      </a:r>
+                      <a:endParaRPr lang="en-US" sz="1200" dirty="0">
+                        <a:latin typeface="Calibri" charset="0"/>
+                        <a:ea typeface="Calibri" charset="0"/>
+                        <a:cs typeface="Calibri" charset="0"/>
+                      </a:endParaRPr>
+                    </a:p>
+                  </a:txBody>
+                  <a:tcPr marL="38100" marR="38100" marT="38100" marB="38100" anchor="ctr">
+                    <a:lnL w="12700" cap="flat" cmpd="sng" algn="ctr">
+                      <a:solidFill>
+                        <a:srgbClr val="E2E6EC"/>
+                      </a:solidFill>
+                      <a:prstDash val="solid"/>
+                      <a:round/>
+                      <a:headEnd type="none" w="med" len="med"/>
+                      <a:tailEnd type="none" w="med" len="med"/>
+                    </a:lnL>
+                    <a:lnR w="12700" cap="flat" cmpd="sng" algn="ctr">
+                      <a:solidFill>
+                        <a:srgbClr val="E2E6EC"/>
+                      </a:solidFill>
+                      <a:prstDash val="solid"/>
+                      <a:round/>
+                      <a:headEnd type="none" w="med" len="med"/>
+                      <a:tailEnd type="none" w="med" len="med"/>
+                    </a:lnR>
+                    <a:lnT w="12700" cap="flat" cmpd="sng" algn="ctr">
+                      <a:solidFill>
+                        <a:srgbClr val="E2E6EC"/>
+                      </a:solidFill>
+                      <a:prstDash val="solid"/>
+                      <a:round/>
+                      <a:headEnd type="none" w="med" len="med"/>
+                      <a:tailEnd type="none" w="med" len="med"/>
+                    </a:lnT>
+                    <a:lnB w="12700" cap="flat" cmpd="sng" algn="ctr">
+                      <a:solidFill>
+                        <a:srgbClr val="E2E6EC"/>
+                      </a:solidFill>
+                      <a:prstDash val="solid"/>
+                      <a:round/>
+                      <a:headEnd type="none" w="med" len="med"/>
+                      <a:tailEnd type="none" w="med" len="med"/>
+                    </a:lnB>
+                    <a:solidFill>
+                      <a:srgbClr val="F4F6F8"/>
+                    </a:solidFill>
+                  </a:tcPr>
+                </a:tc>
+                <a:tc>
+                  <a:txBody>
+                    <a:bodyPr/>
+                    <a:lstStyle/>
+                    <a:p>
+                      <a:pPr algn="ctr" indent="0" marL="0">
+                        <a:buNone/>
+                      </a:pPr>
+                      <a:r>
+                        <a:rPr lang="en-US" sz="1200" b="1" dirty="0">
+                          <a:solidFill>
+                            <a:srgbClr val="12B5A5"/>
+                          </a:solidFill>
+                          <a:latin typeface="Calibri" pitchFamily="34" charset="0"/>
+                          <a:ea typeface="Calibri" pitchFamily="34" charset="-122"/>
+                          <a:cs typeface="Calibri" pitchFamily="34" charset="-120"/>
+                        </a:rPr>
+                        <a:t>10</a:t>
+                      </a:r>
+                      <a:endParaRPr lang="en-US" sz="1200" dirty="0">
+                        <a:latin typeface="Calibri" charset="0"/>
+                        <a:ea typeface="Calibri" charset="0"/>
+                        <a:cs typeface="Calibri" charset="0"/>
+                      </a:endParaRPr>
+                    </a:p>
+                  </a:txBody>
+                  <a:tcPr marL="38100" marR="38100" marT="38100" marB="38100" anchor="ctr">
+                    <a:lnL w="12700" cap="flat" cmpd="sng" algn="ctr">
+                      <a:solidFill>
+                        <a:srgbClr val="E2E6EC"/>
+                      </a:solidFill>
+                      <a:prstDash val="solid"/>
+                      <a:round/>
+                      <a:headEnd type="none" w="med" len="med"/>
+                      <a:tailEnd type="none" w="med" len="med"/>
+                    </a:lnL>
+                    <a:lnR w="12700" cap="flat" cmpd="sng" algn="ctr">
+                      <a:solidFill>
+                        <a:srgbClr val="E2E6EC"/>
+                      </a:solidFill>
+                      <a:prstDash val="solid"/>
+                      <a:round/>
+                      <a:headEnd type="none" w="med" len="med"/>
+                      <a:tailEnd type="none" w="med" len="med"/>
+                    </a:lnR>
+                    <a:lnT w="12700" cap="flat" cmpd="sng" algn="ctr">
+                      <a:solidFill>
+                        <a:srgbClr val="E2E6EC"/>
+                      </a:solidFill>
+                      <a:prstDash val="solid"/>
+                      <a:round/>
+                      <a:headEnd type="none" w="med" len="med"/>
+                      <a:tailEnd type="none" w="med" len="med"/>
+                    </a:lnT>
+                    <a:lnB w="12700" cap="flat" cmpd="sng" algn="ctr">
+                      <a:solidFill>
+                        <a:srgbClr val="E2E6EC"/>
+                      </a:solidFill>
+                      <a:prstDash val="solid"/>
+                      <a:round/>
+                      <a:headEnd type="none" w="med" len="med"/>
+                      <a:tailEnd type="none" w="med" len="med"/>
+                    </a:lnB>
+                    <a:solidFill>
+                      <a:srgbClr val="F4F6F8"/>
+                    </a:solidFill>
+                  </a:tcPr>
+                </a:tc>
+                <a:tc>
+                  <a:txBody>
+                    <a:bodyPr/>
+                    <a:lstStyle/>
+                    <a:p>
+                      <a:pPr algn="ctr" indent="0" marL="0">
+                        <a:buNone/>
+                      </a:pPr>
+                      <a:r>
+                        <a:rPr lang="en-US" sz="1200" b="1" dirty="0">
+                          <a:solidFill>
+                            <a:srgbClr val="E11D2A"/>
+                          </a:solidFill>
+                          <a:latin typeface="Calibri" pitchFamily="34" charset="0"/>
+                          <a:ea typeface="Calibri" pitchFamily="34" charset="-122"/>
+                          <a:cs typeface="Calibri" pitchFamily="34" charset="-120"/>
+                        </a:rPr>
+                        <a:t>50</a:t>
+                      </a:r>
+                      <a:endParaRPr lang="en-US" sz="1200" dirty="0">
+                        <a:latin typeface="Calibri" charset="0"/>
+                        <a:ea typeface="Calibri" charset="0"/>
+                        <a:cs typeface="Calibri" charset="0"/>
+                      </a:endParaRPr>
+                    </a:p>
+                  </a:txBody>
+                  <a:tcPr marL="38100" marR="38100" marT="38100" marB="38100" anchor="ctr">
+                    <a:lnL w="12700" cap="flat" cmpd="sng" algn="ctr">
+                      <a:solidFill>
+                        <a:srgbClr val="E2E6EC"/>
+                      </a:solidFill>
+                      <a:prstDash val="solid"/>
+                      <a:round/>
+                      <a:headEnd type="none" w="med" len="med"/>
+                      <a:tailEnd type="none" w="med" len="med"/>
+                    </a:lnL>
+                    <a:lnR w="12700" cap="flat" cmpd="sng" algn="ctr">
+                      <a:solidFill>
+                        <a:srgbClr val="E2E6EC"/>
+                      </a:solidFill>
+                      <a:prstDash val="solid"/>
+                      <a:round/>
+                      <a:headEnd type="none" w="med" len="med"/>
+                      <a:tailEnd type="none" w="med" len="med"/>
+                    </a:lnR>
+                    <a:lnT w="12700" cap="flat" cmpd="sng" algn="ctr">
+                      <a:solidFill>
+                        <a:srgbClr val="E2E6EC"/>
+                      </a:solidFill>
+                      <a:prstDash val="solid"/>
+                      <a:round/>
+                      <a:headEnd type="none" w="med" len="med"/>
+                      <a:tailEnd type="none" w="med" len="med"/>
+                    </a:lnT>
+                    <a:lnB w="12700" cap="flat" cmpd="sng" algn="ctr">
+                      <a:solidFill>
+                        <a:srgbClr val="E2E6EC"/>
+                      </a:solidFill>
+                      <a:prstDash val="solid"/>
+                      <a:round/>
+                      <a:headEnd type="none" w="med" len="med"/>
+                      <a:tailEnd type="none" w="med" len="med"/>
+                    </a:lnB>
+                    <a:solidFill>
+                      <a:srgbClr val="F4F6F8"/>
+                    </a:solidFill>
+                  </a:tcPr>
+                </a:tc>
+              </a:tr>
+              <a:tr h="384048">
+                <a:tc>
+                  <a:txBody>
+                    <a:bodyPr/>
+                    <a:lstStyle/>
+                    <a:p>
+                      <a:pPr indent="0" marL="0">
                         <a:buNone/>
                       </a:pPr>
                       <a:r>
@@ -8516,7 +9854,7 @@
                     <a:bodyPr/>
                     <a:lstStyle/>
                     <a:p>
-                      <a:pPr marL="0" indent="0">
+                      <a:pPr indent="0" marL="0">
                         <a:buNone/>
                       </a:pPr>
                       <a:r>
@@ -8584,7 +9922,7 @@
                     <a:bodyPr/>
                     <a:lstStyle/>
                     <a:p>
-                      <a:pPr marL="0" indent="0" algn="ctr">
+                      <a:pPr algn="ctr" indent="0" marL="0">
                         <a:buNone/>
                       </a:pPr>
                       <a:r>
@@ -8596,7 +9934,7 @@
                           <a:ea typeface="Calibri" pitchFamily="34" charset="-122"/>
                           <a:cs typeface="Calibri" pitchFamily="34" charset="-120"/>
                         </a:rPr>
-                        <a:t>2</a:t>
+                        <a:t>9</a:t>
                       </a:r>
                       <a:endParaRPr lang="en-US" sz="1200" dirty="0">
                         <a:latin typeface="Calibri" charset="0"/>
@@ -8652,7 +9990,7 @@
                     <a:bodyPr/>
                     <a:lstStyle/>
                     <a:p>
-                      <a:pPr marL="0" indent="0" algn="ctr">
+                      <a:pPr algn="ctr" indent="0" marL="0">
                         <a:buNone/>
                       </a:pPr>
                       <a:r>
@@ -8715,11 +10053,6 @@
                     </a:solidFill>
                   </a:tcPr>
                 </a:tc>
-                <a:extLst>
-                  <a:ext uri="{0D108BD9-81ED-4DB2-BD59-A6C34878D82A}">
-                    <a16:rowId xmlns:a16="http://schemas.microsoft.com/office/drawing/2014/main" val="10001"/>
-                  </a:ext>
-                </a:extLst>
               </a:tr>
               <a:tr h="384048">
                 <a:tc>
@@ -8727,7 +10060,555 @@
                     <a:bodyPr/>
                     <a:lstStyle/>
                     <a:p>
-                      <a:pPr marL="0" indent="0">
+                      <a:pPr indent="0" marL="0">
+                        <a:buNone/>
+                      </a:pPr>
+                      <a:r>
+                        <a:rPr lang="en-US" sz="1200" dirty="0">
+                          <a:solidFill>
+                            <a:srgbClr val="1F2430"/>
+                          </a:solidFill>
+                          <a:latin typeface="Calibri" pitchFamily="34" charset="0"/>
+                          <a:ea typeface="Calibri" pitchFamily="34" charset="-122"/>
+                          <a:cs typeface="Calibri" pitchFamily="34" charset="-120"/>
+                        </a:rPr>
+                        <a:t>Terbuai Asmara</a:t>
+                      </a:r>
+                      <a:endParaRPr lang="en-US" sz="1200" dirty="0">
+                        <a:latin typeface="Calibri" charset="0"/>
+                        <a:ea typeface="Calibri" charset="0"/>
+                        <a:cs typeface="Calibri" charset="0"/>
+                      </a:endParaRPr>
+                    </a:p>
+                  </a:txBody>
+                  <a:tcPr marL="38100" marR="38100" marT="38100" marB="38100" anchor="ctr">
+                    <a:lnL w="12700" cap="flat" cmpd="sng" algn="ctr">
+                      <a:solidFill>
+                        <a:srgbClr val="E2E6EC"/>
+                      </a:solidFill>
+                      <a:prstDash val="solid"/>
+                      <a:round/>
+                      <a:headEnd type="none" w="med" len="med"/>
+                      <a:tailEnd type="none" w="med" len="med"/>
+                    </a:lnL>
+                    <a:lnR w="12700" cap="flat" cmpd="sng" algn="ctr">
+                      <a:solidFill>
+                        <a:srgbClr val="E2E6EC"/>
+                      </a:solidFill>
+                      <a:prstDash val="solid"/>
+                      <a:round/>
+                      <a:headEnd type="none" w="med" len="med"/>
+                      <a:tailEnd type="none" w="med" len="med"/>
+                    </a:lnR>
+                    <a:lnT w="12700" cap="flat" cmpd="sng" algn="ctr">
+                      <a:solidFill>
+                        <a:srgbClr val="E2E6EC"/>
+                      </a:solidFill>
+                      <a:prstDash val="solid"/>
+                      <a:round/>
+                      <a:headEnd type="none" w="med" len="med"/>
+                      <a:tailEnd type="none" w="med" len="med"/>
+                    </a:lnT>
+                    <a:lnB w="12700" cap="flat" cmpd="sng" algn="ctr">
+                      <a:solidFill>
+                        <a:srgbClr val="E2E6EC"/>
+                      </a:solidFill>
+                      <a:prstDash val="solid"/>
+                      <a:round/>
+                      <a:headEnd type="none" w="med" len="med"/>
+                      <a:tailEnd type="none" w="med" len="med"/>
+                    </a:lnB>
+                    <a:solidFill>
+                      <a:srgbClr val="F4F6F8"/>
+                    </a:solidFill>
+                  </a:tcPr>
+                </a:tc>
+                <a:tc>
+                  <a:txBody>
+                    <a:bodyPr/>
+                    <a:lstStyle/>
+                    <a:p>
+                      <a:pPr indent="0" marL="0">
+                        <a:buNone/>
+                      </a:pPr>
+                      <a:r>
+                        <a:rPr lang="en-US" sz="1200" dirty="0">
+                          <a:solidFill>
+                            <a:srgbClr val="64748B"/>
+                          </a:solidFill>
+                          <a:latin typeface="Calibri" pitchFamily="34" charset="0"/>
+                          <a:ea typeface="Calibri" pitchFamily="34" charset="-122"/>
+                          <a:cs typeface="Calibri" pitchFamily="34" charset="-120"/>
+                        </a:rPr>
+                        <a:t>—</a:t>
+                      </a:r>
+                      <a:endParaRPr lang="en-US" sz="1200" dirty="0">
+                        <a:latin typeface="Calibri" charset="0"/>
+                        <a:ea typeface="Calibri" charset="0"/>
+                        <a:cs typeface="Calibri" charset="0"/>
+                      </a:endParaRPr>
+                    </a:p>
+                  </a:txBody>
+                  <a:tcPr marL="38100" marR="38100" marT="38100" marB="38100" anchor="ctr">
+                    <a:lnL w="12700" cap="flat" cmpd="sng" algn="ctr">
+                      <a:solidFill>
+                        <a:srgbClr val="E2E6EC"/>
+                      </a:solidFill>
+                      <a:prstDash val="solid"/>
+                      <a:round/>
+                      <a:headEnd type="none" w="med" len="med"/>
+                      <a:tailEnd type="none" w="med" len="med"/>
+                    </a:lnL>
+                    <a:lnR w="12700" cap="flat" cmpd="sng" algn="ctr">
+                      <a:solidFill>
+                        <a:srgbClr val="E2E6EC"/>
+                      </a:solidFill>
+                      <a:prstDash val="solid"/>
+                      <a:round/>
+                      <a:headEnd type="none" w="med" len="med"/>
+                      <a:tailEnd type="none" w="med" len="med"/>
+                    </a:lnR>
+                    <a:lnT w="12700" cap="flat" cmpd="sng" algn="ctr">
+                      <a:solidFill>
+                        <a:srgbClr val="E2E6EC"/>
+                      </a:solidFill>
+                      <a:prstDash val="solid"/>
+                      <a:round/>
+                      <a:headEnd type="none" w="med" len="med"/>
+                      <a:tailEnd type="none" w="med" len="med"/>
+                    </a:lnT>
+                    <a:lnB w="12700" cap="flat" cmpd="sng" algn="ctr">
+                      <a:solidFill>
+                        <a:srgbClr val="E2E6EC"/>
+                      </a:solidFill>
+                      <a:prstDash val="solid"/>
+                      <a:round/>
+                      <a:headEnd type="none" w="med" len="med"/>
+                      <a:tailEnd type="none" w="med" len="med"/>
+                    </a:lnB>
+                    <a:solidFill>
+                      <a:srgbClr val="F4F6F8"/>
+                    </a:solidFill>
+                  </a:tcPr>
+                </a:tc>
+                <a:tc>
+                  <a:txBody>
+                    <a:bodyPr/>
+                    <a:lstStyle/>
+                    <a:p>
+                      <a:pPr algn="ctr" indent="0" marL="0">
+                        <a:buNone/>
+                      </a:pPr>
+                      <a:r>
+                        <a:rPr lang="en-US" sz="1200" b="1" dirty="0">
+                          <a:solidFill>
+                            <a:srgbClr val="12B5A5"/>
+                          </a:solidFill>
+                          <a:latin typeface="Calibri" pitchFamily="34" charset="0"/>
+                          <a:ea typeface="Calibri" pitchFamily="34" charset="-122"/>
+                          <a:cs typeface="Calibri" pitchFamily="34" charset="-120"/>
+                        </a:rPr>
+                        <a:t>9</a:t>
+                      </a:r>
+                      <a:endParaRPr lang="en-US" sz="1200" dirty="0">
+                        <a:latin typeface="Calibri" charset="0"/>
+                        <a:ea typeface="Calibri" charset="0"/>
+                        <a:cs typeface="Calibri" charset="0"/>
+                      </a:endParaRPr>
+                    </a:p>
+                  </a:txBody>
+                  <a:tcPr marL="38100" marR="38100" marT="38100" marB="38100" anchor="ctr">
+                    <a:lnL w="12700" cap="flat" cmpd="sng" algn="ctr">
+                      <a:solidFill>
+                        <a:srgbClr val="E2E6EC"/>
+                      </a:solidFill>
+                      <a:prstDash val="solid"/>
+                      <a:round/>
+                      <a:headEnd type="none" w="med" len="med"/>
+                      <a:tailEnd type="none" w="med" len="med"/>
+                    </a:lnL>
+                    <a:lnR w="12700" cap="flat" cmpd="sng" algn="ctr">
+                      <a:solidFill>
+                        <a:srgbClr val="E2E6EC"/>
+                      </a:solidFill>
+                      <a:prstDash val="solid"/>
+                      <a:round/>
+                      <a:headEnd type="none" w="med" len="med"/>
+                      <a:tailEnd type="none" w="med" len="med"/>
+                    </a:lnR>
+                    <a:lnT w="12700" cap="flat" cmpd="sng" algn="ctr">
+                      <a:solidFill>
+                        <a:srgbClr val="E2E6EC"/>
+                      </a:solidFill>
+                      <a:prstDash val="solid"/>
+                      <a:round/>
+                      <a:headEnd type="none" w="med" len="med"/>
+                      <a:tailEnd type="none" w="med" len="med"/>
+                    </a:lnT>
+                    <a:lnB w="12700" cap="flat" cmpd="sng" algn="ctr">
+                      <a:solidFill>
+                        <a:srgbClr val="E2E6EC"/>
+                      </a:solidFill>
+                      <a:prstDash val="solid"/>
+                      <a:round/>
+                      <a:headEnd type="none" w="med" len="med"/>
+                      <a:tailEnd type="none" w="med" len="med"/>
+                    </a:lnB>
+                    <a:solidFill>
+                      <a:srgbClr val="F4F6F8"/>
+                    </a:solidFill>
+                  </a:tcPr>
+                </a:tc>
+                <a:tc>
+                  <a:txBody>
+                    <a:bodyPr/>
+                    <a:lstStyle/>
+                    <a:p>
+                      <a:pPr algn="ctr" indent="0" marL="0">
+                        <a:buNone/>
+                      </a:pPr>
+                      <a:r>
+                        <a:rPr lang="en-US" sz="1200" b="1" dirty="0">
+                          <a:solidFill>
+                            <a:srgbClr val="E11D2A"/>
+                          </a:solidFill>
+                          <a:latin typeface="Calibri" pitchFamily="34" charset="0"/>
+                          <a:ea typeface="Calibri" pitchFamily="34" charset="-122"/>
+                          <a:cs typeface="Calibri" pitchFamily="34" charset="-120"/>
+                        </a:rPr>
+                        <a:t>50</a:t>
+                      </a:r>
+                      <a:endParaRPr lang="en-US" sz="1200" dirty="0">
+                        <a:latin typeface="Calibri" charset="0"/>
+                        <a:ea typeface="Calibri" charset="0"/>
+                        <a:cs typeface="Calibri" charset="0"/>
+                      </a:endParaRPr>
+                    </a:p>
+                  </a:txBody>
+                  <a:tcPr marL="38100" marR="38100" marT="38100" marB="38100" anchor="ctr">
+                    <a:lnL w="12700" cap="flat" cmpd="sng" algn="ctr">
+                      <a:solidFill>
+                        <a:srgbClr val="E2E6EC"/>
+                      </a:solidFill>
+                      <a:prstDash val="solid"/>
+                      <a:round/>
+                      <a:headEnd type="none" w="med" len="med"/>
+                      <a:tailEnd type="none" w="med" len="med"/>
+                    </a:lnL>
+                    <a:lnR w="12700" cap="flat" cmpd="sng" algn="ctr">
+                      <a:solidFill>
+                        <a:srgbClr val="E2E6EC"/>
+                      </a:solidFill>
+                      <a:prstDash val="solid"/>
+                      <a:round/>
+                      <a:headEnd type="none" w="med" len="med"/>
+                      <a:tailEnd type="none" w="med" len="med"/>
+                    </a:lnR>
+                    <a:lnT w="12700" cap="flat" cmpd="sng" algn="ctr">
+                      <a:solidFill>
+                        <a:srgbClr val="E2E6EC"/>
+                      </a:solidFill>
+                      <a:prstDash val="solid"/>
+                      <a:round/>
+                      <a:headEnd type="none" w="med" len="med"/>
+                      <a:tailEnd type="none" w="med" len="med"/>
+                    </a:lnT>
+                    <a:lnB w="12700" cap="flat" cmpd="sng" algn="ctr">
+                      <a:solidFill>
+                        <a:srgbClr val="E2E6EC"/>
+                      </a:solidFill>
+                      <a:prstDash val="solid"/>
+                      <a:round/>
+                      <a:headEnd type="none" w="med" len="med"/>
+                      <a:tailEnd type="none" w="med" len="med"/>
+                    </a:lnB>
+                    <a:solidFill>
+                      <a:srgbClr val="F4F6F8"/>
+                    </a:solidFill>
+                  </a:tcPr>
+                </a:tc>
+              </a:tr>
+              <a:tr h="384048">
+                <a:tc>
+                  <a:txBody>
+                    <a:bodyPr/>
+                    <a:lstStyle/>
+                    <a:p>
+                      <a:pPr indent="0" marL="0">
+                        <a:buNone/>
+                      </a:pPr>
+                      <a:r>
+                        <a:rPr lang="en-US" sz="1200" dirty="0">
+                          <a:solidFill>
+                            <a:srgbClr val="1F2430"/>
+                          </a:solidFill>
+                          <a:latin typeface="Calibri" pitchFamily="34" charset="0"/>
+                          <a:ea typeface="Calibri" pitchFamily="34" charset="-122"/>
+                          <a:cs typeface="Calibri" pitchFamily="34" charset="-120"/>
+                        </a:rPr>
+                        <a:t>Kemana</a:t>
+                      </a:r>
+                      <a:endParaRPr lang="en-US" sz="1200" dirty="0">
+                        <a:latin typeface="Calibri" charset="0"/>
+                        <a:ea typeface="Calibri" charset="0"/>
+                        <a:cs typeface="Calibri" charset="0"/>
+                      </a:endParaRPr>
+                    </a:p>
+                  </a:txBody>
+                  <a:tcPr marL="38100" marR="38100" marT="38100" marB="38100" anchor="ctr">
+                    <a:lnL w="12700" cap="flat" cmpd="sng" algn="ctr">
+                      <a:solidFill>
+                        <a:srgbClr val="E2E6EC"/>
+                      </a:solidFill>
+                      <a:prstDash val="solid"/>
+                      <a:round/>
+                      <a:headEnd type="none" w="med" len="med"/>
+                      <a:tailEnd type="none" w="med" len="med"/>
+                    </a:lnL>
+                    <a:lnR w="12700" cap="flat" cmpd="sng" algn="ctr">
+                      <a:solidFill>
+                        <a:srgbClr val="E2E6EC"/>
+                      </a:solidFill>
+                      <a:prstDash val="solid"/>
+                      <a:round/>
+                      <a:headEnd type="none" w="med" len="med"/>
+                      <a:tailEnd type="none" w="med" len="med"/>
+                    </a:lnR>
+                    <a:lnT w="12700" cap="flat" cmpd="sng" algn="ctr">
+                      <a:solidFill>
+                        <a:srgbClr val="E2E6EC"/>
+                      </a:solidFill>
+                      <a:prstDash val="solid"/>
+                      <a:round/>
+                      <a:headEnd type="none" w="med" len="med"/>
+                      <a:tailEnd type="none" w="med" len="med"/>
+                    </a:lnT>
+                    <a:lnB w="12700" cap="flat" cmpd="sng" algn="ctr">
+                      <a:solidFill>
+                        <a:srgbClr val="E2E6EC"/>
+                      </a:solidFill>
+                      <a:prstDash val="solid"/>
+                      <a:round/>
+                      <a:headEnd type="none" w="med" len="med"/>
+                      <a:tailEnd type="none" w="med" len="med"/>
+                    </a:lnB>
+                    <a:solidFill>
+                      <a:srgbClr val="FFFFFF"/>
+                    </a:solidFill>
+                  </a:tcPr>
+                </a:tc>
+                <a:tc>
+                  <a:txBody>
+                    <a:bodyPr/>
+                    <a:lstStyle/>
+                    <a:p>
+                      <a:pPr indent="0" marL="0">
+                        <a:buNone/>
+                      </a:pPr>
+                      <a:r>
+                        <a:rPr lang="en-US" sz="1200" dirty="0">
+                          <a:solidFill>
+                            <a:srgbClr val="64748B"/>
+                          </a:solidFill>
+                          <a:latin typeface="Calibri" pitchFamily="34" charset="0"/>
+                          <a:ea typeface="Calibri" pitchFamily="34" charset="-122"/>
+                          <a:cs typeface="Calibri" pitchFamily="34" charset="-120"/>
+                        </a:rPr>
+                        <a:t>Koes Plus</a:t>
+                      </a:r>
+                      <a:endParaRPr lang="en-US" sz="1200" dirty="0">
+                        <a:latin typeface="Calibri" charset="0"/>
+                        <a:ea typeface="Calibri" charset="0"/>
+                        <a:cs typeface="Calibri" charset="0"/>
+                      </a:endParaRPr>
+                    </a:p>
+                  </a:txBody>
+                  <a:tcPr marL="38100" marR="38100" marT="38100" marB="38100" anchor="ctr">
+                    <a:lnL w="12700" cap="flat" cmpd="sng" algn="ctr">
+                      <a:solidFill>
+                        <a:srgbClr val="E2E6EC"/>
+                      </a:solidFill>
+                      <a:prstDash val="solid"/>
+                      <a:round/>
+                      <a:headEnd type="none" w="med" len="med"/>
+                      <a:tailEnd type="none" w="med" len="med"/>
+                    </a:lnL>
+                    <a:lnR w="12700" cap="flat" cmpd="sng" algn="ctr">
+                      <a:solidFill>
+                        <a:srgbClr val="E2E6EC"/>
+                      </a:solidFill>
+                      <a:prstDash val="solid"/>
+                      <a:round/>
+                      <a:headEnd type="none" w="med" len="med"/>
+                      <a:tailEnd type="none" w="med" len="med"/>
+                    </a:lnR>
+                    <a:lnT w="12700" cap="flat" cmpd="sng" algn="ctr">
+                      <a:solidFill>
+                        <a:srgbClr val="E2E6EC"/>
+                      </a:solidFill>
+                      <a:prstDash val="solid"/>
+                      <a:round/>
+                      <a:headEnd type="none" w="med" len="med"/>
+                      <a:tailEnd type="none" w="med" len="med"/>
+                    </a:lnT>
+                    <a:lnB w="12700" cap="flat" cmpd="sng" algn="ctr">
+                      <a:solidFill>
+                        <a:srgbClr val="E2E6EC"/>
+                      </a:solidFill>
+                      <a:prstDash val="solid"/>
+                      <a:round/>
+                      <a:headEnd type="none" w="med" len="med"/>
+                      <a:tailEnd type="none" w="med" len="med"/>
+                    </a:lnB>
+                    <a:solidFill>
+                      <a:srgbClr val="FFFFFF"/>
+                    </a:solidFill>
+                  </a:tcPr>
+                </a:tc>
+                <a:tc>
+                  <a:txBody>
+                    <a:bodyPr/>
+                    <a:lstStyle/>
+                    <a:p>
+                      <a:pPr algn="ctr" indent="0" marL="0">
+                        <a:buNone/>
+                      </a:pPr>
+                      <a:r>
+                        <a:rPr lang="en-US" sz="1200" b="1" dirty="0">
+                          <a:solidFill>
+                            <a:srgbClr val="12B5A5"/>
+                          </a:solidFill>
+                          <a:latin typeface="Calibri" pitchFamily="34" charset="0"/>
+                          <a:ea typeface="Calibri" pitchFamily="34" charset="-122"/>
+                          <a:cs typeface="Calibri" pitchFamily="34" charset="-120"/>
+                        </a:rPr>
+                        <a:t>8</a:t>
+                      </a:r>
+                      <a:endParaRPr lang="en-US" sz="1200" dirty="0">
+                        <a:latin typeface="Calibri" charset="0"/>
+                        <a:ea typeface="Calibri" charset="0"/>
+                        <a:cs typeface="Calibri" charset="0"/>
+                      </a:endParaRPr>
+                    </a:p>
+                  </a:txBody>
+                  <a:tcPr marL="38100" marR="38100" marT="38100" marB="38100" anchor="ctr">
+                    <a:lnL w="12700" cap="flat" cmpd="sng" algn="ctr">
+                      <a:solidFill>
+                        <a:srgbClr val="E2E6EC"/>
+                      </a:solidFill>
+                      <a:prstDash val="solid"/>
+                      <a:round/>
+                      <a:headEnd type="none" w="med" len="med"/>
+                      <a:tailEnd type="none" w="med" len="med"/>
+                    </a:lnL>
+                    <a:lnR w="12700" cap="flat" cmpd="sng" algn="ctr">
+                      <a:solidFill>
+                        <a:srgbClr val="E2E6EC"/>
+                      </a:solidFill>
+                      <a:prstDash val="solid"/>
+                      <a:round/>
+                      <a:headEnd type="none" w="med" len="med"/>
+                      <a:tailEnd type="none" w="med" len="med"/>
+                    </a:lnR>
+                    <a:lnT w="12700" cap="flat" cmpd="sng" algn="ctr">
+                      <a:solidFill>
+                        <a:srgbClr val="E2E6EC"/>
+                      </a:solidFill>
+                      <a:prstDash val="solid"/>
+                      <a:round/>
+                      <a:headEnd type="none" w="med" len="med"/>
+                      <a:tailEnd type="none" w="med" len="med"/>
+                    </a:lnT>
+                    <a:lnB w="12700" cap="flat" cmpd="sng" algn="ctr">
+                      <a:solidFill>
+                        <a:srgbClr val="E2E6EC"/>
+                      </a:solidFill>
+                      <a:prstDash val="solid"/>
+                      <a:round/>
+                      <a:headEnd type="none" w="med" len="med"/>
+                      <a:tailEnd type="none" w="med" len="med"/>
+                    </a:lnB>
+                    <a:solidFill>
+                      <a:srgbClr val="FFFFFF"/>
+                    </a:solidFill>
+                  </a:tcPr>
+                </a:tc>
+                <a:tc>
+                  <a:txBody>
+                    <a:bodyPr/>
+                    <a:lstStyle/>
+                    <a:p>
+                      <a:pPr algn="ctr" indent="0" marL="0">
+                        <a:buNone/>
+                      </a:pPr>
+                      <a:r>
+                        <a:rPr lang="en-US" sz="1200" b="1" dirty="0">
+                          <a:solidFill>
+                            <a:srgbClr val="E11D2A"/>
+                          </a:solidFill>
+                          <a:latin typeface="Calibri" pitchFamily="34" charset="0"/>
+                          <a:ea typeface="Calibri" pitchFamily="34" charset="-122"/>
+                          <a:cs typeface="Calibri" pitchFamily="34" charset="-120"/>
+                        </a:rPr>
+                        <a:t>50</a:t>
+                      </a:r>
+                      <a:endParaRPr lang="en-US" sz="1200" dirty="0">
+                        <a:latin typeface="Calibri" charset="0"/>
+                        <a:ea typeface="Calibri" charset="0"/>
+                        <a:cs typeface="Calibri" charset="0"/>
+                      </a:endParaRPr>
+                    </a:p>
+                  </a:txBody>
+                  <a:tcPr marL="38100" marR="38100" marT="38100" marB="38100" anchor="ctr">
+                    <a:lnL w="12700" cap="flat" cmpd="sng" algn="ctr">
+                      <a:solidFill>
+                        <a:srgbClr val="E2E6EC"/>
+                      </a:solidFill>
+                      <a:prstDash val="solid"/>
+                      <a:round/>
+                      <a:headEnd type="none" w="med" len="med"/>
+                      <a:tailEnd type="none" w="med" len="med"/>
+                    </a:lnL>
+                    <a:lnR w="12700" cap="flat" cmpd="sng" algn="ctr">
+                      <a:solidFill>
+                        <a:srgbClr val="E2E6EC"/>
+                      </a:solidFill>
+                      <a:prstDash val="solid"/>
+                      <a:round/>
+                      <a:headEnd type="none" w="med" len="med"/>
+                      <a:tailEnd type="none" w="med" len="med"/>
+                    </a:lnR>
+                    <a:lnT w="12700" cap="flat" cmpd="sng" algn="ctr">
+                      <a:solidFill>
+                        <a:srgbClr val="E2E6EC"/>
+                      </a:solidFill>
+                      <a:prstDash val="solid"/>
+                      <a:round/>
+                      <a:headEnd type="none" w="med" len="med"/>
+                      <a:tailEnd type="none" w="med" len="med"/>
+                    </a:lnT>
+                    <a:lnB w="12700" cap="flat" cmpd="sng" algn="ctr">
+                      <a:solidFill>
+                        <a:srgbClr val="E2E6EC"/>
+                      </a:solidFill>
+                      <a:prstDash val="solid"/>
+                      <a:round/>
+                      <a:headEnd type="none" w="med" len="med"/>
+                      <a:tailEnd type="none" w="med" len="med"/>
+                    </a:lnB>
+                    <a:solidFill>
+                      <a:srgbClr val="FFFFFF"/>
+                    </a:solidFill>
+                  </a:tcPr>
+                </a:tc>
+              </a:tr>
+              <a:tr h="384048">
+                <a:tc>
+                  <a:txBody>
+                    <a:bodyPr/>
+                    <a:lstStyle/>
+                    <a:p>
+                      <a:pPr indent="0" marL="0">
                         <a:buNone/>
                       </a:pPr>
                       <a:r>
@@ -8795,7 +10676,7 @@
                     <a:bodyPr/>
                     <a:lstStyle/>
                     <a:p>
-                      <a:pPr marL="0" indent="0">
+                      <a:pPr indent="0" marL="0">
                         <a:buNone/>
                       </a:pPr>
                       <a:r>
@@ -8863,7 +10744,7 @@
                     <a:bodyPr/>
                     <a:lstStyle/>
                     <a:p>
-                      <a:pPr marL="0" indent="0" algn="ctr">
+                      <a:pPr algn="ctr" indent="0" marL="0">
                         <a:buNone/>
                       </a:pPr>
                       <a:r>
@@ -8875,7 +10756,7 @@
                           <a:ea typeface="Calibri" pitchFamily="34" charset="-122"/>
                           <a:cs typeface="Calibri" pitchFamily="34" charset="-120"/>
                         </a:rPr>
-                        <a:t>1</a:t>
+                        <a:t>5</a:t>
                       </a:r>
                       <a:endParaRPr lang="en-US" sz="1200" dirty="0">
                         <a:latin typeface="Calibri" charset="0"/>
@@ -8931,7 +10812,7 @@
                     <a:bodyPr/>
                     <a:lstStyle/>
                     <a:p>
-                      <a:pPr marL="0" indent="0" algn="ctr">
+                      <a:pPr algn="ctr" indent="0" marL="0">
                         <a:buNone/>
                       </a:pPr>
                       <a:r>
@@ -8994,1685 +10875,6 @@
                     </a:solidFill>
                   </a:tcPr>
                 </a:tc>
-                <a:extLst>
-                  <a:ext uri="{0D108BD9-81ED-4DB2-BD59-A6C34878D82A}">
-                    <a16:rowId xmlns:a16="http://schemas.microsoft.com/office/drawing/2014/main" val="10002"/>
-                  </a:ext>
-                </a:extLst>
-              </a:tr>
-              <a:tr h="384048">
-                <a:tc>
-                  <a:txBody>
-                    <a:bodyPr/>
-                    <a:lstStyle/>
-                    <a:p>
-                      <a:pPr marL="0" indent="0">
-                        <a:buNone/>
-                      </a:pPr>
-                      <a:r>
-                        <a:rPr lang="en-US" sz="1200" dirty="0">
-                          <a:solidFill>
-                            <a:srgbClr val="1F2430"/>
-                          </a:solidFill>
-                          <a:latin typeface="Calibri" pitchFamily="34" charset="0"/>
-                          <a:ea typeface="Calibri" pitchFamily="34" charset="-122"/>
-                          <a:cs typeface="Calibri" pitchFamily="34" charset="-120"/>
-                        </a:rPr>
-                        <a:t>Puja Pau Sen Ta Ti / …</a:t>
-                      </a:r>
-                      <a:endParaRPr lang="en-US" sz="1200" dirty="0">
-                        <a:latin typeface="Calibri" charset="0"/>
-                        <a:ea typeface="Calibri" charset="0"/>
-                        <a:cs typeface="Calibri" charset="0"/>
-                      </a:endParaRPr>
-                    </a:p>
-                  </a:txBody>
-                  <a:tcPr marL="38100" marR="38100" marT="38100" marB="38100" anchor="ctr">
-                    <a:lnL w="12700" cap="flat" cmpd="sng" algn="ctr">
-                      <a:solidFill>
-                        <a:srgbClr val="E2E6EC"/>
-                      </a:solidFill>
-                      <a:prstDash val="solid"/>
-                      <a:round/>
-                      <a:headEnd type="none" w="med" len="med"/>
-                      <a:tailEnd type="none" w="med" len="med"/>
-                    </a:lnL>
-                    <a:lnR w="12700" cap="flat" cmpd="sng" algn="ctr">
-                      <a:solidFill>
-                        <a:srgbClr val="E2E6EC"/>
-                      </a:solidFill>
-                      <a:prstDash val="solid"/>
-                      <a:round/>
-                      <a:headEnd type="none" w="med" len="med"/>
-                      <a:tailEnd type="none" w="med" len="med"/>
-                    </a:lnR>
-                    <a:lnT w="12700" cap="flat" cmpd="sng" algn="ctr">
-                      <a:solidFill>
-                        <a:srgbClr val="E2E6EC"/>
-                      </a:solidFill>
-                      <a:prstDash val="solid"/>
-                      <a:round/>
-                      <a:headEnd type="none" w="med" len="med"/>
-                      <a:tailEnd type="none" w="med" len="med"/>
-                    </a:lnT>
-                    <a:lnB w="12700" cap="flat" cmpd="sng" algn="ctr">
-                      <a:solidFill>
-                        <a:srgbClr val="E2E6EC"/>
-                      </a:solidFill>
-                      <a:prstDash val="solid"/>
-                      <a:round/>
-                      <a:headEnd type="none" w="med" len="med"/>
-                      <a:tailEnd type="none" w="med" len="med"/>
-                    </a:lnB>
-                    <a:solidFill>
-                      <a:srgbClr val="FFFFFF"/>
-                    </a:solidFill>
-                  </a:tcPr>
-                </a:tc>
-                <a:tc>
-                  <a:txBody>
-                    <a:bodyPr/>
-                    <a:lstStyle/>
-                    <a:p>
-                      <a:pPr marL="0" indent="0">
-                        <a:buNone/>
-                      </a:pPr>
-                      <a:r>
-                        <a:rPr lang="en-US" sz="1200" dirty="0">
-                          <a:solidFill>
-                            <a:srgbClr val="64748B"/>
-                          </a:solidFill>
-                          <a:latin typeface="Calibri" pitchFamily="34" charset="0"/>
-                          <a:ea typeface="Calibri" pitchFamily="34" charset="-122"/>
-                          <a:cs typeface="Calibri" pitchFamily="34" charset="-120"/>
-                        </a:rPr>
-                        <a:t>—</a:t>
-                      </a:r>
-                      <a:endParaRPr lang="en-US" sz="1200" dirty="0">
-                        <a:latin typeface="Calibri" charset="0"/>
-                        <a:ea typeface="Calibri" charset="0"/>
-                        <a:cs typeface="Calibri" charset="0"/>
-                      </a:endParaRPr>
-                    </a:p>
-                  </a:txBody>
-                  <a:tcPr marL="38100" marR="38100" marT="38100" marB="38100" anchor="ctr">
-                    <a:lnL w="12700" cap="flat" cmpd="sng" algn="ctr">
-                      <a:solidFill>
-                        <a:srgbClr val="E2E6EC"/>
-                      </a:solidFill>
-                      <a:prstDash val="solid"/>
-                      <a:round/>
-                      <a:headEnd type="none" w="med" len="med"/>
-                      <a:tailEnd type="none" w="med" len="med"/>
-                    </a:lnL>
-                    <a:lnR w="12700" cap="flat" cmpd="sng" algn="ctr">
-                      <a:solidFill>
-                        <a:srgbClr val="E2E6EC"/>
-                      </a:solidFill>
-                      <a:prstDash val="solid"/>
-                      <a:round/>
-                      <a:headEnd type="none" w="med" len="med"/>
-                      <a:tailEnd type="none" w="med" len="med"/>
-                    </a:lnR>
-                    <a:lnT w="12700" cap="flat" cmpd="sng" algn="ctr">
-                      <a:solidFill>
-                        <a:srgbClr val="E2E6EC"/>
-                      </a:solidFill>
-                      <a:prstDash val="solid"/>
-                      <a:round/>
-                      <a:headEnd type="none" w="med" len="med"/>
-                      <a:tailEnd type="none" w="med" len="med"/>
-                    </a:lnT>
-                    <a:lnB w="12700" cap="flat" cmpd="sng" algn="ctr">
-                      <a:solidFill>
-                        <a:srgbClr val="E2E6EC"/>
-                      </a:solidFill>
-                      <a:prstDash val="solid"/>
-                      <a:round/>
-                      <a:headEnd type="none" w="med" len="med"/>
-                      <a:tailEnd type="none" w="med" len="med"/>
-                    </a:lnB>
-                    <a:solidFill>
-                      <a:srgbClr val="FFFFFF"/>
-                    </a:solidFill>
-                  </a:tcPr>
-                </a:tc>
-                <a:tc>
-                  <a:txBody>
-                    <a:bodyPr/>
-                    <a:lstStyle/>
-                    <a:p>
-                      <a:pPr marL="0" indent="0" algn="ctr">
-                        <a:buNone/>
-                      </a:pPr>
-                      <a:r>
-                        <a:rPr lang="en-US" sz="1200" b="1" dirty="0">
-                          <a:solidFill>
-                            <a:srgbClr val="12B5A5"/>
-                          </a:solidFill>
-                          <a:latin typeface="Calibri" pitchFamily="34" charset="0"/>
-                          <a:ea typeface="Calibri" pitchFamily="34" charset="-122"/>
-                          <a:cs typeface="Calibri" pitchFamily="34" charset="-120"/>
-                        </a:rPr>
-                        <a:t>0</a:t>
-                      </a:r>
-                      <a:endParaRPr lang="en-US" sz="1200" dirty="0">
-                        <a:latin typeface="Calibri" charset="0"/>
-                        <a:ea typeface="Calibri" charset="0"/>
-                        <a:cs typeface="Calibri" charset="0"/>
-                      </a:endParaRPr>
-                    </a:p>
-                  </a:txBody>
-                  <a:tcPr marL="38100" marR="38100" marT="38100" marB="38100" anchor="ctr">
-                    <a:lnL w="12700" cap="flat" cmpd="sng" algn="ctr">
-                      <a:solidFill>
-                        <a:srgbClr val="E2E6EC"/>
-                      </a:solidFill>
-                      <a:prstDash val="solid"/>
-                      <a:round/>
-                      <a:headEnd type="none" w="med" len="med"/>
-                      <a:tailEnd type="none" w="med" len="med"/>
-                    </a:lnL>
-                    <a:lnR w="12700" cap="flat" cmpd="sng" algn="ctr">
-                      <a:solidFill>
-                        <a:srgbClr val="E2E6EC"/>
-                      </a:solidFill>
-                      <a:prstDash val="solid"/>
-                      <a:round/>
-                      <a:headEnd type="none" w="med" len="med"/>
-                      <a:tailEnd type="none" w="med" len="med"/>
-                    </a:lnR>
-                    <a:lnT w="12700" cap="flat" cmpd="sng" algn="ctr">
-                      <a:solidFill>
-                        <a:srgbClr val="E2E6EC"/>
-                      </a:solidFill>
-                      <a:prstDash val="solid"/>
-                      <a:round/>
-                      <a:headEnd type="none" w="med" len="med"/>
-                      <a:tailEnd type="none" w="med" len="med"/>
-                    </a:lnT>
-                    <a:lnB w="12700" cap="flat" cmpd="sng" algn="ctr">
-                      <a:solidFill>
-                        <a:srgbClr val="E2E6EC"/>
-                      </a:solidFill>
-                      <a:prstDash val="solid"/>
-                      <a:round/>
-                      <a:headEnd type="none" w="med" len="med"/>
-                      <a:tailEnd type="none" w="med" len="med"/>
-                    </a:lnB>
-                    <a:solidFill>
-                      <a:srgbClr val="FFFFFF"/>
-                    </a:solidFill>
-                  </a:tcPr>
-                </a:tc>
-                <a:tc>
-                  <a:txBody>
-                    <a:bodyPr/>
-                    <a:lstStyle/>
-                    <a:p>
-                      <a:pPr marL="0" indent="0" algn="ctr">
-                        <a:buNone/>
-                      </a:pPr>
-                      <a:r>
-                        <a:rPr lang="en-US" sz="1200" b="1" dirty="0">
-                          <a:solidFill>
-                            <a:srgbClr val="E11D2A"/>
-                          </a:solidFill>
-                          <a:latin typeface="Calibri" pitchFamily="34" charset="0"/>
-                          <a:ea typeface="Calibri" pitchFamily="34" charset="-122"/>
-                          <a:cs typeface="Calibri" pitchFamily="34" charset="-120"/>
-                        </a:rPr>
-                        <a:t>50</a:t>
-                      </a:r>
-                      <a:endParaRPr lang="en-US" sz="1200" dirty="0">
-                        <a:latin typeface="Calibri" charset="0"/>
-                        <a:ea typeface="Calibri" charset="0"/>
-                        <a:cs typeface="Calibri" charset="0"/>
-                      </a:endParaRPr>
-                    </a:p>
-                  </a:txBody>
-                  <a:tcPr marL="38100" marR="38100" marT="38100" marB="38100" anchor="ctr">
-                    <a:lnL w="12700" cap="flat" cmpd="sng" algn="ctr">
-                      <a:solidFill>
-                        <a:srgbClr val="E2E6EC"/>
-                      </a:solidFill>
-                      <a:prstDash val="solid"/>
-                      <a:round/>
-                      <a:headEnd type="none" w="med" len="med"/>
-                      <a:tailEnd type="none" w="med" len="med"/>
-                    </a:lnL>
-                    <a:lnR w="12700" cap="flat" cmpd="sng" algn="ctr">
-                      <a:solidFill>
-                        <a:srgbClr val="E2E6EC"/>
-                      </a:solidFill>
-                      <a:prstDash val="solid"/>
-                      <a:round/>
-                      <a:headEnd type="none" w="med" len="med"/>
-                      <a:tailEnd type="none" w="med" len="med"/>
-                    </a:lnR>
-                    <a:lnT w="12700" cap="flat" cmpd="sng" algn="ctr">
-                      <a:solidFill>
-                        <a:srgbClr val="E2E6EC"/>
-                      </a:solidFill>
-                      <a:prstDash val="solid"/>
-                      <a:round/>
-                      <a:headEnd type="none" w="med" len="med"/>
-                      <a:tailEnd type="none" w="med" len="med"/>
-                    </a:lnT>
-                    <a:lnB w="12700" cap="flat" cmpd="sng" algn="ctr">
-                      <a:solidFill>
-                        <a:srgbClr val="E2E6EC"/>
-                      </a:solidFill>
-                      <a:prstDash val="solid"/>
-                      <a:round/>
-                      <a:headEnd type="none" w="med" len="med"/>
-                      <a:tailEnd type="none" w="med" len="med"/>
-                    </a:lnB>
-                    <a:solidFill>
-                      <a:srgbClr val="FFFFFF"/>
-                    </a:solidFill>
-                  </a:tcPr>
-                </a:tc>
-                <a:extLst>
-                  <a:ext uri="{0D108BD9-81ED-4DB2-BD59-A6C34878D82A}">
-                    <a16:rowId xmlns:a16="http://schemas.microsoft.com/office/drawing/2014/main" val="10003"/>
-                  </a:ext>
-                </a:extLst>
-              </a:tr>
-              <a:tr h="384048">
-                <a:tc>
-                  <a:txBody>
-                    <a:bodyPr/>
-                    <a:lstStyle/>
-                    <a:p>
-                      <a:pPr marL="0" indent="0">
-                        <a:buNone/>
-                      </a:pPr>
-                      <a:r>
-                        <a:rPr lang="en-US" sz="1200" dirty="0">
-                          <a:solidFill>
-                            <a:srgbClr val="1F2430"/>
-                          </a:solidFill>
-                          <a:latin typeface="Calibri" pitchFamily="34" charset="0"/>
-                          <a:ea typeface="Calibri" pitchFamily="34" charset="-122"/>
-                          <a:cs typeface="Calibri" pitchFamily="34" charset="-120"/>
-                        </a:rPr>
-                        <a:t>Ora Nitik</a:t>
-                      </a:r>
-                      <a:endParaRPr lang="en-US" sz="1200" dirty="0">
-                        <a:latin typeface="Calibri" charset="0"/>
-                        <a:ea typeface="Calibri" charset="0"/>
-                        <a:cs typeface="Calibri" charset="0"/>
-                      </a:endParaRPr>
-                    </a:p>
-                  </a:txBody>
-                  <a:tcPr marL="38100" marR="38100" marT="38100" marB="38100" anchor="ctr">
-                    <a:lnL w="12700" cap="flat" cmpd="sng" algn="ctr">
-                      <a:solidFill>
-                        <a:srgbClr val="E2E6EC"/>
-                      </a:solidFill>
-                      <a:prstDash val="solid"/>
-                      <a:round/>
-                      <a:headEnd type="none" w="med" len="med"/>
-                      <a:tailEnd type="none" w="med" len="med"/>
-                    </a:lnL>
-                    <a:lnR w="12700" cap="flat" cmpd="sng" algn="ctr">
-                      <a:solidFill>
-                        <a:srgbClr val="E2E6EC"/>
-                      </a:solidFill>
-                      <a:prstDash val="solid"/>
-                      <a:round/>
-                      <a:headEnd type="none" w="med" len="med"/>
-                      <a:tailEnd type="none" w="med" len="med"/>
-                    </a:lnR>
-                    <a:lnT w="12700" cap="flat" cmpd="sng" algn="ctr">
-                      <a:solidFill>
-                        <a:srgbClr val="E2E6EC"/>
-                      </a:solidFill>
-                      <a:prstDash val="solid"/>
-                      <a:round/>
-                      <a:headEnd type="none" w="med" len="med"/>
-                      <a:tailEnd type="none" w="med" len="med"/>
-                    </a:lnT>
-                    <a:lnB w="12700" cap="flat" cmpd="sng" algn="ctr">
-                      <a:solidFill>
-                        <a:srgbClr val="E2E6EC"/>
-                      </a:solidFill>
-                      <a:prstDash val="solid"/>
-                      <a:round/>
-                      <a:headEnd type="none" w="med" len="med"/>
-                      <a:tailEnd type="none" w="med" len="med"/>
-                    </a:lnB>
-                    <a:solidFill>
-                      <a:srgbClr val="F4F6F8"/>
-                    </a:solidFill>
-                  </a:tcPr>
-                </a:tc>
-                <a:tc>
-                  <a:txBody>
-                    <a:bodyPr/>
-                    <a:lstStyle/>
-                    <a:p>
-                      <a:pPr marL="0" indent="0">
-                        <a:buNone/>
-                      </a:pPr>
-                      <a:r>
-                        <a:rPr lang="en-US" sz="1200" dirty="0">
-                          <a:solidFill>
-                            <a:srgbClr val="64748B"/>
-                          </a:solidFill>
-                          <a:latin typeface="Calibri" pitchFamily="34" charset="0"/>
-                          <a:ea typeface="Calibri" pitchFamily="34" charset="-122"/>
-                          <a:cs typeface="Calibri" pitchFamily="34" charset="-120"/>
-                        </a:rPr>
-                        <a:t>—</a:t>
-                      </a:r>
-                      <a:endParaRPr lang="en-US" sz="1200" dirty="0">
-                        <a:latin typeface="Calibri" charset="0"/>
-                        <a:ea typeface="Calibri" charset="0"/>
-                        <a:cs typeface="Calibri" charset="0"/>
-                      </a:endParaRPr>
-                    </a:p>
-                  </a:txBody>
-                  <a:tcPr marL="38100" marR="38100" marT="38100" marB="38100" anchor="ctr">
-                    <a:lnL w="12700" cap="flat" cmpd="sng" algn="ctr">
-                      <a:solidFill>
-                        <a:srgbClr val="E2E6EC"/>
-                      </a:solidFill>
-                      <a:prstDash val="solid"/>
-                      <a:round/>
-                      <a:headEnd type="none" w="med" len="med"/>
-                      <a:tailEnd type="none" w="med" len="med"/>
-                    </a:lnL>
-                    <a:lnR w="12700" cap="flat" cmpd="sng" algn="ctr">
-                      <a:solidFill>
-                        <a:srgbClr val="E2E6EC"/>
-                      </a:solidFill>
-                      <a:prstDash val="solid"/>
-                      <a:round/>
-                      <a:headEnd type="none" w="med" len="med"/>
-                      <a:tailEnd type="none" w="med" len="med"/>
-                    </a:lnR>
-                    <a:lnT w="12700" cap="flat" cmpd="sng" algn="ctr">
-                      <a:solidFill>
-                        <a:srgbClr val="E2E6EC"/>
-                      </a:solidFill>
-                      <a:prstDash val="solid"/>
-                      <a:round/>
-                      <a:headEnd type="none" w="med" len="med"/>
-                      <a:tailEnd type="none" w="med" len="med"/>
-                    </a:lnT>
-                    <a:lnB w="12700" cap="flat" cmpd="sng" algn="ctr">
-                      <a:solidFill>
-                        <a:srgbClr val="E2E6EC"/>
-                      </a:solidFill>
-                      <a:prstDash val="solid"/>
-                      <a:round/>
-                      <a:headEnd type="none" w="med" len="med"/>
-                      <a:tailEnd type="none" w="med" len="med"/>
-                    </a:lnB>
-                    <a:solidFill>
-                      <a:srgbClr val="F4F6F8"/>
-                    </a:solidFill>
-                  </a:tcPr>
-                </a:tc>
-                <a:tc>
-                  <a:txBody>
-                    <a:bodyPr/>
-                    <a:lstStyle/>
-                    <a:p>
-                      <a:pPr marL="0" indent="0" algn="ctr">
-                        <a:buNone/>
-                      </a:pPr>
-                      <a:r>
-                        <a:rPr lang="en-US" sz="1200" b="1" dirty="0">
-                          <a:solidFill>
-                            <a:srgbClr val="12B5A5"/>
-                          </a:solidFill>
-                          <a:latin typeface="Calibri" pitchFamily="34" charset="0"/>
-                          <a:ea typeface="Calibri" pitchFamily="34" charset="-122"/>
-                          <a:cs typeface="Calibri" pitchFamily="34" charset="-120"/>
-                        </a:rPr>
-                        <a:t>0</a:t>
-                      </a:r>
-                      <a:endParaRPr lang="en-US" sz="1200" dirty="0">
-                        <a:latin typeface="Calibri" charset="0"/>
-                        <a:ea typeface="Calibri" charset="0"/>
-                        <a:cs typeface="Calibri" charset="0"/>
-                      </a:endParaRPr>
-                    </a:p>
-                  </a:txBody>
-                  <a:tcPr marL="38100" marR="38100" marT="38100" marB="38100" anchor="ctr">
-                    <a:lnL w="12700" cap="flat" cmpd="sng" algn="ctr">
-                      <a:solidFill>
-                        <a:srgbClr val="E2E6EC"/>
-                      </a:solidFill>
-                      <a:prstDash val="solid"/>
-                      <a:round/>
-                      <a:headEnd type="none" w="med" len="med"/>
-                      <a:tailEnd type="none" w="med" len="med"/>
-                    </a:lnL>
-                    <a:lnR w="12700" cap="flat" cmpd="sng" algn="ctr">
-                      <a:solidFill>
-                        <a:srgbClr val="E2E6EC"/>
-                      </a:solidFill>
-                      <a:prstDash val="solid"/>
-                      <a:round/>
-                      <a:headEnd type="none" w="med" len="med"/>
-                      <a:tailEnd type="none" w="med" len="med"/>
-                    </a:lnR>
-                    <a:lnT w="12700" cap="flat" cmpd="sng" algn="ctr">
-                      <a:solidFill>
-                        <a:srgbClr val="E2E6EC"/>
-                      </a:solidFill>
-                      <a:prstDash val="solid"/>
-                      <a:round/>
-                      <a:headEnd type="none" w="med" len="med"/>
-                      <a:tailEnd type="none" w="med" len="med"/>
-                    </a:lnT>
-                    <a:lnB w="12700" cap="flat" cmpd="sng" algn="ctr">
-                      <a:solidFill>
-                        <a:srgbClr val="E2E6EC"/>
-                      </a:solidFill>
-                      <a:prstDash val="solid"/>
-                      <a:round/>
-                      <a:headEnd type="none" w="med" len="med"/>
-                      <a:tailEnd type="none" w="med" len="med"/>
-                    </a:lnB>
-                    <a:solidFill>
-                      <a:srgbClr val="F4F6F8"/>
-                    </a:solidFill>
-                  </a:tcPr>
-                </a:tc>
-                <a:tc>
-                  <a:txBody>
-                    <a:bodyPr/>
-                    <a:lstStyle/>
-                    <a:p>
-                      <a:pPr marL="0" indent="0" algn="ctr">
-                        <a:buNone/>
-                      </a:pPr>
-                      <a:r>
-                        <a:rPr lang="en-US" sz="1200" b="1" dirty="0">
-                          <a:solidFill>
-                            <a:srgbClr val="E11D2A"/>
-                          </a:solidFill>
-                          <a:latin typeface="Calibri" pitchFamily="34" charset="0"/>
-                          <a:ea typeface="Calibri" pitchFamily="34" charset="-122"/>
-                          <a:cs typeface="Calibri" pitchFamily="34" charset="-120"/>
-                        </a:rPr>
-                        <a:t>50</a:t>
-                      </a:r>
-                      <a:endParaRPr lang="en-US" sz="1200" dirty="0">
-                        <a:latin typeface="Calibri" charset="0"/>
-                        <a:ea typeface="Calibri" charset="0"/>
-                        <a:cs typeface="Calibri" charset="0"/>
-                      </a:endParaRPr>
-                    </a:p>
-                  </a:txBody>
-                  <a:tcPr marL="38100" marR="38100" marT="38100" marB="38100" anchor="ctr">
-                    <a:lnL w="12700" cap="flat" cmpd="sng" algn="ctr">
-                      <a:solidFill>
-                        <a:srgbClr val="E2E6EC"/>
-                      </a:solidFill>
-                      <a:prstDash val="solid"/>
-                      <a:round/>
-                      <a:headEnd type="none" w="med" len="med"/>
-                      <a:tailEnd type="none" w="med" len="med"/>
-                    </a:lnL>
-                    <a:lnR w="12700" cap="flat" cmpd="sng" algn="ctr">
-                      <a:solidFill>
-                        <a:srgbClr val="E2E6EC"/>
-                      </a:solidFill>
-                      <a:prstDash val="solid"/>
-                      <a:round/>
-                      <a:headEnd type="none" w="med" len="med"/>
-                      <a:tailEnd type="none" w="med" len="med"/>
-                    </a:lnR>
-                    <a:lnT w="12700" cap="flat" cmpd="sng" algn="ctr">
-                      <a:solidFill>
-                        <a:srgbClr val="E2E6EC"/>
-                      </a:solidFill>
-                      <a:prstDash val="solid"/>
-                      <a:round/>
-                      <a:headEnd type="none" w="med" len="med"/>
-                      <a:tailEnd type="none" w="med" len="med"/>
-                    </a:lnT>
-                    <a:lnB w="12700" cap="flat" cmpd="sng" algn="ctr">
-                      <a:solidFill>
-                        <a:srgbClr val="E2E6EC"/>
-                      </a:solidFill>
-                      <a:prstDash val="solid"/>
-                      <a:round/>
-                      <a:headEnd type="none" w="med" len="med"/>
-                      <a:tailEnd type="none" w="med" len="med"/>
-                    </a:lnB>
-                    <a:solidFill>
-                      <a:srgbClr val="F4F6F8"/>
-                    </a:solidFill>
-                  </a:tcPr>
-                </a:tc>
-                <a:extLst>
-                  <a:ext uri="{0D108BD9-81ED-4DB2-BD59-A6C34878D82A}">
-                    <a16:rowId xmlns:a16="http://schemas.microsoft.com/office/drawing/2014/main" val="10004"/>
-                  </a:ext>
-                </a:extLst>
-              </a:tr>
-              <a:tr h="384048">
-                <a:tc>
-                  <a:txBody>
-                    <a:bodyPr/>
-                    <a:lstStyle/>
-                    <a:p>
-                      <a:pPr marL="0" indent="0">
-                        <a:buNone/>
-                      </a:pPr>
-                      <a:r>
-                        <a:rPr lang="en-US" sz="1200" dirty="0">
-                          <a:solidFill>
-                            <a:srgbClr val="1F2430"/>
-                          </a:solidFill>
-                          <a:latin typeface="Calibri" pitchFamily="34" charset="0"/>
-                          <a:ea typeface="Calibri" pitchFamily="34" charset="-122"/>
-                          <a:cs typeface="Calibri" pitchFamily="34" charset="-120"/>
-                        </a:rPr>
-                        <a:t>Mmm Pengen</a:t>
-                      </a:r>
-                      <a:endParaRPr lang="en-US" sz="1200" dirty="0">
-                        <a:latin typeface="Calibri" charset="0"/>
-                        <a:ea typeface="Calibri" charset="0"/>
-                        <a:cs typeface="Calibri" charset="0"/>
-                      </a:endParaRPr>
-                    </a:p>
-                  </a:txBody>
-                  <a:tcPr marL="38100" marR="38100" marT="38100" marB="38100" anchor="ctr">
-                    <a:lnL w="12700" cap="flat" cmpd="sng" algn="ctr">
-                      <a:solidFill>
-                        <a:srgbClr val="E2E6EC"/>
-                      </a:solidFill>
-                      <a:prstDash val="solid"/>
-                      <a:round/>
-                      <a:headEnd type="none" w="med" len="med"/>
-                      <a:tailEnd type="none" w="med" len="med"/>
-                    </a:lnL>
-                    <a:lnR w="12700" cap="flat" cmpd="sng" algn="ctr">
-                      <a:solidFill>
-                        <a:srgbClr val="E2E6EC"/>
-                      </a:solidFill>
-                      <a:prstDash val="solid"/>
-                      <a:round/>
-                      <a:headEnd type="none" w="med" len="med"/>
-                      <a:tailEnd type="none" w="med" len="med"/>
-                    </a:lnR>
-                    <a:lnT w="12700" cap="flat" cmpd="sng" algn="ctr">
-                      <a:solidFill>
-                        <a:srgbClr val="E2E6EC"/>
-                      </a:solidFill>
-                      <a:prstDash val="solid"/>
-                      <a:round/>
-                      <a:headEnd type="none" w="med" len="med"/>
-                      <a:tailEnd type="none" w="med" len="med"/>
-                    </a:lnT>
-                    <a:lnB w="12700" cap="flat" cmpd="sng" algn="ctr">
-                      <a:solidFill>
-                        <a:srgbClr val="E2E6EC"/>
-                      </a:solidFill>
-                      <a:prstDash val="solid"/>
-                      <a:round/>
-                      <a:headEnd type="none" w="med" len="med"/>
-                      <a:tailEnd type="none" w="med" len="med"/>
-                    </a:lnB>
-                    <a:solidFill>
-                      <a:srgbClr val="FFFFFF"/>
-                    </a:solidFill>
-                  </a:tcPr>
-                </a:tc>
-                <a:tc>
-                  <a:txBody>
-                    <a:bodyPr/>
-                    <a:lstStyle/>
-                    <a:p>
-                      <a:pPr marL="0" indent="0">
-                        <a:buNone/>
-                      </a:pPr>
-                      <a:r>
-                        <a:rPr lang="en-US" sz="1200" dirty="0">
-                          <a:solidFill>
-                            <a:srgbClr val="64748B"/>
-                          </a:solidFill>
-                          <a:latin typeface="Calibri" pitchFamily="34" charset="0"/>
-                          <a:ea typeface="Calibri" pitchFamily="34" charset="-122"/>
-                          <a:cs typeface="Calibri" pitchFamily="34" charset="-120"/>
-                        </a:rPr>
-                        <a:t>—</a:t>
-                      </a:r>
-                      <a:endParaRPr lang="en-US" sz="1200" dirty="0">
-                        <a:latin typeface="Calibri" charset="0"/>
-                        <a:ea typeface="Calibri" charset="0"/>
-                        <a:cs typeface="Calibri" charset="0"/>
-                      </a:endParaRPr>
-                    </a:p>
-                  </a:txBody>
-                  <a:tcPr marL="38100" marR="38100" marT="38100" marB="38100" anchor="ctr">
-                    <a:lnL w="12700" cap="flat" cmpd="sng" algn="ctr">
-                      <a:solidFill>
-                        <a:srgbClr val="E2E6EC"/>
-                      </a:solidFill>
-                      <a:prstDash val="solid"/>
-                      <a:round/>
-                      <a:headEnd type="none" w="med" len="med"/>
-                      <a:tailEnd type="none" w="med" len="med"/>
-                    </a:lnL>
-                    <a:lnR w="12700" cap="flat" cmpd="sng" algn="ctr">
-                      <a:solidFill>
-                        <a:srgbClr val="E2E6EC"/>
-                      </a:solidFill>
-                      <a:prstDash val="solid"/>
-                      <a:round/>
-                      <a:headEnd type="none" w="med" len="med"/>
-                      <a:tailEnd type="none" w="med" len="med"/>
-                    </a:lnR>
-                    <a:lnT w="12700" cap="flat" cmpd="sng" algn="ctr">
-                      <a:solidFill>
-                        <a:srgbClr val="E2E6EC"/>
-                      </a:solidFill>
-                      <a:prstDash val="solid"/>
-                      <a:round/>
-                      <a:headEnd type="none" w="med" len="med"/>
-                      <a:tailEnd type="none" w="med" len="med"/>
-                    </a:lnT>
-                    <a:lnB w="12700" cap="flat" cmpd="sng" algn="ctr">
-                      <a:solidFill>
-                        <a:srgbClr val="E2E6EC"/>
-                      </a:solidFill>
-                      <a:prstDash val="solid"/>
-                      <a:round/>
-                      <a:headEnd type="none" w="med" len="med"/>
-                      <a:tailEnd type="none" w="med" len="med"/>
-                    </a:lnB>
-                    <a:solidFill>
-                      <a:srgbClr val="FFFFFF"/>
-                    </a:solidFill>
-                  </a:tcPr>
-                </a:tc>
-                <a:tc>
-                  <a:txBody>
-                    <a:bodyPr/>
-                    <a:lstStyle/>
-                    <a:p>
-                      <a:pPr marL="0" indent="0" algn="ctr">
-                        <a:buNone/>
-                      </a:pPr>
-                      <a:r>
-                        <a:rPr lang="en-US" sz="1200" b="1" dirty="0">
-                          <a:solidFill>
-                            <a:srgbClr val="12B5A5"/>
-                          </a:solidFill>
-                          <a:latin typeface="Calibri" pitchFamily="34" charset="0"/>
-                          <a:ea typeface="Calibri" pitchFamily="34" charset="-122"/>
-                          <a:cs typeface="Calibri" pitchFamily="34" charset="-120"/>
-                        </a:rPr>
-                        <a:t>0</a:t>
-                      </a:r>
-                      <a:endParaRPr lang="en-US" sz="1200" dirty="0">
-                        <a:latin typeface="Calibri" charset="0"/>
-                        <a:ea typeface="Calibri" charset="0"/>
-                        <a:cs typeface="Calibri" charset="0"/>
-                      </a:endParaRPr>
-                    </a:p>
-                  </a:txBody>
-                  <a:tcPr marL="38100" marR="38100" marT="38100" marB="38100" anchor="ctr">
-                    <a:lnL w="12700" cap="flat" cmpd="sng" algn="ctr">
-                      <a:solidFill>
-                        <a:srgbClr val="E2E6EC"/>
-                      </a:solidFill>
-                      <a:prstDash val="solid"/>
-                      <a:round/>
-                      <a:headEnd type="none" w="med" len="med"/>
-                      <a:tailEnd type="none" w="med" len="med"/>
-                    </a:lnL>
-                    <a:lnR w="12700" cap="flat" cmpd="sng" algn="ctr">
-                      <a:solidFill>
-                        <a:srgbClr val="E2E6EC"/>
-                      </a:solidFill>
-                      <a:prstDash val="solid"/>
-                      <a:round/>
-                      <a:headEnd type="none" w="med" len="med"/>
-                      <a:tailEnd type="none" w="med" len="med"/>
-                    </a:lnR>
-                    <a:lnT w="12700" cap="flat" cmpd="sng" algn="ctr">
-                      <a:solidFill>
-                        <a:srgbClr val="E2E6EC"/>
-                      </a:solidFill>
-                      <a:prstDash val="solid"/>
-                      <a:round/>
-                      <a:headEnd type="none" w="med" len="med"/>
-                      <a:tailEnd type="none" w="med" len="med"/>
-                    </a:lnT>
-                    <a:lnB w="12700" cap="flat" cmpd="sng" algn="ctr">
-                      <a:solidFill>
-                        <a:srgbClr val="E2E6EC"/>
-                      </a:solidFill>
-                      <a:prstDash val="solid"/>
-                      <a:round/>
-                      <a:headEnd type="none" w="med" len="med"/>
-                      <a:tailEnd type="none" w="med" len="med"/>
-                    </a:lnB>
-                    <a:solidFill>
-                      <a:srgbClr val="FFFFFF"/>
-                    </a:solidFill>
-                  </a:tcPr>
-                </a:tc>
-                <a:tc>
-                  <a:txBody>
-                    <a:bodyPr/>
-                    <a:lstStyle/>
-                    <a:p>
-                      <a:pPr marL="0" indent="0" algn="ctr">
-                        <a:buNone/>
-                      </a:pPr>
-                      <a:r>
-                        <a:rPr lang="en-US" sz="1200" b="1" dirty="0">
-                          <a:solidFill>
-                            <a:srgbClr val="E11D2A"/>
-                          </a:solidFill>
-                          <a:latin typeface="Calibri" pitchFamily="34" charset="0"/>
-                          <a:ea typeface="Calibri" pitchFamily="34" charset="-122"/>
-                          <a:cs typeface="Calibri" pitchFamily="34" charset="-120"/>
-                        </a:rPr>
-                        <a:t>50</a:t>
-                      </a:r>
-                      <a:endParaRPr lang="en-US" sz="1200" dirty="0">
-                        <a:latin typeface="Calibri" charset="0"/>
-                        <a:ea typeface="Calibri" charset="0"/>
-                        <a:cs typeface="Calibri" charset="0"/>
-                      </a:endParaRPr>
-                    </a:p>
-                  </a:txBody>
-                  <a:tcPr marL="38100" marR="38100" marT="38100" marB="38100" anchor="ctr">
-                    <a:lnL w="12700" cap="flat" cmpd="sng" algn="ctr">
-                      <a:solidFill>
-                        <a:srgbClr val="E2E6EC"/>
-                      </a:solidFill>
-                      <a:prstDash val="solid"/>
-                      <a:round/>
-                      <a:headEnd type="none" w="med" len="med"/>
-                      <a:tailEnd type="none" w="med" len="med"/>
-                    </a:lnL>
-                    <a:lnR w="12700" cap="flat" cmpd="sng" algn="ctr">
-                      <a:solidFill>
-                        <a:srgbClr val="E2E6EC"/>
-                      </a:solidFill>
-                      <a:prstDash val="solid"/>
-                      <a:round/>
-                      <a:headEnd type="none" w="med" len="med"/>
-                      <a:tailEnd type="none" w="med" len="med"/>
-                    </a:lnR>
-                    <a:lnT w="12700" cap="flat" cmpd="sng" algn="ctr">
-                      <a:solidFill>
-                        <a:srgbClr val="E2E6EC"/>
-                      </a:solidFill>
-                      <a:prstDash val="solid"/>
-                      <a:round/>
-                      <a:headEnd type="none" w="med" len="med"/>
-                      <a:tailEnd type="none" w="med" len="med"/>
-                    </a:lnT>
-                    <a:lnB w="12700" cap="flat" cmpd="sng" algn="ctr">
-                      <a:solidFill>
-                        <a:srgbClr val="E2E6EC"/>
-                      </a:solidFill>
-                      <a:prstDash val="solid"/>
-                      <a:round/>
-                      <a:headEnd type="none" w="med" len="med"/>
-                      <a:tailEnd type="none" w="med" len="med"/>
-                    </a:lnB>
-                    <a:solidFill>
-                      <a:srgbClr val="FFFFFF"/>
-                    </a:solidFill>
-                  </a:tcPr>
-                </a:tc>
-                <a:extLst>
-                  <a:ext uri="{0D108BD9-81ED-4DB2-BD59-A6C34878D82A}">
-                    <a16:rowId xmlns:a16="http://schemas.microsoft.com/office/drawing/2014/main" val="10005"/>
-                  </a:ext>
-                </a:extLst>
-              </a:tr>
-              <a:tr h="384048">
-                <a:tc>
-                  <a:txBody>
-                    <a:bodyPr/>
-                    <a:lstStyle/>
-                    <a:p>
-                      <a:pPr marL="0" indent="0">
-                        <a:buNone/>
-                      </a:pPr>
-                      <a:r>
-                        <a:rPr lang="en-US" sz="1200" dirty="0">
-                          <a:solidFill>
-                            <a:srgbClr val="1F2430"/>
-                          </a:solidFill>
-                          <a:latin typeface="Calibri" pitchFamily="34" charset="0"/>
-                          <a:ea typeface="Calibri" pitchFamily="34" charset="-122"/>
-                          <a:cs typeface="Calibri" pitchFamily="34" charset="-120"/>
-                        </a:rPr>
-                        <a:t>Bertahan Hidup</a:t>
-                      </a:r>
-                      <a:endParaRPr lang="en-US" sz="1200" dirty="0">
-                        <a:latin typeface="Calibri" charset="0"/>
-                        <a:ea typeface="Calibri" charset="0"/>
-                        <a:cs typeface="Calibri" charset="0"/>
-                      </a:endParaRPr>
-                    </a:p>
-                  </a:txBody>
-                  <a:tcPr marL="38100" marR="38100" marT="38100" marB="38100" anchor="ctr">
-                    <a:lnL w="12700" cap="flat" cmpd="sng" algn="ctr">
-                      <a:solidFill>
-                        <a:srgbClr val="E2E6EC"/>
-                      </a:solidFill>
-                      <a:prstDash val="solid"/>
-                      <a:round/>
-                      <a:headEnd type="none" w="med" len="med"/>
-                      <a:tailEnd type="none" w="med" len="med"/>
-                    </a:lnL>
-                    <a:lnR w="12700" cap="flat" cmpd="sng" algn="ctr">
-                      <a:solidFill>
-                        <a:srgbClr val="E2E6EC"/>
-                      </a:solidFill>
-                      <a:prstDash val="solid"/>
-                      <a:round/>
-                      <a:headEnd type="none" w="med" len="med"/>
-                      <a:tailEnd type="none" w="med" len="med"/>
-                    </a:lnR>
-                    <a:lnT w="12700" cap="flat" cmpd="sng" algn="ctr">
-                      <a:solidFill>
-                        <a:srgbClr val="E2E6EC"/>
-                      </a:solidFill>
-                      <a:prstDash val="solid"/>
-                      <a:round/>
-                      <a:headEnd type="none" w="med" len="med"/>
-                      <a:tailEnd type="none" w="med" len="med"/>
-                    </a:lnT>
-                    <a:lnB w="12700" cap="flat" cmpd="sng" algn="ctr">
-                      <a:solidFill>
-                        <a:srgbClr val="E2E6EC"/>
-                      </a:solidFill>
-                      <a:prstDash val="solid"/>
-                      <a:round/>
-                      <a:headEnd type="none" w="med" len="med"/>
-                      <a:tailEnd type="none" w="med" len="med"/>
-                    </a:lnB>
-                    <a:solidFill>
-                      <a:srgbClr val="F4F6F8"/>
-                    </a:solidFill>
-                  </a:tcPr>
-                </a:tc>
-                <a:tc>
-                  <a:txBody>
-                    <a:bodyPr/>
-                    <a:lstStyle/>
-                    <a:p>
-                      <a:pPr marL="0" indent="0">
-                        <a:buNone/>
-                      </a:pPr>
-                      <a:r>
-                        <a:rPr lang="en-US" sz="1200" dirty="0">
-                          <a:solidFill>
-                            <a:srgbClr val="64748B"/>
-                          </a:solidFill>
-                          <a:latin typeface="Calibri" pitchFamily="34" charset="0"/>
-                          <a:ea typeface="Calibri" pitchFamily="34" charset="-122"/>
-                          <a:cs typeface="Calibri" pitchFamily="34" charset="-120"/>
-                        </a:rPr>
-                        <a:t>8 Ball</a:t>
-                      </a:r>
-                      <a:endParaRPr lang="en-US" sz="1200" dirty="0">
-                        <a:latin typeface="Calibri" charset="0"/>
-                        <a:ea typeface="Calibri" charset="0"/>
-                        <a:cs typeface="Calibri" charset="0"/>
-                      </a:endParaRPr>
-                    </a:p>
-                  </a:txBody>
-                  <a:tcPr marL="38100" marR="38100" marT="38100" marB="38100" anchor="ctr">
-                    <a:lnL w="12700" cap="flat" cmpd="sng" algn="ctr">
-                      <a:solidFill>
-                        <a:srgbClr val="E2E6EC"/>
-                      </a:solidFill>
-                      <a:prstDash val="solid"/>
-                      <a:round/>
-                      <a:headEnd type="none" w="med" len="med"/>
-                      <a:tailEnd type="none" w="med" len="med"/>
-                    </a:lnL>
-                    <a:lnR w="12700" cap="flat" cmpd="sng" algn="ctr">
-                      <a:solidFill>
-                        <a:srgbClr val="E2E6EC"/>
-                      </a:solidFill>
-                      <a:prstDash val="solid"/>
-                      <a:round/>
-                      <a:headEnd type="none" w="med" len="med"/>
-                      <a:tailEnd type="none" w="med" len="med"/>
-                    </a:lnR>
-                    <a:lnT w="12700" cap="flat" cmpd="sng" algn="ctr">
-                      <a:solidFill>
-                        <a:srgbClr val="E2E6EC"/>
-                      </a:solidFill>
-                      <a:prstDash val="solid"/>
-                      <a:round/>
-                      <a:headEnd type="none" w="med" len="med"/>
-                      <a:tailEnd type="none" w="med" len="med"/>
-                    </a:lnT>
-                    <a:lnB w="12700" cap="flat" cmpd="sng" algn="ctr">
-                      <a:solidFill>
-                        <a:srgbClr val="E2E6EC"/>
-                      </a:solidFill>
-                      <a:prstDash val="solid"/>
-                      <a:round/>
-                      <a:headEnd type="none" w="med" len="med"/>
-                      <a:tailEnd type="none" w="med" len="med"/>
-                    </a:lnB>
-                    <a:solidFill>
-                      <a:srgbClr val="F4F6F8"/>
-                    </a:solidFill>
-                  </a:tcPr>
-                </a:tc>
-                <a:tc>
-                  <a:txBody>
-                    <a:bodyPr/>
-                    <a:lstStyle/>
-                    <a:p>
-                      <a:pPr marL="0" indent="0" algn="ctr">
-                        <a:buNone/>
-                      </a:pPr>
-                      <a:r>
-                        <a:rPr lang="en-US" sz="1200" b="1" dirty="0">
-                          <a:solidFill>
-                            <a:srgbClr val="12B5A5"/>
-                          </a:solidFill>
-                          <a:latin typeface="Calibri" pitchFamily="34" charset="0"/>
-                          <a:ea typeface="Calibri" pitchFamily="34" charset="-122"/>
-                          <a:cs typeface="Calibri" pitchFamily="34" charset="-120"/>
-                        </a:rPr>
-                        <a:t>0</a:t>
-                      </a:r>
-                      <a:endParaRPr lang="en-US" sz="1200" dirty="0">
-                        <a:latin typeface="Calibri" charset="0"/>
-                        <a:ea typeface="Calibri" charset="0"/>
-                        <a:cs typeface="Calibri" charset="0"/>
-                      </a:endParaRPr>
-                    </a:p>
-                  </a:txBody>
-                  <a:tcPr marL="38100" marR="38100" marT="38100" marB="38100" anchor="ctr">
-                    <a:lnL w="12700" cap="flat" cmpd="sng" algn="ctr">
-                      <a:solidFill>
-                        <a:srgbClr val="E2E6EC"/>
-                      </a:solidFill>
-                      <a:prstDash val="solid"/>
-                      <a:round/>
-                      <a:headEnd type="none" w="med" len="med"/>
-                      <a:tailEnd type="none" w="med" len="med"/>
-                    </a:lnL>
-                    <a:lnR w="12700" cap="flat" cmpd="sng" algn="ctr">
-                      <a:solidFill>
-                        <a:srgbClr val="E2E6EC"/>
-                      </a:solidFill>
-                      <a:prstDash val="solid"/>
-                      <a:round/>
-                      <a:headEnd type="none" w="med" len="med"/>
-                      <a:tailEnd type="none" w="med" len="med"/>
-                    </a:lnR>
-                    <a:lnT w="12700" cap="flat" cmpd="sng" algn="ctr">
-                      <a:solidFill>
-                        <a:srgbClr val="E2E6EC"/>
-                      </a:solidFill>
-                      <a:prstDash val="solid"/>
-                      <a:round/>
-                      <a:headEnd type="none" w="med" len="med"/>
-                      <a:tailEnd type="none" w="med" len="med"/>
-                    </a:lnT>
-                    <a:lnB w="12700" cap="flat" cmpd="sng" algn="ctr">
-                      <a:solidFill>
-                        <a:srgbClr val="E2E6EC"/>
-                      </a:solidFill>
-                      <a:prstDash val="solid"/>
-                      <a:round/>
-                      <a:headEnd type="none" w="med" len="med"/>
-                      <a:tailEnd type="none" w="med" len="med"/>
-                    </a:lnB>
-                    <a:solidFill>
-                      <a:srgbClr val="F4F6F8"/>
-                    </a:solidFill>
-                  </a:tcPr>
-                </a:tc>
-                <a:tc>
-                  <a:txBody>
-                    <a:bodyPr/>
-                    <a:lstStyle/>
-                    <a:p>
-                      <a:pPr marL="0" indent="0" algn="ctr">
-                        <a:buNone/>
-                      </a:pPr>
-                      <a:r>
-                        <a:rPr lang="en-US" sz="1200" b="1" dirty="0">
-                          <a:solidFill>
-                            <a:srgbClr val="E11D2A"/>
-                          </a:solidFill>
-                          <a:latin typeface="Calibri" pitchFamily="34" charset="0"/>
-                          <a:ea typeface="Calibri" pitchFamily="34" charset="-122"/>
-                          <a:cs typeface="Calibri" pitchFamily="34" charset="-120"/>
-                        </a:rPr>
-                        <a:t>50</a:t>
-                      </a:r>
-                      <a:endParaRPr lang="en-US" sz="1200" dirty="0">
-                        <a:latin typeface="Calibri" charset="0"/>
-                        <a:ea typeface="Calibri" charset="0"/>
-                        <a:cs typeface="Calibri" charset="0"/>
-                      </a:endParaRPr>
-                    </a:p>
-                  </a:txBody>
-                  <a:tcPr marL="38100" marR="38100" marT="38100" marB="38100" anchor="ctr">
-                    <a:lnL w="12700" cap="flat" cmpd="sng" algn="ctr">
-                      <a:solidFill>
-                        <a:srgbClr val="E2E6EC"/>
-                      </a:solidFill>
-                      <a:prstDash val="solid"/>
-                      <a:round/>
-                      <a:headEnd type="none" w="med" len="med"/>
-                      <a:tailEnd type="none" w="med" len="med"/>
-                    </a:lnL>
-                    <a:lnR w="12700" cap="flat" cmpd="sng" algn="ctr">
-                      <a:solidFill>
-                        <a:srgbClr val="E2E6EC"/>
-                      </a:solidFill>
-                      <a:prstDash val="solid"/>
-                      <a:round/>
-                      <a:headEnd type="none" w="med" len="med"/>
-                      <a:tailEnd type="none" w="med" len="med"/>
-                    </a:lnR>
-                    <a:lnT w="12700" cap="flat" cmpd="sng" algn="ctr">
-                      <a:solidFill>
-                        <a:srgbClr val="E2E6EC"/>
-                      </a:solidFill>
-                      <a:prstDash val="solid"/>
-                      <a:round/>
-                      <a:headEnd type="none" w="med" len="med"/>
-                      <a:tailEnd type="none" w="med" len="med"/>
-                    </a:lnT>
-                    <a:lnB w="12700" cap="flat" cmpd="sng" algn="ctr">
-                      <a:solidFill>
-                        <a:srgbClr val="E2E6EC"/>
-                      </a:solidFill>
-                      <a:prstDash val="solid"/>
-                      <a:round/>
-                      <a:headEnd type="none" w="med" len="med"/>
-                      <a:tailEnd type="none" w="med" len="med"/>
-                    </a:lnB>
-                    <a:solidFill>
-                      <a:srgbClr val="F4F6F8"/>
-                    </a:solidFill>
-                  </a:tcPr>
-                </a:tc>
-                <a:extLst>
-                  <a:ext uri="{0D108BD9-81ED-4DB2-BD59-A6C34878D82A}">
-                    <a16:rowId xmlns:a16="http://schemas.microsoft.com/office/drawing/2014/main" val="10006"/>
-                  </a:ext>
-                </a:extLst>
-              </a:tr>
-              <a:tr h="384048">
-                <a:tc>
-                  <a:txBody>
-                    <a:bodyPr/>
-                    <a:lstStyle/>
-                    <a:p>
-                      <a:pPr marL="0" indent="0">
-                        <a:buNone/>
-                      </a:pPr>
-                      <a:r>
-                        <a:rPr lang="en-US" sz="1200" dirty="0">
-                          <a:solidFill>
-                            <a:srgbClr val="1F2430"/>
-                          </a:solidFill>
-                          <a:latin typeface="Calibri" pitchFamily="34" charset="0"/>
-                          <a:ea typeface="Calibri" pitchFamily="34" charset="-122"/>
-                          <a:cs typeface="Calibri" pitchFamily="34" charset="-120"/>
-                        </a:rPr>
-                        <a:t>Rindu Mama</a:t>
-                      </a:r>
-                      <a:endParaRPr lang="en-US" sz="1200" dirty="0">
-                        <a:latin typeface="Calibri" charset="0"/>
-                        <a:ea typeface="Calibri" charset="0"/>
-                        <a:cs typeface="Calibri" charset="0"/>
-                      </a:endParaRPr>
-                    </a:p>
-                  </a:txBody>
-                  <a:tcPr marL="38100" marR="38100" marT="38100" marB="38100" anchor="ctr">
-                    <a:lnL w="12700" cap="flat" cmpd="sng" algn="ctr">
-                      <a:solidFill>
-                        <a:srgbClr val="E2E6EC"/>
-                      </a:solidFill>
-                      <a:prstDash val="solid"/>
-                      <a:round/>
-                      <a:headEnd type="none" w="med" len="med"/>
-                      <a:tailEnd type="none" w="med" len="med"/>
-                    </a:lnL>
-                    <a:lnR w="12700" cap="flat" cmpd="sng" algn="ctr">
-                      <a:solidFill>
-                        <a:srgbClr val="E2E6EC"/>
-                      </a:solidFill>
-                      <a:prstDash val="solid"/>
-                      <a:round/>
-                      <a:headEnd type="none" w="med" len="med"/>
-                      <a:tailEnd type="none" w="med" len="med"/>
-                    </a:lnR>
-                    <a:lnT w="12700" cap="flat" cmpd="sng" algn="ctr">
-                      <a:solidFill>
-                        <a:srgbClr val="E2E6EC"/>
-                      </a:solidFill>
-                      <a:prstDash val="solid"/>
-                      <a:round/>
-                      <a:headEnd type="none" w="med" len="med"/>
-                      <a:tailEnd type="none" w="med" len="med"/>
-                    </a:lnT>
-                    <a:lnB w="12700" cap="flat" cmpd="sng" algn="ctr">
-                      <a:solidFill>
-                        <a:srgbClr val="E2E6EC"/>
-                      </a:solidFill>
-                      <a:prstDash val="solid"/>
-                      <a:round/>
-                      <a:headEnd type="none" w="med" len="med"/>
-                      <a:tailEnd type="none" w="med" len="med"/>
-                    </a:lnB>
-                    <a:solidFill>
-                      <a:srgbClr val="FFFFFF"/>
-                    </a:solidFill>
-                  </a:tcPr>
-                </a:tc>
-                <a:tc>
-                  <a:txBody>
-                    <a:bodyPr/>
-                    <a:lstStyle/>
-                    <a:p>
-                      <a:pPr marL="0" indent="0">
-                        <a:buNone/>
-                      </a:pPr>
-                      <a:r>
-                        <a:rPr lang="en-US" sz="1200" dirty="0">
-                          <a:solidFill>
-                            <a:srgbClr val="64748B"/>
-                          </a:solidFill>
-                          <a:latin typeface="Calibri" pitchFamily="34" charset="0"/>
-                          <a:ea typeface="Calibri" pitchFamily="34" charset="-122"/>
-                          <a:cs typeface="Calibri" pitchFamily="34" charset="-120"/>
-                        </a:rPr>
-                        <a:t>—</a:t>
-                      </a:r>
-                      <a:endParaRPr lang="en-US" sz="1200" dirty="0">
-                        <a:latin typeface="Calibri" charset="0"/>
-                        <a:ea typeface="Calibri" charset="0"/>
-                        <a:cs typeface="Calibri" charset="0"/>
-                      </a:endParaRPr>
-                    </a:p>
-                  </a:txBody>
-                  <a:tcPr marL="38100" marR="38100" marT="38100" marB="38100" anchor="ctr">
-                    <a:lnL w="12700" cap="flat" cmpd="sng" algn="ctr">
-                      <a:solidFill>
-                        <a:srgbClr val="E2E6EC"/>
-                      </a:solidFill>
-                      <a:prstDash val="solid"/>
-                      <a:round/>
-                      <a:headEnd type="none" w="med" len="med"/>
-                      <a:tailEnd type="none" w="med" len="med"/>
-                    </a:lnL>
-                    <a:lnR w="12700" cap="flat" cmpd="sng" algn="ctr">
-                      <a:solidFill>
-                        <a:srgbClr val="E2E6EC"/>
-                      </a:solidFill>
-                      <a:prstDash val="solid"/>
-                      <a:round/>
-                      <a:headEnd type="none" w="med" len="med"/>
-                      <a:tailEnd type="none" w="med" len="med"/>
-                    </a:lnR>
-                    <a:lnT w="12700" cap="flat" cmpd="sng" algn="ctr">
-                      <a:solidFill>
-                        <a:srgbClr val="E2E6EC"/>
-                      </a:solidFill>
-                      <a:prstDash val="solid"/>
-                      <a:round/>
-                      <a:headEnd type="none" w="med" len="med"/>
-                      <a:tailEnd type="none" w="med" len="med"/>
-                    </a:lnT>
-                    <a:lnB w="12700" cap="flat" cmpd="sng" algn="ctr">
-                      <a:solidFill>
-                        <a:srgbClr val="E2E6EC"/>
-                      </a:solidFill>
-                      <a:prstDash val="solid"/>
-                      <a:round/>
-                      <a:headEnd type="none" w="med" len="med"/>
-                      <a:tailEnd type="none" w="med" len="med"/>
-                    </a:lnB>
-                    <a:solidFill>
-                      <a:srgbClr val="FFFFFF"/>
-                    </a:solidFill>
-                  </a:tcPr>
-                </a:tc>
-                <a:tc>
-                  <a:txBody>
-                    <a:bodyPr/>
-                    <a:lstStyle/>
-                    <a:p>
-                      <a:pPr marL="0" indent="0" algn="ctr">
-                        <a:buNone/>
-                      </a:pPr>
-                      <a:r>
-                        <a:rPr lang="en-US" sz="1200" b="1" dirty="0">
-                          <a:solidFill>
-                            <a:srgbClr val="12B5A5"/>
-                          </a:solidFill>
-                          <a:latin typeface="Calibri" pitchFamily="34" charset="0"/>
-                          <a:ea typeface="Calibri" pitchFamily="34" charset="-122"/>
-                          <a:cs typeface="Calibri" pitchFamily="34" charset="-120"/>
-                        </a:rPr>
-                        <a:t>0</a:t>
-                      </a:r>
-                      <a:endParaRPr lang="en-US" sz="1200" dirty="0">
-                        <a:latin typeface="Calibri" charset="0"/>
-                        <a:ea typeface="Calibri" charset="0"/>
-                        <a:cs typeface="Calibri" charset="0"/>
-                      </a:endParaRPr>
-                    </a:p>
-                  </a:txBody>
-                  <a:tcPr marL="38100" marR="38100" marT="38100" marB="38100" anchor="ctr">
-                    <a:lnL w="12700" cap="flat" cmpd="sng" algn="ctr">
-                      <a:solidFill>
-                        <a:srgbClr val="E2E6EC"/>
-                      </a:solidFill>
-                      <a:prstDash val="solid"/>
-                      <a:round/>
-                      <a:headEnd type="none" w="med" len="med"/>
-                      <a:tailEnd type="none" w="med" len="med"/>
-                    </a:lnL>
-                    <a:lnR w="12700" cap="flat" cmpd="sng" algn="ctr">
-                      <a:solidFill>
-                        <a:srgbClr val="E2E6EC"/>
-                      </a:solidFill>
-                      <a:prstDash val="solid"/>
-                      <a:round/>
-                      <a:headEnd type="none" w="med" len="med"/>
-                      <a:tailEnd type="none" w="med" len="med"/>
-                    </a:lnR>
-                    <a:lnT w="12700" cap="flat" cmpd="sng" algn="ctr">
-                      <a:solidFill>
-                        <a:srgbClr val="E2E6EC"/>
-                      </a:solidFill>
-                      <a:prstDash val="solid"/>
-                      <a:round/>
-                      <a:headEnd type="none" w="med" len="med"/>
-                      <a:tailEnd type="none" w="med" len="med"/>
-                    </a:lnT>
-                    <a:lnB w="12700" cap="flat" cmpd="sng" algn="ctr">
-                      <a:solidFill>
-                        <a:srgbClr val="E2E6EC"/>
-                      </a:solidFill>
-                      <a:prstDash val="solid"/>
-                      <a:round/>
-                      <a:headEnd type="none" w="med" len="med"/>
-                      <a:tailEnd type="none" w="med" len="med"/>
-                    </a:lnB>
-                    <a:solidFill>
-                      <a:srgbClr val="FFFFFF"/>
-                    </a:solidFill>
-                  </a:tcPr>
-                </a:tc>
-                <a:tc>
-                  <a:txBody>
-                    <a:bodyPr/>
-                    <a:lstStyle/>
-                    <a:p>
-                      <a:pPr marL="0" indent="0" algn="ctr">
-                        <a:buNone/>
-                      </a:pPr>
-                      <a:r>
-                        <a:rPr lang="en-US" sz="1200" b="1" dirty="0">
-                          <a:solidFill>
-                            <a:srgbClr val="E11D2A"/>
-                          </a:solidFill>
-                          <a:latin typeface="Calibri" pitchFamily="34" charset="0"/>
-                          <a:ea typeface="Calibri" pitchFamily="34" charset="-122"/>
-                          <a:cs typeface="Calibri" pitchFamily="34" charset="-120"/>
-                        </a:rPr>
-                        <a:t>50</a:t>
-                      </a:r>
-                      <a:endParaRPr lang="en-US" sz="1200" dirty="0">
-                        <a:latin typeface="Calibri" charset="0"/>
-                        <a:ea typeface="Calibri" charset="0"/>
-                        <a:cs typeface="Calibri" charset="0"/>
-                      </a:endParaRPr>
-                    </a:p>
-                  </a:txBody>
-                  <a:tcPr marL="38100" marR="38100" marT="38100" marB="38100" anchor="ctr">
-                    <a:lnL w="12700" cap="flat" cmpd="sng" algn="ctr">
-                      <a:solidFill>
-                        <a:srgbClr val="E2E6EC"/>
-                      </a:solidFill>
-                      <a:prstDash val="solid"/>
-                      <a:round/>
-                      <a:headEnd type="none" w="med" len="med"/>
-                      <a:tailEnd type="none" w="med" len="med"/>
-                    </a:lnL>
-                    <a:lnR w="12700" cap="flat" cmpd="sng" algn="ctr">
-                      <a:solidFill>
-                        <a:srgbClr val="E2E6EC"/>
-                      </a:solidFill>
-                      <a:prstDash val="solid"/>
-                      <a:round/>
-                      <a:headEnd type="none" w="med" len="med"/>
-                      <a:tailEnd type="none" w="med" len="med"/>
-                    </a:lnR>
-                    <a:lnT w="12700" cap="flat" cmpd="sng" algn="ctr">
-                      <a:solidFill>
-                        <a:srgbClr val="E2E6EC"/>
-                      </a:solidFill>
-                      <a:prstDash val="solid"/>
-                      <a:round/>
-                      <a:headEnd type="none" w="med" len="med"/>
-                      <a:tailEnd type="none" w="med" len="med"/>
-                    </a:lnT>
-                    <a:lnB w="12700" cap="flat" cmpd="sng" algn="ctr">
-                      <a:solidFill>
-                        <a:srgbClr val="E2E6EC"/>
-                      </a:solidFill>
-                      <a:prstDash val="solid"/>
-                      <a:round/>
-                      <a:headEnd type="none" w="med" len="med"/>
-                      <a:tailEnd type="none" w="med" len="med"/>
-                    </a:lnB>
-                    <a:solidFill>
-                      <a:srgbClr val="FFFFFF"/>
-                    </a:solidFill>
-                  </a:tcPr>
-                </a:tc>
-                <a:extLst>
-                  <a:ext uri="{0D108BD9-81ED-4DB2-BD59-A6C34878D82A}">
-                    <a16:rowId xmlns:a16="http://schemas.microsoft.com/office/drawing/2014/main" val="10007"/>
-                  </a:ext>
-                </a:extLst>
-              </a:tr>
-              <a:tr h="384048">
-                <a:tc>
-                  <a:txBody>
-                    <a:bodyPr/>
-                    <a:lstStyle/>
-                    <a:p>
-                      <a:pPr marL="0" indent="0">
-                        <a:buNone/>
-                      </a:pPr>
-                      <a:r>
-                        <a:rPr lang="en-US" sz="1200" dirty="0">
-                          <a:solidFill>
-                            <a:srgbClr val="1F2430"/>
-                          </a:solidFill>
-                          <a:latin typeface="Calibri" pitchFamily="34" charset="0"/>
-                          <a:ea typeface="Calibri" pitchFamily="34" charset="-122"/>
-                          <a:cs typeface="Calibri" pitchFamily="34" charset="-120"/>
-                        </a:rPr>
-                        <a:t>Idk How To Fall</a:t>
-                      </a:r>
-                      <a:endParaRPr lang="en-US" sz="1200" dirty="0">
-                        <a:latin typeface="Calibri" charset="0"/>
-                        <a:ea typeface="Calibri" charset="0"/>
-                        <a:cs typeface="Calibri" charset="0"/>
-                      </a:endParaRPr>
-                    </a:p>
-                  </a:txBody>
-                  <a:tcPr marL="38100" marR="38100" marT="38100" marB="38100" anchor="ctr">
-                    <a:lnL w="12700" cap="flat" cmpd="sng" algn="ctr">
-                      <a:solidFill>
-                        <a:srgbClr val="E2E6EC"/>
-                      </a:solidFill>
-                      <a:prstDash val="solid"/>
-                      <a:round/>
-                      <a:headEnd type="none" w="med" len="med"/>
-                      <a:tailEnd type="none" w="med" len="med"/>
-                    </a:lnL>
-                    <a:lnR w="12700" cap="flat" cmpd="sng" algn="ctr">
-                      <a:solidFill>
-                        <a:srgbClr val="E2E6EC"/>
-                      </a:solidFill>
-                      <a:prstDash val="solid"/>
-                      <a:round/>
-                      <a:headEnd type="none" w="med" len="med"/>
-                      <a:tailEnd type="none" w="med" len="med"/>
-                    </a:lnR>
-                    <a:lnT w="12700" cap="flat" cmpd="sng" algn="ctr">
-                      <a:solidFill>
-                        <a:srgbClr val="E2E6EC"/>
-                      </a:solidFill>
-                      <a:prstDash val="solid"/>
-                      <a:round/>
-                      <a:headEnd type="none" w="med" len="med"/>
-                      <a:tailEnd type="none" w="med" len="med"/>
-                    </a:lnT>
-                    <a:lnB w="12700" cap="flat" cmpd="sng" algn="ctr">
-                      <a:solidFill>
-                        <a:srgbClr val="E2E6EC"/>
-                      </a:solidFill>
-                      <a:prstDash val="solid"/>
-                      <a:round/>
-                      <a:headEnd type="none" w="med" len="med"/>
-                      <a:tailEnd type="none" w="med" len="med"/>
-                    </a:lnB>
-                    <a:solidFill>
-                      <a:srgbClr val="F4F6F8"/>
-                    </a:solidFill>
-                  </a:tcPr>
-                </a:tc>
-                <a:tc>
-                  <a:txBody>
-                    <a:bodyPr/>
-                    <a:lstStyle/>
-                    <a:p>
-                      <a:pPr marL="0" indent="0">
-                        <a:buNone/>
-                      </a:pPr>
-                      <a:r>
-                        <a:rPr lang="en-US" sz="1200" dirty="0">
-                          <a:solidFill>
-                            <a:srgbClr val="64748B"/>
-                          </a:solidFill>
-                          <a:latin typeface="Calibri" pitchFamily="34" charset="0"/>
-                          <a:ea typeface="Calibri" pitchFamily="34" charset="-122"/>
-                          <a:cs typeface="Calibri" pitchFamily="34" charset="-120"/>
-                        </a:rPr>
-                        <a:t>—</a:t>
-                      </a:r>
-                      <a:endParaRPr lang="en-US" sz="1200" dirty="0">
-                        <a:latin typeface="Calibri" charset="0"/>
-                        <a:ea typeface="Calibri" charset="0"/>
-                        <a:cs typeface="Calibri" charset="0"/>
-                      </a:endParaRPr>
-                    </a:p>
-                  </a:txBody>
-                  <a:tcPr marL="38100" marR="38100" marT="38100" marB="38100" anchor="ctr">
-                    <a:lnL w="12700" cap="flat" cmpd="sng" algn="ctr">
-                      <a:solidFill>
-                        <a:srgbClr val="E2E6EC"/>
-                      </a:solidFill>
-                      <a:prstDash val="solid"/>
-                      <a:round/>
-                      <a:headEnd type="none" w="med" len="med"/>
-                      <a:tailEnd type="none" w="med" len="med"/>
-                    </a:lnL>
-                    <a:lnR w="12700" cap="flat" cmpd="sng" algn="ctr">
-                      <a:solidFill>
-                        <a:srgbClr val="E2E6EC"/>
-                      </a:solidFill>
-                      <a:prstDash val="solid"/>
-                      <a:round/>
-                      <a:headEnd type="none" w="med" len="med"/>
-                      <a:tailEnd type="none" w="med" len="med"/>
-                    </a:lnR>
-                    <a:lnT w="12700" cap="flat" cmpd="sng" algn="ctr">
-                      <a:solidFill>
-                        <a:srgbClr val="E2E6EC"/>
-                      </a:solidFill>
-                      <a:prstDash val="solid"/>
-                      <a:round/>
-                      <a:headEnd type="none" w="med" len="med"/>
-                      <a:tailEnd type="none" w="med" len="med"/>
-                    </a:lnT>
-                    <a:lnB w="12700" cap="flat" cmpd="sng" algn="ctr">
-                      <a:solidFill>
-                        <a:srgbClr val="E2E6EC"/>
-                      </a:solidFill>
-                      <a:prstDash val="solid"/>
-                      <a:round/>
-                      <a:headEnd type="none" w="med" len="med"/>
-                      <a:tailEnd type="none" w="med" len="med"/>
-                    </a:lnB>
-                    <a:solidFill>
-                      <a:srgbClr val="F4F6F8"/>
-                    </a:solidFill>
-                  </a:tcPr>
-                </a:tc>
-                <a:tc>
-                  <a:txBody>
-                    <a:bodyPr/>
-                    <a:lstStyle/>
-                    <a:p>
-                      <a:pPr marL="0" indent="0" algn="ctr">
-                        <a:buNone/>
-                      </a:pPr>
-                      <a:r>
-                        <a:rPr lang="en-US" sz="1200" b="1" dirty="0">
-                          <a:solidFill>
-                            <a:srgbClr val="12B5A5"/>
-                          </a:solidFill>
-                          <a:latin typeface="Calibri" pitchFamily="34" charset="0"/>
-                          <a:ea typeface="Calibri" pitchFamily="34" charset="-122"/>
-                          <a:cs typeface="Calibri" pitchFamily="34" charset="-120"/>
-                        </a:rPr>
-                        <a:t>0</a:t>
-                      </a:r>
-                      <a:endParaRPr lang="en-US" sz="1200" dirty="0">
-                        <a:latin typeface="Calibri" charset="0"/>
-                        <a:ea typeface="Calibri" charset="0"/>
-                        <a:cs typeface="Calibri" charset="0"/>
-                      </a:endParaRPr>
-                    </a:p>
-                  </a:txBody>
-                  <a:tcPr marL="38100" marR="38100" marT="38100" marB="38100" anchor="ctr">
-                    <a:lnL w="12700" cap="flat" cmpd="sng" algn="ctr">
-                      <a:solidFill>
-                        <a:srgbClr val="E2E6EC"/>
-                      </a:solidFill>
-                      <a:prstDash val="solid"/>
-                      <a:round/>
-                      <a:headEnd type="none" w="med" len="med"/>
-                      <a:tailEnd type="none" w="med" len="med"/>
-                    </a:lnL>
-                    <a:lnR w="12700" cap="flat" cmpd="sng" algn="ctr">
-                      <a:solidFill>
-                        <a:srgbClr val="E2E6EC"/>
-                      </a:solidFill>
-                      <a:prstDash val="solid"/>
-                      <a:round/>
-                      <a:headEnd type="none" w="med" len="med"/>
-                      <a:tailEnd type="none" w="med" len="med"/>
-                    </a:lnR>
-                    <a:lnT w="12700" cap="flat" cmpd="sng" algn="ctr">
-                      <a:solidFill>
-                        <a:srgbClr val="E2E6EC"/>
-                      </a:solidFill>
-                      <a:prstDash val="solid"/>
-                      <a:round/>
-                      <a:headEnd type="none" w="med" len="med"/>
-                      <a:tailEnd type="none" w="med" len="med"/>
-                    </a:lnT>
-                    <a:lnB w="12700" cap="flat" cmpd="sng" algn="ctr">
-                      <a:solidFill>
-                        <a:srgbClr val="E2E6EC"/>
-                      </a:solidFill>
-                      <a:prstDash val="solid"/>
-                      <a:round/>
-                      <a:headEnd type="none" w="med" len="med"/>
-                      <a:tailEnd type="none" w="med" len="med"/>
-                    </a:lnB>
-                    <a:solidFill>
-                      <a:srgbClr val="F4F6F8"/>
-                    </a:solidFill>
-                  </a:tcPr>
-                </a:tc>
-                <a:tc>
-                  <a:txBody>
-                    <a:bodyPr/>
-                    <a:lstStyle/>
-                    <a:p>
-                      <a:pPr marL="0" indent="0" algn="ctr">
-                        <a:buNone/>
-                      </a:pPr>
-                      <a:r>
-                        <a:rPr lang="en-US" sz="1200" b="1" dirty="0">
-                          <a:solidFill>
-                            <a:srgbClr val="E11D2A"/>
-                          </a:solidFill>
-                          <a:latin typeface="Calibri" pitchFamily="34" charset="0"/>
-                          <a:ea typeface="Calibri" pitchFamily="34" charset="-122"/>
-                          <a:cs typeface="Calibri" pitchFamily="34" charset="-120"/>
-                        </a:rPr>
-                        <a:t>50</a:t>
-                      </a:r>
-                      <a:endParaRPr lang="en-US" sz="1200" dirty="0">
-                        <a:latin typeface="Calibri" charset="0"/>
-                        <a:ea typeface="Calibri" charset="0"/>
-                        <a:cs typeface="Calibri" charset="0"/>
-                      </a:endParaRPr>
-                    </a:p>
-                  </a:txBody>
-                  <a:tcPr marL="38100" marR="38100" marT="38100" marB="38100" anchor="ctr">
-                    <a:lnL w="12700" cap="flat" cmpd="sng" algn="ctr">
-                      <a:solidFill>
-                        <a:srgbClr val="E2E6EC"/>
-                      </a:solidFill>
-                      <a:prstDash val="solid"/>
-                      <a:round/>
-                      <a:headEnd type="none" w="med" len="med"/>
-                      <a:tailEnd type="none" w="med" len="med"/>
-                    </a:lnL>
-                    <a:lnR w="12700" cap="flat" cmpd="sng" algn="ctr">
-                      <a:solidFill>
-                        <a:srgbClr val="E2E6EC"/>
-                      </a:solidFill>
-                      <a:prstDash val="solid"/>
-                      <a:round/>
-                      <a:headEnd type="none" w="med" len="med"/>
-                      <a:tailEnd type="none" w="med" len="med"/>
-                    </a:lnR>
-                    <a:lnT w="12700" cap="flat" cmpd="sng" algn="ctr">
-                      <a:solidFill>
-                        <a:srgbClr val="E2E6EC"/>
-                      </a:solidFill>
-                      <a:prstDash val="solid"/>
-                      <a:round/>
-                      <a:headEnd type="none" w="med" len="med"/>
-                      <a:tailEnd type="none" w="med" len="med"/>
-                    </a:lnT>
-                    <a:lnB w="12700" cap="flat" cmpd="sng" algn="ctr">
-                      <a:solidFill>
-                        <a:srgbClr val="E2E6EC"/>
-                      </a:solidFill>
-                      <a:prstDash val="solid"/>
-                      <a:round/>
-                      <a:headEnd type="none" w="med" len="med"/>
-                      <a:tailEnd type="none" w="med" len="med"/>
-                    </a:lnB>
-                    <a:solidFill>
-                      <a:srgbClr val="F4F6F8"/>
-                    </a:solidFill>
-                  </a:tcPr>
-                </a:tc>
-                <a:extLst>
-                  <a:ext uri="{0D108BD9-81ED-4DB2-BD59-A6C34878D82A}">
-                    <a16:rowId xmlns:a16="http://schemas.microsoft.com/office/drawing/2014/main" val="10008"/>
-                  </a:ext>
-                </a:extLst>
               </a:tr>
             </a:tbl>
           </a:graphicData>
@@ -10699,7 +10901,7 @@
           </a:solidFill>
           <a:ln/>
           <a:effectLst>
-            <a:outerShdw blurRad="101600" dist="38100" dir="5400000" algn="bl" rotWithShape="0">
+            <a:outerShdw sx="100000" sy="100000" kx="0" ky="0" algn="bl" rotWithShape="0" blurRad="101600" dist="38100" dir="5400000">
               <a:srgbClr val="000000">
                 <a:alpha val="12000"/>
               </a:srgbClr>
@@ -10728,7 +10930,7 @@
           <a:bodyPr wrap="square" lIns="0" tIns="0" rIns="0" bIns="0" rtlCol="0" anchor="ctr"/>
           <a:lstStyle/>
           <a:p>
-            <a:pPr marL="0" indent="0">
+            <a:pPr indent="0" marL="0">
               <a:buNone/>
             </a:pPr>
             <a:r>
@@ -10767,7 +10969,7 @@
           <a:bodyPr wrap="square" lIns="0" tIns="0" rIns="0" bIns="0" rtlCol="0" anchor="ctr"/>
           <a:lstStyle/>
           <a:p>
-            <a:pPr marL="0" indent="0">
+            <a:pPr indent="0" marL="0">
               <a:buNone/>
             </a:pPr>
             <a:r>
@@ -10781,6 +10983,9 @@
               </a:rPr>
               <a:t>698</a:t>
             </a:r>
+            <a:pPr indent="0" marL="0">
+              <a:buNone/>
+            </a:pPr>
             <a:r>
               <a:rPr lang="en-US" sz="1200" dirty="0">
                 <a:solidFill>
@@ -10817,7 +11022,7 @@
           <a:bodyPr wrap="square" lIns="0" tIns="0" rIns="0" bIns="0" rtlCol="0" anchor="ctr"/>
           <a:lstStyle/>
           <a:p>
-            <a:pPr marL="0" indent="0">
+            <a:pPr indent="0" marL="0">
               <a:buNone/>
             </a:pPr>
             <a:r>
@@ -10831,6 +11036,9 @@
               </a:rPr>
               <a:t>30</a:t>
             </a:r>
+            <a:pPr indent="0" marL="0">
+              <a:buNone/>
+            </a:pPr>
             <a:r>
               <a:rPr lang="en-US" sz="1200" dirty="0">
                 <a:solidFill>
@@ -10848,7 +11056,7 @@
       </p:sp>
       <p:sp>
         <p:nvSpPr>
-          <p:cNvPr id="5" name="Text 7"/>
+          <p:cNvPr id="10" name="Text 7"/>
           <p:cNvSpPr/>
           <p:nvPr/>
         </p:nvSpPr>
@@ -10867,7 +11075,7 @@
           <a:bodyPr wrap="square" lIns="0" tIns="0" rIns="0" bIns="0" rtlCol="0" anchor="ctr"/>
           <a:lstStyle/>
           <a:p>
-            <a:pPr marL="0" indent="0">
+            <a:pPr indent="0" marL="0">
               <a:buNone/>
             </a:pPr>
             <a:r>
@@ -10881,6 +11089,9 @@
               </a:rPr>
               <a:t>36 / 0</a:t>
             </a:r>
+            <a:pPr indent="0" marL="0">
+              <a:buNone/>
+            </a:pPr>
             <a:r>
               <a:rPr lang="en-US" sz="1200" dirty="0">
                 <a:solidFill>
@@ -10917,7 +11128,7 @@
           <a:bodyPr wrap="square" lIns="0" tIns="0" rIns="0" bIns="0" rtlCol="0" anchor="ctr"/>
           <a:lstStyle/>
           <a:p>
-            <a:pPr marL="0" indent="0">
+            <a:pPr indent="0" marL="0">
               <a:lnSpc>
                 <a:spcPct val="112000"/>
               </a:lnSpc>
@@ -10932,7 +11143,7 @@
                 <a:ea typeface="Calibri" pitchFamily="34" charset="-122"/>
                 <a:cs typeface="Calibri" pitchFamily="34" charset="-120"/>
               </a:rPr>
-              <a:t>YouTube count is capped at 50 (search max). ISRC via MusicBrainz is sparse for this niche catalog; switches to Spotify once Extended Quota Mode is granted — no pipeline change.</a:t>
+              <a:t>ISRC via Spotify Web API (Development Mode caps search at 10 results — Feb 2026). YouTube count is capped at 50 (search max). Source is pluggable (Spotify / MusicBrainz) via one env var.</a:t>
             </a:r>
             <a:endParaRPr lang="en-US" sz="1100" dirty="0"/>
           </a:p>
@@ -11239,299 +11450,4 @@
     </a:ext>
   </a:extLst>
 </a:theme>
-</file>
-
-<file path=ppt/theme/theme2.xml><?xml version="1.0" encoding="utf-8"?>
-<a:theme xmlns:a="http://schemas.openxmlformats.org/drawingml/2006/main" name="Tema Office">
-  <a:themeElements>
-    <a:clrScheme name="Office">
-      <a:dk1>
-        <a:sysClr val="windowText" lastClr="000000"/>
-      </a:dk1>
-      <a:lt1>
-        <a:sysClr val="window" lastClr="FFFFFF"/>
-      </a:lt1>
-      <a:dk2>
-        <a:srgbClr val="44546A"/>
-      </a:dk2>
-      <a:lt2>
-        <a:srgbClr val="E7E6E6"/>
-      </a:lt2>
-      <a:accent1>
-        <a:srgbClr val="4472C4"/>
-      </a:accent1>
-      <a:accent2>
-        <a:srgbClr val="ED7D31"/>
-      </a:accent2>
-      <a:accent3>
-        <a:srgbClr val="A5A5A5"/>
-      </a:accent3>
-      <a:accent4>
-        <a:srgbClr val="FFC000"/>
-      </a:accent4>
-      <a:accent5>
-        <a:srgbClr val="5B9BD5"/>
-      </a:accent5>
-      <a:accent6>
-        <a:srgbClr val="70AD47"/>
-      </a:accent6>
-      <a:hlink>
-        <a:srgbClr val="0563C1"/>
-      </a:hlink>
-      <a:folHlink>
-        <a:srgbClr val="954F72"/>
-      </a:folHlink>
-    </a:clrScheme>
-    <a:fontScheme name="Office">
-      <a:majorFont>
-        <a:latin typeface="Calibri Light" panose="020F0302020204030204"/>
-        <a:ea typeface=""/>
-        <a:cs typeface=""/>
-        <a:font script="Jpan" typeface="游ゴシック Light"/>
-        <a:font script="Hang" typeface="맑은 고딕"/>
-        <a:font script="Hans" typeface="等线 Light"/>
-        <a:font script="Hant" typeface="新細明體"/>
-        <a:font script="Arab" typeface="Times New Roman"/>
-        <a:font script="Hebr" typeface="Times New Roman"/>
-        <a:font script="Thai" typeface="Angsana New"/>
-        <a:font script="Ethi" typeface="Nyala"/>
-        <a:font script="Beng" typeface="Vrinda"/>
-        <a:font script="Gujr" typeface="Shruti"/>
-        <a:font script="Khmr" typeface="MoolBoran"/>
-        <a:font script="Knda" typeface="Tunga"/>
-        <a:font script="Guru" typeface="Raavi"/>
-        <a:font script="Cans" typeface="Euphemia"/>
-        <a:font script="Cher" typeface="Plantagenet Cherokee"/>
-        <a:font script="Yiii" typeface="Microsoft Yi Baiti"/>
-        <a:font script="Tibt" typeface="Microsoft Himalaya"/>
-        <a:font script="Thaa" typeface="MV Boli"/>
-        <a:font script="Deva" typeface="Mangal"/>
-        <a:font script="Telu" typeface="Gautami"/>
-        <a:font script="Taml" typeface="Latha"/>
-        <a:font script="Syrc" typeface="Estrangelo Edessa"/>
-        <a:font script="Orya" typeface="Kalinga"/>
-        <a:font script="Mlym" typeface="Kartika"/>
-        <a:font script="Laoo" typeface="DokChampa"/>
-        <a:font script="Sinh" typeface="Iskoola Pota"/>
-        <a:font script="Mong" typeface="Mongolian Baiti"/>
-        <a:font script="Viet" typeface="Times New Roman"/>
-        <a:font script="Uigh" typeface="Microsoft Uighur"/>
-        <a:font script="Geor" typeface="Sylfaen"/>
-        <a:font script="Armn" typeface="Arial"/>
-        <a:font script="Bugi" typeface="Leelawadee UI"/>
-        <a:font script="Bopo" typeface="Microsoft JhengHei"/>
-        <a:font script="Java" typeface="Javanese Text"/>
-        <a:font script="Lisu" typeface="Segoe UI"/>
-        <a:font script="Mymr" typeface="Myanmar Text"/>
-        <a:font script="Nkoo" typeface="Ebrima"/>
-        <a:font script="Olck" typeface="Nirmala UI"/>
-        <a:font script="Osma" typeface="Ebrima"/>
-        <a:font script="Phag" typeface="Phagspa"/>
-        <a:font script="Syrn" typeface="Estrangelo Edessa"/>
-        <a:font script="Syrj" typeface="Estrangelo Edessa"/>
-        <a:font script="Syre" typeface="Estrangelo Edessa"/>
-        <a:font script="Sora" typeface="Nirmala UI"/>
-        <a:font script="Tale" typeface="Microsoft Tai Le"/>
-        <a:font script="Talu" typeface="Microsoft New Tai Lue"/>
-        <a:font script="Tfng" typeface="Ebrima"/>
-      </a:majorFont>
-      <a:minorFont>
-        <a:latin typeface="Calibri" panose="020F0502020204030204"/>
-        <a:ea typeface=""/>
-        <a:cs typeface=""/>
-        <a:font script="Jpan" typeface="游ゴシック"/>
-        <a:font script="Hang" typeface="맑은 고딕"/>
-        <a:font script="Hans" typeface="等线"/>
-        <a:font script="Hant" typeface="新細明體"/>
-        <a:font script="Arab" typeface="Arial"/>
-        <a:font script="Hebr" typeface="Arial"/>
-        <a:font script="Thai" typeface="Cordia New"/>
-        <a:font script="Ethi" typeface="Nyala"/>
-        <a:font script="Beng" typeface="Vrinda"/>
-        <a:font script="Gujr" typeface="Shruti"/>
-        <a:font script="Khmr" typeface="DaunPenh"/>
-        <a:font script="Knda" typeface="Tunga"/>
-        <a:font script="Guru" typeface="Raavi"/>
-        <a:font script="Cans" typeface="Euphemia"/>
-        <a:font script="Cher" typeface="Plantagenet Cherokee"/>
-        <a:font script="Yiii" typeface="Microsoft Yi Baiti"/>
-        <a:font script="Tibt" typeface="Microsoft Himalaya"/>
-        <a:font script="Thaa" typeface="MV Boli"/>
-        <a:font script="Deva" typeface="Mangal"/>
-        <a:font script="Telu" typeface="Gautami"/>
-        <a:font script="Taml" typeface="Latha"/>
-        <a:font script="Syrc" typeface="Estrangelo Edessa"/>
-        <a:font script="Orya" typeface="Kalinga"/>
-        <a:font script="Mlym" typeface="Kartika"/>
-        <a:font script="Laoo" typeface="DokChampa"/>
-        <a:font script="Sinh" typeface="Iskoola Pota"/>
-        <a:font script="Mong" typeface="Mongolian Baiti"/>
-        <a:font script="Viet" typeface="Arial"/>
-        <a:font script="Uigh" typeface="Microsoft Uighur"/>
-        <a:font script="Geor" typeface="Sylfaen"/>
-        <a:font script="Armn" typeface="Arial"/>
-        <a:font script="Bugi" typeface="Leelawadee UI"/>
-        <a:font script="Bopo" typeface="Microsoft JhengHei"/>
-        <a:font script="Java" typeface="Javanese Text"/>
-        <a:font script="Lisu" typeface="Segoe UI"/>
-        <a:font script="Mymr" typeface="Myanmar Text"/>
-        <a:font script="Nkoo" typeface="Ebrima"/>
-        <a:font script="Olck" typeface="Nirmala UI"/>
-        <a:font script="Osma" typeface="Ebrima"/>
-        <a:font script="Phag" typeface="Phagspa"/>
-        <a:font script="Syrn" typeface="Estrangelo Edessa"/>
-        <a:font script="Syrj" typeface="Estrangelo Edessa"/>
-        <a:font script="Syre" typeface="Estrangelo Edessa"/>
-        <a:font script="Sora" typeface="Nirmala UI"/>
-        <a:font script="Tale" typeface="Microsoft Tai Le"/>
-        <a:font script="Talu" typeface="Microsoft New Tai Lue"/>
-        <a:font script="Tfng" typeface="Ebrima"/>
-      </a:minorFont>
-    </a:fontScheme>
-    <a:fmtScheme name="Office">
-      <a:fillStyleLst>
-        <a:solidFill>
-          <a:schemeClr val="phClr"/>
-        </a:solidFill>
-        <a:gradFill rotWithShape="1">
-          <a:gsLst>
-            <a:gs pos="0">
-              <a:schemeClr val="phClr">
-                <a:lumMod val="110000"/>
-                <a:satMod val="105000"/>
-                <a:tint val="67000"/>
-              </a:schemeClr>
-            </a:gs>
-            <a:gs pos="50000">
-              <a:schemeClr val="phClr">
-                <a:lumMod val="105000"/>
-                <a:satMod val="103000"/>
-                <a:tint val="73000"/>
-              </a:schemeClr>
-            </a:gs>
-            <a:gs pos="100000">
-              <a:schemeClr val="phClr">
-                <a:lumMod val="105000"/>
-                <a:satMod val="109000"/>
-                <a:tint val="81000"/>
-              </a:schemeClr>
-            </a:gs>
-          </a:gsLst>
-          <a:lin ang="5400000" scaled="0"/>
-        </a:gradFill>
-        <a:gradFill rotWithShape="1">
-          <a:gsLst>
-            <a:gs pos="0">
-              <a:schemeClr val="phClr">
-                <a:satMod val="103000"/>
-                <a:lumMod val="102000"/>
-                <a:tint val="94000"/>
-              </a:schemeClr>
-            </a:gs>
-            <a:gs pos="50000">
-              <a:schemeClr val="phClr">
-                <a:satMod val="110000"/>
-                <a:lumMod val="100000"/>
-                <a:shade val="100000"/>
-              </a:schemeClr>
-            </a:gs>
-            <a:gs pos="100000">
-              <a:schemeClr val="phClr">
-                <a:lumMod val="99000"/>
-                <a:satMod val="120000"/>
-                <a:shade val="78000"/>
-              </a:schemeClr>
-            </a:gs>
-          </a:gsLst>
-          <a:lin ang="5400000" scaled="0"/>
-        </a:gradFill>
-      </a:fillStyleLst>
-      <a:lnStyleLst>
-        <a:ln w="6350" cap="flat" cmpd="sng" algn="ctr">
-          <a:solidFill>
-            <a:schemeClr val="phClr"/>
-          </a:solidFill>
-          <a:prstDash val="solid"/>
-          <a:miter lim="800000"/>
-        </a:ln>
-        <a:ln w="12700" cap="flat" cmpd="sng" algn="ctr">
-          <a:solidFill>
-            <a:schemeClr val="phClr"/>
-          </a:solidFill>
-          <a:prstDash val="solid"/>
-          <a:miter lim="800000"/>
-        </a:ln>
-        <a:ln w="19050" cap="flat" cmpd="sng" algn="ctr">
-          <a:solidFill>
-            <a:schemeClr val="phClr"/>
-          </a:solidFill>
-          <a:prstDash val="solid"/>
-          <a:miter lim="800000"/>
-        </a:ln>
-      </a:lnStyleLst>
-      <a:effectStyleLst>
-        <a:effectStyle>
-          <a:effectLst/>
-        </a:effectStyle>
-        <a:effectStyle>
-          <a:effectLst/>
-        </a:effectStyle>
-        <a:effectStyle>
-          <a:effectLst>
-            <a:outerShdw blurRad="57150" dist="19050" dir="5400000" algn="ctr" rotWithShape="0">
-              <a:srgbClr val="000000">
-                <a:alpha val="63000"/>
-              </a:srgbClr>
-            </a:outerShdw>
-          </a:effectLst>
-        </a:effectStyle>
-      </a:effectStyleLst>
-      <a:bgFillStyleLst>
-        <a:solidFill>
-          <a:schemeClr val="phClr"/>
-        </a:solidFill>
-        <a:solidFill>
-          <a:schemeClr val="phClr">
-            <a:tint val="95000"/>
-            <a:satMod val="170000"/>
-          </a:schemeClr>
-        </a:solidFill>
-        <a:gradFill rotWithShape="1">
-          <a:gsLst>
-            <a:gs pos="0">
-              <a:schemeClr val="phClr">
-                <a:tint val="93000"/>
-                <a:satMod val="150000"/>
-                <a:shade val="98000"/>
-                <a:lumMod val="102000"/>
-              </a:schemeClr>
-            </a:gs>
-            <a:gs pos="50000">
-              <a:schemeClr val="phClr">
-                <a:tint val="98000"/>
-                <a:satMod val="130000"/>
-                <a:shade val="90000"/>
-                <a:lumMod val="103000"/>
-              </a:schemeClr>
-            </a:gs>
-            <a:gs pos="100000">
-              <a:schemeClr val="phClr">
-                <a:shade val="63000"/>
-                <a:satMod val="120000"/>
-              </a:schemeClr>
-            </a:gs>
-          </a:gsLst>
-          <a:lin ang="5400000" scaled="0"/>
-        </a:gradFill>
-      </a:bgFillStyleLst>
-    </a:fmtScheme>
-  </a:themeElements>
-  <a:objectDefaults/>
-  <a:extraClrSchemeLst/>
-  <a:extLst>
-    <a:ext uri="{05A4C25C-085E-4340-85A3-A5531E510DB2}">
-      <thm15:themeFamily xmlns:thm15="http://schemas.microsoft.com/office/thememl/2012/main" name="Office Theme" id="{62F939B6-93AF-4DB8-9C6B-D6C7DFDC589F}" vid="{4A3C46E8-61CC-4603-A589-7422A47A8E4A}"/>
-    </a:ext>
-  </a:extLst>
-</a:theme>
 </file>